--- a/site/slides/Week11.pptx
+++ b/site/slides/Week11.pptx
@@ -221,8 +221,8 @@
 <file path=ppt/revisionInfo.xml><?xml version="1.0" encoding="utf-8"?>
 <p1510:revInfo xmlns:a="http://schemas.openxmlformats.org/drawingml/2006/main" xmlns:r="http://schemas.openxmlformats.org/officeDocument/2006/relationships" xmlns:p1510="http://schemas.microsoft.com/office/powerpoint/2015/10/main">
   <p1510:revLst>
-    <p1510:client id="{9EE8A341-E075-4BCE-AF6C-E2386705436A}" v="74" dt="2025-04-01T01:47:35.037"/>
-    <p1510:client id="{E2C68675-4D21-4D34-8F20-796597FA4E4E}" v="119" dt="2025-03-31T13:06:54.265"/>
+    <p1510:client id="{51B9DC88-A7BA-497A-905D-57F00DD6A415}" v="176" dt="2026-03-30T02:45:56.459"/>
+    <p1510:client id="{E846E367-73E5-4D03-9EC2-7499F3B0ADCF}" v="16" dt="2026-03-31T01:34:19.435"/>
   </p1510:revLst>
 </p1510:revInfo>
 </file>
@@ -230,2003 +230,530 @@
 <file path=ppt/changesInfos/changesInfo1.xml><?xml version="1.0" encoding="utf-8"?>
 <pc:chgInfo xmlns:a="http://schemas.openxmlformats.org/drawingml/2006/main" xmlns:r="http://schemas.openxmlformats.org/officeDocument/2006/relationships" xmlns:ac="http://schemas.microsoft.com/office/drawing/2013/main/command" xmlns:pc="http://schemas.microsoft.com/office/powerpoint/2013/main/command">
   <pc:docChgLst>
-    <pc:chgData name="Zhao Jin" userId="cd05a825-544c-438a-9ba1-08e63db50b47" providerId="ADAL" clId="{CCD631C3-D91E-4641-ACDC-389C8C611FC7}"/>
-    <pc:docChg chg="undo custSel addSld delSld modSld sldOrd modMainMaster">
-      <pc:chgData name="Zhao Jin" userId="cd05a825-544c-438a-9ba1-08e63db50b47" providerId="ADAL" clId="{CCD631C3-D91E-4641-ACDC-389C8C611FC7}" dt="2021-04-05T01:50:32.322" v="2616"/>
+    <pc:chgData name="Zhao Jin" userId="cd05a825-544c-438a-9ba1-08e63db50b47" providerId="ADAL" clId="{5DF3A229-1965-414E-AF54-F4C37AC7DF68}"/>
+    <pc:docChg chg="undo custSel modSld">
+      <pc:chgData name="Zhao Jin" userId="cd05a825-544c-438a-9ba1-08e63db50b47" providerId="ADAL" clId="{5DF3A229-1965-414E-AF54-F4C37AC7DF68}" dt="2026-03-31T01:35:04.006" v="47" actId="14100"/>
+      <pc:docMkLst>
+        <pc:docMk/>
+      </pc:docMkLst>
+      <pc:sldChg chg="modSp">
+        <pc:chgData name="Zhao Jin" userId="cd05a825-544c-438a-9ba1-08e63db50b47" providerId="ADAL" clId="{5DF3A229-1965-414E-AF54-F4C37AC7DF68}" dt="2026-03-31T01:34:19.435" v="35" actId="313"/>
+        <pc:sldMkLst>
+          <pc:docMk/>
+          <pc:sldMk cId="1854371286" sldId="597"/>
+        </pc:sldMkLst>
+        <pc:spChg chg="mod">
+          <ac:chgData name="Zhao Jin" userId="cd05a825-544c-438a-9ba1-08e63db50b47" providerId="ADAL" clId="{5DF3A229-1965-414E-AF54-F4C37AC7DF68}" dt="2026-03-31T01:34:19.435" v="35" actId="313"/>
+          <ac:spMkLst>
+            <pc:docMk/>
+            <pc:sldMk cId="1854371286" sldId="597"/>
+            <ac:spMk id="11" creationId="{00000000-0000-0000-0000-000000000000}"/>
+          </ac:spMkLst>
+        </pc:spChg>
+      </pc:sldChg>
+      <pc:sldChg chg="modSp mod">
+        <pc:chgData name="Zhao Jin" userId="cd05a825-544c-438a-9ba1-08e63db50b47" providerId="ADAL" clId="{5DF3A229-1965-414E-AF54-F4C37AC7DF68}" dt="2026-03-31T01:34:29.964" v="37" actId="14100"/>
+        <pc:sldMkLst>
+          <pc:docMk/>
+          <pc:sldMk cId="1365241982" sldId="598"/>
+        </pc:sldMkLst>
+        <pc:spChg chg="mod">
+          <ac:chgData name="Zhao Jin" userId="cd05a825-544c-438a-9ba1-08e63db50b47" providerId="ADAL" clId="{5DF3A229-1965-414E-AF54-F4C37AC7DF68}" dt="2026-03-31T01:34:27.387" v="36" actId="14100"/>
+          <ac:spMkLst>
+            <pc:docMk/>
+            <pc:sldMk cId="1365241982" sldId="598"/>
+            <ac:spMk id="3" creationId="{A427CF8D-9BB6-0C39-9BBA-08CDD54C5232}"/>
+          </ac:spMkLst>
+        </pc:spChg>
+        <pc:spChg chg="mod">
+          <ac:chgData name="Zhao Jin" userId="cd05a825-544c-438a-9ba1-08e63db50b47" providerId="ADAL" clId="{5DF3A229-1965-414E-AF54-F4C37AC7DF68}" dt="2026-03-31T01:34:29.964" v="37" actId="14100"/>
+          <ac:spMkLst>
+            <pc:docMk/>
+            <pc:sldMk cId="1365241982" sldId="598"/>
+            <ac:spMk id="4" creationId="{F48B6148-2E57-8BFF-6DE9-4E0A61A16845}"/>
+          </ac:spMkLst>
+        </pc:spChg>
+        <pc:spChg chg="mod">
+          <ac:chgData name="Zhao Jin" userId="cd05a825-544c-438a-9ba1-08e63db50b47" providerId="ADAL" clId="{5DF3A229-1965-414E-AF54-F4C37AC7DF68}" dt="2026-03-31T01:34:10.200" v="1" actId="313"/>
+          <ac:spMkLst>
+            <pc:docMk/>
+            <pc:sldMk cId="1365241982" sldId="598"/>
+            <ac:spMk id="9" creationId="{00000000-0000-0000-0000-000000000000}"/>
+          </ac:spMkLst>
+        </pc:spChg>
+        <pc:spChg chg="mod">
+          <ac:chgData name="Zhao Jin" userId="cd05a825-544c-438a-9ba1-08e63db50b47" providerId="ADAL" clId="{5DF3A229-1965-414E-AF54-F4C37AC7DF68}" dt="2026-03-31T01:34:11.122" v="3" actId="313"/>
+          <ac:spMkLst>
+            <pc:docMk/>
+            <pc:sldMk cId="1365241982" sldId="598"/>
+            <ac:spMk id="14" creationId="{00000000-0000-0000-0000-000000000000}"/>
+          </ac:spMkLst>
+        </pc:spChg>
+      </pc:sldChg>
+      <pc:sldChg chg="modSp mod">
+        <pc:chgData name="Zhao Jin" userId="cd05a825-544c-438a-9ba1-08e63db50b47" providerId="ADAL" clId="{5DF3A229-1965-414E-AF54-F4C37AC7DF68}" dt="2026-03-31T01:34:16.583" v="22" actId="313"/>
+        <pc:sldMkLst>
+          <pc:docMk/>
+          <pc:sldMk cId="2302344841" sldId="599"/>
+        </pc:sldMkLst>
+        <pc:spChg chg="mod">
+          <ac:chgData name="Zhao Jin" userId="cd05a825-544c-438a-9ba1-08e63db50b47" providerId="ADAL" clId="{5DF3A229-1965-414E-AF54-F4C37AC7DF68}" dt="2026-03-31T01:34:16.583" v="22" actId="313"/>
+          <ac:spMkLst>
+            <pc:docMk/>
+            <pc:sldMk cId="2302344841" sldId="599"/>
+            <ac:spMk id="10" creationId="{00000000-0000-0000-0000-000000000000}"/>
+          </ac:spMkLst>
+        </pc:spChg>
+      </pc:sldChg>
+      <pc:sldChg chg="modSp mod">
+        <pc:chgData name="Zhao Jin" userId="cd05a825-544c-438a-9ba1-08e63db50b47" providerId="ADAL" clId="{5DF3A229-1965-414E-AF54-F4C37AC7DF68}" dt="2026-03-31T01:34:15.915" v="19" actId="313"/>
+        <pc:sldMkLst>
+          <pc:docMk/>
+          <pc:sldMk cId="1890638764" sldId="600"/>
+        </pc:sldMkLst>
+        <pc:spChg chg="mod">
+          <ac:chgData name="Zhao Jin" userId="cd05a825-544c-438a-9ba1-08e63db50b47" providerId="ADAL" clId="{5DF3A229-1965-414E-AF54-F4C37AC7DF68}" dt="2026-03-31T01:34:13.668" v="8" actId="313"/>
+          <ac:spMkLst>
+            <pc:docMk/>
+            <pc:sldMk cId="1890638764" sldId="600"/>
+            <ac:spMk id="9" creationId="{00000000-0000-0000-0000-000000000000}"/>
+          </ac:spMkLst>
+        </pc:spChg>
+        <pc:spChg chg="mod">
+          <ac:chgData name="Zhao Jin" userId="cd05a825-544c-438a-9ba1-08e63db50b47" providerId="ADAL" clId="{5DF3A229-1965-414E-AF54-F4C37AC7DF68}" dt="2026-03-31T01:34:13.917" v="9" actId="313"/>
+          <ac:spMkLst>
+            <pc:docMk/>
+            <pc:sldMk cId="1890638764" sldId="600"/>
+            <ac:spMk id="11" creationId="{00000000-0000-0000-0000-000000000000}"/>
+          </ac:spMkLst>
+        </pc:spChg>
+        <pc:spChg chg="mod">
+          <ac:chgData name="Zhao Jin" userId="cd05a825-544c-438a-9ba1-08e63db50b47" providerId="ADAL" clId="{5DF3A229-1965-414E-AF54-F4C37AC7DF68}" dt="2026-03-31T01:34:14.130" v="10" actId="313"/>
+          <ac:spMkLst>
+            <pc:docMk/>
+            <pc:sldMk cId="1890638764" sldId="600"/>
+            <ac:spMk id="14" creationId="{00000000-0000-0000-0000-000000000000}"/>
+          </ac:spMkLst>
+        </pc:spChg>
+        <pc:spChg chg="mod">
+          <ac:chgData name="Zhao Jin" userId="cd05a825-544c-438a-9ba1-08e63db50b47" providerId="ADAL" clId="{5DF3A229-1965-414E-AF54-F4C37AC7DF68}" dt="2026-03-31T01:34:14.348" v="11" actId="313"/>
+          <ac:spMkLst>
+            <pc:docMk/>
+            <pc:sldMk cId="1890638764" sldId="600"/>
+            <ac:spMk id="16" creationId="{00000000-0000-0000-0000-000000000000}"/>
+          </ac:spMkLst>
+        </pc:spChg>
+        <pc:spChg chg="mod">
+          <ac:chgData name="Zhao Jin" userId="cd05a825-544c-438a-9ba1-08e63db50b47" providerId="ADAL" clId="{5DF3A229-1965-414E-AF54-F4C37AC7DF68}" dt="2026-03-31T01:34:14.561" v="12" actId="313"/>
+          <ac:spMkLst>
+            <pc:docMk/>
+            <pc:sldMk cId="1890638764" sldId="600"/>
+            <ac:spMk id="18" creationId="{00000000-0000-0000-0000-000000000000}"/>
+          </ac:spMkLst>
+        </pc:spChg>
+        <pc:spChg chg="mod">
+          <ac:chgData name="Zhao Jin" userId="cd05a825-544c-438a-9ba1-08e63db50b47" providerId="ADAL" clId="{5DF3A229-1965-414E-AF54-F4C37AC7DF68}" dt="2026-03-31T01:34:14.743" v="13" actId="313"/>
+          <ac:spMkLst>
+            <pc:docMk/>
+            <pc:sldMk cId="1890638764" sldId="600"/>
+            <ac:spMk id="20" creationId="{00000000-0000-0000-0000-000000000000}"/>
+          </ac:spMkLst>
+        </pc:spChg>
+        <pc:spChg chg="mod">
+          <ac:chgData name="Zhao Jin" userId="cd05a825-544c-438a-9ba1-08e63db50b47" providerId="ADAL" clId="{5DF3A229-1965-414E-AF54-F4C37AC7DF68}" dt="2026-03-31T01:34:14.936" v="14" actId="313"/>
+          <ac:spMkLst>
+            <pc:docMk/>
+            <pc:sldMk cId="1890638764" sldId="600"/>
+            <ac:spMk id="41" creationId="{00000000-0000-0000-0000-000000000000}"/>
+          </ac:spMkLst>
+        </pc:spChg>
+        <pc:spChg chg="mod">
+          <ac:chgData name="Zhao Jin" userId="cd05a825-544c-438a-9ba1-08e63db50b47" providerId="ADAL" clId="{5DF3A229-1965-414E-AF54-F4C37AC7DF68}" dt="2026-03-31T01:34:15.136" v="15" actId="313"/>
+          <ac:spMkLst>
+            <pc:docMk/>
+            <pc:sldMk cId="1890638764" sldId="600"/>
+            <ac:spMk id="42" creationId="{00000000-0000-0000-0000-000000000000}"/>
+          </ac:spMkLst>
+        </pc:spChg>
+        <pc:spChg chg="mod">
+          <ac:chgData name="Zhao Jin" userId="cd05a825-544c-438a-9ba1-08e63db50b47" providerId="ADAL" clId="{5DF3A229-1965-414E-AF54-F4C37AC7DF68}" dt="2026-03-31T01:34:15.334" v="16" actId="313"/>
+          <ac:spMkLst>
+            <pc:docMk/>
+            <pc:sldMk cId="1890638764" sldId="600"/>
+            <ac:spMk id="44" creationId="{00000000-0000-0000-0000-000000000000}"/>
+          </ac:spMkLst>
+        </pc:spChg>
+        <pc:spChg chg="mod">
+          <ac:chgData name="Zhao Jin" userId="cd05a825-544c-438a-9ba1-08e63db50b47" providerId="ADAL" clId="{5DF3A229-1965-414E-AF54-F4C37AC7DF68}" dt="2026-03-31T01:34:15.524" v="17" actId="313"/>
+          <ac:spMkLst>
+            <pc:docMk/>
+            <pc:sldMk cId="1890638764" sldId="600"/>
+            <ac:spMk id="46" creationId="{00000000-0000-0000-0000-000000000000}"/>
+          </ac:spMkLst>
+        </pc:spChg>
+        <pc:spChg chg="mod">
+          <ac:chgData name="Zhao Jin" userId="cd05a825-544c-438a-9ba1-08e63db50b47" providerId="ADAL" clId="{5DF3A229-1965-414E-AF54-F4C37AC7DF68}" dt="2026-03-31T01:34:15.721" v="18" actId="313"/>
+          <ac:spMkLst>
+            <pc:docMk/>
+            <pc:sldMk cId="1890638764" sldId="600"/>
+            <ac:spMk id="48" creationId="{00000000-0000-0000-0000-000000000000}"/>
+          </ac:spMkLst>
+        </pc:spChg>
+        <pc:spChg chg="mod">
+          <ac:chgData name="Zhao Jin" userId="cd05a825-544c-438a-9ba1-08e63db50b47" providerId="ADAL" clId="{5DF3A229-1965-414E-AF54-F4C37AC7DF68}" dt="2026-03-31T01:34:15.915" v="19" actId="313"/>
+          <ac:spMkLst>
+            <pc:docMk/>
+            <pc:sldMk cId="1890638764" sldId="600"/>
+            <ac:spMk id="50" creationId="{00000000-0000-0000-0000-000000000000}"/>
+          </ac:spMkLst>
+        </pc:spChg>
+      </pc:sldChg>
+      <pc:sldChg chg="modSp mod">
+        <pc:chgData name="Zhao Jin" userId="cd05a825-544c-438a-9ba1-08e63db50b47" providerId="ADAL" clId="{5DF3A229-1965-414E-AF54-F4C37AC7DF68}" dt="2026-03-31T01:35:04.006" v="47" actId="14100"/>
+        <pc:sldMkLst>
+          <pc:docMk/>
+          <pc:sldMk cId="19136523" sldId="601"/>
+        </pc:sldMkLst>
+        <pc:spChg chg="mod">
+          <ac:chgData name="Zhao Jin" userId="cd05a825-544c-438a-9ba1-08e63db50b47" providerId="ADAL" clId="{5DF3A229-1965-414E-AF54-F4C37AC7DF68}" dt="2026-03-31T01:34:16.782" v="23" actId="313"/>
+          <ac:spMkLst>
+            <pc:docMk/>
+            <pc:sldMk cId="19136523" sldId="601"/>
+            <ac:spMk id="72" creationId="{00000000-0000-0000-0000-000000000000}"/>
+          </ac:spMkLst>
+        </pc:spChg>
+        <pc:spChg chg="mod">
+          <ac:chgData name="Zhao Jin" userId="cd05a825-544c-438a-9ba1-08e63db50b47" providerId="ADAL" clId="{5DF3A229-1965-414E-AF54-F4C37AC7DF68}" dt="2026-03-31T01:34:17.235" v="24" actId="313"/>
+          <ac:spMkLst>
+            <pc:docMk/>
+            <pc:sldMk cId="19136523" sldId="601"/>
+            <ac:spMk id="73" creationId="{00000000-0000-0000-0000-000000000000}"/>
+          </ac:spMkLst>
+        </pc:spChg>
+        <pc:spChg chg="mod">
+          <ac:chgData name="Zhao Jin" userId="cd05a825-544c-438a-9ba1-08e63db50b47" providerId="ADAL" clId="{5DF3A229-1965-414E-AF54-F4C37AC7DF68}" dt="2026-03-31T01:34:47.668" v="40" actId="14100"/>
+          <ac:spMkLst>
+            <pc:docMk/>
+            <pc:sldMk cId="19136523" sldId="601"/>
+            <ac:spMk id="75" creationId="{00000000-0000-0000-0000-000000000000}"/>
+          </ac:spMkLst>
+        </pc:spChg>
+        <pc:spChg chg="mod">
+          <ac:chgData name="Zhao Jin" userId="cd05a825-544c-438a-9ba1-08e63db50b47" providerId="ADAL" clId="{5DF3A229-1965-414E-AF54-F4C37AC7DF68}" dt="2026-03-31T01:34:17.619" v="26" actId="313"/>
+          <ac:spMkLst>
+            <pc:docMk/>
+            <pc:sldMk cId="19136523" sldId="601"/>
+            <ac:spMk id="79" creationId="{00000000-0000-0000-0000-000000000000}"/>
+          </ac:spMkLst>
+        </pc:spChg>
+        <pc:spChg chg="mod">
+          <ac:chgData name="Zhao Jin" userId="cd05a825-544c-438a-9ba1-08e63db50b47" providerId="ADAL" clId="{5DF3A229-1965-414E-AF54-F4C37AC7DF68}" dt="2026-03-31T01:34:49.686" v="41" actId="14100"/>
+          <ac:spMkLst>
+            <pc:docMk/>
+            <pc:sldMk cId="19136523" sldId="601"/>
+            <ac:spMk id="81" creationId="{00000000-0000-0000-0000-000000000000}"/>
+          </ac:spMkLst>
+        </pc:spChg>
+        <pc:spChg chg="mod">
+          <ac:chgData name="Zhao Jin" userId="cd05a825-544c-438a-9ba1-08e63db50b47" providerId="ADAL" clId="{5DF3A229-1965-414E-AF54-F4C37AC7DF68}" dt="2026-03-31T01:34:57.659" v="44" actId="14100"/>
+          <ac:spMkLst>
+            <pc:docMk/>
+            <pc:sldMk cId="19136523" sldId="601"/>
+            <ac:spMk id="82" creationId="{00000000-0000-0000-0000-000000000000}"/>
+          </ac:spMkLst>
+        </pc:spChg>
+        <pc:spChg chg="mod">
+          <ac:chgData name="Zhao Jin" userId="cd05a825-544c-438a-9ba1-08e63db50b47" providerId="ADAL" clId="{5DF3A229-1965-414E-AF54-F4C37AC7DF68}" dt="2026-03-31T01:35:04.006" v="47" actId="14100"/>
+          <ac:spMkLst>
+            <pc:docMk/>
+            <pc:sldMk cId="19136523" sldId="601"/>
+            <ac:spMk id="83" creationId="{00000000-0000-0000-0000-000000000000}"/>
+          </ac:spMkLst>
+        </pc:spChg>
+        <pc:spChg chg="mod">
+          <ac:chgData name="Zhao Jin" userId="cd05a825-544c-438a-9ba1-08e63db50b47" providerId="ADAL" clId="{5DF3A229-1965-414E-AF54-F4C37AC7DF68}" dt="2026-03-31T01:34:51.741" v="42" actId="14100"/>
+          <ac:spMkLst>
+            <pc:docMk/>
+            <pc:sldMk cId="19136523" sldId="601"/>
+            <ac:spMk id="88" creationId="{00000000-0000-0000-0000-000000000000}"/>
+          </ac:spMkLst>
+        </pc:spChg>
+        <pc:spChg chg="mod">
+          <ac:chgData name="Zhao Jin" userId="cd05a825-544c-438a-9ba1-08e63db50b47" providerId="ADAL" clId="{5DF3A229-1965-414E-AF54-F4C37AC7DF68}" dt="2026-03-31T01:34:55.239" v="43" actId="14100"/>
+          <ac:spMkLst>
+            <pc:docMk/>
+            <pc:sldMk cId="19136523" sldId="601"/>
+            <ac:spMk id="89" creationId="{00000000-0000-0000-0000-000000000000}"/>
+          </ac:spMkLst>
+        </pc:spChg>
+        <pc:spChg chg="mod">
+          <ac:chgData name="Zhao Jin" userId="cd05a825-544c-438a-9ba1-08e63db50b47" providerId="ADAL" clId="{5DF3A229-1965-414E-AF54-F4C37AC7DF68}" dt="2026-03-31T01:34:59.456" v="45" actId="14100"/>
+          <ac:spMkLst>
+            <pc:docMk/>
+            <pc:sldMk cId="19136523" sldId="601"/>
+            <ac:spMk id="103" creationId="{00000000-0000-0000-0000-000000000000}"/>
+          </ac:spMkLst>
+        </pc:spChg>
+        <pc:spChg chg="mod">
+          <ac:chgData name="Zhao Jin" userId="cd05a825-544c-438a-9ba1-08e63db50b47" providerId="ADAL" clId="{5DF3A229-1965-414E-AF54-F4C37AC7DF68}" dt="2026-03-31T01:35:01.270" v="46" actId="14100"/>
+          <ac:spMkLst>
+            <pc:docMk/>
+            <pc:sldMk cId="19136523" sldId="601"/>
+            <ac:spMk id="104" creationId="{00000000-0000-0000-0000-000000000000}"/>
+          </ac:spMkLst>
+        </pc:spChg>
+        <pc:grpChg chg="mod">
+          <ac:chgData name="Zhao Jin" userId="cd05a825-544c-438a-9ba1-08e63db50b47" providerId="ADAL" clId="{5DF3A229-1965-414E-AF54-F4C37AC7DF68}" dt="2026-03-31T01:34:45.173" v="39" actId="14100"/>
+          <ac:grpSpMkLst>
+            <pc:docMk/>
+            <pc:sldMk cId="19136523" sldId="601"/>
+            <ac:grpSpMk id="71" creationId="{00000000-0000-0000-0000-000000000000}"/>
+          </ac:grpSpMkLst>
+        </pc:grpChg>
+      </pc:sldChg>
+    </pc:docChg>
+  </pc:docChgLst>
+  <pc:docChgLst>
+    <pc:chgData name="Zhao Jin" userId="cd05a825-544c-438a-9ba1-08e63db50b47" providerId="ADAL" clId="{7346625B-7E8F-4E9B-A9F0-94C1DD70E907}"/>
+    <pc:docChg chg="undo custSel modSld">
+      <pc:chgData name="Zhao Jin" userId="cd05a825-544c-438a-9ba1-08e63db50b47" providerId="ADAL" clId="{7346625B-7E8F-4E9B-A9F0-94C1DD70E907}" dt="2026-03-30T02:45:56.459" v="717"/>
       <pc:docMkLst>
         <pc:docMk/>
       </pc:docMkLst>
       <pc:sldChg chg="modSp mod">
-        <pc:chgData name="Zhao Jin" userId="cd05a825-544c-438a-9ba1-08e63db50b47" providerId="ADAL" clId="{CCD631C3-D91E-4641-ACDC-389C8C611FC7}" dt="2021-03-10T03:44:15.084" v="15" actId="20577"/>
-        <pc:sldMkLst>
-          <pc:docMk/>
-          <pc:sldMk cId="0" sldId="256"/>
-        </pc:sldMkLst>
-      </pc:sldChg>
-      <pc:sldChg chg="modSp mod">
-        <pc:chgData name="Zhao Jin" userId="cd05a825-544c-438a-9ba1-08e63db50b47" providerId="ADAL" clId="{CCD631C3-D91E-4641-ACDC-389C8C611FC7}" dt="2021-03-15T04:27:56.388" v="478" actId="20577"/>
-        <pc:sldMkLst>
-          <pc:docMk/>
-          <pc:sldMk cId="2438607696" sldId="468"/>
-        </pc:sldMkLst>
-      </pc:sldChg>
-      <pc:sldChg chg="delSp modSp add del mod">
-        <pc:chgData name="Zhao Jin" userId="cd05a825-544c-438a-9ba1-08e63db50b47" providerId="ADAL" clId="{CCD631C3-D91E-4641-ACDC-389C8C611FC7}" dt="2021-03-15T04:15:15.847" v="64" actId="47"/>
-        <pc:sldMkLst>
-          <pc:docMk/>
-          <pc:sldMk cId="2426954327" sldId="469"/>
-        </pc:sldMkLst>
-      </pc:sldChg>
-      <pc:sldChg chg="modSp del">
-        <pc:chgData name="Zhao Jin" userId="cd05a825-544c-438a-9ba1-08e63db50b47" providerId="ADAL" clId="{CCD631C3-D91E-4641-ACDC-389C8C611FC7}" dt="2021-03-15T04:14:44.736" v="43" actId="47"/>
+        <pc:chgData name="Zhao Jin" userId="cd05a825-544c-438a-9ba1-08e63db50b47" providerId="ADAL" clId="{7346625B-7E8F-4E9B-A9F0-94C1DD70E907}" dt="2026-03-30T02:10:02.224" v="68" actId="207"/>
         <pc:sldMkLst>
           <pc:docMk/>
           <pc:sldMk cId="1067695719" sldId="526"/>
         </pc:sldMkLst>
+        <pc:spChg chg="mod">
+          <ac:chgData name="Zhao Jin" userId="cd05a825-544c-438a-9ba1-08e63db50b47" providerId="ADAL" clId="{7346625B-7E8F-4E9B-A9F0-94C1DD70E907}" dt="2026-03-30T02:10:02.224" v="68" actId="207"/>
+          <ac:spMkLst>
+            <pc:docMk/>
+            <pc:sldMk cId="1067695719" sldId="526"/>
+            <ac:spMk id="13" creationId="{00000000-0000-0000-0000-000000000000}"/>
+          </ac:spMkLst>
+        </pc:spChg>
       </pc:sldChg>
-      <pc:sldChg chg="modSp del">
-        <pc:chgData name="Zhao Jin" userId="cd05a825-544c-438a-9ba1-08e63db50b47" providerId="ADAL" clId="{CCD631C3-D91E-4641-ACDC-389C8C611FC7}" dt="2021-03-15T04:14:44.736" v="43" actId="47"/>
-        <pc:sldMkLst>
-          <pc:docMk/>
-          <pc:sldMk cId="1427618944" sldId="553"/>
-        </pc:sldMkLst>
-      </pc:sldChg>
-      <pc:sldChg chg="delSp modSp add mod">
-        <pc:chgData name="Zhao Jin" userId="cd05a825-544c-438a-9ba1-08e63db50b47" providerId="ADAL" clId="{CCD631C3-D91E-4641-ACDC-389C8C611FC7}" dt="2021-03-15T04:28:11.083" v="484"/>
-        <pc:sldMkLst>
-          <pc:docMk/>
-          <pc:sldMk cId="3209251491" sldId="583"/>
-        </pc:sldMkLst>
-      </pc:sldChg>
-      <pc:sldChg chg="delSp modSp add mod">
-        <pc:chgData name="Zhao Jin" userId="cd05a825-544c-438a-9ba1-08e63db50b47" providerId="ADAL" clId="{CCD631C3-D91E-4641-ACDC-389C8C611FC7}" dt="2021-03-29T04:53:54.033" v="1453" actId="20577"/>
-        <pc:sldMkLst>
-          <pc:docMk/>
-          <pc:sldMk cId="52021965" sldId="590"/>
-        </pc:sldMkLst>
-      </pc:sldChg>
-      <pc:sldChg chg="delSp modSp add mod">
-        <pc:chgData name="Zhao Jin" userId="cd05a825-544c-438a-9ba1-08e63db50b47" providerId="ADAL" clId="{CCD631C3-D91E-4641-ACDC-389C8C611FC7}" dt="2021-03-29T05:04:49.530" v="2570" actId="207"/>
-        <pc:sldMkLst>
-          <pc:docMk/>
-          <pc:sldMk cId="375744792" sldId="591"/>
-        </pc:sldMkLst>
-      </pc:sldChg>
-      <pc:sldChg chg="delSp modSp add mod">
-        <pc:chgData name="Zhao Jin" userId="cd05a825-544c-438a-9ba1-08e63db50b47" providerId="ADAL" clId="{CCD631C3-D91E-4641-ACDC-389C8C611FC7}" dt="2021-03-29T05:05:15.143" v="2601" actId="1035"/>
-        <pc:sldMkLst>
-          <pc:docMk/>
-          <pc:sldMk cId="2497011922" sldId="592"/>
-        </pc:sldMkLst>
-      </pc:sldChg>
-      <pc:sldChg chg="delSp modSp add del mod">
-        <pc:chgData name="Zhao Jin" userId="cd05a825-544c-438a-9ba1-08e63db50b47" providerId="ADAL" clId="{CCD631C3-D91E-4641-ACDC-389C8C611FC7}" dt="2021-03-15T04:28:42.165" v="498" actId="47"/>
-        <pc:sldMkLst>
-          <pc:docMk/>
-          <pc:sldMk cId="1489350861" sldId="593"/>
-        </pc:sldMkLst>
-      </pc:sldChg>
-      <pc:sldChg chg="modSp add del">
-        <pc:chgData name="Zhao Jin" userId="cd05a825-544c-438a-9ba1-08e63db50b47" providerId="ADAL" clId="{CCD631C3-D91E-4641-ACDC-389C8C611FC7}" dt="2021-03-15T04:28:48.042" v="499" actId="47"/>
-        <pc:sldMkLst>
-          <pc:docMk/>
-          <pc:sldMk cId="3950042621" sldId="594"/>
-        </pc:sldMkLst>
-      </pc:sldChg>
-      <pc:sldChg chg="modSp add del">
-        <pc:chgData name="Zhao Jin" userId="cd05a825-544c-438a-9ba1-08e63db50b47" providerId="ADAL" clId="{CCD631C3-D91E-4641-ACDC-389C8C611FC7}" dt="2021-03-15T04:28:51.486" v="500" actId="47"/>
-        <pc:sldMkLst>
-          <pc:docMk/>
-          <pc:sldMk cId="1140620369" sldId="595"/>
-        </pc:sldMkLst>
-      </pc:sldChg>
-      <pc:sldChg chg="delSp modSp add mod modAnim">
-        <pc:chgData name="Zhao Jin" userId="cd05a825-544c-438a-9ba1-08e63db50b47" providerId="ADAL" clId="{CCD631C3-D91E-4641-ACDC-389C8C611FC7}" dt="2021-03-15T04:29:30.987" v="524" actId="20577"/>
-        <pc:sldMkLst>
-          <pc:docMk/>
-          <pc:sldMk cId="1854371286" sldId="597"/>
-        </pc:sldMkLst>
-      </pc:sldChg>
-      <pc:sldChg chg="delSp modSp add mod">
-        <pc:chgData name="Zhao Jin" userId="cd05a825-544c-438a-9ba1-08e63db50b47" providerId="ADAL" clId="{CCD631C3-D91E-4641-ACDC-389C8C611FC7}" dt="2021-03-29T05:03:08.668" v="2453"/>
-        <pc:sldMkLst>
-          <pc:docMk/>
-          <pc:sldMk cId="1365241982" sldId="598"/>
-        </pc:sldMkLst>
-      </pc:sldChg>
-      <pc:sldChg chg="delSp modSp add mod">
-        <pc:chgData name="Zhao Jin" userId="cd05a825-544c-438a-9ba1-08e63db50b47" providerId="ADAL" clId="{CCD631C3-D91E-4641-ACDC-389C8C611FC7}" dt="2021-03-29T05:03:22.658" v="2457"/>
-        <pc:sldMkLst>
-          <pc:docMk/>
-          <pc:sldMk cId="2302344841" sldId="599"/>
-        </pc:sldMkLst>
-      </pc:sldChg>
-      <pc:sldChg chg="delSp modSp add mod ord">
-        <pc:chgData name="Zhao Jin" userId="cd05a825-544c-438a-9ba1-08e63db50b47" providerId="ADAL" clId="{CCD631C3-D91E-4641-ACDC-389C8C611FC7}" dt="2021-03-15T04:30:00.230" v="535" actId="6549"/>
-        <pc:sldMkLst>
-          <pc:docMk/>
-          <pc:sldMk cId="1890638764" sldId="600"/>
-        </pc:sldMkLst>
-      </pc:sldChg>
-      <pc:sldChg chg="delSp modSp add mod">
-        <pc:chgData name="Zhao Jin" userId="cd05a825-544c-438a-9ba1-08e63db50b47" providerId="ADAL" clId="{CCD631C3-D91E-4641-ACDC-389C8C611FC7}" dt="2021-03-15T04:30:06.888" v="536" actId="6549"/>
-        <pc:sldMkLst>
-          <pc:docMk/>
-          <pc:sldMk cId="19136523" sldId="601"/>
-        </pc:sldMkLst>
-      </pc:sldChg>
-      <pc:sldChg chg="delSp modSp add mod">
-        <pc:chgData name="Zhao Jin" userId="cd05a825-544c-438a-9ba1-08e63db50b47" providerId="ADAL" clId="{CCD631C3-D91E-4641-ACDC-389C8C611FC7}" dt="2021-03-15T04:30:36.429" v="550" actId="20577"/>
-        <pc:sldMkLst>
-          <pc:docMk/>
-          <pc:sldMk cId="4018933415" sldId="609"/>
-        </pc:sldMkLst>
-      </pc:sldChg>
-      <pc:sldChg chg="delSp modSp add mod">
-        <pc:chgData name="Zhao Jin" userId="cd05a825-544c-438a-9ba1-08e63db50b47" providerId="ADAL" clId="{CCD631C3-D91E-4641-ACDC-389C8C611FC7}" dt="2021-03-15T04:30:38.231" v="553" actId="20577"/>
-        <pc:sldMkLst>
-          <pc:docMk/>
-          <pc:sldMk cId="2596011763" sldId="610"/>
-        </pc:sldMkLst>
-      </pc:sldChg>
-      <pc:sldChg chg="delSp modSp add mod">
-        <pc:chgData name="Zhao Jin" userId="cd05a825-544c-438a-9ba1-08e63db50b47" providerId="ADAL" clId="{CCD631C3-D91E-4641-ACDC-389C8C611FC7}" dt="2021-03-15T04:30:40.343" v="556" actId="20577"/>
-        <pc:sldMkLst>
-          <pc:docMk/>
-          <pc:sldMk cId="498775291" sldId="611"/>
-        </pc:sldMkLst>
-      </pc:sldChg>
-      <pc:sldChg chg="delSp modSp add mod">
-        <pc:chgData name="Zhao Jin" userId="cd05a825-544c-438a-9ba1-08e63db50b47" providerId="ADAL" clId="{CCD631C3-D91E-4641-ACDC-389C8C611FC7}" dt="2021-03-15T04:30:42.233" v="559" actId="20577"/>
-        <pc:sldMkLst>
-          <pc:docMk/>
-          <pc:sldMk cId="1398799763" sldId="612"/>
-        </pc:sldMkLst>
-      </pc:sldChg>
-      <pc:sldChg chg="delSp modSp add mod">
-        <pc:chgData name="Zhao Jin" userId="cd05a825-544c-438a-9ba1-08e63db50b47" providerId="ADAL" clId="{CCD631C3-D91E-4641-ACDC-389C8C611FC7}" dt="2021-03-15T04:31:03.725" v="583" actId="20577"/>
-        <pc:sldMkLst>
-          <pc:docMk/>
-          <pc:sldMk cId="3122256906" sldId="613"/>
-        </pc:sldMkLst>
-      </pc:sldChg>
-      <pc:sldChg chg="delSp modSp add mod">
-        <pc:chgData name="Zhao Jin" userId="cd05a825-544c-438a-9ba1-08e63db50b47" providerId="ADAL" clId="{CCD631C3-D91E-4641-ACDC-389C8C611FC7}" dt="2021-03-15T04:30:44.111" v="562" actId="20577"/>
-        <pc:sldMkLst>
-          <pc:docMk/>
-          <pc:sldMk cId="1199921267" sldId="614"/>
-        </pc:sldMkLst>
-      </pc:sldChg>
-      <pc:sldChg chg="delSp modSp add mod">
-        <pc:chgData name="Zhao Jin" userId="cd05a825-544c-438a-9ba1-08e63db50b47" providerId="ADAL" clId="{CCD631C3-D91E-4641-ACDC-389C8C611FC7}" dt="2021-03-15T04:30:46.016" v="565" actId="20577"/>
-        <pc:sldMkLst>
-          <pc:docMk/>
-          <pc:sldMk cId="2650110406" sldId="615"/>
-        </pc:sldMkLst>
-      </pc:sldChg>
-      <pc:sldChg chg="delSp modSp add mod">
-        <pc:chgData name="Zhao Jin" userId="cd05a825-544c-438a-9ba1-08e63db50b47" providerId="ADAL" clId="{CCD631C3-D91E-4641-ACDC-389C8C611FC7}" dt="2021-03-15T04:30:47.683" v="568" actId="20577"/>
-        <pc:sldMkLst>
-          <pc:docMk/>
-          <pc:sldMk cId="3658891290" sldId="616"/>
-        </pc:sldMkLst>
-      </pc:sldChg>
-      <pc:sldChg chg="modSp del">
-        <pc:chgData name="Zhao Jin" userId="cd05a825-544c-438a-9ba1-08e63db50b47" providerId="ADAL" clId="{CCD631C3-D91E-4641-ACDC-389C8C611FC7}" dt="2021-03-15T04:14:44.736" v="43" actId="47"/>
-        <pc:sldMkLst>
-          <pc:docMk/>
-          <pc:sldMk cId="1813128722" sldId="617"/>
-        </pc:sldMkLst>
-      </pc:sldChg>
-      <pc:sldChg chg="delSp modSp add mod">
-        <pc:chgData name="Zhao Jin" userId="cd05a825-544c-438a-9ba1-08e63db50b47" providerId="ADAL" clId="{CCD631C3-D91E-4641-ACDC-389C8C611FC7}" dt="2021-03-15T04:30:50.360" v="571" actId="20577"/>
-        <pc:sldMkLst>
-          <pc:docMk/>
-          <pc:sldMk cId="3308462364" sldId="617"/>
-        </pc:sldMkLst>
-      </pc:sldChg>
-      <pc:sldChg chg="delSp modSp add mod">
-        <pc:chgData name="Zhao Jin" userId="cd05a825-544c-438a-9ba1-08e63db50b47" providerId="ADAL" clId="{CCD631C3-D91E-4641-ACDC-389C8C611FC7}" dt="2021-03-15T04:30:53.696" v="574" actId="20577"/>
-        <pc:sldMkLst>
-          <pc:docMk/>
-          <pc:sldMk cId="762563431" sldId="618"/>
-        </pc:sldMkLst>
-      </pc:sldChg>
-      <pc:sldChg chg="delSp modSp add mod">
-        <pc:chgData name="Zhao Jin" userId="cd05a825-544c-438a-9ba1-08e63db50b47" providerId="ADAL" clId="{CCD631C3-D91E-4641-ACDC-389C8C611FC7}" dt="2021-03-15T04:30:55.312" v="577" actId="20577"/>
-        <pc:sldMkLst>
-          <pc:docMk/>
-          <pc:sldMk cId="1164729378" sldId="619"/>
-        </pc:sldMkLst>
-      </pc:sldChg>
-      <pc:sldChg chg="delSp modSp add mod">
-        <pc:chgData name="Zhao Jin" userId="cd05a825-544c-438a-9ba1-08e63db50b47" providerId="ADAL" clId="{CCD631C3-D91E-4641-ACDC-389C8C611FC7}" dt="2021-03-15T04:31:00.530" v="580" actId="20577"/>
-        <pc:sldMkLst>
-          <pc:docMk/>
-          <pc:sldMk cId="1096816361" sldId="620"/>
-        </pc:sldMkLst>
-      </pc:sldChg>
-      <pc:sldChg chg="delSp modSp add mod">
-        <pc:chgData name="Zhao Jin" userId="cd05a825-544c-438a-9ba1-08e63db50b47" providerId="ADAL" clId="{CCD631C3-D91E-4641-ACDC-389C8C611FC7}" dt="2021-03-15T04:31:05.957" v="586" actId="20577"/>
-        <pc:sldMkLst>
-          <pc:docMk/>
-          <pc:sldMk cId="4110967709" sldId="621"/>
-        </pc:sldMkLst>
-      </pc:sldChg>
-      <pc:sldChg chg="addSp delSp modSp add mod delAnim">
-        <pc:chgData name="Zhao Jin" userId="cd05a825-544c-438a-9ba1-08e63db50b47" providerId="ADAL" clId="{CCD631C3-D91E-4641-ACDC-389C8C611FC7}" dt="2021-03-15T04:48:30.218" v="1443" actId="207"/>
-        <pc:sldMkLst>
-          <pc:docMk/>
-          <pc:sldMk cId="172325292" sldId="622"/>
-        </pc:sldMkLst>
-      </pc:sldChg>
-      <pc:sldChg chg="addSp delSp modSp add mod delAnim">
-        <pc:chgData name="Zhao Jin" userId="cd05a825-544c-438a-9ba1-08e63db50b47" providerId="ADAL" clId="{CCD631C3-D91E-4641-ACDC-389C8C611FC7}" dt="2021-03-15T04:48:38.572" v="1445"/>
-        <pc:sldMkLst>
-          <pc:docMk/>
-          <pc:sldMk cId="3569280496" sldId="623"/>
-        </pc:sldMkLst>
-      </pc:sldChg>
-      <pc:sldChg chg="addSp delSp modSp add mod">
-        <pc:chgData name="Zhao Jin" userId="cd05a825-544c-438a-9ba1-08e63db50b47" providerId="ADAL" clId="{CCD631C3-D91E-4641-ACDC-389C8C611FC7}" dt="2021-03-15T04:48:43.448" v="1447" actId="1076"/>
+      <pc:sldChg chg="addSp delSp modSp mod addAnim delAnim modAnim">
+        <pc:chgData name="Zhao Jin" userId="cd05a825-544c-438a-9ba1-08e63db50b47" providerId="ADAL" clId="{7346625B-7E8F-4E9B-A9F0-94C1DD70E907}" dt="2026-03-30T02:35:07.913" v="149"/>
         <pc:sldMkLst>
           <pc:docMk/>
           <pc:sldMk cId="1400456452" sldId="624"/>
         </pc:sldMkLst>
+        <pc:spChg chg="mod">
+          <ac:chgData name="Zhao Jin" userId="cd05a825-544c-438a-9ba1-08e63db50b47" providerId="ADAL" clId="{7346625B-7E8F-4E9B-A9F0-94C1DD70E907}" dt="2026-03-30T02:26:46.276" v="86" actId="6549"/>
+          <ac:spMkLst>
+            <pc:docMk/>
+            <pc:sldMk cId="1400456452" sldId="624"/>
+            <ac:spMk id="30" creationId="{00000000-0000-0000-0000-000000000000}"/>
+          </ac:spMkLst>
+        </pc:spChg>
+        <pc:spChg chg="mod">
+          <ac:chgData name="Zhao Jin" userId="cd05a825-544c-438a-9ba1-08e63db50b47" providerId="ADAL" clId="{7346625B-7E8F-4E9B-A9F0-94C1DD70E907}" dt="2026-03-30T02:30:30.565" v="121"/>
+          <ac:spMkLst>
+            <pc:docMk/>
+            <pc:sldMk cId="1400456452" sldId="624"/>
+            <ac:spMk id="63" creationId="{55395FF0-F8A5-9974-6392-89736171ED87}"/>
+          </ac:spMkLst>
+        </pc:spChg>
+        <pc:spChg chg="mod">
+          <ac:chgData name="Zhao Jin" userId="cd05a825-544c-438a-9ba1-08e63db50b47" providerId="ADAL" clId="{7346625B-7E8F-4E9B-A9F0-94C1DD70E907}" dt="2026-03-30T02:30:30.565" v="121"/>
+          <ac:spMkLst>
+            <pc:docMk/>
+            <pc:sldMk cId="1400456452" sldId="624"/>
+            <ac:spMk id="14336" creationId="{7BB179B1-A9B3-F645-A629-A1E26C2AAE28}"/>
+          </ac:spMkLst>
+        </pc:spChg>
+        <pc:spChg chg="add mod">
+          <ac:chgData name="Zhao Jin" userId="cd05a825-544c-438a-9ba1-08e63db50b47" providerId="ADAL" clId="{7346625B-7E8F-4E9B-A9F0-94C1DD70E907}" dt="2026-03-30T02:30:30.565" v="121"/>
+          <ac:spMkLst>
+            <pc:docMk/>
+            <pc:sldMk cId="1400456452" sldId="624"/>
+            <ac:spMk id="14337" creationId="{8EFF7C7B-D714-1458-D303-DADC68B6580B}"/>
+          </ac:spMkLst>
+        </pc:spChg>
+        <pc:spChg chg="add mod">
+          <ac:chgData name="Zhao Jin" userId="cd05a825-544c-438a-9ba1-08e63db50b47" providerId="ADAL" clId="{7346625B-7E8F-4E9B-A9F0-94C1DD70E907}" dt="2026-03-30T02:30:30.565" v="121"/>
+          <ac:spMkLst>
+            <pc:docMk/>
+            <pc:sldMk cId="1400456452" sldId="624"/>
+            <ac:spMk id="14340" creationId="{12338DB1-3210-32B9-2F7D-4FB5877CBDCD}"/>
+          </ac:spMkLst>
+        </pc:spChg>
+        <pc:spChg chg="mod">
+          <ac:chgData name="Zhao Jin" userId="cd05a825-544c-438a-9ba1-08e63db50b47" providerId="ADAL" clId="{7346625B-7E8F-4E9B-A9F0-94C1DD70E907}" dt="2026-03-30T02:30:30.565" v="121"/>
+          <ac:spMkLst>
+            <pc:docMk/>
+            <pc:sldMk cId="1400456452" sldId="624"/>
+            <ac:spMk id="14343" creationId="{DEC8A63E-F146-A0EE-5FF4-268833D59A53}"/>
+          </ac:spMkLst>
+        </pc:spChg>
+        <pc:spChg chg="mod">
+          <ac:chgData name="Zhao Jin" userId="cd05a825-544c-438a-9ba1-08e63db50b47" providerId="ADAL" clId="{7346625B-7E8F-4E9B-A9F0-94C1DD70E907}" dt="2026-03-30T02:30:30.565" v="121"/>
+          <ac:spMkLst>
+            <pc:docMk/>
+            <pc:sldMk cId="1400456452" sldId="624"/>
+            <ac:spMk id="14345" creationId="{90448695-32F3-C6E4-7673-ECAF40E6833C}"/>
+          </ac:spMkLst>
+        </pc:spChg>
+        <pc:spChg chg="mod">
+          <ac:chgData name="Zhao Jin" userId="cd05a825-544c-438a-9ba1-08e63db50b47" providerId="ADAL" clId="{7346625B-7E8F-4E9B-A9F0-94C1DD70E907}" dt="2026-03-30T02:30:30.565" v="121"/>
+          <ac:spMkLst>
+            <pc:docMk/>
+            <pc:sldMk cId="1400456452" sldId="624"/>
+            <ac:spMk id="14346" creationId="{5E7C6C6C-562D-4CE6-F2A8-E8B2F81EDAF9}"/>
+          </ac:spMkLst>
+        </pc:spChg>
+        <pc:spChg chg="add mod">
+          <ac:chgData name="Zhao Jin" userId="cd05a825-544c-438a-9ba1-08e63db50b47" providerId="ADAL" clId="{7346625B-7E8F-4E9B-A9F0-94C1DD70E907}" dt="2026-03-30T02:30:30.565" v="121"/>
+          <ac:spMkLst>
+            <pc:docMk/>
+            <pc:sldMk cId="1400456452" sldId="624"/>
+            <ac:spMk id="14347" creationId="{AD9352D3-D9C2-ED4F-AA70-AE442714DF45}"/>
+          </ac:spMkLst>
+        </pc:spChg>
+        <pc:spChg chg="add mod">
+          <ac:chgData name="Zhao Jin" userId="cd05a825-544c-438a-9ba1-08e63db50b47" providerId="ADAL" clId="{7346625B-7E8F-4E9B-A9F0-94C1DD70E907}" dt="2026-03-30T02:30:30.565" v="121"/>
+          <ac:spMkLst>
+            <pc:docMk/>
+            <pc:sldMk cId="1400456452" sldId="624"/>
+            <ac:spMk id="14348" creationId="{8AB91D03-EBBA-49B6-E11C-8B4FE8E4E308}"/>
+          </ac:spMkLst>
+        </pc:spChg>
+        <pc:spChg chg="add mod">
+          <ac:chgData name="Zhao Jin" userId="cd05a825-544c-438a-9ba1-08e63db50b47" providerId="ADAL" clId="{7346625B-7E8F-4E9B-A9F0-94C1DD70E907}" dt="2026-03-30T02:30:30.565" v="121"/>
+          <ac:spMkLst>
+            <pc:docMk/>
+            <pc:sldMk cId="1400456452" sldId="624"/>
+            <ac:spMk id="14349" creationId="{FEE36775-1CF4-59F9-A378-B75099D45382}"/>
+          </ac:spMkLst>
+        </pc:spChg>
+        <pc:picChg chg="add mod">
+          <ac:chgData name="Zhao Jin" userId="cd05a825-544c-438a-9ba1-08e63db50b47" providerId="ADAL" clId="{7346625B-7E8F-4E9B-A9F0-94C1DD70E907}" dt="2026-03-30T02:26:20.505" v="76" actId="1035"/>
+          <ac:picMkLst>
+            <pc:docMk/>
+            <pc:sldMk cId="1400456452" sldId="624"/>
+            <ac:picMk id="3" creationId="{E04B5978-49B6-1B61-CF7F-EB927E86CABD}"/>
+          </ac:picMkLst>
+        </pc:picChg>
+        <pc:picChg chg="add del mod">
+          <ac:chgData name="Zhao Jin" userId="cd05a825-544c-438a-9ba1-08e63db50b47" providerId="ADAL" clId="{7346625B-7E8F-4E9B-A9F0-94C1DD70E907}" dt="2026-03-30T02:27:38.738" v="93" actId="478"/>
+          <ac:picMkLst>
+            <pc:docMk/>
+            <pc:sldMk cId="1400456452" sldId="624"/>
+            <ac:picMk id="4" creationId="{ABB19319-747F-1087-D085-63DF6AA3FC6A}"/>
+          </ac:picMkLst>
+        </pc:picChg>
+        <pc:picChg chg="add del mod">
+          <ac:chgData name="Zhao Jin" userId="cd05a825-544c-438a-9ba1-08e63db50b47" providerId="ADAL" clId="{7346625B-7E8F-4E9B-A9F0-94C1DD70E907}" dt="2026-03-30T02:30:06.534" v="120" actId="478"/>
+          <ac:picMkLst>
+            <pc:docMk/>
+            <pc:sldMk cId="1400456452" sldId="624"/>
+            <ac:picMk id="61" creationId="{D05E451D-A463-FCE1-722A-9732DD2A0910}"/>
+          </ac:picMkLst>
+        </pc:picChg>
+        <pc:picChg chg="add mod">
+          <ac:chgData name="Zhao Jin" userId="cd05a825-544c-438a-9ba1-08e63db50b47" providerId="ADAL" clId="{7346625B-7E8F-4E9B-A9F0-94C1DD70E907}" dt="2026-03-30T02:31:19.718" v="127" actId="1076"/>
+          <ac:picMkLst>
+            <pc:docMk/>
+            <pc:sldMk cId="1400456452" sldId="624"/>
+            <ac:picMk id="14350" creationId="{86996FD7-D01C-834A-251C-45ED6C8D81C6}"/>
+          </ac:picMkLst>
+        </pc:picChg>
+        <pc:picChg chg="add mod">
+          <ac:chgData name="Zhao Jin" userId="cd05a825-544c-438a-9ba1-08e63db50b47" providerId="ADAL" clId="{7346625B-7E8F-4E9B-A9F0-94C1DD70E907}" dt="2026-03-30T02:31:39.453" v="130" actId="1076"/>
+          <ac:picMkLst>
+            <pc:docMk/>
+            <pc:sldMk cId="1400456452" sldId="624"/>
+            <ac:picMk id="14351" creationId="{C972E6C7-12ED-3B81-E339-D8D55C6EEFE2}"/>
+          </ac:picMkLst>
+        </pc:picChg>
+        <pc:picChg chg="add mod">
+          <ac:chgData name="Zhao Jin" userId="cd05a825-544c-438a-9ba1-08e63db50b47" providerId="ADAL" clId="{7346625B-7E8F-4E9B-A9F0-94C1DD70E907}" dt="2026-03-30T02:32:12.195" v="133" actId="1076"/>
+          <ac:picMkLst>
+            <pc:docMk/>
+            <pc:sldMk cId="1400456452" sldId="624"/>
+            <ac:picMk id="14353" creationId="{7ADEAF2A-3175-300B-1BBF-F103802CC580}"/>
+          </ac:picMkLst>
+        </pc:picChg>
+        <pc:picChg chg="add del mod">
+          <ac:chgData name="Zhao Jin" userId="cd05a825-544c-438a-9ba1-08e63db50b47" providerId="ADAL" clId="{7346625B-7E8F-4E9B-A9F0-94C1DD70E907}" dt="2026-03-30T02:32:44.173" v="136" actId="478"/>
+          <ac:picMkLst>
+            <pc:docMk/>
+            <pc:sldMk cId="1400456452" sldId="624"/>
+            <ac:picMk id="14354" creationId="{5C754EF2-4BD9-4187-31B6-2A3BF06673DA}"/>
+          </ac:picMkLst>
+        </pc:picChg>
       </pc:sldChg>
-      <pc:sldChg chg="delSp modSp add mod modAnim">
-        <pc:chgData name="Zhao Jin" userId="cd05a825-544c-438a-9ba1-08e63db50b47" providerId="ADAL" clId="{CCD631C3-D91E-4641-ACDC-389C8C611FC7}" dt="2021-03-15T04:33:32.546" v="718" actId="20577"/>
+      <pc:sldChg chg="modAnim">
+        <pc:chgData name="Zhao Jin" userId="cd05a825-544c-438a-9ba1-08e63db50b47" providerId="ADAL" clId="{7346625B-7E8F-4E9B-A9F0-94C1DD70E907}" dt="2026-03-30T02:43:20.442" v="579"/>
         <pc:sldMkLst>
           <pc:docMk/>
-          <pc:sldMk cId="529301135" sldId="625"/>
+          <pc:sldMk cId="3494212704" sldId="647"/>
         </pc:sldMkLst>
       </pc:sldChg>
-      <pc:sldChg chg="addSp delSp modSp add mod delAnim">
-        <pc:chgData name="Zhao Jin" userId="cd05a825-544c-438a-9ba1-08e63db50b47" providerId="ADAL" clId="{CCD631C3-D91E-4641-ACDC-389C8C611FC7}" dt="2021-04-05T01:50:32.322" v="2616"/>
+      <pc:sldChg chg="modAnim">
+        <pc:chgData name="Zhao Jin" userId="cd05a825-544c-438a-9ba1-08e63db50b47" providerId="ADAL" clId="{7346625B-7E8F-4E9B-A9F0-94C1DD70E907}" dt="2026-03-30T02:43:22.939" v="580"/>
         <pc:sldMkLst>
           <pc:docMk/>
-          <pc:sldMk cId="4000828616" sldId="626"/>
-        </pc:sldMkLst>
-      </pc:sldChg>
-      <pc:sldChg chg="add del">
-        <pc:chgData name="Zhao Jin" userId="cd05a825-544c-438a-9ba1-08e63db50b47" providerId="ADAL" clId="{CCD631C3-D91E-4641-ACDC-389C8C611FC7}" dt="2021-03-29T04:54:29.871" v="1455"/>
-        <pc:sldMkLst>
-          <pc:docMk/>
-          <pc:sldMk cId="4149629702" sldId="626"/>
-        </pc:sldMkLst>
-      </pc:sldChg>
-      <pc:sldChg chg="modSp del">
-        <pc:chgData name="Zhao Jin" userId="cd05a825-544c-438a-9ba1-08e63db50b47" providerId="ADAL" clId="{CCD631C3-D91E-4641-ACDC-389C8C611FC7}" dt="2021-03-15T04:14:44.736" v="43" actId="47"/>
-        <pc:sldMkLst>
-          <pc:docMk/>
-          <pc:sldMk cId="3454948446" sldId="636"/>
-        </pc:sldMkLst>
-      </pc:sldChg>
-      <pc:sldChg chg="modSp del">
-        <pc:chgData name="Zhao Jin" userId="cd05a825-544c-438a-9ba1-08e63db50b47" providerId="ADAL" clId="{CCD631C3-D91E-4641-ACDC-389C8C611FC7}" dt="2021-03-15T04:14:44.736" v="43" actId="47"/>
-        <pc:sldMkLst>
-          <pc:docMk/>
-          <pc:sldMk cId="3737971943" sldId="637"/>
-        </pc:sldMkLst>
-      </pc:sldChg>
-      <pc:sldChg chg="modSp del">
-        <pc:chgData name="Zhao Jin" userId="cd05a825-544c-438a-9ba1-08e63db50b47" providerId="ADAL" clId="{CCD631C3-D91E-4641-ACDC-389C8C611FC7}" dt="2021-03-15T04:14:44.736" v="43" actId="47"/>
-        <pc:sldMkLst>
-          <pc:docMk/>
-          <pc:sldMk cId="1179750071" sldId="639"/>
-        </pc:sldMkLst>
-      </pc:sldChg>
-      <pc:sldChg chg="modSp del">
-        <pc:chgData name="Zhao Jin" userId="cd05a825-544c-438a-9ba1-08e63db50b47" providerId="ADAL" clId="{CCD631C3-D91E-4641-ACDC-389C8C611FC7}" dt="2021-03-15T04:14:44.736" v="43" actId="47"/>
-        <pc:sldMkLst>
-          <pc:docMk/>
-          <pc:sldMk cId="3462301147" sldId="640"/>
-        </pc:sldMkLst>
-      </pc:sldChg>
-      <pc:sldChg chg="modSp del">
-        <pc:chgData name="Zhao Jin" userId="cd05a825-544c-438a-9ba1-08e63db50b47" providerId="ADAL" clId="{CCD631C3-D91E-4641-ACDC-389C8C611FC7}" dt="2021-03-15T04:14:44.736" v="43" actId="47"/>
-        <pc:sldMkLst>
-          <pc:docMk/>
-          <pc:sldMk cId="723901272" sldId="641"/>
-        </pc:sldMkLst>
-      </pc:sldChg>
-      <pc:sldChg chg="modSp del">
-        <pc:chgData name="Zhao Jin" userId="cd05a825-544c-438a-9ba1-08e63db50b47" providerId="ADAL" clId="{CCD631C3-D91E-4641-ACDC-389C8C611FC7}" dt="2021-03-15T04:14:44.736" v="43" actId="47"/>
-        <pc:sldMkLst>
-          <pc:docMk/>
-          <pc:sldMk cId="4089006062" sldId="642"/>
-        </pc:sldMkLst>
-      </pc:sldChg>
-      <pc:sldChg chg="modSp del">
-        <pc:chgData name="Zhao Jin" userId="cd05a825-544c-438a-9ba1-08e63db50b47" providerId="ADAL" clId="{CCD631C3-D91E-4641-ACDC-389C8C611FC7}" dt="2021-03-15T04:14:44.736" v="43" actId="47"/>
-        <pc:sldMkLst>
-          <pc:docMk/>
-          <pc:sldMk cId="1514327557" sldId="643"/>
-        </pc:sldMkLst>
-      </pc:sldChg>
-      <pc:sldMasterChg chg="modSp modSldLayout">
-        <pc:chgData name="Zhao Jin" userId="cd05a825-544c-438a-9ba1-08e63db50b47" providerId="ADAL" clId="{CCD631C3-D91E-4641-ACDC-389C8C611FC7}" dt="2021-03-10T03:44:34.267" v="42"/>
-        <pc:sldMasterMkLst>
-          <pc:docMk/>
-          <pc:sldMasterMk cId="0" sldId="2147485087"/>
-        </pc:sldMasterMkLst>
-        <pc:sldLayoutChg chg="modSp">
-          <pc:chgData name="Zhao Jin" userId="cd05a825-544c-438a-9ba1-08e63db50b47" providerId="ADAL" clId="{CCD631C3-D91E-4641-ACDC-389C8C611FC7}" dt="2021-03-10T03:44:34.267" v="42"/>
-          <pc:sldLayoutMkLst>
-            <pc:docMk/>
-            <pc:sldMasterMk cId="0" sldId="2147485087"/>
-            <pc:sldLayoutMk cId="0" sldId="2147485088"/>
-          </pc:sldLayoutMkLst>
-        </pc:sldLayoutChg>
-        <pc:sldLayoutChg chg="modSp">
-          <pc:chgData name="Zhao Jin" userId="cd05a825-544c-438a-9ba1-08e63db50b47" providerId="ADAL" clId="{CCD631C3-D91E-4641-ACDC-389C8C611FC7}" dt="2021-03-10T03:44:34.267" v="42"/>
-          <pc:sldLayoutMkLst>
-            <pc:docMk/>
-            <pc:sldMasterMk cId="0" sldId="2147485087"/>
-            <pc:sldLayoutMk cId="0" sldId="2147485089"/>
-          </pc:sldLayoutMkLst>
-        </pc:sldLayoutChg>
-        <pc:sldLayoutChg chg="modSp">
-          <pc:chgData name="Zhao Jin" userId="cd05a825-544c-438a-9ba1-08e63db50b47" providerId="ADAL" clId="{CCD631C3-D91E-4641-ACDC-389C8C611FC7}" dt="2021-03-10T03:44:34.267" v="42"/>
-          <pc:sldLayoutMkLst>
-            <pc:docMk/>
-            <pc:sldMasterMk cId="0" sldId="2147485087"/>
-            <pc:sldLayoutMk cId="0" sldId="2147485090"/>
-          </pc:sldLayoutMkLst>
-        </pc:sldLayoutChg>
-        <pc:sldLayoutChg chg="modSp">
-          <pc:chgData name="Zhao Jin" userId="cd05a825-544c-438a-9ba1-08e63db50b47" providerId="ADAL" clId="{CCD631C3-D91E-4641-ACDC-389C8C611FC7}" dt="2021-03-10T03:44:34.267" v="42"/>
-          <pc:sldLayoutMkLst>
-            <pc:docMk/>
-            <pc:sldMasterMk cId="0" sldId="2147485087"/>
-            <pc:sldLayoutMk cId="0" sldId="2147485091"/>
-          </pc:sldLayoutMkLst>
-        </pc:sldLayoutChg>
-        <pc:sldLayoutChg chg="modSp">
-          <pc:chgData name="Zhao Jin" userId="cd05a825-544c-438a-9ba1-08e63db50b47" providerId="ADAL" clId="{CCD631C3-D91E-4641-ACDC-389C8C611FC7}" dt="2021-03-10T03:44:34.267" v="42"/>
-          <pc:sldLayoutMkLst>
-            <pc:docMk/>
-            <pc:sldMasterMk cId="0" sldId="2147485087"/>
-            <pc:sldLayoutMk cId="0" sldId="2147485092"/>
-          </pc:sldLayoutMkLst>
-        </pc:sldLayoutChg>
-        <pc:sldLayoutChg chg="modSp">
-          <pc:chgData name="Zhao Jin" userId="cd05a825-544c-438a-9ba1-08e63db50b47" providerId="ADAL" clId="{CCD631C3-D91E-4641-ACDC-389C8C611FC7}" dt="2021-03-10T03:44:34.267" v="42"/>
-          <pc:sldLayoutMkLst>
-            <pc:docMk/>
-            <pc:sldMasterMk cId="0" sldId="2147485087"/>
-            <pc:sldLayoutMk cId="0" sldId="2147485093"/>
-          </pc:sldLayoutMkLst>
-        </pc:sldLayoutChg>
-        <pc:sldLayoutChg chg="modSp">
-          <pc:chgData name="Zhao Jin" userId="cd05a825-544c-438a-9ba1-08e63db50b47" providerId="ADAL" clId="{CCD631C3-D91E-4641-ACDC-389C8C611FC7}" dt="2021-03-10T03:44:34.267" v="42"/>
-          <pc:sldLayoutMkLst>
-            <pc:docMk/>
-            <pc:sldMasterMk cId="0" sldId="2147485087"/>
-            <pc:sldLayoutMk cId="0" sldId="2147485094"/>
-          </pc:sldLayoutMkLst>
-        </pc:sldLayoutChg>
-        <pc:sldLayoutChg chg="modSp">
-          <pc:chgData name="Zhao Jin" userId="cd05a825-544c-438a-9ba1-08e63db50b47" providerId="ADAL" clId="{CCD631C3-D91E-4641-ACDC-389C8C611FC7}" dt="2021-03-10T03:44:34.267" v="42"/>
-          <pc:sldLayoutMkLst>
-            <pc:docMk/>
-            <pc:sldMasterMk cId="0" sldId="2147485087"/>
-            <pc:sldLayoutMk cId="0" sldId="2147485095"/>
-          </pc:sldLayoutMkLst>
-        </pc:sldLayoutChg>
-        <pc:sldLayoutChg chg="modSp">
-          <pc:chgData name="Zhao Jin" userId="cd05a825-544c-438a-9ba1-08e63db50b47" providerId="ADAL" clId="{CCD631C3-D91E-4641-ACDC-389C8C611FC7}" dt="2021-03-10T03:44:34.267" v="42"/>
-          <pc:sldLayoutMkLst>
-            <pc:docMk/>
-            <pc:sldMasterMk cId="0" sldId="2147485087"/>
-            <pc:sldLayoutMk cId="0" sldId="2147485096"/>
-          </pc:sldLayoutMkLst>
-        </pc:sldLayoutChg>
-        <pc:sldLayoutChg chg="modSp">
-          <pc:chgData name="Zhao Jin" userId="cd05a825-544c-438a-9ba1-08e63db50b47" providerId="ADAL" clId="{CCD631C3-D91E-4641-ACDC-389C8C611FC7}" dt="2021-03-10T03:44:34.267" v="42"/>
-          <pc:sldLayoutMkLst>
-            <pc:docMk/>
-            <pc:sldMasterMk cId="0" sldId="2147485087"/>
-            <pc:sldLayoutMk cId="0" sldId="2147485097"/>
-          </pc:sldLayoutMkLst>
-        </pc:sldLayoutChg>
-        <pc:sldLayoutChg chg="modSp">
-          <pc:chgData name="Zhao Jin" userId="cd05a825-544c-438a-9ba1-08e63db50b47" providerId="ADAL" clId="{CCD631C3-D91E-4641-ACDC-389C8C611FC7}" dt="2021-03-10T03:44:34.267" v="42"/>
-          <pc:sldLayoutMkLst>
-            <pc:docMk/>
-            <pc:sldMasterMk cId="0" sldId="2147485087"/>
-            <pc:sldLayoutMk cId="0" sldId="2147485098"/>
-          </pc:sldLayoutMkLst>
-        </pc:sldLayoutChg>
-      </pc:sldMasterChg>
-    </pc:docChg>
-  </pc:docChgLst>
-  <pc:docChgLst>
-    <pc:chgData name="Zhao Jin" userId="cd05a825-544c-438a-9ba1-08e63db50b47" providerId="ADAL" clId="{A32C303E-058C-49B2-A332-285D2EFE86C4}"/>
-    <pc:docChg chg="modSld">
-      <pc:chgData name="Zhao Jin" userId="cd05a825-544c-438a-9ba1-08e63db50b47" providerId="ADAL" clId="{A32C303E-058C-49B2-A332-285D2EFE86C4}" dt="2024-01-31T05:43:07.180" v="0"/>
-      <pc:docMkLst>
-        <pc:docMk/>
-      </pc:docMkLst>
-      <pc:sldChg chg="addSp modSp">
-        <pc:chgData name="Zhao Jin" userId="cd05a825-544c-438a-9ba1-08e63db50b47" providerId="ADAL" clId="{A32C303E-058C-49B2-A332-285D2EFE86C4}" dt="2024-01-31T05:43:07.180" v="0"/>
-        <pc:sldMkLst>
-          <pc:docMk/>
-          <pc:sldMk cId="0" sldId="256"/>
-        </pc:sldMkLst>
-      </pc:sldChg>
-    </pc:docChg>
-  </pc:docChgLst>
-  <pc:docChgLst>
-    <pc:chgData name="Zhao Jin" userId="cd05a825-544c-438a-9ba1-08e63db50b47" providerId="ADAL" clId="{B24B02F7-7905-4588-AF93-2F3E26C169C6}"/>
-    <pc:docChg chg="undo redo custSel addSld delSld modSld modMainMaster">
-      <pc:chgData name="Zhao Jin" userId="cd05a825-544c-438a-9ba1-08e63db50b47" providerId="ADAL" clId="{B24B02F7-7905-4588-AF93-2F3E26C169C6}" dt="2021-02-15T05:41:42.563" v="2814" actId="20577"/>
-      <pc:docMkLst>
-        <pc:docMk/>
-      </pc:docMkLst>
-      <pc:sldChg chg="modSp mod">
-        <pc:chgData name="Zhao Jin" userId="cd05a825-544c-438a-9ba1-08e63db50b47" providerId="ADAL" clId="{B24B02F7-7905-4588-AF93-2F3E26C169C6}" dt="2021-02-10T03:54:53.078" v="11" actId="20577"/>
-        <pc:sldMkLst>
-          <pc:docMk/>
-          <pc:sldMk cId="0" sldId="256"/>
+          <pc:sldMk cId="2331399055" sldId="648"/>
         </pc:sldMkLst>
       </pc:sldChg>
       <pc:sldChg chg="modSp mod">
-        <pc:chgData name="Zhao Jin" userId="cd05a825-544c-438a-9ba1-08e63db50b47" providerId="ADAL" clId="{B24B02F7-7905-4588-AF93-2F3E26C169C6}" dt="2021-02-15T05:40:06.780" v="2547" actId="20577"/>
+        <pc:chgData name="Zhao Jin" userId="cd05a825-544c-438a-9ba1-08e63db50b47" providerId="ADAL" clId="{7346625B-7E8F-4E9B-A9F0-94C1DD70E907}" dt="2026-03-30T02:45:48.686" v="716" actId="15"/>
         <pc:sldMkLst>
           <pc:docMk/>
-          <pc:sldMk cId="2438607696" sldId="468"/>
-        </pc:sldMkLst>
-      </pc:sldChg>
-      <pc:sldChg chg="modSp add mod">
-        <pc:chgData name="Zhao Jin" userId="cd05a825-544c-438a-9ba1-08e63db50b47" providerId="ADAL" clId="{B24B02F7-7905-4588-AF93-2F3E26C169C6}" dt="2021-02-15T05:41:42.563" v="2814" actId="20577"/>
-        <pc:sldMkLst>
-          <pc:docMk/>
-          <pc:sldMk cId="1067695719" sldId="526"/>
-        </pc:sldMkLst>
-      </pc:sldChg>
-      <pc:sldChg chg="modSp del">
-        <pc:chgData name="Zhao Jin" userId="cd05a825-544c-438a-9ba1-08e63db50b47" providerId="ADAL" clId="{B24B02F7-7905-4588-AF93-2F3E26C169C6}" dt="2021-02-11T11:05:45.269" v="2429" actId="47"/>
-        <pc:sldMkLst>
-          <pc:docMk/>
-          <pc:sldMk cId="1705639840" sldId="543"/>
-        </pc:sldMkLst>
-      </pc:sldChg>
-      <pc:sldChg chg="addSp modSp add del mod modAnim">
-        <pc:chgData name="Zhao Jin" userId="cd05a825-544c-438a-9ba1-08e63db50b47" providerId="ADAL" clId="{B24B02F7-7905-4588-AF93-2F3E26C169C6}" dt="2021-02-11T10:34:24.898" v="941" actId="207"/>
-        <pc:sldMkLst>
-          <pc:docMk/>
-          <pc:sldMk cId="2573090601" sldId="546"/>
-        </pc:sldMkLst>
-      </pc:sldChg>
-      <pc:sldChg chg="addSp delSp modSp mod modAnim">
-        <pc:chgData name="Zhao Jin" userId="cd05a825-544c-438a-9ba1-08e63db50b47" providerId="ADAL" clId="{B24B02F7-7905-4588-AF93-2F3E26C169C6}" dt="2021-02-11T10:46:20.240" v="1768" actId="6549"/>
-        <pc:sldMkLst>
-          <pc:docMk/>
-          <pc:sldMk cId="1427618944" sldId="553"/>
-        </pc:sldMkLst>
-      </pc:sldChg>
-      <pc:sldChg chg="modSp del">
-        <pc:chgData name="Zhao Jin" userId="cd05a825-544c-438a-9ba1-08e63db50b47" providerId="ADAL" clId="{B24B02F7-7905-4588-AF93-2F3E26C169C6}" dt="2021-02-11T11:05:45.269" v="2429" actId="47"/>
-        <pc:sldMkLst>
-          <pc:docMk/>
-          <pc:sldMk cId="487843573" sldId="558"/>
-        </pc:sldMkLst>
-      </pc:sldChg>
-      <pc:sldChg chg="modSp del">
-        <pc:chgData name="Zhao Jin" userId="cd05a825-544c-438a-9ba1-08e63db50b47" providerId="ADAL" clId="{B24B02F7-7905-4588-AF93-2F3E26C169C6}" dt="2021-02-11T10:14:03.499" v="27" actId="47"/>
-        <pc:sldMkLst>
-          <pc:docMk/>
-          <pc:sldMk cId="92291925" sldId="563"/>
-        </pc:sldMkLst>
-      </pc:sldChg>
-      <pc:sldChg chg="modSp del">
-        <pc:chgData name="Zhao Jin" userId="cd05a825-544c-438a-9ba1-08e63db50b47" providerId="ADAL" clId="{B24B02F7-7905-4588-AF93-2F3E26C169C6}" dt="2021-02-11T11:05:45.269" v="2429" actId="47"/>
-        <pc:sldMkLst>
-          <pc:docMk/>
-          <pc:sldMk cId="894186310" sldId="564"/>
-        </pc:sldMkLst>
-      </pc:sldChg>
-      <pc:sldChg chg="modSp del">
-        <pc:chgData name="Zhao Jin" userId="cd05a825-544c-438a-9ba1-08e63db50b47" providerId="ADAL" clId="{B24B02F7-7905-4588-AF93-2F3E26C169C6}" dt="2021-02-11T11:05:45.269" v="2429" actId="47"/>
-        <pc:sldMkLst>
-          <pc:docMk/>
-          <pc:sldMk cId="1732540191" sldId="568"/>
-        </pc:sldMkLst>
-      </pc:sldChg>
-      <pc:sldChg chg="modSp del mod">
-        <pc:chgData name="Zhao Jin" userId="cd05a825-544c-438a-9ba1-08e63db50b47" providerId="ADAL" clId="{B24B02F7-7905-4588-AF93-2F3E26C169C6}" dt="2021-02-11T11:05:45.269" v="2429" actId="47"/>
-        <pc:sldMkLst>
-          <pc:docMk/>
-          <pc:sldMk cId="3229890649" sldId="569"/>
-        </pc:sldMkLst>
-      </pc:sldChg>
-      <pc:sldChg chg="modSp del">
-        <pc:chgData name="Zhao Jin" userId="cd05a825-544c-438a-9ba1-08e63db50b47" providerId="ADAL" clId="{B24B02F7-7905-4588-AF93-2F3E26C169C6}" dt="2021-02-11T11:05:45.269" v="2429" actId="47"/>
-        <pc:sldMkLst>
-          <pc:docMk/>
-          <pc:sldMk cId="3922430229" sldId="580"/>
-        </pc:sldMkLst>
-      </pc:sldChg>
-      <pc:sldChg chg="modSp del">
-        <pc:chgData name="Zhao Jin" userId="cd05a825-544c-438a-9ba1-08e63db50b47" providerId="ADAL" clId="{B24B02F7-7905-4588-AF93-2F3E26C169C6}" dt="2021-02-11T11:05:45.269" v="2429" actId="47"/>
-        <pc:sldMkLst>
-          <pc:docMk/>
-          <pc:sldMk cId="1886636263" sldId="581"/>
-        </pc:sldMkLst>
-      </pc:sldChg>
-      <pc:sldChg chg="modSp del">
-        <pc:chgData name="Zhao Jin" userId="cd05a825-544c-438a-9ba1-08e63db50b47" providerId="ADAL" clId="{B24B02F7-7905-4588-AF93-2F3E26C169C6}" dt="2021-02-11T11:05:45.269" v="2429" actId="47"/>
-        <pc:sldMkLst>
-          <pc:docMk/>
-          <pc:sldMk cId="211149325" sldId="589"/>
-        </pc:sldMkLst>
-      </pc:sldChg>
-      <pc:sldChg chg="modSp del">
-        <pc:chgData name="Zhao Jin" userId="cd05a825-544c-438a-9ba1-08e63db50b47" providerId="ADAL" clId="{B24B02F7-7905-4588-AF93-2F3E26C169C6}" dt="2021-02-11T11:05:45.269" v="2429" actId="47"/>
-        <pc:sldMkLst>
-          <pc:docMk/>
-          <pc:sldMk cId="4156536479" sldId="590"/>
-        </pc:sldMkLst>
-      </pc:sldChg>
-      <pc:sldChg chg="modSp del">
-        <pc:chgData name="Zhao Jin" userId="cd05a825-544c-438a-9ba1-08e63db50b47" providerId="ADAL" clId="{B24B02F7-7905-4588-AF93-2F3E26C169C6}" dt="2021-02-11T11:05:45.269" v="2429" actId="47"/>
-        <pc:sldMkLst>
-          <pc:docMk/>
-          <pc:sldMk cId="567798019" sldId="591"/>
-        </pc:sldMkLst>
-      </pc:sldChg>
-      <pc:sldChg chg="modSp del">
-        <pc:chgData name="Zhao Jin" userId="cd05a825-544c-438a-9ba1-08e63db50b47" providerId="ADAL" clId="{B24B02F7-7905-4588-AF93-2F3E26C169C6}" dt="2021-02-11T11:05:45.269" v="2429" actId="47"/>
-        <pc:sldMkLst>
-          <pc:docMk/>
-          <pc:sldMk cId="137810324" sldId="592"/>
-        </pc:sldMkLst>
-      </pc:sldChg>
-      <pc:sldChg chg="modSp del">
-        <pc:chgData name="Zhao Jin" userId="cd05a825-544c-438a-9ba1-08e63db50b47" providerId="ADAL" clId="{B24B02F7-7905-4588-AF93-2F3E26C169C6}" dt="2021-02-11T11:05:45.269" v="2429" actId="47"/>
-        <pc:sldMkLst>
-          <pc:docMk/>
-          <pc:sldMk cId="3233082706" sldId="593"/>
-        </pc:sldMkLst>
-      </pc:sldChg>
-      <pc:sldChg chg="modSp del">
-        <pc:chgData name="Zhao Jin" userId="cd05a825-544c-438a-9ba1-08e63db50b47" providerId="ADAL" clId="{B24B02F7-7905-4588-AF93-2F3E26C169C6}" dt="2021-02-11T11:05:45.269" v="2429" actId="47"/>
-        <pc:sldMkLst>
-          <pc:docMk/>
-          <pc:sldMk cId="2217225800" sldId="594"/>
-        </pc:sldMkLst>
-      </pc:sldChg>
-      <pc:sldChg chg="modSp del">
-        <pc:chgData name="Zhao Jin" userId="cd05a825-544c-438a-9ba1-08e63db50b47" providerId="ADAL" clId="{B24B02F7-7905-4588-AF93-2F3E26C169C6}" dt="2021-02-11T11:05:45.269" v="2429" actId="47"/>
-        <pc:sldMkLst>
-          <pc:docMk/>
-          <pc:sldMk cId="2419983458" sldId="595"/>
-        </pc:sldMkLst>
-      </pc:sldChg>
-      <pc:sldChg chg="modSp del">
-        <pc:chgData name="Zhao Jin" userId="cd05a825-544c-438a-9ba1-08e63db50b47" providerId="ADAL" clId="{B24B02F7-7905-4588-AF93-2F3E26C169C6}" dt="2021-02-11T11:05:45.269" v="2429" actId="47"/>
-        <pc:sldMkLst>
-          <pc:docMk/>
-          <pc:sldMk cId="3643682471" sldId="596"/>
-        </pc:sldMkLst>
-      </pc:sldChg>
-      <pc:sldChg chg="modSp del">
-        <pc:chgData name="Zhao Jin" userId="cd05a825-544c-438a-9ba1-08e63db50b47" providerId="ADAL" clId="{B24B02F7-7905-4588-AF93-2F3E26C169C6}" dt="2021-02-11T11:05:45.269" v="2429" actId="47"/>
-        <pc:sldMkLst>
-          <pc:docMk/>
-          <pc:sldMk cId="3231946261" sldId="597"/>
-        </pc:sldMkLst>
-      </pc:sldChg>
-      <pc:sldChg chg="modSp del">
-        <pc:chgData name="Zhao Jin" userId="cd05a825-544c-438a-9ba1-08e63db50b47" providerId="ADAL" clId="{B24B02F7-7905-4588-AF93-2F3E26C169C6}" dt="2021-02-11T11:05:45.269" v="2429" actId="47"/>
-        <pc:sldMkLst>
-          <pc:docMk/>
-          <pc:sldMk cId="4002657513" sldId="598"/>
-        </pc:sldMkLst>
-      </pc:sldChg>
-      <pc:sldChg chg="modSp del">
-        <pc:chgData name="Zhao Jin" userId="cd05a825-544c-438a-9ba1-08e63db50b47" providerId="ADAL" clId="{B24B02F7-7905-4588-AF93-2F3E26C169C6}" dt="2021-02-11T11:05:45.269" v="2429" actId="47"/>
-        <pc:sldMkLst>
-          <pc:docMk/>
-          <pc:sldMk cId="2930953569" sldId="599"/>
-        </pc:sldMkLst>
-      </pc:sldChg>
-      <pc:sldChg chg="modSp del">
-        <pc:chgData name="Zhao Jin" userId="cd05a825-544c-438a-9ba1-08e63db50b47" providerId="ADAL" clId="{B24B02F7-7905-4588-AF93-2F3E26C169C6}" dt="2021-02-11T11:05:45.269" v="2429" actId="47"/>
-        <pc:sldMkLst>
-          <pc:docMk/>
-          <pc:sldMk cId="880934081" sldId="600"/>
-        </pc:sldMkLst>
-      </pc:sldChg>
-      <pc:sldChg chg="addSp delSp modSp add mod modAnim">
-        <pc:chgData name="Zhao Jin" userId="cd05a825-544c-438a-9ba1-08e63db50b47" providerId="ADAL" clId="{B24B02F7-7905-4588-AF93-2F3E26C169C6}" dt="2021-02-11T10:46:14.362" v="1753" actId="20577"/>
-        <pc:sldMkLst>
-          <pc:docMk/>
-          <pc:sldMk cId="1094276337" sldId="601"/>
-        </pc:sldMkLst>
-      </pc:sldChg>
-      <pc:sldChg chg="addSp delSp modSp add mod delAnim modAnim">
-        <pc:chgData name="Zhao Jin" userId="cd05a825-544c-438a-9ba1-08e63db50b47" providerId="ADAL" clId="{B24B02F7-7905-4588-AF93-2F3E26C169C6}" dt="2021-02-11T11:02:40.633" v="2305" actId="207"/>
-        <pc:sldMkLst>
-          <pc:docMk/>
-          <pc:sldMk cId="1542002799" sldId="602"/>
-        </pc:sldMkLst>
-      </pc:sldChg>
-      <pc:sldChg chg="delSp modSp add mod delAnim">
-        <pc:chgData name="Zhao Jin" userId="cd05a825-544c-438a-9ba1-08e63db50b47" providerId="ADAL" clId="{B24B02F7-7905-4588-AF93-2F3E26C169C6}" dt="2021-02-11T11:05:31.419" v="2428" actId="207"/>
-        <pc:sldMkLst>
-          <pc:docMk/>
-          <pc:sldMk cId="830535321" sldId="603"/>
-        </pc:sldMkLst>
-      </pc:sldChg>
-      <pc:sldChg chg="add del">
-        <pc:chgData name="Zhao Jin" userId="cd05a825-544c-438a-9ba1-08e63db50b47" providerId="ADAL" clId="{B24B02F7-7905-4588-AF93-2F3E26C169C6}" dt="2021-02-11T11:11:11.059" v="2431" actId="47"/>
-        <pc:sldMkLst>
-          <pc:docMk/>
-          <pc:sldMk cId="3335349144" sldId="604"/>
-        </pc:sldMkLst>
-      </pc:sldChg>
-      <pc:sldMasterChg chg="modSp modSldLayout">
-        <pc:chgData name="Zhao Jin" userId="cd05a825-544c-438a-9ba1-08e63db50b47" providerId="ADAL" clId="{B24B02F7-7905-4588-AF93-2F3E26C169C6}" dt="2021-02-10T03:55:18.143" v="13"/>
-        <pc:sldMasterMkLst>
-          <pc:docMk/>
-          <pc:sldMasterMk cId="0" sldId="2147485087"/>
-        </pc:sldMasterMkLst>
-        <pc:sldLayoutChg chg="modSp">
-          <pc:chgData name="Zhao Jin" userId="cd05a825-544c-438a-9ba1-08e63db50b47" providerId="ADAL" clId="{B24B02F7-7905-4588-AF93-2F3E26C169C6}" dt="2021-02-10T03:55:18.143" v="13"/>
-          <pc:sldLayoutMkLst>
-            <pc:docMk/>
-            <pc:sldMasterMk cId="0" sldId="2147485087"/>
-            <pc:sldLayoutMk cId="0" sldId="2147485088"/>
-          </pc:sldLayoutMkLst>
-        </pc:sldLayoutChg>
-        <pc:sldLayoutChg chg="modSp">
-          <pc:chgData name="Zhao Jin" userId="cd05a825-544c-438a-9ba1-08e63db50b47" providerId="ADAL" clId="{B24B02F7-7905-4588-AF93-2F3E26C169C6}" dt="2021-02-10T03:55:18.143" v="13"/>
-          <pc:sldLayoutMkLst>
-            <pc:docMk/>
-            <pc:sldMasterMk cId="0" sldId="2147485087"/>
-            <pc:sldLayoutMk cId="0" sldId="2147485089"/>
-          </pc:sldLayoutMkLst>
-        </pc:sldLayoutChg>
-        <pc:sldLayoutChg chg="modSp">
-          <pc:chgData name="Zhao Jin" userId="cd05a825-544c-438a-9ba1-08e63db50b47" providerId="ADAL" clId="{B24B02F7-7905-4588-AF93-2F3E26C169C6}" dt="2021-02-10T03:55:18.143" v="13"/>
-          <pc:sldLayoutMkLst>
-            <pc:docMk/>
-            <pc:sldMasterMk cId="0" sldId="2147485087"/>
-            <pc:sldLayoutMk cId="0" sldId="2147485090"/>
-          </pc:sldLayoutMkLst>
-        </pc:sldLayoutChg>
-        <pc:sldLayoutChg chg="modSp">
-          <pc:chgData name="Zhao Jin" userId="cd05a825-544c-438a-9ba1-08e63db50b47" providerId="ADAL" clId="{B24B02F7-7905-4588-AF93-2F3E26C169C6}" dt="2021-02-10T03:55:18.143" v="13"/>
-          <pc:sldLayoutMkLst>
-            <pc:docMk/>
-            <pc:sldMasterMk cId="0" sldId="2147485087"/>
-            <pc:sldLayoutMk cId="0" sldId="2147485091"/>
-          </pc:sldLayoutMkLst>
-        </pc:sldLayoutChg>
-        <pc:sldLayoutChg chg="modSp">
-          <pc:chgData name="Zhao Jin" userId="cd05a825-544c-438a-9ba1-08e63db50b47" providerId="ADAL" clId="{B24B02F7-7905-4588-AF93-2F3E26C169C6}" dt="2021-02-10T03:55:18.143" v="13"/>
-          <pc:sldLayoutMkLst>
-            <pc:docMk/>
-            <pc:sldMasterMk cId="0" sldId="2147485087"/>
-            <pc:sldLayoutMk cId="0" sldId="2147485092"/>
-          </pc:sldLayoutMkLst>
-        </pc:sldLayoutChg>
-        <pc:sldLayoutChg chg="modSp">
-          <pc:chgData name="Zhao Jin" userId="cd05a825-544c-438a-9ba1-08e63db50b47" providerId="ADAL" clId="{B24B02F7-7905-4588-AF93-2F3E26C169C6}" dt="2021-02-10T03:55:18.143" v="13"/>
-          <pc:sldLayoutMkLst>
-            <pc:docMk/>
-            <pc:sldMasterMk cId="0" sldId="2147485087"/>
-            <pc:sldLayoutMk cId="0" sldId="2147485093"/>
-          </pc:sldLayoutMkLst>
-        </pc:sldLayoutChg>
-        <pc:sldLayoutChg chg="modSp">
-          <pc:chgData name="Zhao Jin" userId="cd05a825-544c-438a-9ba1-08e63db50b47" providerId="ADAL" clId="{B24B02F7-7905-4588-AF93-2F3E26C169C6}" dt="2021-02-10T03:55:18.143" v="13"/>
-          <pc:sldLayoutMkLst>
-            <pc:docMk/>
-            <pc:sldMasterMk cId="0" sldId="2147485087"/>
-            <pc:sldLayoutMk cId="0" sldId="2147485094"/>
-          </pc:sldLayoutMkLst>
-        </pc:sldLayoutChg>
-        <pc:sldLayoutChg chg="modSp">
-          <pc:chgData name="Zhao Jin" userId="cd05a825-544c-438a-9ba1-08e63db50b47" providerId="ADAL" clId="{B24B02F7-7905-4588-AF93-2F3E26C169C6}" dt="2021-02-10T03:55:18.143" v="13"/>
-          <pc:sldLayoutMkLst>
-            <pc:docMk/>
-            <pc:sldMasterMk cId="0" sldId="2147485087"/>
-            <pc:sldLayoutMk cId="0" sldId="2147485095"/>
-          </pc:sldLayoutMkLst>
-        </pc:sldLayoutChg>
-        <pc:sldLayoutChg chg="modSp">
-          <pc:chgData name="Zhao Jin" userId="cd05a825-544c-438a-9ba1-08e63db50b47" providerId="ADAL" clId="{B24B02F7-7905-4588-AF93-2F3E26C169C6}" dt="2021-02-10T03:55:18.143" v="13"/>
-          <pc:sldLayoutMkLst>
-            <pc:docMk/>
-            <pc:sldMasterMk cId="0" sldId="2147485087"/>
-            <pc:sldLayoutMk cId="0" sldId="2147485096"/>
-          </pc:sldLayoutMkLst>
-        </pc:sldLayoutChg>
-        <pc:sldLayoutChg chg="modSp">
-          <pc:chgData name="Zhao Jin" userId="cd05a825-544c-438a-9ba1-08e63db50b47" providerId="ADAL" clId="{B24B02F7-7905-4588-AF93-2F3E26C169C6}" dt="2021-02-10T03:55:18.143" v="13"/>
-          <pc:sldLayoutMkLst>
-            <pc:docMk/>
-            <pc:sldMasterMk cId="0" sldId="2147485087"/>
-            <pc:sldLayoutMk cId="0" sldId="2147485097"/>
-          </pc:sldLayoutMkLst>
-        </pc:sldLayoutChg>
-        <pc:sldLayoutChg chg="modSp">
-          <pc:chgData name="Zhao Jin" userId="cd05a825-544c-438a-9ba1-08e63db50b47" providerId="ADAL" clId="{B24B02F7-7905-4588-AF93-2F3E26C169C6}" dt="2021-02-10T03:55:18.143" v="13"/>
-          <pc:sldLayoutMkLst>
-            <pc:docMk/>
-            <pc:sldMasterMk cId="0" sldId="2147485087"/>
-            <pc:sldLayoutMk cId="0" sldId="2147485098"/>
-          </pc:sldLayoutMkLst>
-        </pc:sldLayoutChg>
-      </pc:sldMasterChg>
-    </pc:docChg>
-  </pc:docChgLst>
-  <pc:docChgLst>
-    <pc:chgData name="dcszjin@nus.edu.sg" userId="cd05a825-544c-438a-9ba1-08e63db50b47" providerId="ADAL" clId="{9951FBC0-0DB4-4E89-AD15-8BA171954228}"/>
-    <pc:docChg chg="custSel modSld modMainMaster">
-      <pc:chgData name="dcszjin@nus.edu.sg" userId="cd05a825-544c-438a-9ba1-08e63db50b47" providerId="ADAL" clId="{9951FBC0-0DB4-4E89-AD15-8BA171954228}" dt="2021-03-01T07:03:49.103" v="65" actId="20577"/>
-      <pc:docMkLst>
-        <pc:docMk/>
-      </pc:docMkLst>
-      <pc:sldChg chg="modSp mod">
-        <pc:chgData name="dcszjin@nus.edu.sg" userId="cd05a825-544c-438a-9ba1-08e63db50b47" providerId="ADAL" clId="{9951FBC0-0DB4-4E89-AD15-8BA171954228}" dt="2021-03-01T07:03:04.415" v="61" actId="20577"/>
-        <pc:sldMkLst>
-          <pc:docMk/>
-          <pc:sldMk cId="0" sldId="256"/>
-        </pc:sldMkLst>
-      </pc:sldChg>
-      <pc:sldChg chg="modSp">
-        <pc:chgData name="dcszjin@nus.edu.sg" userId="cd05a825-544c-438a-9ba1-08e63db50b47" providerId="ADAL" clId="{9951FBC0-0DB4-4E89-AD15-8BA171954228}" dt="2021-03-01T07:03:15.979" v="62"/>
-        <pc:sldMkLst>
-          <pc:docMk/>
-          <pc:sldMk cId="2438607696" sldId="468"/>
-        </pc:sldMkLst>
-      </pc:sldChg>
-      <pc:sldChg chg="modSp">
-        <pc:chgData name="dcszjin@nus.edu.sg" userId="cd05a825-544c-438a-9ba1-08e63db50b47" providerId="ADAL" clId="{9951FBC0-0DB4-4E89-AD15-8BA171954228}" dt="2021-03-01T07:03:15.979" v="62"/>
-        <pc:sldMkLst>
-          <pc:docMk/>
-          <pc:sldMk cId="1067695719" sldId="526"/>
-        </pc:sldMkLst>
-      </pc:sldChg>
-      <pc:sldChg chg="delSp modSp mod">
-        <pc:chgData name="dcszjin@nus.edu.sg" userId="cd05a825-544c-438a-9ba1-08e63db50b47" providerId="ADAL" clId="{9951FBC0-0DB4-4E89-AD15-8BA171954228}" dt="2021-03-01T07:03:18.318" v="63" actId="478"/>
-        <pc:sldMkLst>
-          <pc:docMk/>
-          <pc:sldMk cId="2573090601" sldId="546"/>
-        </pc:sldMkLst>
-      </pc:sldChg>
-      <pc:sldChg chg="modSp">
-        <pc:chgData name="dcszjin@nus.edu.sg" userId="cd05a825-544c-438a-9ba1-08e63db50b47" providerId="ADAL" clId="{9951FBC0-0DB4-4E89-AD15-8BA171954228}" dt="2021-03-01T07:03:15.979" v="62"/>
-        <pc:sldMkLst>
-          <pc:docMk/>
-          <pc:sldMk cId="1427618944" sldId="553"/>
-        </pc:sldMkLst>
-      </pc:sldChg>
-      <pc:sldChg chg="modSp">
-        <pc:chgData name="dcszjin@nus.edu.sg" userId="cd05a825-544c-438a-9ba1-08e63db50b47" providerId="ADAL" clId="{9951FBC0-0DB4-4E89-AD15-8BA171954228}" dt="2021-03-01T07:03:15.979" v="62"/>
-        <pc:sldMkLst>
-          <pc:docMk/>
-          <pc:sldMk cId="1094276337" sldId="601"/>
-        </pc:sldMkLst>
-      </pc:sldChg>
-      <pc:sldChg chg="modSp mod">
-        <pc:chgData name="dcszjin@nus.edu.sg" userId="cd05a825-544c-438a-9ba1-08e63db50b47" providerId="ADAL" clId="{9951FBC0-0DB4-4E89-AD15-8BA171954228}" dt="2021-03-01T07:03:49.103" v="65" actId="20577"/>
-        <pc:sldMkLst>
-          <pc:docMk/>
-          <pc:sldMk cId="1542002799" sldId="602"/>
-        </pc:sldMkLst>
-      </pc:sldChg>
-      <pc:sldChg chg="modSp">
-        <pc:chgData name="dcszjin@nus.edu.sg" userId="cd05a825-544c-438a-9ba1-08e63db50b47" providerId="ADAL" clId="{9951FBC0-0DB4-4E89-AD15-8BA171954228}" dt="2021-03-01T07:03:15.979" v="62"/>
-        <pc:sldMkLst>
-          <pc:docMk/>
-          <pc:sldMk cId="830535321" sldId="603"/>
-        </pc:sldMkLst>
-      </pc:sldChg>
-      <pc:sldMasterChg chg="modSp modSldLayout">
-        <pc:chgData name="dcszjin@nus.edu.sg" userId="cd05a825-544c-438a-9ba1-08e63db50b47" providerId="ADAL" clId="{9951FBC0-0DB4-4E89-AD15-8BA171954228}" dt="2021-03-01T07:03:15.979" v="62"/>
-        <pc:sldMasterMkLst>
-          <pc:docMk/>
-          <pc:sldMasterMk cId="0" sldId="2147485087"/>
-        </pc:sldMasterMkLst>
-        <pc:sldLayoutChg chg="modSp">
-          <pc:chgData name="dcszjin@nus.edu.sg" userId="cd05a825-544c-438a-9ba1-08e63db50b47" providerId="ADAL" clId="{9951FBC0-0DB4-4E89-AD15-8BA171954228}" dt="2021-03-01T07:03:15.979" v="62"/>
-          <pc:sldLayoutMkLst>
-            <pc:docMk/>
-            <pc:sldMasterMk cId="0" sldId="2147485087"/>
-            <pc:sldLayoutMk cId="0" sldId="2147485088"/>
-          </pc:sldLayoutMkLst>
-        </pc:sldLayoutChg>
-        <pc:sldLayoutChg chg="modSp">
-          <pc:chgData name="dcszjin@nus.edu.sg" userId="cd05a825-544c-438a-9ba1-08e63db50b47" providerId="ADAL" clId="{9951FBC0-0DB4-4E89-AD15-8BA171954228}" dt="2021-03-01T07:03:15.979" v="62"/>
-          <pc:sldLayoutMkLst>
-            <pc:docMk/>
-            <pc:sldMasterMk cId="0" sldId="2147485087"/>
-            <pc:sldLayoutMk cId="0" sldId="2147485089"/>
-          </pc:sldLayoutMkLst>
-        </pc:sldLayoutChg>
-        <pc:sldLayoutChg chg="modSp">
-          <pc:chgData name="dcszjin@nus.edu.sg" userId="cd05a825-544c-438a-9ba1-08e63db50b47" providerId="ADAL" clId="{9951FBC0-0DB4-4E89-AD15-8BA171954228}" dt="2021-03-01T07:03:15.979" v="62"/>
-          <pc:sldLayoutMkLst>
-            <pc:docMk/>
-            <pc:sldMasterMk cId="0" sldId="2147485087"/>
-            <pc:sldLayoutMk cId="0" sldId="2147485090"/>
-          </pc:sldLayoutMkLst>
-        </pc:sldLayoutChg>
-        <pc:sldLayoutChg chg="modSp">
-          <pc:chgData name="dcszjin@nus.edu.sg" userId="cd05a825-544c-438a-9ba1-08e63db50b47" providerId="ADAL" clId="{9951FBC0-0DB4-4E89-AD15-8BA171954228}" dt="2021-03-01T07:03:15.979" v="62"/>
-          <pc:sldLayoutMkLst>
-            <pc:docMk/>
-            <pc:sldMasterMk cId="0" sldId="2147485087"/>
-            <pc:sldLayoutMk cId="0" sldId="2147485091"/>
-          </pc:sldLayoutMkLst>
-        </pc:sldLayoutChg>
-        <pc:sldLayoutChg chg="modSp">
-          <pc:chgData name="dcszjin@nus.edu.sg" userId="cd05a825-544c-438a-9ba1-08e63db50b47" providerId="ADAL" clId="{9951FBC0-0DB4-4E89-AD15-8BA171954228}" dt="2021-03-01T07:03:15.979" v="62"/>
-          <pc:sldLayoutMkLst>
-            <pc:docMk/>
-            <pc:sldMasterMk cId="0" sldId="2147485087"/>
-            <pc:sldLayoutMk cId="0" sldId="2147485092"/>
-          </pc:sldLayoutMkLst>
-        </pc:sldLayoutChg>
-        <pc:sldLayoutChg chg="modSp">
-          <pc:chgData name="dcszjin@nus.edu.sg" userId="cd05a825-544c-438a-9ba1-08e63db50b47" providerId="ADAL" clId="{9951FBC0-0DB4-4E89-AD15-8BA171954228}" dt="2021-03-01T07:03:15.979" v="62"/>
-          <pc:sldLayoutMkLst>
-            <pc:docMk/>
-            <pc:sldMasterMk cId="0" sldId="2147485087"/>
-            <pc:sldLayoutMk cId="0" sldId="2147485093"/>
-          </pc:sldLayoutMkLst>
-        </pc:sldLayoutChg>
-        <pc:sldLayoutChg chg="modSp">
-          <pc:chgData name="dcszjin@nus.edu.sg" userId="cd05a825-544c-438a-9ba1-08e63db50b47" providerId="ADAL" clId="{9951FBC0-0DB4-4E89-AD15-8BA171954228}" dt="2021-03-01T07:03:15.979" v="62"/>
-          <pc:sldLayoutMkLst>
-            <pc:docMk/>
-            <pc:sldMasterMk cId="0" sldId="2147485087"/>
-            <pc:sldLayoutMk cId="0" sldId="2147485094"/>
-          </pc:sldLayoutMkLst>
-        </pc:sldLayoutChg>
-        <pc:sldLayoutChg chg="modSp">
-          <pc:chgData name="dcszjin@nus.edu.sg" userId="cd05a825-544c-438a-9ba1-08e63db50b47" providerId="ADAL" clId="{9951FBC0-0DB4-4E89-AD15-8BA171954228}" dt="2021-03-01T07:03:15.979" v="62"/>
-          <pc:sldLayoutMkLst>
-            <pc:docMk/>
-            <pc:sldMasterMk cId="0" sldId="2147485087"/>
-            <pc:sldLayoutMk cId="0" sldId="2147485095"/>
-          </pc:sldLayoutMkLst>
-        </pc:sldLayoutChg>
-        <pc:sldLayoutChg chg="modSp">
-          <pc:chgData name="dcszjin@nus.edu.sg" userId="cd05a825-544c-438a-9ba1-08e63db50b47" providerId="ADAL" clId="{9951FBC0-0DB4-4E89-AD15-8BA171954228}" dt="2021-03-01T07:03:15.979" v="62"/>
-          <pc:sldLayoutMkLst>
-            <pc:docMk/>
-            <pc:sldMasterMk cId="0" sldId="2147485087"/>
-            <pc:sldLayoutMk cId="0" sldId="2147485096"/>
-          </pc:sldLayoutMkLst>
-        </pc:sldLayoutChg>
-        <pc:sldLayoutChg chg="modSp">
-          <pc:chgData name="dcszjin@nus.edu.sg" userId="cd05a825-544c-438a-9ba1-08e63db50b47" providerId="ADAL" clId="{9951FBC0-0DB4-4E89-AD15-8BA171954228}" dt="2021-03-01T07:03:15.979" v="62"/>
-          <pc:sldLayoutMkLst>
-            <pc:docMk/>
-            <pc:sldMasterMk cId="0" sldId="2147485087"/>
-            <pc:sldLayoutMk cId="0" sldId="2147485097"/>
-          </pc:sldLayoutMkLst>
-        </pc:sldLayoutChg>
-        <pc:sldLayoutChg chg="modSp">
-          <pc:chgData name="dcszjin@nus.edu.sg" userId="cd05a825-544c-438a-9ba1-08e63db50b47" providerId="ADAL" clId="{9951FBC0-0DB4-4E89-AD15-8BA171954228}" dt="2021-03-01T07:03:15.979" v="62"/>
-          <pc:sldLayoutMkLst>
-            <pc:docMk/>
-            <pc:sldMasterMk cId="0" sldId="2147485087"/>
-            <pc:sldLayoutMk cId="0" sldId="2147485098"/>
-          </pc:sldLayoutMkLst>
-        </pc:sldLayoutChg>
-      </pc:sldMasterChg>
-    </pc:docChg>
-  </pc:docChgLst>
-  <pc:docChgLst>
-    <pc:chgData name="Zhao Jin" userId="cd05a825-544c-438a-9ba1-08e63db50b47" providerId="ADAL" clId="{6E5F5F30-4667-4B83-BAFF-B638413AA1D3}"/>
-    <pc:docChg chg="modSld modMainMaster">
-      <pc:chgData name="Zhao Jin" userId="cd05a825-544c-438a-9ba1-08e63db50b47" providerId="ADAL" clId="{6E5F5F30-4667-4B83-BAFF-B638413AA1D3}" dt="2024-03-28T12:04:46.862" v="8"/>
-      <pc:docMkLst>
-        <pc:docMk/>
-      </pc:docMkLst>
-      <pc:sldChg chg="modSp mod">
-        <pc:chgData name="Zhao Jin" userId="cd05a825-544c-438a-9ba1-08e63db50b47" providerId="ADAL" clId="{6E5F5F30-4667-4B83-BAFF-B638413AA1D3}" dt="2024-03-28T12:04:29.286" v="5" actId="20577"/>
-        <pc:sldMkLst>
-          <pc:docMk/>
-          <pc:sldMk cId="0" sldId="256"/>
-        </pc:sldMkLst>
-      </pc:sldChg>
-      <pc:sldChg chg="modSp mod">
-        <pc:chgData name="Zhao Jin" userId="cd05a825-544c-438a-9ba1-08e63db50b47" providerId="ADAL" clId="{6E5F5F30-4667-4B83-BAFF-B638413AA1D3}" dt="2024-03-28T12:04:46.862" v="8"/>
-        <pc:sldMkLst>
-          <pc:docMk/>
-          <pc:sldMk cId="2438607696" sldId="468"/>
-        </pc:sldMkLst>
-      </pc:sldChg>
-      <pc:sldChg chg="modSp">
-        <pc:chgData name="Zhao Jin" userId="cd05a825-544c-438a-9ba1-08e63db50b47" providerId="ADAL" clId="{6E5F5F30-4667-4B83-BAFF-B638413AA1D3}" dt="2024-03-28T12:04:46.862" v="8"/>
-        <pc:sldMkLst>
-          <pc:docMk/>
-          <pc:sldMk cId="3209251491" sldId="583"/>
-        </pc:sldMkLst>
-      </pc:sldChg>
-      <pc:sldChg chg="modSp">
-        <pc:chgData name="Zhao Jin" userId="cd05a825-544c-438a-9ba1-08e63db50b47" providerId="ADAL" clId="{6E5F5F30-4667-4B83-BAFF-B638413AA1D3}" dt="2024-03-28T12:04:46.862" v="8"/>
-        <pc:sldMkLst>
-          <pc:docMk/>
-          <pc:sldMk cId="52021965" sldId="590"/>
-        </pc:sldMkLst>
-      </pc:sldChg>
-      <pc:sldChg chg="modSp">
-        <pc:chgData name="Zhao Jin" userId="cd05a825-544c-438a-9ba1-08e63db50b47" providerId="ADAL" clId="{6E5F5F30-4667-4B83-BAFF-B638413AA1D3}" dt="2024-03-28T12:04:46.862" v="8"/>
-        <pc:sldMkLst>
-          <pc:docMk/>
-          <pc:sldMk cId="375744792" sldId="591"/>
-        </pc:sldMkLst>
-      </pc:sldChg>
-      <pc:sldChg chg="modSp">
-        <pc:chgData name="Zhao Jin" userId="cd05a825-544c-438a-9ba1-08e63db50b47" providerId="ADAL" clId="{6E5F5F30-4667-4B83-BAFF-B638413AA1D3}" dt="2024-03-28T12:04:46.862" v="8"/>
-        <pc:sldMkLst>
-          <pc:docMk/>
-          <pc:sldMk cId="2497011922" sldId="592"/>
-        </pc:sldMkLst>
-      </pc:sldChg>
-      <pc:sldChg chg="modSp">
-        <pc:chgData name="Zhao Jin" userId="cd05a825-544c-438a-9ba1-08e63db50b47" providerId="ADAL" clId="{6E5F5F30-4667-4B83-BAFF-B638413AA1D3}" dt="2024-03-28T12:04:46.862" v="8"/>
-        <pc:sldMkLst>
-          <pc:docMk/>
-          <pc:sldMk cId="1854371286" sldId="597"/>
-        </pc:sldMkLst>
-      </pc:sldChg>
-      <pc:sldChg chg="modSp">
-        <pc:chgData name="Zhao Jin" userId="cd05a825-544c-438a-9ba1-08e63db50b47" providerId="ADAL" clId="{6E5F5F30-4667-4B83-BAFF-B638413AA1D3}" dt="2024-03-28T12:04:46.862" v="8"/>
-        <pc:sldMkLst>
-          <pc:docMk/>
-          <pc:sldMk cId="1365241982" sldId="598"/>
-        </pc:sldMkLst>
-      </pc:sldChg>
-      <pc:sldChg chg="modSp">
-        <pc:chgData name="Zhao Jin" userId="cd05a825-544c-438a-9ba1-08e63db50b47" providerId="ADAL" clId="{6E5F5F30-4667-4B83-BAFF-B638413AA1D3}" dt="2024-03-28T12:04:46.862" v="8"/>
-        <pc:sldMkLst>
-          <pc:docMk/>
-          <pc:sldMk cId="2302344841" sldId="599"/>
-        </pc:sldMkLst>
-      </pc:sldChg>
-      <pc:sldChg chg="modSp">
-        <pc:chgData name="Zhao Jin" userId="cd05a825-544c-438a-9ba1-08e63db50b47" providerId="ADAL" clId="{6E5F5F30-4667-4B83-BAFF-B638413AA1D3}" dt="2024-03-28T12:04:46.862" v="8"/>
-        <pc:sldMkLst>
-          <pc:docMk/>
-          <pc:sldMk cId="1890638764" sldId="600"/>
-        </pc:sldMkLst>
-      </pc:sldChg>
-      <pc:sldChg chg="modSp">
-        <pc:chgData name="Zhao Jin" userId="cd05a825-544c-438a-9ba1-08e63db50b47" providerId="ADAL" clId="{6E5F5F30-4667-4B83-BAFF-B638413AA1D3}" dt="2024-03-28T12:04:46.862" v="8"/>
-        <pc:sldMkLst>
-          <pc:docMk/>
-          <pc:sldMk cId="19136523" sldId="601"/>
-        </pc:sldMkLst>
-      </pc:sldChg>
-      <pc:sldChg chg="modSp">
-        <pc:chgData name="Zhao Jin" userId="cd05a825-544c-438a-9ba1-08e63db50b47" providerId="ADAL" clId="{6E5F5F30-4667-4B83-BAFF-B638413AA1D3}" dt="2024-03-28T12:04:46.862" v="8"/>
-        <pc:sldMkLst>
-          <pc:docMk/>
-          <pc:sldMk cId="4018933415" sldId="609"/>
-        </pc:sldMkLst>
-      </pc:sldChg>
-      <pc:sldChg chg="modSp">
-        <pc:chgData name="Zhao Jin" userId="cd05a825-544c-438a-9ba1-08e63db50b47" providerId="ADAL" clId="{6E5F5F30-4667-4B83-BAFF-B638413AA1D3}" dt="2024-03-28T12:04:46.862" v="8"/>
-        <pc:sldMkLst>
-          <pc:docMk/>
-          <pc:sldMk cId="2596011763" sldId="610"/>
-        </pc:sldMkLst>
-      </pc:sldChg>
-      <pc:sldChg chg="modSp">
-        <pc:chgData name="Zhao Jin" userId="cd05a825-544c-438a-9ba1-08e63db50b47" providerId="ADAL" clId="{6E5F5F30-4667-4B83-BAFF-B638413AA1D3}" dt="2024-03-28T12:04:46.862" v="8"/>
-        <pc:sldMkLst>
-          <pc:docMk/>
-          <pc:sldMk cId="498775291" sldId="611"/>
-        </pc:sldMkLst>
-      </pc:sldChg>
-      <pc:sldChg chg="modSp">
-        <pc:chgData name="Zhao Jin" userId="cd05a825-544c-438a-9ba1-08e63db50b47" providerId="ADAL" clId="{6E5F5F30-4667-4B83-BAFF-B638413AA1D3}" dt="2024-03-28T12:04:46.862" v="8"/>
-        <pc:sldMkLst>
-          <pc:docMk/>
-          <pc:sldMk cId="1398799763" sldId="612"/>
-        </pc:sldMkLst>
-      </pc:sldChg>
-      <pc:sldChg chg="modSp">
-        <pc:chgData name="Zhao Jin" userId="cd05a825-544c-438a-9ba1-08e63db50b47" providerId="ADAL" clId="{6E5F5F30-4667-4B83-BAFF-B638413AA1D3}" dt="2024-03-28T12:04:46.862" v="8"/>
-        <pc:sldMkLst>
-          <pc:docMk/>
-          <pc:sldMk cId="3122256906" sldId="613"/>
-        </pc:sldMkLst>
-      </pc:sldChg>
-      <pc:sldChg chg="modSp">
-        <pc:chgData name="Zhao Jin" userId="cd05a825-544c-438a-9ba1-08e63db50b47" providerId="ADAL" clId="{6E5F5F30-4667-4B83-BAFF-B638413AA1D3}" dt="2024-03-28T12:04:46.862" v="8"/>
-        <pc:sldMkLst>
-          <pc:docMk/>
-          <pc:sldMk cId="1199921267" sldId="614"/>
-        </pc:sldMkLst>
-      </pc:sldChg>
-      <pc:sldChg chg="modSp">
-        <pc:chgData name="Zhao Jin" userId="cd05a825-544c-438a-9ba1-08e63db50b47" providerId="ADAL" clId="{6E5F5F30-4667-4B83-BAFF-B638413AA1D3}" dt="2024-03-28T12:04:46.862" v="8"/>
-        <pc:sldMkLst>
-          <pc:docMk/>
-          <pc:sldMk cId="2650110406" sldId="615"/>
-        </pc:sldMkLst>
-      </pc:sldChg>
-      <pc:sldChg chg="modSp">
-        <pc:chgData name="Zhao Jin" userId="cd05a825-544c-438a-9ba1-08e63db50b47" providerId="ADAL" clId="{6E5F5F30-4667-4B83-BAFF-B638413AA1D3}" dt="2024-03-28T12:04:46.862" v="8"/>
-        <pc:sldMkLst>
-          <pc:docMk/>
-          <pc:sldMk cId="3658891290" sldId="616"/>
-        </pc:sldMkLst>
-      </pc:sldChg>
-      <pc:sldChg chg="modSp">
-        <pc:chgData name="Zhao Jin" userId="cd05a825-544c-438a-9ba1-08e63db50b47" providerId="ADAL" clId="{6E5F5F30-4667-4B83-BAFF-B638413AA1D3}" dt="2024-03-28T12:04:46.862" v="8"/>
-        <pc:sldMkLst>
-          <pc:docMk/>
-          <pc:sldMk cId="3308462364" sldId="617"/>
-        </pc:sldMkLst>
-      </pc:sldChg>
-      <pc:sldChg chg="modSp">
-        <pc:chgData name="Zhao Jin" userId="cd05a825-544c-438a-9ba1-08e63db50b47" providerId="ADAL" clId="{6E5F5F30-4667-4B83-BAFF-B638413AA1D3}" dt="2024-03-28T12:04:46.862" v="8"/>
-        <pc:sldMkLst>
-          <pc:docMk/>
-          <pc:sldMk cId="762563431" sldId="618"/>
-        </pc:sldMkLst>
-      </pc:sldChg>
-      <pc:sldChg chg="modSp">
-        <pc:chgData name="Zhao Jin" userId="cd05a825-544c-438a-9ba1-08e63db50b47" providerId="ADAL" clId="{6E5F5F30-4667-4B83-BAFF-B638413AA1D3}" dt="2024-03-28T12:04:46.862" v="8"/>
-        <pc:sldMkLst>
-          <pc:docMk/>
-          <pc:sldMk cId="1164729378" sldId="619"/>
-        </pc:sldMkLst>
-      </pc:sldChg>
-      <pc:sldChg chg="modSp">
-        <pc:chgData name="Zhao Jin" userId="cd05a825-544c-438a-9ba1-08e63db50b47" providerId="ADAL" clId="{6E5F5F30-4667-4B83-BAFF-B638413AA1D3}" dt="2024-03-28T12:04:46.862" v="8"/>
-        <pc:sldMkLst>
-          <pc:docMk/>
-          <pc:sldMk cId="1096816361" sldId="620"/>
-        </pc:sldMkLst>
-      </pc:sldChg>
-      <pc:sldChg chg="modSp">
-        <pc:chgData name="Zhao Jin" userId="cd05a825-544c-438a-9ba1-08e63db50b47" providerId="ADAL" clId="{6E5F5F30-4667-4B83-BAFF-B638413AA1D3}" dt="2024-03-28T12:04:46.862" v="8"/>
-        <pc:sldMkLst>
-          <pc:docMk/>
-          <pc:sldMk cId="4110967709" sldId="621"/>
-        </pc:sldMkLst>
-      </pc:sldChg>
-      <pc:sldChg chg="modSp">
-        <pc:chgData name="Zhao Jin" userId="cd05a825-544c-438a-9ba1-08e63db50b47" providerId="ADAL" clId="{6E5F5F30-4667-4B83-BAFF-B638413AA1D3}" dt="2024-03-28T12:04:46.862" v="8"/>
-        <pc:sldMkLst>
-          <pc:docMk/>
-          <pc:sldMk cId="172325292" sldId="622"/>
-        </pc:sldMkLst>
-      </pc:sldChg>
-      <pc:sldChg chg="modSp">
-        <pc:chgData name="Zhao Jin" userId="cd05a825-544c-438a-9ba1-08e63db50b47" providerId="ADAL" clId="{6E5F5F30-4667-4B83-BAFF-B638413AA1D3}" dt="2024-03-28T12:04:46.862" v="8"/>
-        <pc:sldMkLst>
-          <pc:docMk/>
-          <pc:sldMk cId="3569280496" sldId="623"/>
-        </pc:sldMkLst>
-      </pc:sldChg>
-      <pc:sldChg chg="modSp">
-        <pc:chgData name="Zhao Jin" userId="cd05a825-544c-438a-9ba1-08e63db50b47" providerId="ADAL" clId="{6E5F5F30-4667-4B83-BAFF-B638413AA1D3}" dt="2024-03-28T12:04:46.862" v="8"/>
-        <pc:sldMkLst>
-          <pc:docMk/>
-          <pc:sldMk cId="1400456452" sldId="624"/>
-        </pc:sldMkLst>
-      </pc:sldChg>
-      <pc:sldChg chg="modSp">
-        <pc:chgData name="Zhao Jin" userId="cd05a825-544c-438a-9ba1-08e63db50b47" providerId="ADAL" clId="{6E5F5F30-4667-4B83-BAFF-B638413AA1D3}" dt="2024-03-28T12:04:46.862" v="8"/>
-        <pc:sldMkLst>
-          <pc:docMk/>
-          <pc:sldMk cId="529301135" sldId="625"/>
-        </pc:sldMkLst>
-      </pc:sldChg>
-      <pc:sldChg chg="modSp">
-        <pc:chgData name="Zhao Jin" userId="cd05a825-544c-438a-9ba1-08e63db50b47" providerId="ADAL" clId="{6E5F5F30-4667-4B83-BAFF-B638413AA1D3}" dt="2024-03-28T12:04:46.862" v="8"/>
-        <pc:sldMkLst>
-          <pc:docMk/>
-          <pc:sldMk cId="4000828616" sldId="626"/>
-        </pc:sldMkLst>
-      </pc:sldChg>
-      <pc:sldMasterChg chg="modSp modSldLayout">
-        <pc:chgData name="Zhao Jin" userId="cd05a825-544c-438a-9ba1-08e63db50b47" providerId="ADAL" clId="{6E5F5F30-4667-4B83-BAFF-B638413AA1D3}" dt="2024-03-28T12:04:46.862" v="8"/>
-        <pc:sldMasterMkLst>
-          <pc:docMk/>
-          <pc:sldMasterMk cId="0" sldId="2147485087"/>
-        </pc:sldMasterMkLst>
-        <pc:sldLayoutChg chg="modSp">
-          <pc:chgData name="Zhao Jin" userId="cd05a825-544c-438a-9ba1-08e63db50b47" providerId="ADAL" clId="{6E5F5F30-4667-4B83-BAFF-B638413AA1D3}" dt="2024-03-28T12:04:46.862" v="8"/>
-          <pc:sldLayoutMkLst>
-            <pc:docMk/>
-            <pc:sldMasterMk cId="0" sldId="2147485087"/>
-            <pc:sldLayoutMk cId="0" sldId="2147485088"/>
-          </pc:sldLayoutMkLst>
-        </pc:sldLayoutChg>
-        <pc:sldLayoutChg chg="modSp">
-          <pc:chgData name="Zhao Jin" userId="cd05a825-544c-438a-9ba1-08e63db50b47" providerId="ADAL" clId="{6E5F5F30-4667-4B83-BAFF-B638413AA1D3}" dt="2024-03-28T12:04:46.862" v="8"/>
-          <pc:sldLayoutMkLst>
-            <pc:docMk/>
-            <pc:sldMasterMk cId="0" sldId="2147485087"/>
-            <pc:sldLayoutMk cId="0" sldId="2147485089"/>
-          </pc:sldLayoutMkLst>
-        </pc:sldLayoutChg>
-        <pc:sldLayoutChg chg="modSp">
-          <pc:chgData name="Zhao Jin" userId="cd05a825-544c-438a-9ba1-08e63db50b47" providerId="ADAL" clId="{6E5F5F30-4667-4B83-BAFF-B638413AA1D3}" dt="2024-03-28T12:04:46.862" v="8"/>
-          <pc:sldLayoutMkLst>
-            <pc:docMk/>
-            <pc:sldMasterMk cId="0" sldId="2147485087"/>
-            <pc:sldLayoutMk cId="0" sldId="2147485090"/>
-          </pc:sldLayoutMkLst>
-        </pc:sldLayoutChg>
-        <pc:sldLayoutChg chg="modSp">
-          <pc:chgData name="Zhao Jin" userId="cd05a825-544c-438a-9ba1-08e63db50b47" providerId="ADAL" clId="{6E5F5F30-4667-4B83-BAFF-B638413AA1D3}" dt="2024-03-28T12:04:46.862" v="8"/>
-          <pc:sldLayoutMkLst>
-            <pc:docMk/>
-            <pc:sldMasterMk cId="0" sldId="2147485087"/>
-            <pc:sldLayoutMk cId="0" sldId="2147485091"/>
-          </pc:sldLayoutMkLst>
-        </pc:sldLayoutChg>
-        <pc:sldLayoutChg chg="modSp">
-          <pc:chgData name="Zhao Jin" userId="cd05a825-544c-438a-9ba1-08e63db50b47" providerId="ADAL" clId="{6E5F5F30-4667-4B83-BAFF-B638413AA1D3}" dt="2024-03-28T12:04:46.862" v="8"/>
-          <pc:sldLayoutMkLst>
-            <pc:docMk/>
-            <pc:sldMasterMk cId="0" sldId="2147485087"/>
-            <pc:sldLayoutMk cId="0" sldId="2147485092"/>
-          </pc:sldLayoutMkLst>
-        </pc:sldLayoutChg>
-        <pc:sldLayoutChg chg="modSp">
-          <pc:chgData name="Zhao Jin" userId="cd05a825-544c-438a-9ba1-08e63db50b47" providerId="ADAL" clId="{6E5F5F30-4667-4B83-BAFF-B638413AA1D3}" dt="2024-03-28T12:04:46.862" v="8"/>
-          <pc:sldLayoutMkLst>
-            <pc:docMk/>
-            <pc:sldMasterMk cId="0" sldId="2147485087"/>
-            <pc:sldLayoutMk cId="0" sldId="2147485093"/>
-          </pc:sldLayoutMkLst>
-        </pc:sldLayoutChg>
-        <pc:sldLayoutChg chg="modSp">
-          <pc:chgData name="Zhao Jin" userId="cd05a825-544c-438a-9ba1-08e63db50b47" providerId="ADAL" clId="{6E5F5F30-4667-4B83-BAFF-B638413AA1D3}" dt="2024-03-28T12:04:46.862" v="8"/>
-          <pc:sldLayoutMkLst>
-            <pc:docMk/>
-            <pc:sldMasterMk cId="0" sldId="2147485087"/>
-            <pc:sldLayoutMk cId="0" sldId="2147485094"/>
-          </pc:sldLayoutMkLst>
-        </pc:sldLayoutChg>
-        <pc:sldLayoutChg chg="modSp">
-          <pc:chgData name="Zhao Jin" userId="cd05a825-544c-438a-9ba1-08e63db50b47" providerId="ADAL" clId="{6E5F5F30-4667-4B83-BAFF-B638413AA1D3}" dt="2024-03-28T12:04:46.862" v="8"/>
-          <pc:sldLayoutMkLst>
-            <pc:docMk/>
-            <pc:sldMasterMk cId="0" sldId="2147485087"/>
-            <pc:sldLayoutMk cId="0" sldId="2147485095"/>
-          </pc:sldLayoutMkLst>
-        </pc:sldLayoutChg>
-        <pc:sldLayoutChg chg="modSp">
-          <pc:chgData name="Zhao Jin" userId="cd05a825-544c-438a-9ba1-08e63db50b47" providerId="ADAL" clId="{6E5F5F30-4667-4B83-BAFF-B638413AA1D3}" dt="2024-03-28T12:04:46.862" v="8"/>
-          <pc:sldLayoutMkLst>
-            <pc:docMk/>
-            <pc:sldMasterMk cId="0" sldId="2147485087"/>
-            <pc:sldLayoutMk cId="0" sldId="2147485096"/>
-          </pc:sldLayoutMkLst>
-        </pc:sldLayoutChg>
-        <pc:sldLayoutChg chg="modSp">
-          <pc:chgData name="Zhao Jin" userId="cd05a825-544c-438a-9ba1-08e63db50b47" providerId="ADAL" clId="{6E5F5F30-4667-4B83-BAFF-B638413AA1D3}" dt="2024-03-28T12:04:46.862" v="8"/>
-          <pc:sldLayoutMkLst>
-            <pc:docMk/>
-            <pc:sldMasterMk cId="0" sldId="2147485087"/>
-            <pc:sldLayoutMk cId="0" sldId="2147485097"/>
-          </pc:sldLayoutMkLst>
-        </pc:sldLayoutChg>
-        <pc:sldLayoutChg chg="modSp">
-          <pc:chgData name="Zhao Jin" userId="cd05a825-544c-438a-9ba1-08e63db50b47" providerId="ADAL" clId="{6E5F5F30-4667-4B83-BAFF-B638413AA1D3}" dt="2024-03-28T12:04:46.862" v="8"/>
-          <pc:sldLayoutMkLst>
-            <pc:docMk/>
-            <pc:sldMasterMk cId="0" sldId="2147485087"/>
-            <pc:sldLayoutMk cId="0" sldId="2147485098"/>
-          </pc:sldLayoutMkLst>
-        </pc:sldLayoutChg>
-      </pc:sldMasterChg>
-    </pc:docChg>
-  </pc:docChgLst>
-  <pc:docChgLst>
-    <pc:chgData name="Zhao Jin" userId="cd05a825-544c-438a-9ba1-08e63db50b47" providerId="ADAL" clId="{3342749F-A4A3-4CC6-8E89-A279285BF1FF}"/>
-    <pc:docChg chg="undo custSel addSld delSld modSld sldOrd">
-      <pc:chgData name="Zhao Jin" userId="cd05a825-544c-438a-9ba1-08e63db50b47" providerId="ADAL" clId="{3342749F-A4A3-4CC6-8E89-A279285BF1FF}" dt="2021-01-25T08:18:19.440" v="5414" actId="20577"/>
-      <pc:docMkLst>
-        <pc:docMk/>
-      </pc:docMkLst>
-      <pc:sldChg chg="modSp mod">
-        <pc:chgData name="Zhao Jin" userId="cd05a825-544c-438a-9ba1-08e63db50b47" providerId="ADAL" clId="{3342749F-A4A3-4CC6-8E89-A279285BF1FF}" dt="2021-01-21T13:07:41.474" v="4692" actId="20577"/>
-        <pc:sldMkLst>
-          <pc:docMk/>
-          <pc:sldMk cId="2438607696" sldId="468"/>
-        </pc:sldMkLst>
-      </pc:sldChg>
-      <pc:sldChg chg="addSp delSp modSp add mod ord delAnim modAnim">
-        <pc:chgData name="Zhao Jin" userId="cd05a825-544c-438a-9ba1-08e63db50b47" providerId="ADAL" clId="{3342749F-A4A3-4CC6-8E89-A279285BF1FF}" dt="2021-01-21T14:37:58.440" v="5166" actId="1076"/>
-        <pc:sldMkLst>
-          <pc:docMk/>
-          <pc:sldMk cId="1311126165" sldId="485"/>
-        </pc:sldMkLst>
-      </pc:sldChg>
-      <pc:sldChg chg="del">
-        <pc:chgData name="Zhao Jin" userId="cd05a825-544c-438a-9ba1-08e63db50b47" providerId="ADAL" clId="{3342749F-A4A3-4CC6-8E89-A279285BF1FF}" dt="2021-01-21T11:55:17.003" v="1356" actId="47"/>
-        <pc:sldMkLst>
-          <pc:docMk/>
-          <pc:sldMk cId="1691474746" sldId="509"/>
-        </pc:sldMkLst>
-      </pc:sldChg>
-      <pc:sldChg chg="del">
-        <pc:chgData name="Zhao Jin" userId="cd05a825-544c-438a-9ba1-08e63db50b47" providerId="ADAL" clId="{3342749F-A4A3-4CC6-8E89-A279285BF1FF}" dt="2021-01-21T12:46:24.776" v="3775" actId="47"/>
-        <pc:sldMkLst>
-          <pc:docMk/>
-          <pc:sldMk cId="3813801240" sldId="511"/>
-        </pc:sldMkLst>
-      </pc:sldChg>
-      <pc:sldChg chg="del">
-        <pc:chgData name="Zhao Jin" userId="cd05a825-544c-438a-9ba1-08e63db50b47" providerId="ADAL" clId="{3342749F-A4A3-4CC6-8E89-A279285BF1FF}" dt="2021-01-21T12:46:24.776" v="3775" actId="47"/>
-        <pc:sldMkLst>
-          <pc:docMk/>
-          <pc:sldMk cId="39845570" sldId="522"/>
-        </pc:sldMkLst>
-      </pc:sldChg>
-      <pc:sldChg chg="del">
-        <pc:chgData name="Zhao Jin" userId="cd05a825-544c-438a-9ba1-08e63db50b47" providerId="ADAL" clId="{3342749F-A4A3-4CC6-8E89-A279285BF1FF}" dt="2021-01-21T12:46:24.776" v="3775" actId="47"/>
-        <pc:sldMkLst>
-          <pc:docMk/>
-          <pc:sldMk cId="2544506794" sldId="525"/>
-        </pc:sldMkLst>
-      </pc:sldChg>
-      <pc:sldChg chg="del">
-        <pc:chgData name="Zhao Jin" userId="cd05a825-544c-438a-9ba1-08e63db50b47" providerId="ADAL" clId="{3342749F-A4A3-4CC6-8E89-A279285BF1FF}" dt="2021-01-21T12:34:31.848" v="3107" actId="47"/>
-        <pc:sldMkLst>
-          <pc:docMk/>
-          <pc:sldMk cId="1799330761" sldId="528"/>
-        </pc:sldMkLst>
-      </pc:sldChg>
-      <pc:sldChg chg="del">
-        <pc:chgData name="Zhao Jin" userId="cd05a825-544c-438a-9ba1-08e63db50b47" providerId="ADAL" clId="{3342749F-A4A3-4CC6-8E89-A279285BF1FF}" dt="2021-01-21T11:55:17.946" v="1357" actId="47"/>
-        <pc:sldMkLst>
-          <pc:docMk/>
-          <pc:sldMk cId="436156561" sldId="530"/>
-        </pc:sldMkLst>
-      </pc:sldChg>
-      <pc:sldChg chg="addSp delSp modSp mod delAnim modAnim">
-        <pc:chgData name="Zhao Jin" userId="cd05a825-544c-438a-9ba1-08e63db50b47" providerId="ADAL" clId="{3342749F-A4A3-4CC6-8E89-A279285BF1FF}" dt="2021-01-21T13:07:20.308" v="4636" actId="478"/>
-        <pc:sldMkLst>
-          <pc:docMk/>
-          <pc:sldMk cId="681224785" sldId="531"/>
-        </pc:sldMkLst>
-      </pc:sldChg>
-      <pc:sldChg chg="del">
-        <pc:chgData name="Zhao Jin" userId="cd05a825-544c-438a-9ba1-08e63db50b47" providerId="ADAL" clId="{3342749F-A4A3-4CC6-8E89-A279285BF1FF}" dt="2021-01-21T11:55:18.413" v="1358" actId="47"/>
-        <pc:sldMkLst>
-          <pc:docMk/>
-          <pc:sldMk cId="3275268416" sldId="532"/>
-        </pc:sldMkLst>
-      </pc:sldChg>
-      <pc:sldChg chg="del">
-        <pc:chgData name="Zhao Jin" userId="cd05a825-544c-438a-9ba1-08e63db50b47" providerId="ADAL" clId="{3342749F-A4A3-4CC6-8E89-A279285BF1FF}" dt="2021-01-21T12:46:24.776" v="3775" actId="47"/>
-        <pc:sldMkLst>
-          <pc:docMk/>
-          <pc:sldMk cId="4265878996" sldId="534"/>
-        </pc:sldMkLst>
-      </pc:sldChg>
-      <pc:sldChg chg="del">
-        <pc:chgData name="Zhao Jin" userId="cd05a825-544c-438a-9ba1-08e63db50b47" providerId="ADAL" clId="{3342749F-A4A3-4CC6-8E89-A279285BF1FF}" dt="2021-01-21T12:46:24.776" v="3775" actId="47"/>
-        <pc:sldMkLst>
-          <pc:docMk/>
-          <pc:sldMk cId="1582525615" sldId="535"/>
-        </pc:sldMkLst>
-      </pc:sldChg>
-      <pc:sldChg chg="del">
-        <pc:chgData name="Zhao Jin" userId="cd05a825-544c-438a-9ba1-08e63db50b47" providerId="ADAL" clId="{3342749F-A4A3-4CC6-8E89-A279285BF1FF}" dt="2021-01-21T12:46:24.776" v="3775" actId="47"/>
-        <pc:sldMkLst>
-          <pc:docMk/>
-          <pc:sldMk cId="1344427664" sldId="537"/>
-        </pc:sldMkLst>
-      </pc:sldChg>
-      <pc:sldChg chg="del">
-        <pc:chgData name="Zhao Jin" userId="cd05a825-544c-438a-9ba1-08e63db50b47" providerId="ADAL" clId="{3342749F-A4A3-4CC6-8E89-A279285BF1FF}" dt="2021-01-21T12:46:24.776" v="3775" actId="47"/>
-        <pc:sldMkLst>
-          <pc:docMk/>
-          <pc:sldMk cId="2851665547" sldId="538"/>
-        </pc:sldMkLst>
-      </pc:sldChg>
-      <pc:sldChg chg="del">
-        <pc:chgData name="Zhao Jin" userId="cd05a825-544c-438a-9ba1-08e63db50b47" providerId="ADAL" clId="{3342749F-A4A3-4CC6-8E89-A279285BF1FF}" dt="2021-01-21T12:46:24.776" v="3775" actId="47"/>
-        <pc:sldMkLst>
-          <pc:docMk/>
-          <pc:sldMk cId="1293966413" sldId="539"/>
-        </pc:sldMkLst>
-      </pc:sldChg>
-      <pc:sldChg chg="del">
-        <pc:chgData name="Zhao Jin" userId="cd05a825-544c-438a-9ba1-08e63db50b47" providerId="ADAL" clId="{3342749F-A4A3-4CC6-8E89-A279285BF1FF}" dt="2021-01-21T12:46:24.776" v="3775" actId="47"/>
-        <pc:sldMkLst>
-          <pc:docMk/>
-          <pc:sldMk cId="3008340486" sldId="540"/>
-        </pc:sldMkLst>
-      </pc:sldChg>
-      <pc:sldChg chg="del">
-        <pc:chgData name="Zhao Jin" userId="cd05a825-544c-438a-9ba1-08e63db50b47" providerId="ADAL" clId="{3342749F-A4A3-4CC6-8E89-A279285BF1FF}" dt="2021-01-21T12:46:24.776" v="3775" actId="47"/>
-        <pc:sldMkLst>
-          <pc:docMk/>
-          <pc:sldMk cId="3466905673" sldId="541"/>
-        </pc:sldMkLst>
-      </pc:sldChg>
-      <pc:sldChg chg="del">
-        <pc:chgData name="Zhao Jin" userId="cd05a825-544c-438a-9ba1-08e63db50b47" providerId="ADAL" clId="{3342749F-A4A3-4CC6-8E89-A279285BF1FF}" dt="2021-01-21T12:46:24.776" v="3775" actId="47"/>
-        <pc:sldMkLst>
-          <pc:docMk/>
-          <pc:sldMk cId="3028826392" sldId="542"/>
-        </pc:sldMkLst>
-      </pc:sldChg>
-      <pc:sldChg chg="del">
-        <pc:chgData name="Zhao Jin" userId="cd05a825-544c-438a-9ba1-08e63db50b47" providerId="ADAL" clId="{3342749F-A4A3-4CC6-8E89-A279285BF1FF}" dt="2021-01-21T12:46:24.776" v="3775" actId="47"/>
-        <pc:sldMkLst>
-          <pc:docMk/>
-          <pc:sldMk cId="2442193536" sldId="543"/>
-        </pc:sldMkLst>
-      </pc:sldChg>
-      <pc:sldChg chg="del">
-        <pc:chgData name="Zhao Jin" userId="cd05a825-544c-438a-9ba1-08e63db50b47" providerId="ADAL" clId="{3342749F-A4A3-4CC6-8E89-A279285BF1FF}" dt="2021-01-21T12:46:24.776" v="3775" actId="47"/>
-        <pc:sldMkLst>
-          <pc:docMk/>
-          <pc:sldMk cId="3813214823" sldId="544"/>
-        </pc:sldMkLst>
-      </pc:sldChg>
-      <pc:sldChg chg="del">
-        <pc:chgData name="Zhao Jin" userId="cd05a825-544c-438a-9ba1-08e63db50b47" providerId="ADAL" clId="{3342749F-A4A3-4CC6-8E89-A279285BF1FF}" dt="2021-01-21T12:46:24.776" v="3775" actId="47"/>
-        <pc:sldMkLst>
-          <pc:docMk/>
-          <pc:sldMk cId="3246666524" sldId="545"/>
-        </pc:sldMkLst>
-      </pc:sldChg>
-      <pc:sldChg chg="addSp delSp modSp mod addAnim delAnim modAnim">
-        <pc:chgData name="Zhao Jin" userId="cd05a825-544c-438a-9ba1-08e63db50b47" providerId="ADAL" clId="{3342749F-A4A3-4CC6-8E89-A279285BF1FF}" dt="2021-01-25T05:04:08.003" v="5348" actId="20577"/>
-        <pc:sldMkLst>
-          <pc:docMk/>
-          <pc:sldMk cId="901453530" sldId="546"/>
-        </pc:sldMkLst>
-      </pc:sldChg>
-      <pc:sldChg chg="addSp delSp modSp add mod delAnim modAnim">
-        <pc:chgData name="Zhao Jin" userId="cd05a825-544c-438a-9ba1-08e63db50b47" providerId="ADAL" clId="{3342749F-A4A3-4CC6-8E89-A279285BF1FF}" dt="2021-01-21T12:36:01.034" v="3240" actId="20577"/>
-        <pc:sldMkLst>
-          <pc:docMk/>
-          <pc:sldMk cId="884841463" sldId="547"/>
-        </pc:sldMkLst>
-      </pc:sldChg>
-      <pc:sldChg chg="delSp modSp add mod ord">
-        <pc:chgData name="Zhao Jin" userId="cd05a825-544c-438a-9ba1-08e63db50b47" providerId="ADAL" clId="{3342749F-A4A3-4CC6-8E89-A279285BF1FF}" dt="2021-01-21T12:38:32.362" v="3394" actId="13926"/>
-        <pc:sldMkLst>
-          <pc:docMk/>
-          <pc:sldMk cId="1617257579" sldId="548"/>
-        </pc:sldMkLst>
-      </pc:sldChg>
-      <pc:sldChg chg="add del">
-        <pc:chgData name="Zhao Jin" userId="cd05a825-544c-438a-9ba1-08e63db50b47" providerId="ADAL" clId="{3342749F-A4A3-4CC6-8E89-A279285BF1FF}" dt="2021-01-21T11:57:31.154" v="1403"/>
-        <pc:sldMkLst>
-          <pc:docMk/>
-          <pc:sldMk cId="2581467069" sldId="549"/>
-        </pc:sldMkLst>
-      </pc:sldChg>
-      <pc:sldChg chg="addSp delSp modSp add mod ord modAnim">
-        <pc:chgData name="Zhao Jin" userId="cd05a825-544c-438a-9ba1-08e63db50b47" providerId="ADAL" clId="{3342749F-A4A3-4CC6-8E89-A279285BF1FF}" dt="2021-01-25T08:18:19.440" v="5414" actId="20577"/>
-        <pc:sldMkLst>
-          <pc:docMk/>
-          <pc:sldMk cId="3394924879" sldId="549"/>
-        </pc:sldMkLst>
-      </pc:sldChg>
-      <pc:sldChg chg="add del">
-        <pc:chgData name="Zhao Jin" userId="cd05a825-544c-438a-9ba1-08e63db50b47" providerId="ADAL" clId="{3342749F-A4A3-4CC6-8E89-A279285BF1FF}" dt="2021-01-21T12:37:58.528" v="3388"/>
-        <pc:sldMkLst>
-          <pc:docMk/>
-          <pc:sldMk cId="710474135" sldId="550"/>
-        </pc:sldMkLst>
-      </pc:sldChg>
-      <pc:sldChg chg="addSp delSp modSp add mod delAnim modAnim">
-        <pc:chgData name="Zhao Jin" userId="cd05a825-544c-438a-9ba1-08e63db50b47" providerId="ADAL" clId="{3342749F-A4A3-4CC6-8E89-A279285BF1FF}" dt="2021-01-21T13:53:36.950" v="5126" actId="1076"/>
-        <pc:sldMkLst>
-          <pc:docMk/>
-          <pc:sldMk cId="784668950" sldId="550"/>
-        </pc:sldMkLst>
-      </pc:sldChg>
-      <pc:sldChg chg="delSp modSp add del mod">
-        <pc:chgData name="Zhao Jin" userId="cd05a825-544c-438a-9ba1-08e63db50b47" providerId="ADAL" clId="{3342749F-A4A3-4CC6-8E89-A279285BF1FF}" dt="2021-01-21T12:21:46.946" v="2377" actId="47"/>
-        <pc:sldMkLst>
-          <pc:docMk/>
-          <pc:sldMk cId="3613962527" sldId="550"/>
-        </pc:sldMkLst>
-      </pc:sldChg>
-      <pc:sldChg chg="add del">
-        <pc:chgData name="Zhao Jin" userId="cd05a825-544c-438a-9ba1-08e63db50b47" providerId="ADAL" clId="{3342749F-A4A3-4CC6-8E89-A279285BF1FF}" dt="2021-01-21T12:24:02.157" v="2423"/>
-        <pc:sldMkLst>
-          <pc:docMk/>
-          <pc:sldMk cId="3794641356" sldId="550"/>
-        </pc:sldMkLst>
-      </pc:sldChg>
-    </pc:docChg>
-  </pc:docChgLst>
-  <pc:docChgLst>
-    <pc:chgData name="Zhao Jin" userId="cd05a825-544c-438a-9ba1-08e63db50b47" providerId="ADAL" clId="{CD38D953-E846-244A-835A-192CE52710D4}"/>
-    <pc:docChg chg="undo custSel addSld delSld modSld">
-      <pc:chgData name="Zhao Jin" userId="cd05a825-544c-438a-9ba1-08e63db50b47" providerId="ADAL" clId="{CD38D953-E846-244A-835A-192CE52710D4}" dt="2021-01-25T03:26:17.801" v="482" actId="20577"/>
-      <pc:docMkLst>
-        <pc:docMk/>
-      </pc:docMkLst>
-      <pc:sldChg chg="modSp addAnim delAnim modAnim">
-        <pc:chgData name="Zhao Jin" userId="cd05a825-544c-438a-9ba1-08e63db50b47" providerId="ADAL" clId="{CD38D953-E846-244A-835A-192CE52710D4}" dt="2021-01-25T03:18:14.928" v="172"/>
-        <pc:sldMkLst>
-          <pc:docMk/>
-          <pc:sldMk cId="1311126165" sldId="485"/>
-        </pc:sldMkLst>
-      </pc:sldChg>
-      <pc:sldChg chg="modSp">
-        <pc:chgData name="Zhao Jin" userId="cd05a825-544c-438a-9ba1-08e63db50b47" providerId="ADAL" clId="{CD38D953-E846-244A-835A-192CE52710D4}" dt="2021-01-25T03:08:51.440" v="84" actId="20577"/>
-        <pc:sldMkLst>
-          <pc:docMk/>
-          <pc:sldMk cId="901453530" sldId="546"/>
-        </pc:sldMkLst>
-      </pc:sldChg>
-      <pc:sldChg chg="modSp">
-        <pc:chgData name="Zhao Jin" userId="cd05a825-544c-438a-9ba1-08e63db50b47" providerId="ADAL" clId="{CD38D953-E846-244A-835A-192CE52710D4}" dt="2021-01-25T03:11:48.514" v="112" actId="207"/>
-        <pc:sldMkLst>
-          <pc:docMk/>
-          <pc:sldMk cId="884841463" sldId="547"/>
-        </pc:sldMkLst>
-      </pc:sldChg>
-      <pc:sldChg chg="modSp">
-        <pc:chgData name="Zhao Jin" userId="cd05a825-544c-438a-9ba1-08e63db50b47" providerId="ADAL" clId="{CD38D953-E846-244A-835A-192CE52710D4}" dt="2021-01-25T03:10:55.270" v="107" actId="20577"/>
-        <pc:sldMkLst>
-          <pc:docMk/>
-          <pc:sldMk cId="1617257579" sldId="548"/>
-        </pc:sldMkLst>
-      </pc:sldChg>
-      <pc:sldChg chg="addSp delSp modSp delAnim modAnim">
-        <pc:chgData name="Zhao Jin" userId="cd05a825-544c-438a-9ba1-08e63db50b47" providerId="ADAL" clId="{CD38D953-E846-244A-835A-192CE52710D4}" dt="2021-01-25T03:24:05.008" v="382"/>
-        <pc:sldMkLst>
-          <pc:docMk/>
-          <pc:sldMk cId="3394924879" sldId="549"/>
-        </pc:sldMkLst>
-      </pc:sldChg>
-      <pc:sldChg chg="addSp delSp modSp addAnim delAnim modAnim">
-        <pc:chgData name="Zhao Jin" userId="cd05a825-544c-438a-9ba1-08e63db50b47" providerId="ADAL" clId="{CD38D953-E846-244A-835A-192CE52710D4}" dt="2021-01-25T03:26:17.801" v="482" actId="20577"/>
-        <pc:sldMkLst>
-          <pc:docMk/>
-          <pc:sldMk cId="784668950" sldId="550"/>
-        </pc:sldMkLst>
-      </pc:sldChg>
-      <pc:sldChg chg="addSp delSp modSp add del addAnim delAnim">
-        <pc:chgData name="Zhao Jin" userId="cd05a825-544c-438a-9ba1-08e63db50b47" providerId="ADAL" clId="{CD38D953-E846-244A-835A-192CE52710D4}" dt="2021-01-25T03:08:44.385" v="80" actId="2696"/>
-        <pc:sldMkLst>
-          <pc:docMk/>
-          <pc:sldMk cId="335305844" sldId="551"/>
-        </pc:sldMkLst>
-      </pc:sldChg>
-    </pc:docChg>
-  </pc:docChgLst>
-  <pc:docChgLst>
-    <pc:chgData name="Zhao Jin" userId="cd05a825-544c-438a-9ba1-08e63db50b47" providerId="ADAL" clId="{28AEA613-C2D1-4884-898F-364599B60A84}"/>
-    <pc:docChg chg="undo custSel addSld delSld modSld sldOrd">
-      <pc:chgData name="Zhao Jin" userId="cd05a825-544c-438a-9ba1-08e63db50b47" providerId="ADAL" clId="{28AEA613-C2D1-4884-898F-364599B60A84}" dt="2021-03-08T05:35:17.057" v="4597" actId="1076"/>
-      <pc:docMkLst>
-        <pc:docMk/>
-      </pc:docMkLst>
-      <pc:sldChg chg="modSp mod">
-        <pc:chgData name="Zhao Jin" userId="cd05a825-544c-438a-9ba1-08e63db50b47" providerId="ADAL" clId="{28AEA613-C2D1-4884-898F-364599B60A84}" dt="2021-03-08T05:14:40.845" v="4350" actId="20577"/>
-        <pc:sldMkLst>
-          <pc:docMk/>
-          <pc:sldMk cId="2438607696" sldId="468"/>
-        </pc:sldMkLst>
-      </pc:sldChg>
-      <pc:sldChg chg="modSp mod">
-        <pc:chgData name="Zhao Jin" userId="cd05a825-544c-438a-9ba1-08e63db50b47" providerId="ADAL" clId="{28AEA613-C2D1-4884-898F-364599B60A84}" dt="2021-03-02T10:06:02.574" v="4181" actId="20577"/>
-        <pc:sldMkLst>
-          <pc:docMk/>
-          <pc:sldMk cId="1067695719" sldId="526"/>
-        </pc:sldMkLst>
-      </pc:sldChg>
-      <pc:sldChg chg="del">
-        <pc:chgData name="Zhao Jin" userId="cd05a825-544c-438a-9ba1-08e63db50b47" providerId="ADAL" clId="{28AEA613-C2D1-4884-898F-364599B60A84}" dt="2021-03-02T06:42:03.057" v="96" actId="47"/>
-        <pc:sldMkLst>
-          <pc:docMk/>
-          <pc:sldMk cId="2573090601" sldId="546"/>
-        </pc:sldMkLst>
-      </pc:sldChg>
-      <pc:sldChg chg="addSp delSp modSp mod ord delAnim modAnim">
-        <pc:chgData name="Zhao Jin" userId="cd05a825-544c-438a-9ba1-08e63db50b47" providerId="ADAL" clId="{28AEA613-C2D1-4884-898F-364599B60A84}" dt="2021-03-08T05:32:40.765" v="4519" actId="20577"/>
-        <pc:sldMkLst>
-          <pc:docMk/>
-          <pc:sldMk cId="1427618944" sldId="553"/>
-        </pc:sldMkLst>
-      </pc:sldChg>
-      <pc:sldChg chg="addSp delSp modSp del mod delAnim modAnim">
-        <pc:chgData name="Zhao Jin" userId="cd05a825-544c-438a-9ba1-08e63db50b47" providerId="ADAL" clId="{28AEA613-C2D1-4884-898F-364599B60A84}" dt="2021-03-02T09:52:23.858" v="3320" actId="47"/>
-        <pc:sldMkLst>
-          <pc:docMk/>
-          <pc:sldMk cId="1094276337" sldId="601"/>
-        </pc:sldMkLst>
-      </pc:sldChg>
-      <pc:sldChg chg="addSp delSp modSp del">
-        <pc:chgData name="Zhao Jin" userId="cd05a825-544c-438a-9ba1-08e63db50b47" providerId="ADAL" clId="{28AEA613-C2D1-4884-898F-364599B60A84}" dt="2021-03-02T09:47:25.458" v="3246" actId="47"/>
-        <pc:sldMkLst>
-          <pc:docMk/>
-          <pc:sldMk cId="1542002799" sldId="602"/>
-        </pc:sldMkLst>
-      </pc:sldChg>
-      <pc:sldChg chg="del">
-        <pc:chgData name="Zhao Jin" userId="cd05a825-544c-438a-9ba1-08e63db50b47" providerId="ADAL" clId="{28AEA613-C2D1-4884-898F-364599B60A84}" dt="2021-03-02T09:47:26.371" v="3247" actId="47"/>
-        <pc:sldMkLst>
-          <pc:docMk/>
-          <pc:sldMk cId="830535321" sldId="603"/>
-        </pc:sldMkLst>
-      </pc:sldChg>
-      <pc:sldChg chg="delSp modSp add mod">
-        <pc:chgData name="Zhao Jin" userId="cd05a825-544c-438a-9ba1-08e63db50b47" providerId="ADAL" clId="{28AEA613-C2D1-4884-898F-364599B60A84}" dt="2021-03-02T10:06:59.744" v="4184" actId="207"/>
-        <pc:sldMkLst>
-          <pc:docMk/>
-          <pc:sldMk cId="1813128722" sldId="617"/>
-        </pc:sldMkLst>
-      </pc:sldChg>
-      <pc:sldChg chg="delSp modSp add mod">
-        <pc:chgData name="Zhao Jin" userId="cd05a825-544c-438a-9ba1-08e63db50b47" providerId="ADAL" clId="{28AEA613-C2D1-4884-898F-364599B60A84}" dt="2021-03-02T10:06:37.605" v="4183"/>
-        <pc:sldMkLst>
-          <pc:docMk/>
-          <pc:sldMk cId="3454948446" sldId="636"/>
-        </pc:sldMkLst>
-      </pc:sldChg>
-      <pc:sldChg chg="addSp delSp modSp add mod delAnim modAnim">
-        <pc:chgData name="Zhao Jin" userId="cd05a825-544c-438a-9ba1-08e63db50b47" providerId="ADAL" clId="{28AEA613-C2D1-4884-898F-364599B60A84}" dt="2021-03-08T05:33:23.196" v="4520" actId="404"/>
-        <pc:sldMkLst>
-          <pc:docMk/>
-          <pc:sldMk cId="3737971943" sldId="637"/>
-        </pc:sldMkLst>
-      </pc:sldChg>
-      <pc:sldChg chg="addSp modSp add del mod modAnim">
-        <pc:chgData name="Zhao Jin" userId="cd05a825-544c-438a-9ba1-08e63db50b47" providerId="ADAL" clId="{28AEA613-C2D1-4884-898F-364599B60A84}" dt="2021-03-08T05:16:40.496" v="4351" actId="47"/>
-        <pc:sldMkLst>
-          <pc:docMk/>
-          <pc:sldMk cId="628751711" sldId="638"/>
-        </pc:sldMkLst>
-      </pc:sldChg>
-      <pc:sldChg chg="delSp modSp add mod delAnim">
-        <pc:chgData name="Zhao Jin" userId="cd05a825-544c-438a-9ba1-08e63db50b47" providerId="ADAL" clId="{28AEA613-C2D1-4884-898F-364599B60A84}" dt="2021-03-02T09:13:30.902" v="1808" actId="20577"/>
-        <pc:sldMkLst>
-          <pc:docMk/>
-          <pc:sldMk cId="1179750071" sldId="639"/>
-        </pc:sldMkLst>
-      </pc:sldChg>
-      <pc:sldChg chg="addSp delSp modSp add mod">
-        <pc:chgData name="Zhao Jin" userId="cd05a825-544c-438a-9ba1-08e63db50b47" providerId="ADAL" clId="{28AEA613-C2D1-4884-898F-364599B60A84}" dt="2021-03-08T05:33:30.840" v="4522" actId="313"/>
-        <pc:sldMkLst>
-          <pc:docMk/>
-          <pc:sldMk cId="3462301147" sldId="640"/>
-        </pc:sldMkLst>
-      </pc:sldChg>
-      <pc:sldChg chg="addSp delSp modSp add mod modAnim">
-        <pc:chgData name="Zhao Jin" userId="cd05a825-544c-438a-9ba1-08e63db50b47" providerId="ADAL" clId="{28AEA613-C2D1-4884-898F-364599B60A84}" dt="2021-03-08T05:35:17.057" v="4597" actId="1076"/>
-        <pc:sldMkLst>
-          <pc:docMk/>
-          <pc:sldMk cId="723901272" sldId="641"/>
-        </pc:sldMkLst>
-      </pc:sldChg>
-      <pc:sldChg chg="addSp delSp modSp add mod addAnim delAnim modAnim">
-        <pc:chgData name="Zhao Jin" userId="cd05a825-544c-438a-9ba1-08e63db50b47" providerId="ADAL" clId="{28AEA613-C2D1-4884-898F-364599B60A84}" dt="2021-03-02T10:05:04.981" v="4149" actId="20577"/>
-        <pc:sldMkLst>
-          <pc:docMk/>
-          <pc:sldMk cId="4089006062" sldId="642"/>
-        </pc:sldMkLst>
-      </pc:sldChg>
-      <pc:sldChg chg="addSp delSp modSp add mod modAnim">
-        <pc:chgData name="Zhao Jin" userId="cd05a825-544c-438a-9ba1-08e63db50b47" providerId="ADAL" clId="{28AEA613-C2D1-4884-898F-364599B60A84}" dt="2021-03-02T10:07:54.387" v="4210"/>
-        <pc:sldMkLst>
-          <pc:docMk/>
-          <pc:sldMk cId="1514327557" sldId="643"/>
-        </pc:sldMkLst>
-      </pc:sldChg>
-    </pc:docChg>
-  </pc:docChgLst>
-  <pc:docChgLst>
-    <pc:chgData name="Zhao Jin" userId="cd05a825-544c-438a-9ba1-08e63db50b47" providerId="ADAL" clId="{E094A0D3-9008-D44F-B23F-E71F39C2BDEC}"/>
-    <pc:docChg chg="undo custSel addSld delSld modSld sldOrd modMainMaster">
-      <pc:chgData name="Zhao Jin" userId="cd05a825-544c-438a-9ba1-08e63db50b47" providerId="ADAL" clId="{E094A0D3-9008-D44F-B23F-E71F39C2BDEC}" dt="2021-01-27T05:44:46" v="1434" actId="207"/>
-      <pc:docMkLst>
-        <pc:docMk/>
-      </pc:docMkLst>
-      <pc:sldChg chg="modSp">
-        <pc:chgData name="Zhao Jin" userId="cd05a825-544c-438a-9ba1-08e63db50b47" providerId="ADAL" clId="{E094A0D3-9008-D44F-B23F-E71F39C2BDEC}" dt="2021-01-27T04:57:42.438" v="23" actId="20577"/>
-        <pc:sldMkLst>
-          <pc:docMk/>
-          <pc:sldMk cId="0" sldId="256"/>
-        </pc:sldMkLst>
-      </pc:sldChg>
-      <pc:sldChg chg="modSp">
-        <pc:chgData name="Zhao Jin" userId="cd05a825-544c-438a-9ba1-08e63db50b47" providerId="ADAL" clId="{E094A0D3-9008-D44F-B23F-E71F39C2BDEC}" dt="2021-01-27T05:17:21.390" v="251" actId="20577"/>
-        <pc:sldMkLst>
-          <pc:docMk/>
-          <pc:sldMk cId="2438607696" sldId="468"/>
-        </pc:sldMkLst>
-      </pc:sldChg>
-      <pc:sldChg chg="modSp">
-        <pc:chgData name="Zhao Jin" userId="cd05a825-544c-438a-9ba1-08e63db50b47" providerId="ADAL" clId="{E094A0D3-9008-D44F-B23F-E71F39C2BDEC}" dt="2021-01-27T04:58:20.523" v="47"/>
-        <pc:sldMkLst>
-          <pc:docMk/>
-          <pc:sldMk cId="1311126165" sldId="485"/>
-        </pc:sldMkLst>
-      </pc:sldChg>
-      <pc:sldChg chg="modSp add">
-        <pc:chgData name="Zhao Jin" userId="cd05a825-544c-438a-9ba1-08e63db50b47" providerId="ADAL" clId="{E094A0D3-9008-D44F-B23F-E71F39C2BDEC}" dt="2021-01-27T05:17:26.077" v="252" actId="20577"/>
-        <pc:sldMkLst>
-          <pc:docMk/>
-          <pc:sldMk cId="3792232794" sldId="504"/>
-        </pc:sldMkLst>
-      </pc:sldChg>
-      <pc:sldChg chg="modSp">
-        <pc:chgData name="Zhao Jin" userId="cd05a825-544c-438a-9ba1-08e63db50b47" providerId="ADAL" clId="{E094A0D3-9008-D44F-B23F-E71F39C2BDEC}" dt="2021-01-27T04:58:20.523" v="47"/>
-        <pc:sldMkLst>
-          <pc:docMk/>
-          <pc:sldMk cId="681224785" sldId="531"/>
-        </pc:sldMkLst>
-      </pc:sldChg>
-      <pc:sldChg chg="modSp del">
-        <pc:chgData name="Zhao Jin" userId="cd05a825-544c-438a-9ba1-08e63db50b47" providerId="ADAL" clId="{E094A0D3-9008-D44F-B23F-E71F39C2BDEC}" dt="2021-01-27T05:12:53.568" v="127" actId="2696"/>
-        <pc:sldMkLst>
-          <pc:docMk/>
-          <pc:sldMk cId="901453530" sldId="546"/>
-        </pc:sldMkLst>
-      </pc:sldChg>
-      <pc:sldChg chg="modSp add">
-        <pc:chgData name="Zhao Jin" userId="cd05a825-544c-438a-9ba1-08e63db50b47" providerId="ADAL" clId="{E094A0D3-9008-D44F-B23F-E71F39C2BDEC}" dt="2021-01-27T05:17:29.706" v="253" actId="20577"/>
-        <pc:sldMkLst>
-          <pc:docMk/>
-          <pc:sldMk cId="4225956616" sldId="546"/>
-        </pc:sldMkLst>
-      </pc:sldChg>
-      <pc:sldChg chg="modSp del">
-        <pc:chgData name="Zhao Jin" userId="cd05a825-544c-438a-9ba1-08e63db50b47" providerId="ADAL" clId="{E094A0D3-9008-D44F-B23F-E71F39C2BDEC}" dt="2021-01-27T05:16:20.724" v="163" actId="2696"/>
-        <pc:sldMkLst>
-          <pc:docMk/>
-          <pc:sldMk cId="884841463" sldId="547"/>
-        </pc:sldMkLst>
-      </pc:sldChg>
-      <pc:sldChg chg="modSp">
-        <pc:chgData name="Zhao Jin" userId="cd05a825-544c-438a-9ba1-08e63db50b47" providerId="ADAL" clId="{E094A0D3-9008-D44F-B23F-E71F39C2BDEC}" dt="2021-01-27T04:58:20.523" v="47"/>
-        <pc:sldMkLst>
-          <pc:docMk/>
-          <pc:sldMk cId="1617257579" sldId="548"/>
-        </pc:sldMkLst>
-      </pc:sldChg>
-      <pc:sldChg chg="modSp">
-        <pc:chgData name="Zhao Jin" userId="cd05a825-544c-438a-9ba1-08e63db50b47" providerId="ADAL" clId="{E094A0D3-9008-D44F-B23F-E71F39C2BDEC}" dt="2021-01-27T04:58:20.523" v="47"/>
-        <pc:sldMkLst>
-          <pc:docMk/>
-          <pc:sldMk cId="3394924879" sldId="549"/>
-        </pc:sldMkLst>
-      </pc:sldChg>
-      <pc:sldChg chg="modSp">
-        <pc:chgData name="Zhao Jin" userId="cd05a825-544c-438a-9ba1-08e63db50b47" providerId="ADAL" clId="{E094A0D3-9008-D44F-B23F-E71F39C2BDEC}" dt="2021-01-27T04:58:20.523" v="47"/>
-        <pc:sldMkLst>
-          <pc:docMk/>
-          <pc:sldMk cId="784668950" sldId="550"/>
-        </pc:sldMkLst>
-      </pc:sldChg>
-      <pc:sldChg chg="modSp add del">
-        <pc:chgData name="Zhao Jin" userId="cd05a825-544c-438a-9ba1-08e63db50b47" providerId="ADAL" clId="{E094A0D3-9008-D44F-B23F-E71F39C2BDEC}" dt="2021-01-27T05:17:38.111" v="258" actId="2696"/>
-        <pc:sldMkLst>
-          <pc:docMk/>
-          <pc:sldMk cId="2538842699" sldId="551"/>
-        </pc:sldMkLst>
-      </pc:sldChg>
-      <pc:sldChg chg="addSp delSp modSp add delAnim">
-        <pc:chgData name="Zhao Jin" userId="cd05a825-544c-438a-9ba1-08e63db50b47" providerId="ADAL" clId="{E094A0D3-9008-D44F-B23F-E71F39C2BDEC}" dt="2021-01-27T05:22:23.124" v="370" actId="20577"/>
-        <pc:sldMkLst>
-          <pc:docMk/>
-          <pc:sldMk cId="3422194935" sldId="552"/>
-        </pc:sldMkLst>
-      </pc:sldChg>
-      <pc:sldChg chg="add del">
-        <pc:chgData name="Zhao Jin" userId="cd05a825-544c-438a-9ba1-08e63db50b47" providerId="ADAL" clId="{E094A0D3-9008-D44F-B23F-E71F39C2BDEC}" dt="2021-01-27T05:18:00.826" v="262"/>
-        <pc:sldMkLst>
-          <pc:docMk/>
-          <pc:sldMk cId="153180961" sldId="553"/>
-        </pc:sldMkLst>
-      </pc:sldChg>
-      <pc:sldChg chg="modSp add">
-        <pc:chgData name="Zhao Jin" userId="cd05a825-544c-438a-9ba1-08e63db50b47" providerId="ADAL" clId="{E094A0D3-9008-D44F-B23F-E71F39C2BDEC}" dt="2021-01-27T05:33:55.712" v="791" actId="14100"/>
-        <pc:sldMkLst>
-          <pc:docMk/>
-          <pc:sldMk cId="1427618944" sldId="553"/>
-        </pc:sldMkLst>
-      </pc:sldChg>
-      <pc:sldChg chg="addSp delSp modSp add ord delAnim modAnim">
-        <pc:chgData name="Zhao Jin" userId="cd05a825-544c-438a-9ba1-08e63db50b47" providerId="ADAL" clId="{E094A0D3-9008-D44F-B23F-E71F39C2BDEC}" dt="2021-01-27T05:37:50.456" v="1042" actId="1035"/>
-        <pc:sldMkLst>
-          <pc:docMk/>
-          <pc:sldMk cId="1659983766" sldId="554"/>
-        </pc:sldMkLst>
-      </pc:sldChg>
-      <pc:sldChg chg="addSp delSp modSp add">
-        <pc:chgData name="Zhao Jin" userId="cd05a825-544c-438a-9ba1-08e63db50b47" providerId="ADAL" clId="{E094A0D3-9008-D44F-B23F-E71F39C2BDEC}" dt="2021-01-27T05:44:46" v="1434" actId="207"/>
-        <pc:sldMkLst>
-          <pc:docMk/>
-          <pc:sldMk cId="1268238251" sldId="555"/>
-        </pc:sldMkLst>
-      </pc:sldChg>
-      <pc:sldMasterChg chg="modSp modSldLayout">
-        <pc:chgData name="Zhao Jin" userId="cd05a825-544c-438a-9ba1-08e63db50b47" providerId="ADAL" clId="{E094A0D3-9008-D44F-B23F-E71F39C2BDEC}" dt="2021-01-27T04:58:20.523" v="47"/>
-        <pc:sldMasterMkLst>
-          <pc:docMk/>
-          <pc:sldMasterMk cId="0" sldId="2147485087"/>
-        </pc:sldMasterMkLst>
-        <pc:sldLayoutChg chg="modSp">
-          <pc:chgData name="Zhao Jin" userId="cd05a825-544c-438a-9ba1-08e63db50b47" providerId="ADAL" clId="{E094A0D3-9008-D44F-B23F-E71F39C2BDEC}" dt="2021-01-27T04:58:20.523" v="47"/>
-          <pc:sldLayoutMkLst>
-            <pc:docMk/>
-            <pc:sldMasterMk cId="0" sldId="2147485087"/>
-            <pc:sldLayoutMk cId="0" sldId="2147485088"/>
-          </pc:sldLayoutMkLst>
-        </pc:sldLayoutChg>
-        <pc:sldLayoutChg chg="modSp">
-          <pc:chgData name="Zhao Jin" userId="cd05a825-544c-438a-9ba1-08e63db50b47" providerId="ADAL" clId="{E094A0D3-9008-D44F-B23F-E71F39C2BDEC}" dt="2021-01-27T04:58:20.523" v="47"/>
-          <pc:sldLayoutMkLst>
-            <pc:docMk/>
-            <pc:sldMasterMk cId="0" sldId="2147485087"/>
-            <pc:sldLayoutMk cId="0" sldId="2147485089"/>
-          </pc:sldLayoutMkLst>
-        </pc:sldLayoutChg>
-        <pc:sldLayoutChg chg="modSp">
-          <pc:chgData name="Zhao Jin" userId="cd05a825-544c-438a-9ba1-08e63db50b47" providerId="ADAL" clId="{E094A0D3-9008-D44F-B23F-E71F39C2BDEC}" dt="2021-01-27T04:58:20.523" v="47"/>
-          <pc:sldLayoutMkLst>
-            <pc:docMk/>
-            <pc:sldMasterMk cId="0" sldId="2147485087"/>
-            <pc:sldLayoutMk cId="0" sldId="2147485090"/>
-          </pc:sldLayoutMkLst>
-        </pc:sldLayoutChg>
-        <pc:sldLayoutChg chg="modSp">
-          <pc:chgData name="Zhao Jin" userId="cd05a825-544c-438a-9ba1-08e63db50b47" providerId="ADAL" clId="{E094A0D3-9008-D44F-B23F-E71F39C2BDEC}" dt="2021-01-27T04:58:20.523" v="47"/>
-          <pc:sldLayoutMkLst>
-            <pc:docMk/>
-            <pc:sldMasterMk cId="0" sldId="2147485087"/>
-            <pc:sldLayoutMk cId="0" sldId="2147485091"/>
-          </pc:sldLayoutMkLst>
-        </pc:sldLayoutChg>
-        <pc:sldLayoutChg chg="modSp">
-          <pc:chgData name="Zhao Jin" userId="cd05a825-544c-438a-9ba1-08e63db50b47" providerId="ADAL" clId="{E094A0D3-9008-D44F-B23F-E71F39C2BDEC}" dt="2021-01-27T04:58:20.523" v="47"/>
-          <pc:sldLayoutMkLst>
-            <pc:docMk/>
-            <pc:sldMasterMk cId="0" sldId="2147485087"/>
-            <pc:sldLayoutMk cId="0" sldId="2147485092"/>
-          </pc:sldLayoutMkLst>
-        </pc:sldLayoutChg>
-        <pc:sldLayoutChg chg="modSp">
-          <pc:chgData name="Zhao Jin" userId="cd05a825-544c-438a-9ba1-08e63db50b47" providerId="ADAL" clId="{E094A0D3-9008-D44F-B23F-E71F39C2BDEC}" dt="2021-01-27T04:58:20.523" v="47"/>
-          <pc:sldLayoutMkLst>
-            <pc:docMk/>
-            <pc:sldMasterMk cId="0" sldId="2147485087"/>
-            <pc:sldLayoutMk cId="0" sldId="2147485093"/>
-          </pc:sldLayoutMkLst>
-        </pc:sldLayoutChg>
-        <pc:sldLayoutChg chg="modSp">
-          <pc:chgData name="Zhao Jin" userId="cd05a825-544c-438a-9ba1-08e63db50b47" providerId="ADAL" clId="{E094A0D3-9008-D44F-B23F-E71F39C2BDEC}" dt="2021-01-27T04:58:20.523" v="47"/>
-          <pc:sldLayoutMkLst>
-            <pc:docMk/>
-            <pc:sldMasterMk cId="0" sldId="2147485087"/>
-            <pc:sldLayoutMk cId="0" sldId="2147485094"/>
-          </pc:sldLayoutMkLst>
-        </pc:sldLayoutChg>
-        <pc:sldLayoutChg chg="modSp">
-          <pc:chgData name="Zhao Jin" userId="cd05a825-544c-438a-9ba1-08e63db50b47" providerId="ADAL" clId="{E094A0D3-9008-D44F-B23F-E71F39C2BDEC}" dt="2021-01-27T04:58:20.523" v="47"/>
-          <pc:sldLayoutMkLst>
-            <pc:docMk/>
-            <pc:sldMasterMk cId="0" sldId="2147485087"/>
-            <pc:sldLayoutMk cId="0" sldId="2147485095"/>
-          </pc:sldLayoutMkLst>
-        </pc:sldLayoutChg>
-        <pc:sldLayoutChg chg="modSp">
-          <pc:chgData name="Zhao Jin" userId="cd05a825-544c-438a-9ba1-08e63db50b47" providerId="ADAL" clId="{E094A0D3-9008-D44F-B23F-E71F39C2BDEC}" dt="2021-01-27T04:58:20.523" v="47"/>
-          <pc:sldLayoutMkLst>
-            <pc:docMk/>
-            <pc:sldMasterMk cId="0" sldId="2147485087"/>
-            <pc:sldLayoutMk cId="0" sldId="2147485096"/>
-          </pc:sldLayoutMkLst>
-        </pc:sldLayoutChg>
-        <pc:sldLayoutChg chg="modSp">
-          <pc:chgData name="Zhao Jin" userId="cd05a825-544c-438a-9ba1-08e63db50b47" providerId="ADAL" clId="{E094A0D3-9008-D44F-B23F-E71F39C2BDEC}" dt="2021-01-27T04:58:20.523" v="47"/>
-          <pc:sldLayoutMkLst>
-            <pc:docMk/>
-            <pc:sldMasterMk cId="0" sldId="2147485087"/>
-            <pc:sldLayoutMk cId="0" sldId="2147485097"/>
-          </pc:sldLayoutMkLst>
-        </pc:sldLayoutChg>
-        <pc:sldLayoutChg chg="modSp">
-          <pc:chgData name="Zhao Jin" userId="cd05a825-544c-438a-9ba1-08e63db50b47" providerId="ADAL" clId="{E094A0D3-9008-D44F-B23F-E71F39C2BDEC}" dt="2021-01-27T04:58:20.523" v="47"/>
-          <pc:sldLayoutMkLst>
-            <pc:docMk/>
-            <pc:sldMasterMk cId="0" sldId="2147485087"/>
-            <pc:sldLayoutMk cId="0" sldId="2147485098"/>
-          </pc:sldLayoutMkLst>
-        </pc:sldLayoutChg>
-      </pc:sldMasterChg>
-    </pc:docChg>
-  </pc:docChgLst>
-  <pc:docChgLst>
-    <pc:chgData name="Zhao Jin" userId="cd05a825-544c-438a-9ba1-08e63db50b47" providerId="ADAL" clId="{E2C68675-4D21-4D34-8F20-796597FA4E4E}"/>
-    <pc:docChg chg="undo custSel addSld delSld modSld">
-      <pc:chgData name="Zhao Jin" userId="cd05a825-544c-438a-9ba1-08e63db50b47" providerId="ADAL" clId="{E2C68675-4D21-4D34-8F20-796597FA4E4E}" dt="2025-03-31T13:10:12.722" v="3795" actId="20577"/>
-      <pc:docMkLst>
-        <pc:docMk/>
-      </pc:docMkLst>
-      <pc:sldChg chg="modSp mod">
-        <pc:chgData name="Zhao Jin" userId="cd05a825-544c-438a-9ba1-08e63db50b47" providerId="ADAL" clId="{E2C68675-4D21-4D34-8F20-796597FA4E4E}" dt="2025-03-31T12:10:42.878" v="158" actId="20577"/>
-        <pc:sldMkLst>
-          <pc:docMk/>
-          <pc:sldMk cId="375744792" sldId="591"/>
+          <pc:sldMk cId="1415479900" sldId="649"/>
         </pc:sldMkLst>
         <pc:spChg chg="mod">
-          <ac:chgData name="Zhao Jin" userId="cd05a825-544c-438a-9ba1-08e63db50b47" providerId="ADAL" clId="{E2C68675-4D21-4D34-8F20-796597FA4E4E}" dt="2025-03-31T12:10:42.878" v="158" actId="20577"/>
+          <ac:chgData name="Zhao Jin" userId="cd05a825-544c-438a-9ba1-08e63db50b47" providerId="ADAL" clId="{7346625B-7E8F-4E9B-A9F0-94C1DD70E907}" dt="2026-03-30T02:45:48.686" v="716" actId="15"/>
           <ac:spMkLst>
             <pc:docMk/>
-            <pc:sldMk cId="375744792" sldId="591"/>
-            <ac:spMk id="34" creationId="{00000000-0000-0000-0000-000000000000}"/>
+            <pc:sldMk cId="1415479900" sldId="649"/>
+            <ac:spMk id="13" creationId="{00000000-0000-0000-0000-000000000000}"/>
           </ac:spMkLst>
         </pc:spChg>
       </pc:sldChg>
       <pc:sldChg chg="modAnim">
-        <pc:chgData name="Zhao Jin" userId="cd05a825-544c-438a-9ba1-08e63db50b47" providerId="ADAL" clId="{E2C68675-4D21-4D34-8F20-796597FA4E4E}" dt="2025-03-31T12:15:08.164" v="252"/>
+        <pc:chgData name="Zhao Jin" userId="cd05a825-544c-438a-9ba1-08e63db50b47" providerId="ADAL" clId="{7346625B-7E8F-4E9B-A9F0-94C1DD70E907}" dt="2026-03-30T02:45:56.459" v="717"/>
         <pc:sldMkLst>
           <pc:docMk/>
-          <pc:sldMk cId="3122256906" sldId="613"/>
+          <pc:sldMk cId="3074147188" sldId="650"/>
         </pc:sldMkLst>
       </pc:sldChg>
-      <pc:sldChg chg="delSp modSp mod delAnim modAnim">
-        <pc:chgData name="Zhao Jin" userId="cd05a825-544c-438a-9ba1-08e63db50b47" providerId="ADAL" clId="{E2C68675-4D21-4D34-8F20-796597FA4E4E}" dt="2025-03-31T12:14:45.123" v="250" actId="478"/>
-        <pc:sldMkLst>
-          <pc:docMk/>
-          <pc:sldMk cId="1400456452" sldId="624"/>
-        </pc:sldMkLst>
-        <pc:spChg chg="del mod">
-          <ac:chgData name="Zhao Jin" userId="cd05a825-544c-438a-9ba1-08e63db50b47" providerId="ADAL" clId="{E2C68675-4D21-4D34-8F20-796597FA4E4E}" dt="2025-03-31T12:14:45.123" v="250" actId="478"/>
-          <ac:spMkLst>
-            <pc:docMk/>
-            <pc:sldMk cId="1400456452" sldId="624"/>
-            <ac:spMk id="81" creationId="{5D94346C-D381-40BF-8939-B87C972D4157}"/>
-          </ac:spMkLst>
-        </pc:spChg>
-      </pc:sldChg>
-      <pc:sldChg chg="modAnim">
-        <pc:chgData name="Zhao Jin" userId="cd05a825-544c-438a-9ba1-08e63db50b47" providerId="ADAL" clId="{E2C68675-4D21-4D34-8F20-796597FA4E4E}" dt="2025-03-31T12:14:35.073" v="249"/>
-        <pc:sldMkLst>
-          <pc:docMk/>
-          <pc:sldMk cId="529301135" sldId="625"/>
-        </pc:sldMkLst>
-      </pc:sldChg>
-      <pc:sldChg chg="addSp delSp modSp mod">
-        <pc:chgData name="Zhao Jin" userId="cd05a825-544c-438a-9ba1-08e63db50b47" providerId="ADAL" clId="{E2C68675-4D21-4D34-8F20-796597FA4E4E}" dt="2025-03-31T13:08:19.837" v="3463" actId="20577"/>
-        <pc:sldMkLst>
-          <pc:docMk/>
-          <pc:sldMk cId="1813128722" sldId="629"/>
-        </pc:sldMkLst>
-        <pc:spChg chg="add del mod">
-          <ac:chgData name="Zhao Jin" userId="cd05a825-544c-438a-9ba1-08e63db50b47" providerId="ADAL" clId="{E2C68675-4D21-4D34-8F20-796597FA4E4E}" dt="2025-03-31T12:37:37.117" v="1421" actId="478"/>
-          <ac:spMkLst>
-            <pc:docMk/>
-            <pc:sldMk cId="1813128722" sldId="629"/>
-            <ac:spMk id="4" creationId="{319A37AF-BC03-083E-3A8E-AD0098B8A672}"/>
-          </ac:spMkLst>
-        </pc:spChg>
-        <pc:spChg chg="add mod">
-          <ac:chgData name="Zhao Jin" userId="cd05a825-544c-438a-9ba1-08e63db50b47" providerId="ADAL" clId="{E2C68675-4D21-4D34-8F20-796597FA4E4E}" dt="2025-03-31T12:59:54.128" v="3018" actId="20577"/>
-          <ac:spMkLst>
-            <pc:docMk/>
-            <pc:sldMk cId="1813128722" sldId="629"/>
-            <ac:spMk id="5" creationId="{07B13374-BB52-E5E4-EDDD-994F1003DC9A}"/>
-          </ac:spMkLst>
-        </pc:spChg>
-        <pc:spChg chg="mod">
-          <ac:chgData name="Zhao Jin" userId="cd05a825-544c-438a-9ba1-08e63db50b47" providerId="ADAL" clId="{E2C68675-4D21-4D34-8F20-796597FA4E4E}" dt="2025-03-31T13:08:19.837" v="3463" actId="20577"/>
-          <ac:spMkLst>
-            <pc:docMk/>
-            <pc:sldMk cId="1813128722" sldId="629"/>
-            <ac:spMk id="13" creationId="{00000000-0000-0000-0000-000000000000}"/>
-          </ac:spMkLst>
-        </pc:spChg>
-        <pc:graphicFrameChg chg="add del modGraphic">
-          <ac:chgData name="Zhao Jin" userId="cd05a825-544c-438a-9ba1-08e63db50b47" providerId="ADAL" clId="{E2C68675-4D21-4D34-8F20-796597FA4E4E}" dt="2025-03-31T12:37:00.166" v="1368" actId="478"/>
-          <ac:graphicFrameMkLst>
-            <pc:docMk/>
-            <pc:sldMk cId="1813128722" sldId="629"/>
-            <ac:graphicFrameMk id="3" creationId="{30B0D4E1-6950-0051-E0CE-6E64111195FC}"/>
-          </ac:graphicFrameMkLst>
-        </pc:graphicFrameChg>
-      </pc:sldChg>
-      <pc:sldChg chg="addSp delSp modSp mod modAnim">
-        <pc:chgData name="Zhao Jin" userId="cd05a825-544c-438a-9ba1-08e63db50b47" providerId="ADAL" clId="{E2C68675-4D21-4D34-8F20-796597FA4E4E}" dt="2025-03-31T13:06:37.447" v="3288" actId="478"/>
-        <pc:sldMkLst>
-          <pc:docMk/>
-          <pc:sldMk cId="4089006062" sldId="642"/>
-        </pc:sldMkLst>
-        <pc:spChg chg="add del mod">
-          <ac:chgData name="Zhao Jin" userId="cd05a825-544c-438a-9ba1-08e63db50b47" providerId="ADAL" clId="{E2C68675-4D21-4D34-8F20-796597FA4E4E}" dt="2025-03-31T13:06:37.447" v="3288" actId="478"/>
-          <ac:spMkLst>
-            <pc:docMk/>
-            <pc:sldMk cId="4089006062" sldId="642"/>
-            <ac:spMk id="3" creationId="{46287D0D-1737-E2AE-4682-3FE45F580E7D}"/>
-          </ac:spMkLst>
-        </pc:spChg>
-        <pc:spChg chg="add del mod">
-          <ac:chgData name="Zhao Jin" userId="cd05a825-544c-438a-9ba1-08e63db50b47" providerId="ADAL" clId="{E2C68675-4D21-4D34-8F20-796597FA4E4E}" dt="2025-03-31T13:06:36.548" v="3287" actId="478"/>
-          <ac:spMkLst>
-            <pc:docMk/>
-            <pc:sldMk cId="4089006062" sldId="642"/>
-            <ac:spMk id="4" creationId="{5BEB0980-99A8-C5FB-BDC8-F30677C19C25}"/>
-          </ac:spMkLst>
-        </pc:spChg>
-      </pc:sldChg>
-      <pc:sldChg chg="modSp del mod">
-        <pc:chgData name="Zhao Jin" userId="cd05a825-544c-438a-9ba1-08e63db50b47" providerId="ADAL" clId="{E2C68675-4D21-4D34-8F20-796597FA4E4E}" dt="2025-03-31T12:49:09.711" v="2378" actId="47"/>
-        <pc:sldMkLst>
-          <pc:docMk/>
-          <pc:sldMk cId="791616712" sldId="644"/>
-        </pc:sldMkLst>
-        <pc:spChg chg="mod">
-          <ac:chgData name="Zhao Jin" userId="cd05a825-544c-438a-9ba1-08e63db50b47" providerId="ADAL" clId="{E2C68675-4D21-4D34-8F20-796597FA4E4E}" dt="2025-03-31T12:25:42.857" v="753" actId="20577"/>
-          <ac:spMkLst>
-            <pc:docMk/>
-            <pc:sldMk cId="791616712" sldId="644"/>
-            <ac:spMk id="13" creationId="{00000000-0000-0000-0000-000000000000}"/>
-          </ac:spMkLst>
-        </pc:spChg>
-      </pc:sldChg>
-      <pc:sldChg chg="add del">
-        <pc:chgData name="Zhao Jin" userId="cd05a825-544c-438a-9ba1-08e63db50b47" providerId="ADAL" clId="{E2C68675-4D21-4D34-8F20-796597FA4E4E}" dt="2025-03-31T13:00:51.554" v="3038" actId="47"/>
-        <pc:sldMkLst>
-          <pc:docMk/>
-          <pc:sldMk cId="1053573647" sldId="653"/>
-        </pc:sldMkLst>
-      </pc:sldChg>
-      <pc:sldChg chg="addSp delSp modSp add mod">
-        <pc:chgData name="Zhao Jin" userId="cd05a825-544c-438a-9ba1-08e63db50b47" providerId="ADAL" clId="{E2C68675-4D21-4D34-8F20-796597FA4E4E}" dt="2025-03-31T13:06:15.958" v="3280"/>
+      <pc:sldChg chg="addSp modSp mod">
+        <pc:chgData name="Zhao Jin" userId="cd05a825-544c-438a-9ba1-08e63db50b47" providerId="ADAL" clId="{7346625B-7E8F-4E9B-A9F0-94C1DD70E907}" dt="2026-03-30T02:40:28.721" v="396" actId="113"/>
         <pc:sldMkLst>
           <pc:docMk/>
           <pc:sldMk cId="858923647" sldId="654"/>
         </pc:sldMkLst>
-        <pc:spChg chg="add mod">
-          <ac:chgData name="Zhao Jin" userId="cd05a825-544c-438a-9ba1-08e63db50b47" providerId="ADAL" clId="{E2C68675-4D21-4D34-8F20-796597FA4E4E}" dt="2025-03-31T12:58:41.873" v="2928" actId="1076"/>
+        <pc:spChg chg="mod">
+          <ac:chgData name="Zhao Jin" userId="cd05a825-544c-438a-9ba1-08e63db50b47" providerId="ADAL" clId="{7346625B-7E8F-4E9B-A9F0-94C1DD70E907}" dt="2026-03-30T02:39:42.141" v="382" actId="1035"/>
           <ac:spMkLst>
             <pc:docMk/>
             <pc:sldMk cId="858923647" sldId="654"/>
             <ac:spMk id="3" creationId="{E6ADA33E-D932-833D-A3B0-DD2F3FAAA38A}"/>
           </ac:spMkLst>
         </pc:spChg>
-        <pc:spChg chg="add del mod">
-          <ac:chgData name="Zhao Jin" userId="cd05a825-544c-438a-9ba1-08e63db50b47" providerId="ADAL" clId="{E2C68675-4D21-4D34-8F20-796597FA4E4E}" dt="2025-03-31T12:55:01.290" v="2677" actId="478"/>
+        <pc:spChg chg="add mod">
+          <ac:chgData name="Zhao Jin" userId="cd05a825-544c-438a-9ba1-08e63db50b47" providerId="ADAL" clId="{7346625B-7E8F-4E9B-A9F0-94C1DD70E907}" dt="2026-03-30T02:40:07.721" v="385" actId="1038"/>
           <ac:spMkLst>
             <pc:docMk/>
             <pc:sldMk cId="858923647" sldId="654"/>
-            <ac:spMk id="4" creationId="{59F036D6-E949-F3F2-40BE-40B4B60913F7}"/>
+            <ac:spMk id="4" creationId="{EE377046-CB6C-378C-A04E-F2CE06AD09C3}"/>
           </ac:spMkLst>
         </pc:spChg>
-        <pc:spChg chg="add mod">
-          <ac:chgData name="Zhao Jin" userId="cd05a825-544c-438a-9ba1-08e63db50b47" providerId="ADAL" clId="{E2C68675-4D21-4D34-8F20-796597FA4E4E}" dt="2025-03-31T12:58:44.817" v="2929" actId="113"/>
+        <pc:spChg chg="mod">
+          <ac:chgData name="Zhao Jin" userId="cd05a825-544c-438a-9ba1-08e63db50b47" providerId="ADAL" clId="{7346625B-7E8F-4E9B-A9F0-94C1DD70E907}" dt="2026-03-30T02:40:28.721" v="396" actId="113"/>
           <ac:spMkLst>
             <pc:docMk/>
             <pc:sldMk cId="858923647" sldId="654"/>
             <ac:spMk id="5" creationId="{EC29D59C-1C79-C1C7-DA2C-385CFF1EC4A5}"/>
           </ac:spMkLst>
         </pc:spChg>
-        <pc:spChg chg="add mod">
-          <ac:chgData name="Zhao Jin" userId="cd05a825-544c-438a-9ba1-08e63db50b47" providerId="ADAL" clId="{E2C68675-4D21-4D34-8F20-796597FA4E4E}" dt="2025-03-31T13:06:15.958" v="3280"/>
-          <ac:spMkLst>
-            <pc:docMk/>
-            <pc:sldMk cId="858923647" sldId="654"/>
-            <ac:spMk id="6" creationId="{9F418916-03CE-F52A-759A-D875325E7B74}"/>
-          </ac:spMkLst>
-        </pc:spChg>
         <pc:spChg chg="mod">
-          <ac:chgData name="Zhao Jin" userId="cd05a825-544c-438a-9ba1-08e63db50b47" providerId="ADAL" clId="{E2C68675-4D21-4D34-8F20-796597FA4E4E}" dt="2025-03-31T13:03:51.265" v="3152" actId="5793"/>
+          <ac:chgData name="Zhao Jin" userId="cd05a825-544c-438a-9ba1-08e63db50b47" providerId="ADAL" clId="{7346625B-7E8F-4E9B-A9F0-94C1DD70E907}" dt="2026-03-30T02:39:12.310" v="315" actId="20577"/>
           <ac:spMkLst>
             <pc:docMk/>
             <pc:sldMk cId="858923647" sldId="654"/>
@@ -2234,70 +761,14 @@
           </ac:spMkLst>
         </pc:spChg>
       </pc:sldChg>
-      <pc:sldChg chg="addSp delSp modSp add mod">
-        <pc:chgData name="Zhao Jin" userId="cd05a825-544c-438a-9ba1-08e63db50b47" providerId="ADAL" clId="{E2C68675-4D21-4D34-8F20-796597FA4E4E}" dt="2025-03-31T13:00:15.277" v="3027" actId="20577"/>
+      <pc:sldChg chg="modSp mod modAnim">
+        <pc:chgData name="Zhao Jin" userId="cd05a825-544c-438a-9ba1-08e63db50b47" providerId="ADAL" clId="{7346625B-7E8F-4E9B-A9F0-94C1DD70E907}" dt="2026-03-30T02:37:09.942" v="220" actId="20577"/>
         <pc:sldMkLst>
           <pc:docMk/>
           <pc:sldMk cId="4141080286" sldId="655"/>
         </pc:sldMkLst>
-        <pc:spChg chg="add mod">
-          <ac:chgData name="Zhao Jin" userId="cd05a825-544c-438a-9ba1-08e63db50b47" providerId="ADAL" clId="{E2C68675-4D21-4D34-8F20-796597FA4E4E}" dt="2025-03-31T12:43:38.044" v="1853"/>
-          <ac:spMkLst>
-            <pc:docMk/>
-            <pc:sldMk cId="4141080286" sldId="655"/>
-            <ac:spMk id="3" creationId="{51B96973-2A55-8D37-3362-A495739099E7}"/>
-          </ac:spMkLst>
-        </pc:spChg>
-        <pc:spChg chg="add mod">
-          <ac:chgData name="Zhao Jin" userId="cd05a825-544c-438a-9ba1-08e63db50b47" providerId="ADAL" clId="{E2C68675-4D21-4D34-8F20-796597FA4E4E}" dt="2025-03-31T12:43:38.044" v="1853"/>
-          <ac:spMkLst>
-            <pc:docMk/>
-            <pc:sldMk cId="4141080286" sldId="655"/>
-            <ac:spMk id="4" creationId="{E673D850-D296-DE98-B041-3F12A89C9094}"/>
-          </ac:spMkLst>
-        </pc:spChg>
-        <pc:spChg chg="del mod">
-          <ac:chgData name="Zhao Jin" userId="cd05a825-544c-438a-9ba1-08e63db50b47" providerId="ADAL" clId="{E2C68675-4D21-4D34-8F20-796597FA4E4E}" dt="2025-03-31T12:43:34.610" v="1852" actId="478"/>
-          <ac:spMkLst>
-            <pc:docMk/>
-            <pc:sldMk cId="4141080286" sldId="655"/>
-            <ac:spMk id="5" creationId="{C1D35B3B-4AC0-6C99-3349-75B394829DFE}"/>
-          </ac:spMkLst>
-        </pc:spChg>
-        <pc:spChg chg="add mod">
-          <ac:chgData name="Zhao Jin" userId="cd05a825-544c-438a-9ba1-08e63db50b47" providerId="ADAL" clId="{E2C68675-4D21-4D34-8F20-796597FA4E4E}" dt="2025-03-31T13:00:06.482" v="3019"/>
-          <ac:spMkLst>
-            <pc:docMk/>
-            <pc:sldMk cId="4141080286" sldId="655"/>
-            <ac:spMk id="6" creationId="{3CE77357-E29D-5CFD-C518-8B8F9116EB87}"/>
-          </ac:spMkLst>
-        </pc:spChg>
-        <pc:spChg chg="add mod">
-          <ac:chgData name="Zhao Jin" userId="cd05a825-544c-438a-9ba1-08e63db50b47" providerId="ADAL" clId="{E2C68675-4D21-4D34-8F20-796597FA4E4E}" dt="2025-03-31T12:45:20.614" v="1954" actId="14100"/>
-          <ac:spMkLst>
-            <pc:docMk/>
-            <pc:sldMk cId="4141080286" sldId="655"/>
-            <ac:spMk id="8" creationId="{47A91E0D-FD95-33A1-4956-5A51E14BEB61}"/>
-          </ac:spMkLst>
-        </pc:spChg>
-        <pc:spChg chg="add mod">
-          <ac:chgData name="Zhao Jin" userId="cd05a825-544c-438a-9ba1-08e63db50b47" providerId="ADAL" clId="{E2C68675-4D21-4D34-8F20-796597FA4E4E}" dt="2025-03-31T13:00:15.277" v="3027" actId="20577"/>
-          <ac:spMkLst>
-            <pc:docMk/>
-            <pc:sldMk cId="4141080286" sldId="655"/>
-            <ac:spMk id="9" creationId="{CF766189-A436-8011-5B97-7276C3AF0BF2}"/>
-          </ac:spMkLst>
-        </pc:spChg>
-        <pc:spChg chg="add mod">
-          <ac:chgData name="Zhao Jin" userId="cd05a825-544c-438a-9ba1-08e63db50b47" providerId="ADAL" clId="{E2C68675-4D21-4D34-8F20-796597FA4E4E}" dt="2025-03-31T12:44:58.921" v="1941"/>
-          <ac:spMkLst>
-            <pc:docMk/>
-            <pc:sldMk cId="4141080286" sldId="655"/>
-            <ac:spMk id="10" creationId="{C95DD6A7-7695-017C-28B8-11EA956F2BCF}"/>
-          </ac:spMkLst>
-        </pc:spChg>
         <pc:spChg chg="mod">
-          <ac:chgData name="Zhao Jin" userId="cd05a825-544c-438a-9ba1-08e63db50b47" providerId="ADAL" clId="{E2C68675-4D21-4D34-8F20-796597FA4E4E}" dt="2025-03-31T12:46:04.131" v="1990" actId="20577"/>
+          <ac:chgData name="Zhao Jin" userId="cd05a825-544c-438a-9ba1-08e63db50b47" providerId="ADAL" clId="{7346625B-7E8F-4E9B-A9F0-94C1DD70E907}" dt="2026-03-30T02:37:09.942" v="220" actId="20577"/>
           <ac:spMkLst>
             <pc:docMk/>
             <pc:sldMk cId="4141080286" sldId="655"/>
@@ -2305,1739 +776,20 @@
           </ac:spMkLst>
         </pc:spChg>
       </pc:sldChg>
-      <pc:sldChg chg="add del">
-        <pc:chgData name="Zhao Jin" userId="cd05a825-544c-438a-9ba1-08e63db50b47" providerId="ADAL" clId="{E2C68675-4D21-4D34-8F20-796597FA4E4E}" dt="2025-03-31T13:00:35.207" v="3037" actId="47"/>
-        <pc:sldMkLst>
-          <pc:docMk/>
-          <pc:sldMk cId="352292881" sldId="656"/>
-        </pc:sldMkLst>
-      </pc:sldChg>
-      <pc:sldChg chg="addSp delSp modSp add mod">
-        <pc:chgData name="Zhao Jin" userId="cd05a825-544c-438a-9ba1-08e63db50b47" providerId="ADAL" clId="{E2C68675-4D21-4D34-8F20-796597FA4E4E}" dt="2025-03-31T13:03:48.008" v="3147" actId="20577"/>
-        <pc:sldMkLst>
-          <pc:docMk/>
-          <pc:sldMk cId="1245696994" sldId="657"/>
-        </pc:sldMkLst>
-        <pc:spChg chg="mod">
-          <ac:chgData name="Zhao Jin" userId="cd05a825-544c-438a-9ba1-08e63db50b47" providerId="ADAL" clId="{E2C68675-4D21-4D34-8F20-796597FA4E4E}" dt="2025-03-31T12:57:32.783" v="2873" actId="14100"/>
-          <ac:spMkLst>
-            <pc:docMk/>
-            <pc:sldMk cId="1245696994" sldId="657"/>
-            <ac:spMk id="3" creationId="{33B9FCCC-31F2-20B5-A30F-A0179B9C14DA}"/>
-          </ac:spMkLst>
-        </pc:spChg>
-        <pc:spChg chg="add mod">
-          <ac:chgData name="Zhao Jin" userId="cd05a825-544c-438a-9ba1-08e63db50b47" providerId="ADAL" clId="{E2C68675-4D21-4D34-8F20-796597FA4E4E}" dt="2025-03-31T12:59:39.553" v="3012" actId="20577"/>
-          <ac:spMkLst>
-            <pc:docMk/>
-            <pc:sldMk cId="1245696994" sldId="657"/>
-            <ac:spMk id="4" creationId="{ED14520A-3BD0-BE54-1534-C93740B52459}"/>
-          </ac:spMkLst>
-        </pc:spChg>
-        <pc:spChg chg="del">
-          <ac:chgData name="Zhao Jin" userId="cd05a825-544c-438a-9ba1-08e63db50b47" providerId="ADAL" clId="{E2C68675-4D21-4D34-8F20-796597FA4E4E}" dt="2025-03-31T12:55:44.117" v="2740" actId="478"/>
-          <ac:spMkLst>
-            <pc:docMk/>
-            <pc:sldMk cId="1245696994" sldId="657"/>
-            <ac:spMk id="5" creationId="{2BE3E663-39BB-2405-2FFB-E210D9AB1804}"/>
-          </ac:spMkLst>
-        </pc:spChg>
-        <pc:spChg chg="mod">
-          <ac:chgData name="Zhao Jin" userId="cd05a825-544c-438a-9ba1-08e63db50b47" providerId="ADAL" clId="{E2C68675-4D21-4D34-8F20-796597FA4E4E}" dt="2025-03-31T13:03:48.008" v="3147" actId="20577"/>
-          <ac:spMkLst>
-            <pc:docMk/>
-            <pc:sldMk cId="1245696994" sldId="657"/>
-            <ac:spMk id="13" creationId="{EC812D93-7404-AE30-8E11-516969F0FD85}"/>
-          </ac:spMkLst>
-        </pc:spChg>
-      </pc:sldChg>
-      <pc:sldChg chg="delSp modSp add mod">
-        <pc:chgData name="Zhao Jin" userId="cd05a825-544c-438a-9ba1-08e63db50b47" providerId="ADAL" clId="{E2C68675-4D21-4D34-8F20-796597FA4E4E}" dt="2025-03-31T13:10:12.722" v="3795" actId="20577"/>
+      <pc:sldChg chg="modSp mod">
+        <pc:chgData name="Zhao Jin" userId="cd05a825-544c-438a-9ba1-08e63db50b47" providerId="ADAL" clId="{7346625B-7E8F-4E9B-A9F0-94C1DD70E907}" dt="2026-03-30T02:42:35.370" v="578" actId="20577"/>
         <pc:sldMkLst>
           <pc:docMk/>
           <pc:sldMk cId="690942563" sldId="658"/>
         </pc:sldMkLst>
-        <pc:spChg chg="del">
-          <ac:chgData name="Zhao Jin" userId="cd05a825-544c-438a-9ba1-08e63db50b47" providerId="ADAL" clId="{E2C68675-4D21-4D34-8F20-796597FA4E4E}" dt="2025-03-31T13:07:47.777" v="3454" actId="478"/>
-          <ac:spMkLst>
-            <pc:docMk/>
-            <pc:sldMk cId="690942563" sldId="658"/>
-            <ac:spMk id="5" creationId="{D7002433-77CF-E808-1CAF-5F20C2A76528}"/>
-          </ac:spMkLst>
-        </pc:spChg>
         <pc:spChg chg="mod">
-          <ac:chgData name="Zhao Jin" userId="cd05a825-544c-438a-9ba1-08e63db50b47" providerId="ADAL" clId="{E2C68675-4D21-4D34-8F20-796597FA4E4E}" dt="2025-03-31T13:10:12.722" v="3795" actId="20577"/>
+          <ac:chgData name="Zhao Jin" userId="cd05a825-544c-438a-9ba1-08e63db50b47" providerId="ADAL" clId="{7346625B-7E8F-4E9B-A9F0-94C1DD70E907}" dt="2026-03-30T02:42:35.370" v="578" actId="20577"/>
           <ac:spMkLst>
             <pc:docMk/>
             <pc:sldMk cId="690942563" sldId="658"/>
             <ac:spMk id="13" creationId="{C2AE8F5A-11A8-88C1-898E-A322AE70535D}"/>
           </ac:spMkLst>
         </pc:spChg>
-      </pc:sldChg>
-      <pc:sldChg chg="add del">
-        <pc:chgData name="Zhao Jin" userId="cd05a825-544c-438a-9ba1-08e63db50b47" providerId="ADAL" clId="{E2C68675-4D21-4D34-8F20-796597FA4E4E}" dt="2025-03-31T13:01:54.202" v="3040" actId="47"/>
-        <pc:sldMkLst>
-          <pc:docMk/>
-          <pc:sldMk cId="1020208299" sldId="658"/>
-        </pc:sldMkLst>
-      </pc:sldChg>
-      <pc:sldChg chg="add del">
-        <pc:chgData name="Zhao Jin" userId="cd05a825-544c-438a-9ba1-08e63db50b47" providerId="ADAL" clId="{E2C68675-4D21-4D34-8F20-796597FA4E4E}" dt="2025-03-31T12:55:21.981" v="2685"/>
-        <pc:sldMkLst>
-          <pc:docMk/>
-          <pc:sldMk cId="1894306531" sldId="658"/>
-        </pc:sldMkLst>
-      </pc:sldChg>
-      <pc:sldChg chg="modSp add del mod">
-        <pc:chgData name="Zhao Jin" userId="cd05a825-544c-438a-9ba1-08e63db50b47" providerId="ADAL" clId="{E2C68675-4D21-4D34-8F20-796597FA4E4E}" dt="2025-03-31T13:05:39.857" v="3277" actId="47"/>
-        <pc:sldMkLst>
-          <pc:docMk/>
-          <pc:sldMk cId="2276920506" sldId="658"/>
-        </pc:sldMkLst>
-        <pc:spChg chg="mod">
-          <ac:chgData name="Zhao Jin" userId="cd05a825-544c-438a-9ba1-08e63db50b47" providerId="ADAL" clId="{E2C68675-4D21-4D34-8F20-796597FA4E4E}" dt="2025-03-31T13:05:29.037" v="3276" actId="20577"/>
-          <ac:spMkLst>
-            <pc:docMk/>
-            <pc:sldMk cId="2276920506" sldId="658"/>
-            <ac:spMk id="13" creationId="{CCDB5555-6062-B4E6-7E76-B38820FC576A}"/>
-          </ac:spMkLst>
-        </pc:spChg>
-      </pc:sldChg>
-    </pc:docChg>
-  </pc:docChgLst>
-  <pc:docChgLst>
-    <pc:chgData name="Zhao Jin" userId="S::dcszjin@nus.edu.sg::cd05a825-544c-438a-9ba1-08e63db50b47" providerId="AD" clId="Web-{66D5AB6E-AF24-491D-9529-2DDB49AD3149}"/>
-    <pc:docChg chg="modSld">
-      <pc:chgData name="Zhao Jin" userId="S::dcszjin@nus.edu.sg::cd05a825-544c-438a-9ba1-08e63db50b47" providerId="AD" clId="Web-{66D5AB6E-AF24-491D-9529-2DDB49AD3149}" dt="2021-01-20T08:43:03.224" v="8" actId="14100"/>
-      <pc:docMkLst>
-        <pc:docMk/>
-      </pc:docMkLst>
-      <pc:sldChg chg="modSp">
-        <pc:chgData name="Zhao Jin" userId="S::dcszjin@nus.edu.sg::cd05a825-544c-438a-9ba1-08e63db50b47" providerId="AD" clId="Web-{66D5AB6E-AF24-491D-9529-2DDB49AD3149}" dt="2021-01-20T08:43:03.224" v="8" actId="14100"/>
-        <pc:sldMkLst>
-          <pc:docMk/>
-          <pc:sldMk cId="901453530" sldId="546"/>
-        </pc:sldMkLst>
-      </pc:sldChg>
-    </pc:docChg>
-  </pc:docChgLst>
-  <pc:docChgLst>
-    <pc:chgData name="Zhao Jin" userId="cd05a825-544c-438a-9ba1-08e63db50b47" providerId="ADAL" clId="{04DE4CF3-2238-47FE-B46A-6F06D7FED136}"/>
-    <pc:docChg chg="addSld modSld modMainMaster">
-      <pc:chgData name="Zhao Jin" userId="cd05a825-544c-438a-9ba1-08e63db50b47" providerId="ADAL" clId="{04DE4CF3-2238-47FE-B46A-6F06D7FED136}" dt="2025-01-07T07:40:25.804" v="2"/>
-      <pc:docMkLst>
-        <pc:docMk/>
-      </pc:docMkLst>
-      <pc:sldChg chg="modSp">
-        <pc:chgData name="Zhao Jin" userId="cd05a825-544c-438a-9ba1-08e63db50b47" providerId="ADAL" clId="{04DE4CF3-2238-47FE-B46A-6F06D7FED136}" dt="2025-01-07T07:40:25.804" v="2"/>
-        <pc:sldMkLst>
-          <pc:docMk/>
-          <pc:sldMk cId="0" sldId="256"/>
-        </pc:sldMkLst>
-        <pc:spChg chg="mod">
-          <ac:chgData name="Zhao Jin" userId="cd05a825-544c-438a-9ba1-08e63db50b47" providerId="ADAL" clId="{04DE4CF3-2238-47FE-B46A-6F06D7FED136}" dt="2025-01-07T07:40:25.804" v="2"/>
-          <ac:spMkLst>
-            <pc:docMk/>
-            <pc:sldMk cId="0" sldId="256"/>
-            <ac:spMk id="9" creationId="{00000000-0000-0000-0000-000000000000}"/>
-          </ac:spMkLst>
-        </pc:spChg>
-      </pc:sldChg>
-      <pc:sldChg chg="modSp add">
-        <pc:chgData name="Zhao Jin" userId="cd05a825-544c-438a-9ba1-08e63db50b47" providerId="ADAL" clId="{04DE4CF3-2238-47FE-B46A-6F06D7FED136}" dt="2025-01-07T07:40:25.804" v="2"/>
-        <pc:sldMkLst>
-          <pc:docMk/>
-          <pc:sldMk cId="1067695719" sldId="526"/>
-        </pc:sldMkLst>
-        <pc:spChg chg="mod">
-          <ac:chgData name="Zhao Jin" userId="cd05a825-544c-438a-9ba1-08e63db50b47" providerId="ADAL" clId="{04DE4CF3-2238-47FE-B46A-6F06D7FED136}" dt="2025-01-07T07:40:25.804" v="2"/>
-          <ac:spMkLst>
-            <pc:docMk/>
-            <pc:sldMk cId="1067695719" sldId="526"/>
-            <ac:spMk id="2" creationId="{8D140B26-FF79-99B7-7CB8-32CD9097CD6C}"/>
-          </ac:spMkLst>
-        </pc:spChg>
-      </pc:sldChg>
-      <pc:sldChg chg="modSp">
-        <pc:chgData name="Zhao Jin" userId="cd05a825-544c-438a-9ba1-08e63db50b47" providerId="ADAL" clId="{04DE4CF3-2238-47FE-B46A-6F06D7FED136}" dt="2025-01-07T07:40:25.804" v="2"/>
-        <pc:sldMkLst>
-          <pc:docMk/>
-          <pc:sldMk cId="3209251491" sldId="583"/>
-        </pc:sldMkLst>
-        <pc:spChg chg="mod">
-          <ac:chgData name="Zhao Jin" userId="cd05a825-544c-438a-9ba1-08e63db50b47" providerId="ADAL" clId="{04DE4CF3-2238-47FE-B46A-6F06D7FED136}" dt="2025-01-07T07:40:25.804" v="2"/>
-          <ac:spMkLst>
-            <pc:docMk/>
-            <pc:sldMk cId="3209251491" sldId="583"/>
-            <ac:spMk id="2" creationId="{CD6C8A58-F8EE-BEC7-4FC8-0081944B6E9E}"/>
-          </ac:spMkLst>
-        </pc:spChg>
-      </pc:sldChg>
-      <pc:sldChg chg="modSp">
-        <pc:chgData name="Zhao Jin" userId="cd05a825-544c-438a-9ba1-08e63db50b47" providerId="ADAL" clId="{04DE4CF3-2238-47FE-B46A-6F06D7FED136}" dt="2025-01-07T07:40:25.804" v="2"/>
-        <pc:sldMkLst>
-          <pc:docMk/>
-          <pc:sldMk cId="52021965" sldId="590"/>
-        </pc:sldMkLst>
-        <pc:spChg chg="mod">
-          <ac:chgData name="Zhao Jin" userId="cd05a825-544c-438a-9ba1-08e63db50b47" providerId="ADAL" clId="{04DE4CF3-2238-47FE-B46A-6F06D7FED136}" dt="2025-01-07T07:40:25.804" v="2"/>
-          <ac:spMkLst>
-            <pc:docMk/>
-            <pc:sldMk cId="52021965" sldId="590"/>
-            <ac:spMk id="2" creationId="{4710FECD-6F37-B2E9-F196-A08C6F49AF29}"/>
-          </ac:spMkLst>
-        </pc:spChg>
-      </pc:sldChg>
-      <pc:sldChg chg="modSp">
-        <pc:chgData name="Zhao Jin" userId="cd05a825-544c-438a-9ba1-08e63db50b47" providerId="ADAL" clId="{04DE4CF3-2238-47FE-B46A-6F06D7FED136}" dt="2025-01-07T07:40:25.804" v="2"/>
-        <pc:sldMkLst>
-          <pc:docMk/>
-          <pc:sldMk cId="375744792" sldId="591"/>
-        </pc:sldMkLst>
-        <pc:spChg chg="mod">
-          <ac:chgData name="Zhao Jin" userId="cd05a825-544c-438a-9ba1-08e63db50b47" providerId="ADAL" clId="{04DE4CF3-2238-47FE-B46A-6F06D7FED136}" dt="2025-01-07T07:40:25.804" v="2"/>
-          <ac:spMkLst>
-            <pc:docMk/>
-            <pc:sldMk cId="375744792" sldId="591"/>
-            <ac:spMk id="2" creationId="{C50D5F8C-BF5B-B363-9289-08248BAA8814}"/>
-          </ac:spMkLst>
-        </pc:spChg>
-      </pc:sldChg>
-      <pc:sldChg chg="modSp">
-        <pc:chgData name="Zhao Jin" userId="cd05a825-544c-438a-9ba1-08e63db50b47" providerId="ADAL" clId="{04DE4CF3-2238-47FE-B46A-6F06D7FED136}" dt="2025-01-07T07:40:25.804" v="2"/>
-        <pc:sldMkLst>
-          <pc:docMk/>
-          <pc:sldMk cId="2497011922" sldId="592"/>
-        </pc:sldMkLst>
-        <pc:spChg chg="mod">
-          <ac:chgData name="Zhao Jin" userId="cd05a825-544c-438a-9ba1-08e63db50b47" providerId="ADAL" clId="{04DE4CF3-2238-47FE-B46A-6F06D7FED136}" dt="2025-01-07T07:40:25.804" v="2"/>
-          <ac:spMkLst>
-            <pc:docMk/>
-            <pc:sldMk cId="2497011922" sldId="592"/>
-            <ac:spMk id="2" creationId="{82D72318-64F3-B17A-7440-309FA5929EBB}"/>
-          </ac:spMkLst>
-        </pc:spChg>
-      </pc:sldChg>
-      <pc:sldChg chg="modSp">
-        <pc:chgData name="Zhao Jin" userId="cd05a825-544c-438a-9ba1-08e63db50b47" providerId="ADAL" clId="{04DE4CF3-2238-47FE-B46A-6F06D7FED136}" dt="2025-01-07T07:40:25.804" v="2"/>
-        <pc:sldMkLst>
-          <pc:docMk/>
-          <pc:sldMk cId="1854371286" sldId="597"/>
-        </pc:sldMkLst>
-        <pc:spChg chg="mod">
-          <ac:chgData name="Zhao Jin" userId="cd05a825-544c-438a-9ba1-08e63db50b47" providerId="ADAL" clId="{04DE4CF3-2238-47FE-B46A-6F06D7FED136}" dt="2025-01-07T07:40:25.804" v="2"/>
-          <ac:spMkLst>
-            <pc:docMk/>
-            <pc:sldMk cId="1854371286" sldId="597"/>
-            <ac:spMk id="2" creationId="{9E8CF9FE-FD95-E478-DAA3-35DFFBAAD82E}"/>
-          </ac:spMkLst>
-        </pc:spChg>
-      </pc:sldChg>
-      <pc:sldChg chg="modSp">
-        <pc:chgData name="Zhao Jin" userId="cd05a825-544c-438a-9ba1-08e63db50b47" providerId="ADAL" clId="{04DE4CF3-2238-47FE-B46A-6F06D7FED136}" dt="2025-01-07T07:40:25.804" v="2"/>
-        <pc:sldMkLst>
-          <pc:docMk/>
-          <pc:sldMk cId="1365241982" sldId="598"/>
-        </pc:sldMkLst>
-        <pc:spChg chg="mod">
-          <ac:chgData name="Zhao Jin" userId="cd05a825-544c-438a-9ba1-08e63db50b47" providerId="ADAL" clId="{04DE4CF3-2238-47FE-B46A-6F06D7FED136}" dt="2025-01-07T07:40:25.804" v="2"/>
-          <ac:spMkLst>
-            <pc:docMk/>
-            <pc:sldMk cId="1365241982" sldId="598"/>
-            <ac:spMk id="2" creationId="{33AA7C40-A21F-8E31-19F5-42F8BBFF1879}"/>
-          </ac:spMkLst>
-        </pc:spChg>
-      </pc:sldChg>
-      <pc:sldChg chg="modSp">
-        <pc:chgData name="Zhao Jin" userId="cd05a825-544c-438a-9ba1-08e63db50b47" providerId="ADAL" clId="{04DE4CF3-2238-47FE-B46A-6F06D7FED136}" dt="2025-01-07T07:40:25.804" v="2"/>
-        <pc:sldMkLst>
-          <pc:docMk/>
-          <pc:sldMk cId="2302344841" sldId="599"/>
-        </pc:sldMkLst>
-        <pc:spChg chg="mod">
-          <ac:chgData name="Zhao Jin" userId="cd05a825-544c-438a-9ba1-08e63db50b47" providerId="ADAL" clId="{04DE4CF3-2238-47FE-B46A-6F06D7FED136}" dt="2025-01-07T07:40:25.804" v="2"/>
-          <ac:spMkLst>
-            <pc:docMk/>
-            <pc:sldMk cId="2302344841" sldId="599"/>
-            <ac:spMk id="2" creationId="{02FCDF1E-DD1D-2F23-4713-3BE5305D9F77}"/>
-          </ac:spMkLst>
-        </pc:spChg>
-      </pc:sldChg>
-      <pc:sldChg chg="modSp">
-        <pc:chgData name="Zhao Jin" userId="cd05a825-544c-438a-9ba1-08e63db50b47" providerId="ADAL" clId="{04DE4CF3-2238-47FE-B46A-6F06D7FED136}" dt="2025-01-07T07:40:25.804" v="2"/>
-        <pc:sldMkLst>
-          <pc:docMk/>
-          <pc:sldMk cId="1890638764" sldId="600"/>
-        </pc:sldMkLst>
-        <pc:spChg chg="mod">
-          <ac:chgData name="Zhao Jin" userId="cd05a825-544c-438a-9ba1-08e63db50b47" providerId="ADAL" clId="{04DE4CF3-2238-47FE-B46A-6F06D7FED136}" dt="2025-01-07T07:40:25.804" v="2"/>
-          <ac:spMkLst>
-            <pc:docMk/>
-            <pc:sldMk cId="1890638764" sldId="600"/>
-            <ac:spMk id="2" creationId="{DFD34FF4-A958-4C75-27D7-EF621EE45DA6}"/>
-          </ac:spMkLst>
-        </pc:spChg>
-      </pc:sldChg>
-      <pc:sldChg chg="modSp">
-        <pc:chgData name="Zhao Jin" userId="cd05a825-544c-438a-9ba1-08e63db50b47" providerId="ADAL" clId="{04DE4CF3-2238-47FE-B46A-6F06D7FED136}" dt="2025-01-07T07:40:25.804" v="2"/>
-        <pc:sldMkLst>
-          <pc:docMk/>
-          <pc:sldMk cId="19136523" sldId="601"/>
-        </pc:sldMkLst>
-        <pc:spChg chg="mod">
-          <ac:chgData name="Zhao Jin" userId="cd05a825-544c-438a-9ba1-08e63db50b47" providerId="ADAL" clId="{04DE4CF3-2238-47FE-B46A-6F06D7FED136}" dt="2025-01-07T07:40:25.804" v="2"/>
-          <ac:spMkLst>
-            <pc:docMk/>
-            <pc:sldMk cId="19136523" sldId="601"/>
-            <ac:spMk id="2" creationId="{7B4586CF-6248-FD8C-577A-E9708656157E}"/>
-          </ac:spMkLst>
-        </pc:spChg>
-      </pc:sldChg>
-      <pc:sldChg chg="modSp">
-        <pc:chgData name="Zhao Jin" userId="cd05a825-544c-438a-9ba1-08e63db50b47" providerId="ADAL" clId="{04DE4CF3-2238-47FE-B46A-6F06D7FED136}" dt="2025-01-07T07:40:25.804" v="2"/>
-        <pc:sldMkLst>
-          <pc:docMk/>
-          <pc:sldMk cId="4018933415" sldId="609"/>
-        </pc:sldMkLst>
-        <pc:spChg chg="mod">
-          <ac:chgData name="Zhao Jin" userId="cd05a825-544c-438a-9ba1-08e63db50b47" providerId="ADAL" clId="{04DE4CF3-2238-47FE-B46A-6F06D7FED136}" dt="2025-01-07T07:40:25.804" v="2"/>
-          <ac:spMkLst>
-            <pc:docMk/>
-            <pc:sldMk cId="4018933415" sldId="609"/>
-            <ac:spMk id="2" creationId="{092F1F75-2636-3AC1-A013-A776824AEC41}"/>
-          </ac:spMkLst>
-        </pc:spChg>
-      </pc:sldChg>
-      <pc:sldChg chg="modSp">
-        <pc:chgData name="Zhao Jin" userId="cd05a825-544c-438a-9ba1-08e63db50b47" providerId="ADAL" clId="{04DE4CF3-2238-47FE-B46A-6F06D7FED136}" dt="2025-01-07T07:40:25.804" v="2"/>
-        <pc:sldMkLst>
-          <pc:docMk/>
-          <pc:sldMk cId="2596011763" sldId="610"/>
-        </pc:sldMkLst>
-        <pc:spChg chg="mod">
-          <ac:chgData name="Zhao Jin" userId="cd05a825-544c-438a-9ba1-08e63db50b47" providerId="ADAL" clId="{04DE4CF3-2238-47FE-B46A-6F06D7FED136}" dt="2025-01-07T07:40:25.804" v="2"/>
-          <ac:spMkLst>
-            <pc:docMk/>
-            <pc:sldMk cId="2596011763" sldId="610"/>
-            <ac:spMk id="2" creationId="{D774DFFA-D356-D379-BB7A-C9DE2D144A1D}"/>
-          </ac:spMkLst>
-        </pc:spChg>
-      </pc:sldChg>
-      <pc:sldChg chg="modSp">
-        <pc:chgData name="Zhao Jin" userId="cd05a825-544c-438a-9ba1-08e63db50b47" providerId="ADAL" clId="{04DE4CF3-2238-47FE-B46A-6F06D7FED136}" dt="2025-01-07T07:40:25.804" v="2"/>
-        <pc:sldMkLst>
-          <pc:docMk/>
-          <pc:sldMk cId="498775291" sldId="611"/>
-        </pc:sldMkLst>
-        <pc:spChg chg="mod">
-          <ac:chgData name="Zhao Jin" userId="cd05a825-544c-438a-9ba1-08e63db50b47" providerId="ADAL" clId="{04DE4CF3-2238-47FE-B46A-6F06D7FED136}" dt="2025-01-07T07:40:25.804" v="2"/>
-          <ac:spMkLst>
-            <pc:docMk/>
-            <pc:sldMk cId="498775291" sldId="611"/>
-            <ac:spMk id="2" creationId="{A78F2D46-8DB2-D9F9-E214-44AE17A6BA92}"/>
-          </ac:spMkLst>
-        </pc:spChg>
-      </pc:sldChg>
-      <pc:sldChg chg="modSp">
-        <pc:chgData name="Zhao Jin" userId="cd05a825-544c-438a-9ba1-08e63db50b47" providerId="ADAL" clId="{04DE4CF3-2238-47FE-B46A-6F06D7FED136}" dt="2025-01-07T07:40:25.804" v="2"/>
-        <pc:sldMkLst>
-          <pc:docMk/>
-          <pc:sldMk cId="1398799763" sldId="612"/>
-        </pc:sldMkLst>
-        <pc:spChg chg="mod">
-          <ac:chgData name="Zhao Jin" userId="cd05a825-544c-438a-9ba1-08e63db50b47" providerId="ADAL" clId="{04DE4CF3-2238-47FE-B46A-6F06D7FED136}" dt="2025-01-07T07:40:25.804" v="2"/>
-          <ac:spMkLst>
-            <pc:docMk/>
-            <pc:sldMk cId="1398799763" sldId="612"/>
-            <ac:spMk id="2" creationId="{062A0CF2-5A6A-990C-F908-B90140F5FA7B}"/>
-          </ac:spMkLst>
-        </pc:spChg>
-      </pc:sldChg>
-      <pc:sldChg chg="modSp">
-        <pc:chgData name="Zhao Jin" userId="cd05a825-544c-438a-9ba1-08e63db50b47" providerId="ADAL" clId="{04DE4CF3-2238-47FE-B46A-6F06D7FED136}" dt="2025-01-07T07:40:25.804" v="2"/>
-        <pc:sldMkLst>
-          <pc:docMk/>
-          <pc:sldMk cId="3122256906" sldId="613"/>
-        </pc:sldMkLst>
-        <pc:spChg chg="mod">
-          <ac:chgData name="Zhao Jin" userId="cd05a825-544c-438a-9ba1-08e63db50b47" providerId="ADAL" clId="{04DE4CF3-2238-47FE-B46A-6F06D7FED136}" dt="2025-01-07T07:40:25.804" v="2"/>
-          <ac:spMkLst>
-            <pc:docMk/>
-            <pc:sldMk cId="3122256906" sldId="613"/>
-            <ac:spMk id="2" creationId="{3C0EAF32-8123-636F-D270-B2A1F6884B6F}"/>
-          </ac:spMkLst>
-        </pc:spChg>
-      </pc:sldChg>
-      <pc:sldChg chg="modSp">
-        <pc:chgData name="Zhao Jin" userId="cd05a825-544c-438a-9ba1-08e63db50b47" providerId="ADAL" clId="{04DE4CF3-2238-47FE-B46A-6F06D7FED136}" dt="2025-01-07T07:40:25.804" v="2"/>
-        <pc:sldMkLst>
-          <pc:docMk/>
-          <pc:sldMk cId="1199921267" sldId="614"/>
-        </pc:sldMkLst>
-        <pc:spChg chg="mod">
-          <ac:chgData name="Zhao Jin" userId="cd05a825-544c-438a-9ba1-08e63db50b47" providerId="ADAL" clId="{04DE4CF3-2238-47FE-B46A-6F06D7FED136}" dt="2025-01-07T07:40:25.804" v="2"/>
-          <ac:spMkLst>
-            <pc:docMk/>
-            <pc:sldMk cId="1199921267" sldId="614"/>
-            <ac:spMk id="2" creationId="{E5B00CDA-E215-33DB-A328-2881C9164C49}"/>
-          </ac:spMkLst>
-        </pc:spChg>
-      </pc:sldChg>
-      <pc:sldChg chg="modSp">
-        <pc:chgData name="Zhao Jin" userId="cd05a825-544c-438a-9ba1-08e63db50b47" providerId="ADAL" clId="{04DE4CF3-2238-47FE-B46A-6F06D7FED136}" dt="2025-01-07T07:40:25.804" v="2"/>
-        <pc:sldMkLst>
-          <pc:docMk/>
-          <pc:sldMk cId="2650110406" sldId="615"/>
-        </pc:sldMkLst>
-        <pc:spChg chg="mod">
-          <ac:chgData name="Zhao Jin" userId="cd05a825-544c-438a-9ba1-08e63db50b47" providerId="ADAL" clId="{04DE4CF3-2238-47FE-B46A-6F06D7FED136}" dt="2025-01-07T07:40:25.804" v="2"/>
-          <ac:spMkLst>
-            <pc:docMk/>
-            <pc:sldMk cId="2650110406" sldId="615"/>
-            <ac:spMk id="2" creationId="{76EA6942-7EA7-6D10-8FDE-3023FFF31262}"/>
-          </ac:spMkLst>
-        </pc:spChg>
-      </pc:sldChg>
-      <pc:sldChg chg="modSp">
-        <pc:chgData name="Zhao Jin" userId="cd05a825-544c-438a-9ba1-08e63db50b47" providerId="ADAL" clId="{04DE4CF3-2238-47FE-B46A-6F06D7FED136}" dt="2025-01-07T07:40:25.804" v="2"/>
-        <pc:sldMkLst>
-          <pc:docMk/>
-          <pc:sldMk cId="3658891290" sldId="616"/>
-        </pc:sldMkLst>
-        <pc:spChg chg="mod">
-          <ac:chgData name="Zhao Jin" userId="cd05a825-544c-438a-9ba1-08e63db50b47" providerId="ADAL" clId="{04DE4CF3-2238-47FE-B46A-6F06D7FED136}" dt="2025-01-07T07:40:25.804" v="2"/>
-          <ac:spMkLst>
-            <pc:docMk/>
-            <pc:sldMk cId="3658891290" sldId="616"/>
-            <ac:spMk id="2" creationId="{C2DADA44-5331-83D2-6EBD-4A704724A049}"/>
-          </ac:spMkLst>
-        </pc:spChg>
-      </pc:sldChg>
-      <pc:sldChg chg="modSp">
-        <pc:chgData name="Zhao Jin" userId="cd05a825-544c-438a-9ba1-08e63db50b47" providerId="ADAL" clId="{04DE4CF3-2238-47FE-B46A-6F06D7FED136}" dt="2025-01-07T07:40:25.804" v="2"/>
-        <pc:sldMkLst>
-          <pc:docMk/>
-          <pc:sldMk cId="3308462364" sldId="617"/>
-        </pc:sldMkLst>
-        <pc:spChg chg="mod">
-          <ac:chgData name="Zhao Jin" userId="cd05a825-544c-438a-9ba1-08e63db50b47" providerId="ADAL" clId="{04DE4CF3-2238-47FE-B46A-6F06D7FED136}" dt="2025-01-07T07:40:25.804" v="2"/>
-          <ac:spMkLst>
-            <pc:docMk/>
-            <pc:sldMk cId="3308462364" sldId="617"/>
-            <ac:spMk id="2" creationId="{0BB34BF7-A28B-8BC5-C4EA-71F0A2A4B954}"/>
-          </ac:spMkLst>
-        </pc:spChg>
-      </pc:sldChg>
-      <pc:sldChg chg="modSp">
-        <pc:chgData name="Zhao Jin" userId="cd05a825-544c-438a-9ba1-08e63db50b47" providerId="ADAL" clId="{04DE4CF3-2238-47FE-B46A-6F06D7FED136}" dt="2025-01-07T07:40:25.804" v="2"/>
-        <pc:sldMkLst>
-          <pc:docMk/>
-          <pc:sldMk cId="762563431" sldId="618"/>
-        </pc:sldMkLst>
-        <pc:spChg chg="mod">
-          <ac:chgData name="Zhao Jin" userId="cd05a825-544c-438a-9ba1-08e63db50b47" providerId="ADAL" clId="{04DE4CF3-2238-47FE-B46A-6F06D7FED136}" dt="2025-01-07T07:40:25.804" v="2"/>
-          <ac:spMkLst>
-            <pc:docMk/>
-            <pc:sldMk cId="762563431" sldId="618"/>
-            <ac:spMk id="2" creationId="{4B0EB987-F2AB-A9EA-1604-443E38B5673B}"/>
-          </ac:spMkLst>
-        </pc:spChg>
-      </pc:sldChg>
-      <pc:sldChg chg="modSp">
-        <pc:chgData name="Zhao Jin" userId="cd05a825-544c-438a-9ba1-08e63db50b47" providerId="ADAL" clId="{04DE4CF3-2238-47FE-B46A-6F06D7FED136}" dt="2025-01-07T07:40:25.804" v="2"/>
-        <pc:sldMkLst>
-          <pc:docMk/>
-          <pc:sldMk cId="1164729378" sldId="619"/>
-        </pc:sldMkLst>
-        <pc:spChg chg="mod">
-          <ac:chgData name="Zhao Jin" userId="cd05a825-544c-438a-9ba1-08e63db50b47" providerId="ADAL" clId="{04DE4CF3-2238-47FE-B46A-6F06D7FED136}" dt="2025-01-07T07:40:25.804" v="2"/>
-          <ac:spMkLst>
-            <pc:docMk/>
-            <pc:sldMk cId="1164729378" sldId="619"/>
-            <ac:spMk id="2" creationId="{28F8D3D8-8B24-A45B-6D71-231AB7AA3117}"/>
-          </ac:spMkLst>
-        </pc:spChg>
-      </pc:sldChg>
-      <pc:sldChg chg="modSp">
-        <pc:chgData name="Zhao Jin" userId="cd05a825-544c-438a-9ba1-08e63db50b47" providerId="ADAL" clId="{04DE4CF3-2238-47FE-B46A-6F06D7FED136}" dt="2025-01-07T07:40:25.804" v="2"/>
-        <pc:sldMkLst>
-          <pc:docMk/>
-          <pc:sldMk cId="1096816361" sldId="620"/>
-        </pc:sldMkLst>
-        <pc:spChg chg="mod">
-          <ac:chgData name="Zhao Jin" userId="cd05a825-544c-438a-9ba1-08e63db50b47" providerId="ADAL" clId="{04DE4CF3-2238-47FE-B46A-6F06D7FED136}" dt="2025-01-07T07:40:25.804" v="2"/>
-          <ac:spMkLst>
-            <pc:docMk/>
-            <pc:sldMk cId="1096816361" sldId="620"/>
-            <ac:spMk id="2" creationId="{108B7A31-2DFA-06CB-8F40-FDFEDF56B145}"/>
-          </ac:spMkLst>
-        </pc:spChg>
-      </pc:sldChg>
-      <pc:sldChg chg="modSp">
-        <pc:chgData name="Zhao Jin" userId="cd05a825-544c-438a-9ba1-08e63db50b47" providerId="ADAL" clId="{04DE4CF3-2238-47FE-B46A-6F06D7FED136}" dt="2025-01-07T07:40:25.804" v="2"/>
-        <pc:sldMkLst>
-          <pc:docMk/>
-          <pc:sldMk cId="4110967709" sldId="621"/>
-        </pc:sldMkLst>
-        <pc:spChg chg="mod">
-          <ac:chgData name="Zhao Jin" userId="cd05a825-544c-438a-9ba1-08e63db50b47" providerId="ADAL" clId="{04DE4CF3-2238-47FE-B46A-6F06D7FED136}" dt="2025-01-07T07:40:25.804" v="2"/>
-          <ac:spMkLst>
-            <pc:docMk/>
-            <pc:sldMk cId="4110967709" sldId="621"/>
-            <ac:spMk id="2" creationId="{2017DB68-16CF-1041-DF11-80B4AF7253B1}"/>
-          </ac:spMkLst>
-        </pc:spChg>
-      </pc:sldChg>
-      <pc:sldChg chg="modSp">
-        <pc:chgData name="Zhao Jin" userId="cd05a825-544c-438a-9ba1-08e63db50b47" providerId="ADAL" clId="{04DE4CF3-2238-47FE-B46A-6F06D7FED136}" dt="2025-01-07T07:40:25.804" v="2"/>
-        <pc:sldMkLst>
-          <pc:docMk/>
-          <pc:sldMk cId="172325292" sldId="622"/>
-        </pc:sldMkLst>
-        <pc:spChg chg="mod">
-          <ac:chgData name="Zhao Jin" userId="cd05a825-544c-438a-9ba1-08e63db50b47" providerId="ADAL" clId="{04DE4CF3-2238-47FE-B46A-6F06D7FED136}" dt="2025-01-07T07:40:25.804" v="2"/>
-          <ac:spMkLst>
-            <pc:docMk/>
-            <pc:sldMk cId="172325292" sldId="622"/>
-            <ac:spMk id="2" creationId="{6122510E-CC59-80C5-6AF6-88D4260A5832}"/>
-          </ac:spMkLst>
-        </pc:spChg>
-      </pc:sldChg>
-      <pc:sldChg chg="modSp">
-        <pc:chgData name="Zhao Jin" userId="cd05a825-544c-438a-9ba1-08e63db50b47" providerId="ADAL" clId="{04DE4CF3-2238-47FE-B46A-6F06D7FED136}" dt="2025-01-07T07:40:25.804" v="2"/>
-        <pc:sldMkLst>
-          <pc:docMk/>
-          <pc:sldMk cId="3569280496" sldId="623"/>
-        </pc:sldMkLst>
-        <pc:spChg chg="mod">
-          <ac:chgData name="Zhao Jin" userId="cd05a825-544c-438a-9ba1-08e63db50b47" providerId="ADAL" clId="{04DE4CF3-2238-47FE-B46A-6F06D7FED136}" dt="2025-01-07T07:40:25.804" v="2"/>
-          <ac:spMkLst>
-            <pc:docMk/>
-            <pc:sldMk cId="3569280496" sldId="623"/>
-            <ac:spMk id="2" creationId="{71151815-C40A-B7DD-1E0A-059C4E5D071C}"/>
-          </ac:spMkLst>
-        </pc:spChg>
-      </pc:sldChg>
-      <pc:sldChg chg="modSp">
-        <pc:chgData name="Zhao Jin" userId="cd05a825-544c-438a-9ba1-08e63db50b47" providerId="ADAL" clId="{04DE4CF3-2238-47FE-B46A-6F06D7FED136}" dt="2025-01-07T07:40:25.804" v="2"/>
-        <pc:sldMkLst>
-          <pc:docMk/>
-          <pc:sldMk cId="1400456452" sldId="624"/>
-        </pc:sldMkLst>
-        <pc:spChg chg="mod">
-          <ac:chgData name="Zhao Jin" userId="cd05a825-544c-438a-9ba1-08e63db50b47" providerId="ADAL" clId="{04DE4CF3-2238-47FE-B46A-6F06D7FED136}" dt="2025-01-07T07:40:25.804" v="2"/>
-          <ac:spMkLst>
-            <pc:docMk/>
-            <pc:sldMk cId="1400456452" sldId="624"/>
-            <ac:spMk id="2" creationId="{9916CA18-C142-F389-725C-88FC2609D6C4}"/>
-          </ac:spMkLst>
-        </pc:spChg>
-      </pc:sldChg>
-      <pc:sldChg chg="modSp">
-        <pc:chgData name="Zhao Jin" userId="cd05a825-544c-438a-9ba1-08e63db50b47" providerId="ADAL" clId="{04DE4CF3-2238-47FE-B46A-6F06D7FED136}" dt="2025-01-07T07:40:25.804" v="2"/>
-        <pc:sldMkLst>
-          <pc:docMk/>
-          <pc:sldMk cId="529301135" sldId="625"/>
-        </pc:sldMkLst>
-        <pc:spChg chg="mod">
-          <ac:chgData name="Zhao Jin" userId="cd05a825-544c-438a-9ba1-08e63db50b47" providerId="ADAL" clId="{04DE4CF3-2238-47FE-B46A-6F06D7FED136}" dt="2025-01-07T07:40:25.804" v="2"/>
-          <ac:spMkLst>
-            <pc:docMk/>
-            <pc:sldMk cId="529301135" sldId="625"/>
-            <ac:spMk id="2" creationId="{F74DF9BD-BFD8-BC6B-2686-7DFFFF6C1400}"/>
-          </ac:spMkLst>
-        </pc:spChg>
-      </pc:sldChg>
-      <pc:sldChg chg="modSp">
-        <pc:chgData name="Zhao Jin" userId="cd05a825-544c-438a-9ba1-08e63db50b47" providerId="ADAL" clId="{04DE4CF3-2238-47FE-B46A-6F06D7FED136}" dt="2025-01-07T07:40:25.804" v="2"/>
-        <pc:sldMkLst>
-          <pc:docMk/>
-          <pc:sldMk cId="4000828616" sldId="626"/>
-        </pc:sldMkLst>
-        <pc:spChg chg="mod">
-          <ac:chgData name="Zhao Jin" userId="cd05a825-544c-438a-9ba1-08e63db50b47" providerId="ADAL" clId="{04DE4CF3-2238-47FE-B46A-6F06D7FED136}" dt="2025-01-07T07:40:25.804" v="2"/>
-          <ac:spMkLst>
-            <pc:docMk/>
-            <pc:sldMk cId="4000828616" sldId="626"/>
-            <ac:spMk id="2" creationId="{BF59AA13-0198-DB5A-FBF1-F1C728EF02C8}"/>
-          </ac:spMkLst>
-        </pc:spChg>
-      </pc:sldChg>
-      <pc:sldChg chg="add">
-        <pc:chgData name="Zhao Jin" userId="cd05a825-544c-438a-9ba1-08e63db50b47" providerId="ADAL" clId="{04DE4CF3-2238-47FE-B46A-6F06D7FED136}" dt="2024-12-27T08:48:45.966" v="0"/>
-        <pc:sldMkLst>
-          <pc:docMk/>
-          <pc:sldMk cId="0" sldId="627"/>
-        </pc:sldMkLst>
-      </pc:sldChg>
-      <pc:sldChg chg="modSp add">
-        <pc:chgData name="Zhao Jin" userId="cd05a825-544c-438a-9ba1-08e63db50b47" providerId="ADAL" clId="{04DE4CF3-2238-47FE-B46A-6F06D7FED136}" dt="2025-01-07T07:40:25.804" v="2"/>
-        <pc:sldMkLst>
-          <pc:docMk/>
-          <pc:sldMk cId="1751154485" sldId="628"/>
-        </pc:sldMkLst>
-        <pc:spChg chg="mod">
-          <ac:chgData name="Zhao Jin" userId="cd05a825-544c-438a-9ba1-08e63db50b47" providerId="ADAL" clId="{04DE4CF3-2238-47FE-B46A-6F06D7FED136}" dt="2025-01-07T07:40:25.804" v="2"/>
-          <ac:spMkLst>
-            <pc:docMk/>
-            <pc:sldMk cId="1751154485" sldId="628"/>
-            <ac:spMk id="2" creationId="{F90138ED-AC6A-28D6-C8E5-77533B1BA1A2}"/>
-          </ac:spMkLst>
-        </pc:spChg>
-      </pc:sldChg>
-      <pc:sldChg chg="modSp add">
-        <pc:chgData name="Zhao Jin" userId="cd05a825-544c-438a-9ba1-08e63db50b47" providerId="ADAL" clId="{04DE4CF3-2238-47FE-B46A-6F06D7FED136}" dt="2025-01-07T07:40:25.804" v="2"/>
-        <pc:sldMkLst>
-          <pc:docMk/>
-          <pc:sldMk cId="1813128722" sldId="629"/>
-        </pc:sldMkLst>
-        <pc:spChg chg="mod">
-          <ac:chgData name="Zhao Jin" userId="cd05a825-544c-438a-9ba1-08e63db50b47" providerId="ADAL" clId="{04DE4CF3-2238-47FE-B46A-6F06D7FED136}" dt="2025-01-07T07:40:25.804" v="2"/>
-          <ac:spMkLst>
-            <pc:docMk/>
-            <pc:sldMk cId="1813128722" sldId="629"/>
-            <ac:spMk id="2" creationId="{EE7E01C8-85CA-920D-53F0-FCE36D7BA6FD}"/>
-          </ac:spMkLst>
-        </pc:spChg>
-      </pc:sldChg>
-      <pc:sldChg chg="modSp add">
-        <pc:chgData name="Zhao Jin" userId="cd05a825-544c-438a-9ba1-08e63db50b47" providerId="ADAL" clId="{04DE4CF3-2238-47FE-B46A-6F06D7FED136}" dt="2025-01-07T07:40:25.804" v="2"/>
-        <pc:sldMkLst>
-          <pc:docMk/>
-          <pc:sldMk cId="4089006062" sldId="642"/>
-        </pc:sldMkLst>
-        <pc:spChg chg="mod">
-          <ac:chgData name="Zhao Jin" userId="cd05a825-544c-438a-9ba1-08e63db50b47" providerId="ADAL" clId="{04DE4CF3-2238-47FE-B46A-6F06D7FED136}" dt="2025-01-07T07:40:25.804" v="2"/>
-          <ac:spMkLst>
-            <pc:docMk/>
-            <pc:sldMk cId="4089006062" sldId="642"/>
-            <ac:spMk id="2" creationId="{35F364A3-40EF-B062-FCE2-4924A2536ECE}"/>
-          </ac:spMkLst>
-        </pc:spChg>
-      </pc:sldChg>
-      <pc:sldChg chg="modSp add">
-        <pc:chgData name="Zhao Jin" userId="cd05a825-544c-438a-9ba1-08e63db50b47" providerId="ADAL" clId="{04DE4CF3-2238-47FE-B46A-6F06D7FED136}" dt="2025-01-07T07:40:25.804" v="2"/>
-        <pc:sldMkLst>
-          <pc:docMk/>
-          <pc:sldMk cId="791616712" sldId="644"/>
-        </pc:sldMkLst>
-      </pc:sldChg>
-      <pc:sldChg chg="add">
-        <pc:chgData name="Zhao Jin" userId="cd05a825-544c-438a-9ba1-08e63db50b47" providerId="ADAL" clId="{04DE4CF3-2238-47FE-B46A-6F06D7FED136}" dt="2024-12-27T08:48:52.368" v="1"/>
-        <pc:sldMkLst>
-          <pc:docMk/>
-          <pc:sldMk cId="0" sldId="645"/>
-        </pc:sldMkLst>
-      </pc:sldChg>
-      <pc:sldChg chg="modSp add">
-        <pc:chgData name="Zhao Jin" userId="cd05a825-544c-438a-9ba1-08e63db50b47" providerId="ADAL" clId="{04DE4CF3-2238-47FE-B46A-6F06D7FED136}" dt="2025-01-07T07:40:25.804" v="2"/>
-        <pc:sldMkLst>
-          <pc:docMk/>
-          <pc:sldMk cId="919497630" sldId="646"/>
-        </pc:sldMkLst>
-        <pc:spChg chg="mod">
-          <ac:chgData name="Zhao Jin" userId="cd05a825-544c-438a-9ba1-08e63db50b47" providerId="ADAL" clId="{04DE4CF3-2238-47FE-B46A-6F06D7FED136}" dt="2025-01-07T07:40:25.804" v="2"/>
-          <ac:spMkLst>
-            <pc:docMk/>
-            <pc:sldMk cId="919497630" sldId="646"/>
-            <ac:spMk id="2" creationId="{444F1AD0-EC73-7F6F-01D2-19B26A000742}"/>
-          </ac:spMkLst>
-        </pc:spChg>
-      </pc:sldChg>
-      <pc:sldChg chg="modSp add">
-        <pc:chgData name="Zhao Jin" userId="cd05a825-544c-438a-9ba1-08e63db50b47" providerId="ADAL" clId="{04DE4CF3-2238-47FE-B46A-6F06D7FED136}" dt="2025-01-07T07:40:25.804" v="2"/>
-        <pc:sldMkLst>
-          <pc:docMk/>
-          <pc:sldMk cId="3494212704" sldId="647"/>
-        </pc:sldMkLst>
-        <pc:spChg chg="mod">
-          <ac:chgData name="Zhao Jin" userId="cd05a825-544c-438a-9ba1-08e63db50b47" providerId="ADAL" clId="{04DE4CF3-2238-47FE-B46A-6F06D7FED136}" dt="2025-01-07T07:40:25.804" v="2"/>
-          <ac:spMkLst>
-            <pc:docMk/>
-            <pc:sldMk cId="3494212704" sldId="647"/>
-            <ac:spMk id="2" creationId="{00A50BAF-1A01-85F6-7BF8-75BDB43F8AA7}"/>
-          </ac:spMkLst>
-        </pc:spChg>
-      </pc:sldChg>
-      <pc:sldChg chg="modSp add">
-        <pc:chgData name="Zhao Jin" userId="cd05a825-544c-438a-9ba1-08e63db50b47" providerId="ADAL" clId="{04DE4CF3-2238-47FE-B46A-6F06D7FED136}" dt="2025-01-07T07:40:25.804" v="2"/>
-        <pc:sldMkLst>
-          <pc:docMk/>
-          <pc:sldMk cId="2331399055" sldId="648"/>
-        </pc:sldMkLst>
-        <pc:spChg chg="mod">
-          <ac:chgData name="Zhao Jin" userId="cd05a825-544c-438a-9ba1-08e63db50b47" providerId="ADAL" clId="{04DE4CF3-2238-47FE-B46A-6F06D7FED136}" dt="2025-01-07T07:40:25.804" v="2"/>
-          <ac:spMkLst>
-            <pc:docMk/>
-            <pc:sldMk cId="2331399055" sldId="648"/>
-            <ac:spMk id="3" creationId="{795EC628-BB01-E82C-E2B4-BCBD2F9285D0}"/>
-          </ac:spMkLst>
-        </pc:spChg>
-      </pc:sldChg>
-      <pc:sldChg chg="modSp add">
-        <pc:chgData name="Zhao Jin" userId="cd05a825-544c-438a-9ba1-08e63db50b47" providerId="ADAL" clId="{04DE4CF3-2238-47FE-B46A-6F06D7FED136}" dt="2025-01-07T07:40:25.804" v="2"/>
-        <pc:sldMkLst>
-          <pc:docMk/>
-          <pc:sldMk cId="1415479900" sldId="649"/>
-        </pc:sldMkLst>
-        <pc:spChg chg="mod">
-          <ac:chgData name="Zhao Jin" userId="cd05a825-544c-438a-9ba1-08e63db50b47" providerId="ADAL" clId="{04DE4CF3-2238-47FE-B46A-6F06D7FED136}" dt="2025-01-07T07:40:25.804" v="2"/>
-          <ac:spMkLst>
-            <pc:docMk/>
-            <pc:sldMk cId="1415479900" sldId="649"/>
-            <ac:spMk id="2" creationId="{2BDA64F2-EECC-3C64-1ED3-8D34E4580780}"/>
-          </ac:spMkLst>
-        </pc:spChg>
-      </pc:sldChg>
-      <pc:sldChg chg="modSp add">
-        <pc:chgData name="Zhao Jin" userId="cd05a825-544c-438a-9ba1-08e63db50b47" providerId="ADAL" clId="{04DE4CF3-2238-47FE-B46A-6F06D7FED136}" dt="2025-01-07T07:40:25.804" v="2"/>
-        <pc:sldMkLst>
-          <pc:docMk/>
-          <pc:sldMk cId="3074147188" sldId="650"/>
-        </pc:sldMkLst>
-        <pc:spChg chg="mod">
-          <ac:chgData name="Zhao Jin" userId="cd05a825-544c-438a-9ba1-08e63db50b47" providerId="ADAL" clId="{04DE4CF3-2238-47FE-B46A-6F06D7FED136}" dt="2025-01-07T07:40:25.804" v="2"/>
-          <ac:spMkLst>
-            <pc:docMk/>
-            <pc:sldMk cId="3074147188" sldId="650"/>
-            <ac:spMk id="2" creationId="{3468AB70-0351-CEC0-6E86-39DD8FA7C27B}"/>
-          </ac:spMkLst>
-        </pc:spChg>
-      </pc:sldChg>
-      <pc:sldChg chg="modSp add">
-        <pc:chgData name="Zhao Jin" userId="cd05a825-544c-438a-9ba1-08e63db50b47" providerId="ADAL" clId="{04DE4CF3-2238-47FE-B46A-6F06D7FED136}" dt="2025-01-07T07:40:25.804" v="2"/>
-        <pc:sldMkLst>
-          <pc:docMk/>
-          <pc:sldMk cId="1550881545" sldId="651"/>
-        </pc:sldMkLst>
-        <pc:spChg chg="mod">
-          <ac:chgData name="Zhao Jin" userId="cd05a825-544c-438a-9ba1-08e63db50b47" providerId="ADAL" clId="{04DE4CF3-2238-47FE-B46A-6F06D7FED136}" dt="2025-01-07T07:40:25.804" v="2"/>
-          <ac:spMkLst>
-            <pc:docMk/>
-            <pc:sldMk cId="1550881545" sldId="651"/>
-            <ac:spMk id="2" creationId="{B219E236-F481-951D-D286-3B337F7AF858}"/>
-          </ac:spMkLst>
-        </pc:spChg>
-      </pc:sldChg>
-      <pc:sldChg chg="modSp add">
-        <pc:chgData name="Zhao Jin" userId="cd05a825-544c-438a-9ba1-08e63db50b47" providerId="ADAL" clId="{04DE4CF3-2238-47FE-B46A-6F06D7FED136}" dt="2025-01-07T07:40:25.804" v="2"/>
-        <pc:sldMkLst>
-          <pc:docMk/>
-          <pc:sldMk cId="2663715734" sldId="652"/>
-        </pc:sldMkLst>
-        <pc:spChg chg="mod">
-          <ac:chgData name="Zhao Jin" userId="cd05a825-544c-438a-9ba1-08e63db50b47" providerId="ADAL" clId="{04DE4CF3-2238-47FE-B46A-6F06D7FED136}" dt="2025-01-07T07:40:25.804" v="2"/>
-          <ac:spMkLst>
-            <pc:docMk/>
-            <pc:sldMk cId="2663715734" sldId="652"/>
-            <ac:spMk id="3" creationId="{D6A0199B-32DC-FAF5-4EE3-2C388A2FCF0F}"/>
-          </ac:spMkLst>
-        </pc:spChg>
-      </pc:sldChg>
-      <pc:sldMasterChg chg="modSp modSldLayout">
-        <pc:chgData name="Zhao Jin" userId="cd05a825-544c-438a-9ba1-08e63db50b47" providerId="ADAL" clId="{04DE4CF3-2238-47FE-B46A-6F06D7FED136}" dt="2025-01-07T07:40:25.804" v="2"/>
-        <pc:sldMasterMkLst>
-          <pc:docMk/>
-          <pc:sldMasterMk cId="0" sldId="2147485087"/>
-        </pc:sldMasterMkLst>
-        <pc:spChg chg="mod">
-          <ac:chgData name="Zhao Jin" userId="cd05a825-544c-438a-9ba1-08e63db50b47" providerId="ADAL" clId="{04DE4CF3-2238-47FE-B46A-6F06D7FED136}" dt="2025-01-07T07:40:25.804" v="2"/>
-          <ac:spMkLst>
-            <pc:docMk/>
-            <pc:sldMasterMk cId="0" sldId="2147485087"/>
-            <ac:spMk id="5" creationId="{00000000-0000-0000-0000-000000000000}"/>
-          </ac:spMkLst>
-        </pc:spChg>
-        <pc:sldLayoutChg chg="modSp">
-          <pc:chgData name="Zhao Jin" userId="cd05a825-544c-438a-9ba1-08e63db50b47" providerId="ADAL" clId="{04DE4CF3-2238-47FE-B46A-6F06D7FED136}" dt="2025-01-07T07:40:25.804" v="2"/>
-          <pc:sldLayoutMkLst>
-            <pc:docMk/>
-            <pc:sldMasterMk cId="0" sldId="2147485087"/>
-            <pc:sldLayoutMk cId="0" sldId="2147485088"/>
-          </pc:sldLayoutMkLst>
-          <pc:spChg chg="mod">
-            <ac:chgData name="Zhao Jin" userId="cd05a825-544c-438a-9ba1-08e63db50b47" providerId="ADAL" clId="{04DE4CF3-2238-47FE-B46A-6F06D7FED136}" dt="2025-01-07T07:40:25.804" v="2"/>
-            <ac:spMkLst>
-              <pc:docMk/>
-              <pc:sldMasterMk cId="0" sldId="2147485087"/>
-              <pc:sldLayoutMk cId="0" sldId="2147485088"/>
-              <ac:spMk id="5" creationId="{00000000-0000-0000-0000-000000000000}"/>
-            </ac:spMkLst>
-          </pc:spChg>
-        </pc:sldLayoutChg>
-        <pc:sldLayoutChg chg="modSp">
-          <pc:chgData name="Zhao Jin" userId="cd05a825-544c-438a-9ba1-08e63db50b47" providerId="ADAL" clId="{04DE4CF3-2238-47FE-B46A-6F06D7FED136}" dt="2025-01-07T07:40:25.804" v="2"/>
-          <pc:sldLayoutMkLst>
-            <pc:docMk/>
-            <pc:sldMasterMk cId="0" sldId="2147485087"/>
-            <pc:sldLayoutMk cId="0" sldId="2147485089"/>
-          </pc:sldLayoutMkLst>
-          <pc:spChg chg="mod">
-            <ac:chgData name="Zhao Jin" userId="cd05a825-544c-438a-9ba1-08e63db50b47" providerId="ADAL" clId="{04DE4CF3-2238-47FE-B46A-6F06D7FED136}" dt="2025-01-07T07:40:25.804" v="2"/>
-            <ac:spMkLst>
-              <pc:docMk/>
-              <pc:sldMasterMk cId="0" sldId="2147485087"/>
-              <pc:sldLayoutMk cId="0" sldId="2147485089"/>
-              <ac:spMk id="5" creationId="{00000000-0000-0000-0000-000000000000}"/>
-            </ac:spMkLst>
-          </pc:spChg>
-        </pc:sldLayoutChg>
-        <pc:sldLayoutChg chg="modSp">
-          <pc:chgData name="Zhao Jin" userId="cd05a825-544c-438a-9ba1-08e63db50b47" providerId="ADAL" clId="{04DE4CF3-2238-47FE-B46A-6F06D7FED136}" dt="2025-01-07T07:40:25.804" v="2"/>
-          <pc:sldLayoutMkLst>
-            <pc:docMk/>
-            <pc:sldMasterMk cId="0" sldId="2147485087"/>
-            <pc:sldLayoutMk cId="0" sldId="2147485090"/>
-          </pc:sldLayoutMkLst>
-          <pc:spChg chg="mod">
-            <ac:chgData name="Zhao Jin" userId="cd05a825-544c-438a-9ba1-08e63db50b47" providerId="ADAL" clId="{04DE4CF3-2238-47FE-B46A-6F06D7FED136}" dt="2025-01-07T07:40:25.804" v="2"/>
-            <ac:spMkLst>
-              <pc:docMk/>
-              <pc:sldMasterMk cId="0" sldId="2147485087"/>
-              <pc:sldLayoutMk cId="0" sldId="2147485090"/>
-              <ac:spMk id="5" creationId="{00000000-0000-0000-0000-000000000000}"/>
-            </ac:spMkLst>
-          </pc:spChg>
-        </pc:sldLayoutChg>
-        <pc:sldLayoutChg chg="modSp">
-          <pc:chgData name="Zhao Jin" userId="cd05a825-544c-438a-9ba1-08e63db50b47" providerId="ADAL" clId="{04DE4CF3-2238-47FE-B46A-6F06D7FED136}" dt="2025-01-07T07:40:25.804" v="2"/>
-          <pc:sldLayoutMkLst>
-            <pc:docMk/>
-            <pc:sldMasterMk cId="0" sldId="2147485087"/>
-            <pc:sldLayoutMk cId="0" sldId="2147485091"/>
-          </pc:sldLayoutMkLst>
-          <pc:spChg chg="mod">
-            <ac:chgData name="Zhao Jin" userId="cd05a825-544c-438a-9ba1-08e63db50b47" providerId="ADAL" clId="{04DE4CF3-2238-47FE-B46A-6F06D7FED136}" dt="2025-01-07T07:40:25.804" v="2"/>
-            <ac:spMkLst>
-              <pc:docMk/>
-              <pc:sldMasterMk cId="0" sldId="2147485087"/>
-              <pc:sldLayoutMk cId="0" sldId="2147485091"/>
-              <ac:spMk id="6" creationId="{00000000-0000-0000-0000-000000000000}"/>
-            </ac:spMkLst>
-          </pc:spChg>
-        </pc:sldLayoutChg>
-        <pc:sldLayoutChg chg="modSp">
-          <pc:chgData name="Zhao Jin" userId="cd05a825-544c-438a-9ba1-08e63db50b47" providerId="ADAL" clId="{04DE4CF3-2238-47FE-B46A-6F06D7FED136}" dt="2025-01-07T07:40:25.804" v="2"/>
-          <pc:sldLayoutMkLst>
-            <pc:docMk/>
-            <pc:sldMasterMk cId="0" sldId="2147485087"/>
-            <pc:sldLayoutMk cId="0" sldId="2147485092"/>
-          </pc:sldLayoutMkLst>
-          <pc:spChg chg="mod">
-            <ac:chgData name="Zhao Jin" userId="cd05a825-544c-438a-9ba1-08e63db50b47" providerId="ADAL" clId="{04DE4CF3-2238-47FE-B46A-6F06D7FED136}" dt="2025-01-07T07:40:25.804" v="2"/>
-            <ac:spMkLst>
-              <pc:docMk/>
-              <pc:sldMasterMk cId="0" sldId="2147485087"/>
-              <pc:sldLayoutMk cId="0" sldId="2147485092"/>
-              <ac:spMk id="8" creationId="{00000000-0000-0000-0000-000000000000}"/>
-            </ac:spMkLst>
-          </pc:spChg>
-        </pc:sldLayoutChg>
-        <pc:sldLayoutChg chg="modSp">
-          <pc:chgData name="Zhao Jin" userId="cd05a825-544c-438a-9ba1-08e63db50b47" providerId="ADAL" clId="{04DE4CF3-2238-47FE-B46A-6F06D7FED136}" dt="2025-01-07T07:40:25.804" v="2"/>
-          <pc:sldLayoutMkLst>
-            <pc:docMk/>
-            <pc:sldMasterMk cId="0" sldId="2147485087"/>
-            <pc:sldLayoutMk cId="0" sldId="2147485093"/>
-          </pc:sldLayoutMkLst>
-          <pc:spChg chg="mod">
-            <ac:chgData name="Zhao Jin" userId="cd05a825-544c-438a-9ba1-08e63db50b47" providerId="ADAL" clId="{04DE4CF3-2238-47FE-B46A-6F06D7FED136}" dt="2025-01-07T07:40:25.804" v="2"/>
-            <ac:spMkLst>
-              <pc:docMk/>
-              <pc:sldMasterMk cId="0" sldId="2147485087"/>
-              <pc:sldLayoutMk cId="0" sldId="2147485093"/>
-              <ac:spMk id="4" creationId="{00000000-0000-0000-0000-000000000000}"/>
-            </ac:spMkLst>
-          </pc:spChg>
-        </pc:sldLayoutChg>
-        <pc:sldLayoutChg chg="modSp">
-          <pc:chgData name="Zhao Jin" userId="cd05a825-544c-438a-9ba1-08e63db50b47" providerId="ADAL" clId="{04DE4CF3-2238-47FE-B46A-6F06D7FED136}" dt="2025-01-07T07:40:25.804" v="2"/>
-          <pc:sldLayoutMkLst>
-            <pc:docMk/>
-            <pc:sldMasterMk cId="0" sldId="2147485087"/>
-            <pc:sldLayoutMk cId="0" sldId="2147485094"/>
-          </pc:sldLayoutMkLst>
-          <pc:spChg chg="mod">
-            <ac:chgData name="Zhao Jin" userId="cd05a825-544c-438a-9ba1-08e63db50b47" providerId="ADAL" clId="{04DE4CF3-2238-47FE-B46A-6F06D7FED136}" dt="2025-01-07T07:40:25.804" v="2"/>
-            <ac:spMkLst>
-              <pc:docMk/>
-              <pc:sldMasterMk cId="0" sldId="2147485087"/>
-              <pc:sldLayoutMk cId="0" sldId="2147485094"/>
-              <ac:spMk id="3" creationId="{00000000-0000-0000-0000-000000000000}"/>
-            </ac:spMkLst>
-          </pc:spChg>
-        </pc:sldLayoutChg>
-        <pc:sldLayoutChg chg="modSp">
-          <pc:chgData name="Zhao Jin" userId="cd05a825-544c-438a-9ba1-08e63db50b47" providerId="ADAL" clId="{04DE4CF3-2238-47FE-B46A-6F06D7FED136}" dt="2025-01-07T07:40:25.804" v="2"/>
-          <pc:sldLayoutMkLst>
-            <pc:docMk/>
-            <pc:sldMasterMk cId="0" sldId="2147485087"/>
-            <pc:sldLayoutMk cId="0" sldId="2147485095"/>
-          </pc:sldLayoutMkLst>
-          <pc:spChg chg="mod">
-            <ac:chgData name="Zhao Jin" userId="cd05a825-544c-438a-9ba1-08e63db50b47" providerId="ADAL" clId="{04DE4CF3-2238-47FE-B46A-6F06D7FED136}" dt="2025-01-07T07:40:25.804" v="2"/>
-            <ac:spMkLst>
-              <pc:docMk/>
-              <pc:sldMasterMk cId="0" sldId="2147485087"/>
-              <pc:sldLayoutMk cId="0" sldId="2147485095"/>
-              <ac:spMk id="6" creationId="{00000000-0000-0000-0000-000000000000}"/>
-            </ac:spMkLst>
-          </pc:spChg>
-        </pc:sldLayoutChg>
-        <pc:sldLayoutChg chg="modSp">
-          <pc:chgData name="Zhao Jin" userId="cd05a825-544c-438a-9ba1-08e63db50b47" providerId="ADAL" clId="{04DE4CF3-2238-47FE-B46A-6F06D7FED136}" dt="2025-01-07T07:40:25.804" v="2"/>
-          <pc:sldLayoutMkLst>
-            <pc:docMk/>
-            <pc:sldMasterMk cId="0" sldId="2147485087"/>
-            <pc:sldLayoutMk cId="0" sldId="2147485096"/>
-          </pc:sldLayoutMkLst>
-          <pc:spChg chg="mod">
-            <ac:chgData name="Zhao Jin" userId="cd05a825-544c-438a-9ba1-08e63db50b47" providerId="ADAL" clId="{04DE4CF3-2238-47FE-B46A-6F06D7FED136}" dt="2025-01-07T07:40:25.804" v="2"/>
-            <ac:spMkLst>
-              <pc:docMk/>
-              <pc:sldMasterMk cId="0" sldId="2147485087"/>
-              <pc:sldLayoutMk cId="0" sldId="2147485096"/>
-              <ac:spMk id="6" creationId="{00000000-0000-0000-0000-000000000000}"/>
-            </ac:spMkLst>
-          </pc:spChg>
-        </pc:sldLayoutChg>
-        <pc:sldLayoutChg chg="modSp">
-          <pc:chgData name="Zhao Jin" userId="cd05a825-544c-438a-9ba1-08e63db50b47" providerId="ADAL" clId="{04DE4CF3-2238-47FE-B46A-6F06D7FED136}" dt="2025-01-07T07:40:25.804" v="2"/>
-          <pc:sldLayoutMkLst>
-            <pc:docMk/>
-            <pc:sldMasterMk cId="0" sldId="2147485087"/>
-            <pc:sldLayoutMk cId="0" sldId="2147485097"/>
-          </pc:sldLayoutMkLst>
-          <pc:spChg chg="mod">
-            <ac:chgData name="Zhao Jin" userId="cd05a825-544c-438a-9ba1-08e63db50b47" providerId="ADAL" clId="{04DE4CF3-2238-47FE-B46A-6F06D7FED136}" dt="2025-01-07T07:40:25.804" v="2"/>
-            <ac:spMkLst>
-              <pc:docMk/>
-              <pc:sldMasterMk cId="0" sldId="2147485087"/>
-              <pc:sldLayoutMk cId="0" sldId="2147485097"/>
-              <ac:spMk id="5" creationId="{00000000-0000-0000-0000-000000000000}"/>
-            </ac:spMkLst>
-          </pc:spChg>
-        </pc:sldLayoutChg>
-        <pc:sldLayoutChg chg="modSp">
-          <pc:chgData name="Zhao Jin" userId="cd05a825-544c-438a-9ba1-08e63db50b47" providerId="ADAL" clId="{04DE4CF3-2238-47FE-B46A-6F06D7FED136}" dt="2025-01-07T07:40:25.804" v="2"/>
-          <pc:sldLayoutMkLst>
-            <pc:docMk/>
-            <pc:sldMasterMk cId="0" sldId="2147485087"/>
-            <pc:sldLayoutMk cId="0" sldId="2147485098"/>
-          </pc:sldLayoutMkLst>
-          <pc:spChg chg="mod">
-            <ac:chgData name="Zhao Jin" userId="cd05a825-544c-438a-9ba1-08e63db50b47" providerId="ADAL" clId="{04DE4CF3-2238-47FE-B46A-6F06D7FED136}" dt="2025-01-07T07:40:25.804" v="2"/>
-            <ac:spMkLst>
-              <pc:docMk/>
-              <pc:sldMasterMk cId="0" sldId="2147485087"/>
-              <pc:sldLayoutMk cId="0" sldId="2147485098"/>
-              <ac:spMk id="5" creationId="{00000000-0000-0000-0000-000000000000}"/>
-            </ac:spMkLst>
-          </pc:spChg>
-        </pc:sldLayoutChg>
-      </pc:sldMasterChg>
-    </pc:docChg>
-  </pc:docChgLst>
-  <pc:docChgLst>
-    <pc:chgData name="Zhao Jin" userId="cd05a825-544c-438a-9ba1-08e63db50b47" providerId="ADAL" clId="{BBE9D547-4B31-704D-9080-47B1CA4D9124}"/>
-    <pc:docChg chg="modSld">
-      <pc:chgData name="Zhao Jin" userId="cd05a825-544c-438a-9ba1-08e63db50b47" providerId="ADAL" clId="{BBE9D547-4B31-704D-9080-47B1CA4D9124}" dt="2021-01-18T05:40:31.767" v="29" actId="114"/>
-      <pc:docMkLst>
-        <pc:docMk/>
-      </pc:docMkLst>
-      <pc:sldChg chg="modSp modAnim">
-        <pc:chgData name="Zhao Jin" userId="cd05a825-544c-438a-9ba1-08e63db50b47" providerId="ADAL" clId="{BBE9D547-4B31-704D-9080-47B1CA4D9124}" dt="2021-01-18T05:39:25.523" v="25"/>
-        <pc:sldMkLst>
-          <pc:docMk/>
-          <pc:sldMk cId="4265878996" sldId="534"/>
-        </pc:sldMkLst>
-      </pc:sldChg>
-      <pc:sldChg chg="modSp">
-        <pc:chgData name="Zhao Jin" userId="cd05a825-544c-438a-9ba1-08e63db50b47" providerId="ADAL" clId="{BBE9D547-4B31-704D-9080-47B1CA4D9124}" dt="2021-01-18T05:40:31.767" v="29" actId="114"/>
-        <pc:sldMkLst>
-          <pc:docMk/>
-          <pc:sldMk cId="2851665547" sldId="538"/>
-        </pc:sldMkLst>
-      </pc:sldChg>
-    </pc:docChg>
-  </pc:docChgLst>
-  <pc:docChgLst>
-    <pc:chgData name="Zhao Jin" userId="cd05a825-544c-438a-9ba1-08e63db50b47" providerId="ADAL" clId="{B1F7CFED-A664-443A-A173-5DFC1A50598C}"/>
-    <pc:docChg chg="undo custSel addSld delSld modSld sldOrd">
-      <pc:chgData name="Zhao Jin" userId="cd05a825-544c-438a-9ba1-08e63db50b47" providerId="ADAL" clId="{B1F7CFED-A664-443A-A173-5DFC1A50598C}" dt="2021-01-27T11:27:42.250" v="3304" actId="20577"/>
-      <pc:docMkLst>
-        <pc:docMk/>
-      </pc:docMkLst>
-      <pc:sldChg chg="modSp mod">
-        <pc:chgData name="Zhao Jin" userId="cd05a825-544c-438a-9ba1-08e63db50b47" providerId="ADAL" clId="{B1F7CFED-A664-443A-A173-5DFC1A50598C}" dt="2021-01-27T08:47:23.481" v="3299" actId="20577"/>
-        <pc:sldMkLst>
-          <pc:docMk/>
-          <pc:sldMk cId="2438607696" sldId="468"/>
-        </pc:sldMkLst>
-      </pc:sldChg>
-      <pc:sldChg chg="del">
-        <pc:chgData name="Zhao Jin" userId="cd05a825-544c-438a-9ba1-08e63db50b47" providerId="ADAL" clId="{B1F7CFED-A664-443A-A173-5DFC1A50598C}" dt="2021-01-27T07:50:44.942" v="2858" actId="47"/>
-        <pc:sldMkLst>
-          <pc:docMk/>
-          <pc:sldMk cId="1311126165" sldId="485"/>
-        </pc:sldMkLst>
-      </pc:sldChg>
-      <pc:sldChg chg="delSp modSp mod">
-        <pc:chgData name="Zhao Jin" userId="cd05a825-544c-438a-9ba1-08e63db50b47" providerId="ADAL" clId="{B1F7CFED-A664-443A-A173-5DFC1A50598C}" dt="2021-01-27T08:43:28.344" v="3236"/>
-        <pc:sldMkLst>
-          <pc:docMk/>
-          <pc:sldMk cId="3792232794" sldId="504"/>
-        </pc:sldMkLst>
-      </pc:sldChg>
-      <pc:sldChg chg="del">
-        <pc:chgData name="Zhao Jin" userId="cd05a825-544c-438a-9ba1-08e63db50b47" providerId="ADAL" clId="{B1F7CFED-A664-443A-A173-5DFC1A50598C}" dt="2021-01-27T07:50:44.942" v="2858" actId="47"/>
-        <pc:sldMkLst>
-          <pc:docMk/>
-          <pc:sldMk cId="681224785" sldId="531"/>
-        </pc:sldMkLst>
-      </pc:sldChg>
-      <pc:sldChg chg="addSp delSp modSp add del mod modAnim">
-        <pc:chgData name="Zhao Jin" userId="cd05a825-544c-438a-9ba1-08e63db50b47" providerId="ADAL" clId="{B1F7CFED-A664-443A-A173-5DFC1A50598C}" dt="2021-01-27T07:44:47.950" v="2625" actId="2696"/>
-        <pc:sldMkLst>
-          <pc:docMk/>
-          <pc:sldMk cId="375427509" sldId="545"/>
-        </pc:sldMkLst>
-      </pc:sldChg>
-      <pc:sldChg chg="addSp delSp modSp add del mod delAnim modAnim">
-        <pc:chgData name="Zhao Jin" userId="cd05a825-544c-438a-9ba1-08e63db50b47" providerId="ADAL" clId="{B1F7CFED-A664-443A-A173-5DFC1A50598C}" dt="2021-01-27T07:38:37.769" v="2178" actId="2696"/>
-        <pc:sldMkLst>
-          <pc:docMk/>
-          <pc:sldMk cId="1899776498" sldId="545"/>
-        </pc:sldMkLst>
-      </pc:sldChg>
-      <pc:sldChg chg="addSp delSp modSp add del mod delAnim modAnim">
-        <pc:chgData name="Zhao Jin" userId="cd05a825-544c-438a-9ba1-08e63db50b47" providerId="ADAL" clId="{B1F7CFED-A664-443A-A173-5DFC1A50598C}" dt="2021-01-27T08:38:52.330" v="2929" actId="2696"/>
-        <pc:sldMkLst>
-          <pc:docMk/>
-          <pc:sldMk cId="3702084380" sldId="545"/>
-        </pc:sldMkLst>
-      </pc:sldChg>
-      <pc:sldChg chg="modSp add mod">
-        <pc:chgData name="Zhao Jin" userId="cd05a825-544c-438a-9ba1-08e63db50b47" providerId="ADAL" clId="{B1F7CFED-A664-443A-A173-5DFC1A50598C}" dt="2021-01-27T11:27:42.250" v="3304" actId="20577"/>
-        <pc:sldMkLst>
-          <pc:docMk/>
-          <pc:sldMk cId="4228901100" sldId="545"/>
-        </pc:sldMkLst>
-      </pc:sldChg>
-      <pc:sldChg chg="delSp modSp mod">
-        <pc:chgData name="Zhao Jin" userId="cd05a825-544c-438a-9ba1-08e63db50b47" providerId="ADAL" clId="{B1F7CFED-A664-443A-A173-5DFC1A50598C}" dt="2021-01-27T08:43:28.344" v="3236"/>
-        <pc:sldMkLst>
-          <pc:docMk/>
-          <pc:sldMk cId="4225956616" sldId="546"/>
-        </pc:sldMkLst>
-      </pc:sldChg>
-      <pc:sldChg chg="addSp delSp modSp mod">
-        <pc:chgData name="Zhao Jin" userId="cd05a825-544c-438a-9ba1-08e63db50b47" providerId="ADAL" clId="{B1F7CFED-A664-443A-A173-5DFC1A50598C}" dt="2021-01-27T07:01:43.927" v="726" actId="207"/>
-        <pc:sldMkLst>
-          <pc:docMk/>
-          <pc:sldMk cId="1617257579" sldId="548"/>
-        </pc:sldMkLst>
-      </pc:sldChg>
-      <pc:sldChg chg="del">
-        <pc:chgData name="Zhao Jin" userId="cd05a825-544c-438a-9ba1-08e63db50b47" providerId="ADAL" clId="{B1F7CFED-A664-443A-A173-5DFC1A50598C}" dt="2021-01-27T07:50:44.942" v="2858" actId="47"/>
-        <pc:sldMkLst>
-          <pc:docMk/>
-          <pc:sldMk cId="3394924879" sldId="549"/>
-        </pc:sldMkLst>
-      </pc:sldChg>
-      <pc:sldChg chg="del">
-        <pc:chgData name="Zhao Jin" userId="cd05a825-544c-438a-9ba1-08e63db50b47" providerId="ADAL" clId="{B1F7CFED-A664-443A-A173-5DFC1A50598C}" dt="2021-01-27T07:50:44.942" v="2858" actId="47"/>
-        <pc:sldMkLst>
-          <pc:docMk/>
-          <pc:sldMk cId="784668950" sldId="550"/>
-        </pc:sldMkLst>
-      </pc:sldChg>
-      <pc:sldChg chg="delSp modSp mod">
-        <pc:chgData name="Zhao Jin" userId="cd05a825-544c-438a-9ba1-08e63db50b47" providerId="ADAL" clId="{B1F7CFED-A664-443A-A173-5DFC1A50598C}" dt="2021-01-27T08:43:28.344" v="3236"/>
-        <pc:sldMkLst>
-          <pc:docMk/>
-          <pc:sldMk cId="3422194935" sldId="552"/>
-        </pc:sldMkLst>
-      </pc:sldChg>
-      <pc:sldChg chg="delSp modSp mod">
-        <pc:chgData name="Zhao Jin" userId="cd05a825-544c-438a-9ba1-08e63db50b47" providerId="ADAL" clId="{B1F7CFED-A664-443A-A173-5DFC1A50598C}" dt="2021-01-27T08:43:28.344" v="3236"/>
-        <pc:sldMkLst>
-          <pc:docMk/>
-          <pc:sldMk cId="1427618944" sldId="553"/>
-        </pc:sldMkLst>
-      </pc:sldChg>
-      <pc:sldChg chg="delSp modSp mod">
-        <pc:chgData name="Zhao Jin" userId="cd05a825-544c-438a-9ba1-08e63db50b47" providerId="ADAL" clId="{B1F7CFED-A664-443A-A173-5DFC1A50598C}" dt="2021-01-27T08:43:28.344" v="3236"/>
-        <pc:sldMkLst>
-          <pc:docMk/>
-          <pc:sldMk cId="1659983766" sldId="554"/>
-        </pc:sldMkLst>
-      </pc:sldChg>
-      <pc:sldChg chg="addSp delSp modSp mod">
-        <pc:chgData name="Zhao Jin" userId="cd05a825-544c-438a-9ba1-08e63db50b47" providerId="ADAL" clId="{B1F7CFED-A664-443A-A173-5DFC1A50598C}" dt="2021-01-27T08:43:28.344" v="3236"/>
-        <pc:sldMkLst>
-          <pc:docMk/>
-          <pc:sldMk cId="1268238251" sldId="555"/>
-        </pc:sldMkLst>
-      </pc:sldChg>
-      <pc:sldChg chg="addSp delSp modSp add mod ord">
-        <pc:chgData name="Zhao Jin" userId="cd05a825-544c-438a-9ba1-08e63db50b47" providerId="ADAL" clId="{B1F7CFED-A664-443A-A173-5DFC1A50598C}" dt="2021-01-27T07:08:25.449" v="1116" actId="207"/>
-        <pc:sldMkLst>
-          <pc:docMk/>
-          <pc:sldMk cId="3990513599" sldId="556"/>
-        </pc:sldMkLst>
-      </pc:sldChg>
-      <pc:sldChg chg="modSp add mod">
-        <pc:chgData name="Zhao Jin" userId="cd05a825-544c-438a-9ba1-08e63db50b47" providerId="ADAL" clId="{B1F7CFED-A664-443A-A173-5DFC1A50598C}" dt="2021-01-27T07:10:49.029" v="1165" actId="1038"/>
-        <pc:sldMkLst>
-          <pc:docMk/>
-          <pc:sldMk cId="788021743" sldId="557"/>
-        </pc:sldMkLst>
-      </pc:sldChg>
-      <pc:sldChg chg="addSp delSp modSp add mod">
-        <pc:chgData name="Zhao Jin" userId="cd05a825-544c-438a-9ba1-08e63db50b47" providerId="ADAL" clId="{B1F7CFED-A664-443A-A173-5DFC1A50598C}" dt="2021-01-27T07:22:06.429" v="1447"/>
-        <pc:sldMkLst>
-          <pc:docMk/>
-          <pc:sldMk cId="686532275" sldId="558"/>
-        </pc:sldMkLst>
-      </pc:sldChg>
-      <pc:sldChg chg="delSp modSp add mod">
-        <pc:chgData name="Zhao Jin" userId="cd05a825-544c-438a-9ba1-08e63db50b47" providerId="ADAL" clId="{B1F7CFED-A664-443A-A173-5DFC1A50598C}" dt="2021-01-27T08:43:28.344" v="3236"/>
-        <pc:sldMkLst>
-          <pc:docMk/>
-          <pc:sldMk cId="182578491" sldId="559"/>
-        </pc:sldMkLst>
-      </pc:sldChg>
-      <pc:sldChg chg="add del">
-        <pc:chgData name="Zhao Jin" userId="cd05a825-544c-438a-9ba1-08e63db50b47" providerId="ADAL" clId="{B1F7CFED-A664-443A-A173-5DFC1A50598C}" dt="2021-01-27T07:13:34.600" v="1318" actId="47"/>
-        <pc:sldMkLst>
-          <pc:docMk/>
-          <pc:sldMk cId="730965808" sldId="559"/>
-        </pc:sldMkLst>
-      </pc:sldChg>
-      <pc:sldChg chg="addSp delSp modSp add del mod modAnim">
-        <pc:chgData name="Zhao Jin" userId="cd05a825-544c-438a-9ba1-08e63db50b47" providerId="ADAL" clId="{B1F7CFED-A664-443A-A173-5DFC1A50598C}" dt="2021-01-27T07:44:47.950" v="2625" actId="2696"/>
-        <pc:sldMkLst>
-          <pc:docMk/>
-          <pc:sldMk cId="2685445290" sldId="559"/>
-        </pc:sldMkLst>
-      </pc:sldChg>
-      <pc:sldChg chg="add del">
-        <pc:chgData name="Zhao Jin" userId="cd05a825-544c-438a-9ba1-08e63db50b47" providerId="ADAL" clId="{B1F7CFED-A664-443A-A173-5DFC1A50598C}" dt="2021-01-27T07:11:52.838" v="1191"/>
-        <pc:sldMkLst>
-          <pc:docMk/>
-          <pc:sldMk cId="3573907213" sldId="559"/>
-        </pc:sldMkLst>
-      </pc:sldChg>
-      <pc:sldChg chg="add del">
-        <pc:chgData name="Zhao Jin" userId="cd05a825-544c-438a-9ba1-08e63db50b47" providerId="ADAL" clId="{B1F7CFED-A664-443A-A173-5DFC1A50598C}" dt="2021-01-27T08:38:52.330" v="2929" actId="2696"/>
-        <pc:sldMkLst>
-          <pc:docMk/>
-          <pc:sldMk cId="3681791183" sldId="559"/>
-        </pc:sldMkLst>
-      </pc:sldChg>
-      <pc:sldChg chg="add del">
-        <pc:chgData name="Zhao Jin" userId="cd05a825-544c-438a-9ba1-08e63db50b47" providerId="ADAL" clId="{B1F7CFED-A664-443A-A173-5DFC1A50598C}" dt="2021-01-27T07:44:47.950" v="2625" actId="2696"/>
-        <pc:sldMkLst>
-          <pc:docMk/>
-          <pc:sldMk cId="705142466" sldId="560"/>
-        </pc:sldMkLst>
-      </pc:sldChg>
-      <pc:sldChg chg="delSp modSp add del mod">
-        <pc:chgData name="Zhao Jin" userId="cd05a825-544c-438a-9ba1-08e63db50b47" providerId="ADAL" clId="{B1F7CFED-A664-443A-A173-5DFC1A50598C}" dt="2021-01-27T11:27:21.918" v="3300" actId="47"/>
-        <pc:sldMkLst>
-          <pc:docMk/>
-          <pc:sldMk cId="2633024700" sldId="560"/>
-        </pc:sldMkLst>
-      </pc:sldChg>
-      <pc:sldChg chg="add del">
-        <pc:chgData name="Zhao Jin" userId="cd05a825-544c-438a-9ba1-08e63db50b47" providerId="ADAL" clId="{B1F7CFED-A664-443A-A173-5DFC1A50598C}" dt="2021-01-27T08:38:52.330" v="2929" actId="2696"/>
-        <pc:sldMkLst>
-          <pc:docMk/>
-          <pc:sldMk cId="3566869056" sldId="560"/>
-        </pc:sldMkLst>
-      </pc:sldChg>
-      <pc:sldChg chg="addSp delSp modSp add del mod">
-        <pc:chgData name="Zhao Jin" userId="cd05a825-544c-438a-9ba1-08e63db50b47" providerId="ADAL" clId="{B1F7CFED-A664-443A-A173-5DFC1A50598C}" dt="2021-01-27T07:49:21.777" v="2832" actId="47"/>
-        <pc:sldMkLst>
-          <pc:docMk/>
-          <pc:sldMk cId="3148407277" sldId="561"/>
-        </pc:sldMkLst>
-      </pc:sldChg>
-      <pc:sldChg chg="addSp delSp modSp add del mod">
-        <pc:chgData name="Zhao Jin" userId="cd05a825-544c-438a-9ba1-08e63db50b47" providerId="ADAL" clId="{B1F7CFED-A664-443A-A173-5DFC1A50598C}" dt="2021-01-27T08:38:52.330" v="2929" actId="2696"/>
-        <pc:sldMkLst>
-          <pc:docMk/>
-          <pc:sldMk cId="1212688123" sldId="562"/>
-        </pc:sldMkLst>
-      </pc:sldChg>
-      <pc:sldChg chg="modSp add mod">
-        <pc:chgData name="Zhao Jin" userId="cd05a825-544c-438a-9ba1-08e63db50b47" providerId="ADAL" clId="{B1F7CFED-A664-443A-A173-5DFC1A50598C}" dt="2021-01-27T11:27:39.570" v="3303" actId="20577"/>
-        <pc:sldMkLst>
-          <pc:docMk/>
-          <pc:sldMk cId="2739484572" sldId="562"/>
-        </pc:sldMkLst>
-      </pc:sldChg>
-      <pc:sldChg chg="add del">
-        <pc:chgData name="Zhao Jin" userId="cd05a825-544c-438a-9ba1-08e63db50b47" providerId="ADAL" clId="{B1F7CFED-A664-443A-A173-5DFC1A50598C}" dt="2021-01-27T07:47:00.213" v="2716"/>
-        <pc:sldMkLst>
-          <pc:docMk/>
-          <pc:sldMk cId="3295203065" sldId="562"/>
-        </pc:sldMkLst>
-      </pc:sldChg>
-      <pc:sldChg chg="addSp delSp modSp add del mod delAnim">
-        <pc:chgData name="Zhao Jin" userId="cd05a825-544c-438a-9ba1-08e63db50b47" providerId="ADAL" clId="{B1F7CFED-A664-443A-A173-5DFC1A50598C}" dt="2021-01-27T07:45:01.753" v="2627" actId="47"/>
-        <pc:sldMkLst>
-          <pc:docMk/>
-          <pc:sldMk cId="3302621336" sldId="572"/>
-        </pc:sldMkLst>
-      </pc:sldChg>
-      <pc:sldChg chg="add del">
-        <pc:chgData name="Zhao Jin" userId="cd05a825-544c-438a-9ba1-08e63db50b47" providerId="ADAL" clId="{B1F7CFED-A664-443A-A173-5DFC1A50598C}" dt="2021-01-27T07:28:38.512" v="1708"/>
-        <pc:sldMkLst>
-          <pc:docMk/>
-          <pc:sldMk cId="2030195840" sldId="573"/>
-        </pc:sldMkLst>
-      </pc:sldChg>
-      <pc:sldChg chg="add del">
-        <pc:chgData name="Zhao Jin" userId="cd05a825-544c-438a-9ba1-08e63db50b47" providerId="ADAL" clId="{B1F7CFED-A664-443A-A173-5DFC1A50598C}" dt="2021-01-27T07:23:10.496" v="1527" actId="47"/>
-        <pc:sldMkLst>
-          <pc:docMk/>
-          <pc:sldMk cId="3321788103" sldId="573"/>
-        </pc:sldMkLst>
-      </pc:sldChg>
-    </pc:docChg>
-  </pc:docChgLst>
-  <pc:docChgLst>
-    <pc:chgData name="Zhao Jin" userId="cd05a825-544c-438a-9ba1-08e63db50b47" providerId="ADAL" clId="{37A0D694-38DA-4421-B5D3-DEDBFC2EC57C}"/>
-    <pc:docChg chg="undo redo custSel mod addSld delSld modSld sldOrd modMainMaster">
-      <pc:chgData name="Zhao Jin" userId="cd05a825-544c-438a-9ba1-08e63db50b47" providerId="ADAL" clId="{37A0D694-38DA-4421-B5D3-DEDBFC2EC57C}" dt="2021-02-08T07:59:31.262" v="4966" actId="20577"/>
-      <pc:docMkLst>
-        <pc:docMk/>
-      </pc:docMkLst>
-      <pc:sldChg chg="modSp mod">
-        <pc:chgData name="Zhao Jin" userId="cd05a825-544c-438a-9ba1-08e63db50b47" providerId="ADAL" clId="{37A0D694-38DA-4421-B5D3-DEDBFC2EC57C}" dt="2021-02-03T06:56:00.570" v="28" actId="20577"/>
-        <pc:sldMkLst>
-          <pc:docMk/>
-          <pc:sldMk cId="0" sldId="256"/>
-        </pc:sldMkLst>
-      </pc:sldChg>
-      <pc:sldChg chg="modSp mod">
-        <pc:chgData name="Zhao Jin" userId="cd05a825-544c-438a-9ba1-08e63db50b47" providerId="ADAL" clId="{37A0D694-38DA-4421-B5D3-DEDBFC2EC57C}" dt="2021-02-03T09:25:32.601" v="3334" actId="20577"/>
-        <pc:sldMkLst>
-          <pc:docMk/>
-          <pc:sldMk cId="2438607696" sldId="468"/>
-        </pc:sldMkLst>
-      </pc:sldChg>
-      <pc:sldChg chg="modSp del">
-        <pc:chgData name="Zhao Jin" userId="cd05a825-544c-438a-9ba1-08e63db50b47" providerId="ADAL" clId="{37A0D694-38DA-4421-B5D3-DEDBFC2EC57C}" dt="2021-02-03T07:53:06.972" v="43" actId="47"/>
-        <pc:sldMkLst>
-          <pc:docMk/>
-          <pc:sldMk cId="3792232794" sldId="504"/>
-        </pc:sldMkLst>
-      </pc:sldChg>
-      <pc:sldChg chg="addSp delSp modSp add mod ord modAnim">
-        <pc:chgData name="Zhao Jin" userId="cd05a825-544c-438a-9ba1-08e63db50b47" providerId="ADAL" clId="{37A0D694-38DA-4421-B5D3-DEDBFC2EC57C}" dt="2021-02-03T09:26:12.205" v="3350" actId="478"/>
-        <pc:sldMkLst>
-          <pc:docMk/>
-          <pc:sldMk cId="1705639840" sldId="543"/>
-        </pc:sldMkLst>
-      </pc:sldChg>
-      <pc:sldChg chg="modSp del">
-        <pc:chgData name="Zhao Jin" userId="cd05a825-544c-438a-9ba1-08e63db50b47" providerId="ADAL" clId="{37A0D694-38DA-4421-B5D3-DEDBFC2EC57C}" dt="2021-02-03T09:00:14.226" v="1559" actId="47"/>
-        <pc:sldMkLst>
-          <pc:docMk/>
-          <pc:sldMk cId="4228901100" sldId="545"/>
-        </pc:sldMkLst>
-      </pc:sldChg>
-      <pc:sldChg chg="modSp del">
-        <pc:chgData name="Zhao Jin" userId="cd05a825-544c-438a-9ba1-08e63db50b47" providerId="ADAL" clId="{37A0D694-38DA-4421-B5D3-DEDBFC2EC57C}" dt="2021-02-03T07:53:07.263" v="44" actId="47"/>
-        <pc:sldMkLst>
-          <pc:docMk/>
-          <pc:sldMk cId="4225956616" sldId="546"/>
-        </pc:sldMkLst>
-      </pc:sldChg>
-      <pc:sldChg chg="modSp del">
-        <pc:chgData name="Zhao Jin" userId="cd05a825-544c-438a-9ba1-08e63db50b47" providerId="ADAL" clId="{37A0D694-38DA-4421-B5D3-DEDBFC2EC57C}" dt="2021-02-03T09:00:14.226" v="1559" actId="47"/>
-        <pc:sldMkLst>
-          <pc:docMk/>
-          <pc:sldMk cId="1617257579" sldId="548"/>
-        </pc:sldMkLst>
-      </pc:sldChg>
-      <pc:sldChg chg="modSp del">
-        <pc:chgData name="Zhao Jin" userId="cd05a825-544c-438a-9ba1-08e63db50b47" providerId="ADAL" clId="{37A0D694-38DA-4421-B5D3-DEDBFC2EC57C}" dt="2021-02-03T07:53:07.458" v="45" actId="47"/>
-        <pc:sldMkLst>
-          <pc:docMk/>
-          <pc:sldMk cId="3422194935" sldId="552"/>
-        </pc:sldMkLst>
-      </pc:sldChg>
-      <pc:sldChg chg="addSp delSp modSp mod">
-        <pc:chgData name="Zhao Jin" userId="cd05a825-544c-438a-9ba1-08e63db50b47" providerId="ADAL" clId="{37A0D694-38DA-4421-B5D3-DEDBFC2EC57C}" dt="2021-02-08T01:22:04.286" v="3395"/>
-        <pc:sldMkLst>
-          <pc:docMk/>
-          <pc:sldMk cId="1427618944" sldId="553"/>
-        </pc:sldMkLst>
-      </pc:sldChg>
-      <pc:sldChg chg="modSp del">
-        <pc:chgData name="Zhao Jin" userId="cd05a825-544c-438a-9ba1-08e63db50b47" providerId="ADAL" clId="{37A0D694-38DA-4421-B5D3-DEDBFC2EC57C}" dt="2021-02-03T09:00:14.226" v="1559" actId="47"/>
-        <pc:sldMkLst>
-          <pc:docMk/>
-          <pc:sldMk cId="1659983766" sldId="554"/>
-        </pc:sldMkLst>
-      </pc:sldChg>
-      <pc:sldChg chg="modSp del">
-        <pc:chgData name="Zhao Jin" userId="cd05a825-544c-438a-9ba1-08e63db50b47" providerId="ADAL" clId="{37A0D694-38DA-4421-B5D3-DEDBFC2EC57C}" dt="2021-02-03T09:00:14.226" v="1559" actId="47"/>
-        <pc:sldMkLst>
-          <pc:docMk/>
-          <pc:sldMk cId="1268238251" sldId="555"/>
-        </pc:sldMkLst>
-      </pc:sldChg>
-      <pc:sldChg chg="modSp del">
-        <pc:chgData name="Zhao Jin" userId="cd05a825-544c-438a-9ba1-08e63db50b47" providerId="ADAL" clId="{37A0D694-38DA-4421-B5D3-DEDBFC2EC57C}" dt="2021-02-03T09:00:14.226" v="1559" actId="47"/>
-        <pc:sldMkLst>
-          <pc:docMk/>
-          <pc:sldMk cId="3990513599" sldId="556"/>
-        </pc:sldMkLst>
-      </pc:sldChg>
-      <pc:sldChg chg="modSp del">
-        <pc:chgData name="Zhao Jin" userId="cd05a825-544c-438a-9ba1-08e63db50b47" providerId="ADAL" clId="{37A0D694-38DA-4421-B5D3-DEDBFC2EC57C}" dt="2021-02-03T09:00:14.226" v="1559" actId="47"/>
-        <pc:sldMkLst>
-          <pc:docMk/>
-          <pc:sldMk cId="788021743" sldId="557"/>
-        </pc:sldMkLst>
-      </pc:sldChg>
-      <pc:sldChg chg="addSp delSp modSp add mod ord delAnim modAnim">
-        <pc:chgData name="Zhao Jin" userId="cd05a825-544c-438a-9ba1-08e63db50b47" providerId="ADAL" clId="{37A0D694-38DA-4421-B5D3-DEDBFC2EC57C}" dt="2021-02-08T07:59:31.262" v="4966" actId="20577"/>
-        <pc:sldMkLst>
-          <pc:docMk/>
-          <pc:sldMk cId="487843573" sldId="558"/>
-        </pc:sldMkLst>
-      </pc:sldChg>
-      <pc:sldChg chg="modSp del">
-        <pc:chgData name="Zhao Jin" userId="cd05a825-544c-438a-9ba1-08e63db50b47" providerId="ADAL" clId="{37A0D694-38DA-4421-B5D3-DEDBFC2EC57C}" dt="2021-02-03T09:00:14.226" v="1559" actId="47"/>
-        <pc:sldMkLst>
-          <pc:docMk/>
-          <pc:sldMk cId="686532275" sldId="558"/>
-        </pc:sldMkLst>
-      </pc:sldChg>
-      <pc:sldChg chg="modSp del">
-        <pc:chgData name="Zhao Jin" userId="cd05a825-544c-438a-9ba1-08e63db50b47" providerId="ADAL" clId="{37A0D694-38DA-4421-B5D3-DEDBFC2EC57C}" dt="2021-02-03T09:00:14.226" v="1559" actId="47"/>
-        <pc:sldMkLst>
-          <pc:docMk/>
-          <pc:sldMk cId="182578491" sldId="559"/>
-        </pc:sldMkLst>
-      </pc:sldChg>
-      <pc:sldChg chg="modSp del">
-        <pc:chgData name="Zhao Jin" userId="cd05a825-544c-438a-9ba1-08e63db50b47" providerId="ADAL" clId="{37A0D694-38DA-4421-B5D3-DEDBFC2EC57C}" dt="2021-02-03T09:00:14.226" v="1559" actId="47"/>
-        <pc:sldMkLst>
-          <pc:docMk/>
-          <pc:sldMk cId="2739484572" sldId="562"/>
-        </pc:sldMkLst>
-      </pc:sldChg>
-      <pc:sldChg chg="delSp modSp add del mod">
-        <pc:chgData name="Zhao Jin" userId="cd05a825-544c-438a-9ba1-08e63db50b47" providerId="ADAL" clId="{37A0D694-38DA-4421-B5D3-DEDBFC2EC57C}" dt="2021-02-03T09:25:42.125" v="3337" actId="20577"/>
-        <pc:sldMkLst>
-          <pc:docMk/>
-          <pc:sldMk cId="92291925" sldId="563"/>
-        </pc:sldMkLst>
-      </pc:sldChg>
-      <pc:sldChg chg="addSp delSp modSp add mod addAnim delAnim modAnim">
-        <pc:chgData name="Zhao Jin" userId="cd05a825-544c-438a-9ba1-08e63db50b47" providerId="ADAL" clId="{37A0D694-38DA-4421-B5D3-DEDBFC2EC57C}" dt="2021-02-08T01:23:58.466" v="3512" actId="14734"/>
-        <pc:sldMkLst>
-          <pc:docMk/>
-          <pc:sldMk cId="894186310" sldId="564"/>
-        </pc:sldMkLst>
-      </pc:sldChg>
-      <pc:sldChg chg="delSp modSp add mod">
-        <pc:chgData name="Zhao Jin" userId="cd05a825-544c-438a-9ba1-08e63db50b47" providerId="ADAL" clId="{37A0D694-38DA-4421-B5D3-DEDBFC2EC57C}" dt="2021-02-08T01:59:53.143" v="4810" actId="207"/>
-        <pc:sldMkLst>
-          <pc:docMk/>
-          <pc:sldMk cId="1732540191" sldId="568"/>
-        </pc:sldMkLst>
-      </pc:sldChg>
-      <pc:sldChg chg="addSp delSp modSp add mod delAnim modAnim">
-        <pc:chgData name="Zhao Jin" userId="cd05a825-544c-438a-9ba1-08e63db50b47" providerId="ADAL" clId="{37A0D694-38DA-4421-B5D3-DEDBFC2EC57C}" dt="2021-02-08T02:01:55.171" v="4907" actId="20577"/>
-        <pc:sldMkLst>
-          <pc:docMk/>
-          <pc:sldMk cId="3229890649" sldId="569"/>
-        </pc:sldMkLst>
-      </pc:sldChg>
-      <pc:sldChg chg="addSp delSp modSp add del mod">
-        <pc:chgData name="Zhao Jin" userId="cd05a825-544c-438a-9ba1-08e63db50b47" providerId="ADAL" clId="{37A0D694-38DA-4421-B5D3-DEDBFC2EC57C}" dt="2021-02-08T01:41:10.766" v="4086" actId="1038"/>
-        <pc:sldMkLst>
-          <pc:docMk/>
-          <pc:sldMk cId="3922430229" sldId="580"/>
-        </pc:sldMkLst>
-      </pc:sldChg>
-      <pc:sldChg chg="delSp modSp add mod">
-        <pc:chgData name="Zhao Jin" userId="cd05a825-544c-438a-9ba1-08e63db50b47" providerId="ADAL" clId="{37A0D694-38DA-4421-B5D3-DEDBFC2EC57C}" dt="2021-02-08T01:42:07.875" v="4091"/>
-        <pc:sldMkLst>
-          <pc:docMk/>
-          <pc:sldMk cId="1886636263" sldId="581"/>
-        </pc:sldMkLst>
-      </pc:sldChg>
-      <pc:sldChg chg="modSp add del mod">
-        <pc:chgData name="Zhao Jin" userId="cd05a825-544c-438a-9ba1-08e63db50b47" providerId="ADAL" clId="{37A0D694-38DA-4421-B5D3-DEDBFC2EC57C}" dt="2021-02-03T08:47:45.744" v="1076" actId="47"/>
-        <pc:sldMkLst>
-          <pc:docMk/>
-          <pc:sldMk cId="893488834" sldId="587"/>
-        </pc:sldMkLst>
-      </pc:sldChg>
-      <pc:sldChg chg="addSp modSp add del mod">
-        <pc:chgData name="Zhao Jin" userId="cd05a825-544c-438a-9ba1-08e63db50b47" providerId="ADAL" clId="{37A0D694-38DA-4421-B5D3-DEDBFC2EC57C}" dt="2021-02-03T08:47:43.004" v="1075" actId="47"/>
-        <pc:sldMkLst>
-          <pc:docMk/>
-          <pc:sldMk cId="2663336489" sldId="588"/>
-        </pc:sldMkLst>
-      </pc:sldChg>
-      <pc:sldChg chg="addSp delSp modSp add mod">
-        <pc:chgData name="Zhao Jin" userId="cd05a825-544c-438a-9ba1-08e63db50b47" providerId="ADAL" clId="{37A0D694-38DA-4421-B5D3-DEDBFC2EC57C}" dt="2021-02-03T09:26:19.685" v="3354" actId="478"/>
-        <pc:sldMkLst>
-          <pc:docMk/>
-          <pc:sldMk cId="211149325" sldId="589"/>
-        </pc:sldMkLst>
-      </pc:sldChg>
-      <pc:sldChg chg="addSp delSp modSp add mod delAnim modAnim">
-        <pc:chgData name="Zhao Jin" userId="cd05a825-544c-438a-9ba1-08e63db50b47" providerId="ADAL" clId="{37A0D694-38DA-4421-B5D3-DEDBFC2EC57C}" dt="2021-02-08T01:38:27.881" v="3917" actId="20577"/>
-        <pc:sldMkLst>
-          <pc:docMk/>
-          <pc:sldMk cId="4156536479" sldId="590"/>
-        </pc:sldMkLst>
-      </pc:sldChg>
-      <pc:sldChg chg="addSp delSp modSp add mod delAnim">
-        <pc:chgData name="Zhao Jin" userId="cd05a825-544c-438a-9ba1-08e63db50b47" providerId="ADAL" clId="{37A0D694-38DA-4421-B5D3-DEDBFC2EC57C}" dt="2021-02-08T01:30:20.214" v="3620" actId="21"/>
-        <pc:sldMkLst>
-          <pc:docMk/>
-          <pc:sldMk cId="567798019" sldId="591"/>
-        </pc:sldMkLst>
-      </pc:sldChg>
-      <pc:sldChg chg="addSp delSp modSp add mod delAnim">
-        <pc:chgData name="Zhao Jin" userId="cd05a825-544c-438a-9ba1-08e63db50b47" providerId="ADAL" clId="{37A0D694-38DA-4421-B5D3-DEDBFC2EC57C}" dt="2021-02-08T01:32:46.621" v="3700" actId="478"/>
-        <pc:sldMkLst>
-          <pc:docMk/>
-          <pc:sldMk cId="137810324" sldId="592"/>
-        </pc:sldMkLst>
-      </pc:sldChg>
-      <pc:sldChg chg="addSp delSp modSp add mod">
-        <pc:chgData name="Zhao Jin" userId="cd05a825-544c-438a-9ba1-08e63db50b47" providerId="ADAL" clId="{37A0D694-38DA-4421-B5D3-DEDBFC2EC57C}" dt="2021-02-04T05:05:17.681" v="3392" actId="14100"/>
-        <pc:sldMkLst>
-          <pc:docMk/>
-          <pc:sldMk cId="3233082706" sldId="593"/>
-        </pc:sldMkLst>
-      </pc:sldChg>
-      <pc:sldChg chg="add del">
-        <pc:chgData name="Zhao Jin" userId="cd05a825-544c-438a-9ba1-08e63db50b47" providerId="ADAL" clId="{37A0D694-38DA-4421-B5D3-DEDBFC2EC57C}" dt="2021-02-03T08:52:31.399" v="1274"/>
-        <pc:sldMkLst>
-          <pc:docMk/>
-          <pc:sldMk cId="2125946801" sldId="594"/>
-        </pc:sldMkLst>
-      </pc:sldChg>
-      <pc:sldChg chg="addSp delSp modSp add mod delAnim">
-        <pc:chgData name="Zhao Jin" userId="cd05a825-544c-438a-9ba1-08e63db50b47" providerId="ADAL" clId="{37A0D694-38DA-4421-B5D3-DEDBFC2EC57C}" dt="2021-02-03T09:39:04.677" v="3364" actId="13926"/>
-        <pc:sldMkLst>
-          <pc:docMk/>
-          <pc:sldMk cId="2217225800" sldId="594"/>
-        </pc:sldMkLst>
-      </pc:sldChg>
-      <pc:sldChg chg="addSp modSp add mod">
-        <pc:chgData name="Zhao Jin" userId="cd05a825-544c-438a-9ba1-08e63db50b47" providerId="ADAL" clId="{37A0D694-38DA-4421-B5D3-DEDBFC2EC57C}" dt="2021-02-08T02:03:35.963" v="4958" actId="1076"/>
-        <pc:sldMkLst>
-          <pc:docMk/>
-          <pc:sldMk cId="2419983458" sldId="595"/>
-        </pc:sldMkLst>
-      </pc:sldChg>
-      <pc:sldChg chg="addSp delSp modSp add del mod delAnim">
-        <pc:chgData name="Zhao Jin" userId="cd05a825-544c-438a-9ba1-08e63db50b47" providerId="ADAL" clId="{37A0D694-38DA-4421-B5D3-DEDBFC2EC57C}" dt="2021-02-03T09:05:13.520" v="1668" actId="47"/>
-        <pc:sldMkLst>
-          <pc:docMk/>
-          <pc:sldMk cId="765980287" sldId="596"/>
-        </pc:sldMkLst>
-      </pc:sldChg>
-      <pc:sldChg chg="addSp delSp modSp add mod delAnim modAnim">
-        <pc:chgData name="Zhao Jin" userId="cd05a825-544c-438a-9ba1-08e63db50b47" providerId="ADAL" clId="{37A0D694-38DA-4421-B5D3-DEDBFC2EC57C}" dt="2021-02-08T01:42:03.171" v="4089"/>
-        <pc:sldMkLst>
-          <pc:docMk/>
-          <pc:sldMk cId="3643682471" sldId="596"/>
-        </pc:sldMkLst>
-      </pc:sldChg>
-      <pc:sldChg chg="delSp modSp add mod modAnim">
-        <pc:chgData name="Zhao Jin" userId="cd05a825-544c-438a-9ba1-08e63db50b47" providerId="ADAL" clId="{37A0D694-38DA-4421-B5D3-DEDBFC2EC57C}" dt="2021-02-03T09:39:34.898" v="3370" actId="6549"/>
-        <pc:sldMkLst>
-          <pc:docMk/>
-          <pc:sldMk cId="3231946261" sldId="597"/>
-        </pc:sldMkLst>
-      </pc:sldChg>
-      <pc:sldChg chg="delSp modSp add mod ord">
-        <pc:chgData name="Zhao Jin" userId="cd05a825-544c-438a-9ba1-08e63db50b47" providerId="ADAL" clId="{37A0D694-38DA-4421-B5D3-DEDBFC2EC57C}" dt="2021-02-08T01:42:01.261" v="4088"/>
-        <pc:sldMkLst>
-          <pc:docMk/>
-          <pc:sldMk cId="4002657513" sldId="598"/>
-        </pc:sldMkLst>
-      </pc:sldChg>
-      <pc:sldChg chg="addSp delSp modSp add mod ord modClrScheme addAnim delAnim modAnim chgLayout">
-        <pc:chgData name="Zhao Jin" userId="cd05a825-544c-438a-9ba1-08e63db50b47" providerId="ADAL" clId="{37A0D694-38DA-4421-B5D3-DEDBFC2EC57C}" dt="2021-02-04T05:05:47.079" v="3393" actId="478"/>
-        <pc:sldMkLst>
-          <pc:docMk/>
-          <pc:sldMk cId="2930953569" sldId="599"/>
-        </pc:sldMkLst>
-      </pc:sldChg>
-      <pc:sldChg chg="addSp delSp modSp add mod ord delAnim modAnim">
-        <pc:chgData name="Zhao Jin" userId="cd05a825-544c-438a-9ba1-08e63db50b47" providerId="ADAL" clId="{37A0D694-38DA-4421-B5D3-DEDBFC2EC57C}" dt="2021-02-08T02:02:28.200" v="4908" actId="20577"/>
-        <pc:sldMkLst>
-          <pc:docMk/>
-          <pc:sldMk cId="880934081" sldId="600"/>
-        </pc:sldMkLst>
-      </pc:sldChg>
-      <pc:sldMasterChg chg="modSp modSldLayout">
-        <pc:chgData name="Zhao Jin" userId="cd05a825-544c-438a-9ba1-08e63db50b47" providerId="ADAL" clId="{37A0D694-38DA-4421-B5D3-DEDBFC2EC57C}" dt="2021-02-03T06:56:12.527" v="36"/>
-        <pc:sldMasterMkLst>
-          <pc:docMk/>
-          <pc:sldMasterMk cId="0" sldId="2147485087"/>
-        </pc:sldMasterMkLst>
-        <pc:sldLayoutChg chg="modSp">
-          <pc:chgData name="Zhao Jin" userId="cd05a825-544c-438a-9ba1-08e63db50b47" providerId="ADAL" clId="{37A0D694-38DA-4421-B5D3-DEDBFC2EC57C}" dt="2021-02-03T06:56:12.527" v="36"/>
-          <pc:sldLayoutMkLst>
-            <pc:docMk/>
-            <pc:sldMasterMk cId="0" sldId="2147485087"/>
-            <pc:sldLayoutMk cId="0" sldId="2147485088"/>
-          </pc:sldLayoutMkLst>
-        </pc:sldLayoutChg>
-        <pc:sldLayoutChg chg="modSp">
-          <pc:chgData name="Zhao Jin" userId="cd05a825-544c-438a-9ba1-08e63db50b47" providerId="ADAL" clId="{37A0D694-38DA-4421-B5D3-DEDBFC2EC57C}" dt="2021-02-03T06:56:12.527" v="36"/>
-          <pc:sldLayoutMkLst>
-            <pc:docMk/>
-            <pc:sldMasterMk cId="0" sldId="2147485087"/>
-            <pc:sldLayoutMk cId="0" sldId="2147485089"/>
-          </pc:sldLayoutMkLst>
-        </pc:sldLayoutChg>
-        <pc:sldLayoutChg chg="modSp">
-          <pc:chgData name="Zhao Jin" userId="cd05a825-544c-438a-9ba1-08e63db50b47" providerId="ADAL" clId="{37A0D694-38DA-4421-B5D3-DEDBFC2EC57C}" dt="2021-02-03T06:56:12.527" v="36"/>
-          <pc:sldLayoutMkLst>
-            <pc:docMk/>
-            <pc:sldMasterMk cId="0" sldId="2147485087"/>
-            <pc:sldLayoutMk cId="0" sldId="2147485090"/>
-          </pc:sldLayoutMkLst>
-        </pc:sldLayoutChg>
-        <pc:sldLayoutChg chg="modSp">
-          <pc:chgData name="Zhao Jin" userId="cd05a825-544c-438a-9ba1-08e63db50b47" providerId="ADAL" clId="{37A0D694-38DA-4421-B5D3-DEDBFC2EC57C}" dt="2021-02-03T06:56:12.527" v="36"/>
-          <pc:sldLayoutMkLst>
-            <pc:docMk/>
-            <pc:sldMasterMk cId="0" sldId="2147485087"/>
-            <pc:sldLayoutMk cId="0" sldId="2147485091"/>
-          </pc:sldLayoutMkLst>
-        </pc:sldLayoutChg>
-        <pc:sldLayoutChg chg="modSp">
-          <pc:chgData name="Zhao Jin" userId="cd05a825-544c-438a-9ba1-08e63db50b47" providerId="ADAL" clId="{37A0D694-38DA-4421-B5D3-DEDBFC2EC57C}" dt="2021-02-03T06:56:12.527" v="36"/>
-          <pc:sldLayoutMkLst>
-            <pc:docMk/>
-            <pc:sldMasterMk cId="0" sldId="2147485087"/>
-            <pc:sldLayoutMk cId="0" sldId="2147485092"/>
-          </pc:sldLayoutMkLst>
-        </pc:sldLayoutChg>
-        <pc:sldLayoutChg chg="modSp">
-          <pc:chgData name="Zhao Jin" userId="cd05a825-544c-438a-9ba1-08e63db50b47" providerId="ADAL" clId="{37A0D694-38DA-4421-B5D3-DEDBFC2EC57C}" dt="2021-02-03T06:56:12.527" v="36"/>
-          <pc:sldLayoutMkLst>
-            <pc:docMk/>
-            <pc:sldMasterMk cId="0" sldId="2147485087"/>
-            <pc:sldLayoutMk cId="0" sldId="2147485093"/>
-          </pc:sldLayoutMkLst>
-        </pc:sldLayoutChg>
-        <pc:sldLayoutChg chg="modSp">
-          <pc:chgData name="Zhao Jin" userId="cd05a825-544c-438a-9ba1-08e63db50b47" providerId="ADAL" clId="{37A0D694-38DA-4421-B5D3-DEDBFC2EC57C}" dt="2021-02-03T06:56:12.527" v="36"/>
-          <pc:sldLayoutMkLst>
-            <pc:docMk/>
-            <pc:sldMasterMk cId="0" sldId="2147485087"/>
-            <pc:sldLayoutMk cId="0" sldId="2147485094"/>
-          </pc:sldLayoutMkLst>
-        </pc:sldLayoutChg>
-        <pc:sldLayoutChg chg="modSp">
-          <pc:chgData name="Zhao Jin" userId="cd05a825-544c-438a-9ba1-08e63db50b47" providerId="ADAL" clId="{37A0D694-38DA-4421-B5D3-DEDBFC2EC57C}" dt="2021-02-03T06:56:12.527" v="36"/>
-          <pc:sldLayoutMkLst>
-            <pc:docMk/>
-            <pc:sldMasterMk cId="0" sldId="2147485087"/>
-            <pc:sldLayoutMk cId="0" sldId="2147485095"/>
-          </pc:sldLayoutMkLst>
-        </pc:sldLayoutChg>
-        <pc:sldLayoutChg chg="modSp">
-          <pc:chgData name="Zhao Jin" userId="cd05a825-544c-438a-9ba1-08e63db50b47" providerId="ADAL" clId="{37A0D694-38DA-4421-B5D3-DEDBFC2EC57C}" dt="2021-02-03T06:56:12.527" v="36"/>
-          <pc:sldLayoutMkLst>
-            <pc:docMk/>
-            <pc:sldMasterMk cId="0" sldId="2147485087"/>
-            <pc:sldLayoutMk cId="0" sldId="2147485096"/>
-          </pc:sldLayoutMkLst>
-        </pc:sldLayoutChg>
-        <pc:sldLayoutChg chg="modSp">
-          <pc:chgData name="Zhao Jin" userId="cd05a825-544c-438a-9ba1-08e63db50b47" providerId="ADAL" clId="{37A0D694-38DA-4421-B5D3-DEDBFC2EC57C}" dt="2021-02-03T06:56:12.527" v="36"/>
-          <pc:sldLayoutMkLst>
-            <pc:docMk/>
-            <pc:sldMasterMk cId="0" sldId="2147485087"/>
-            <pc:sldLayoutMk cId="0" sldId="2147485097"/>
-          </pc:sldLayoutMkLst>
-        </pc:sldLayoutChg>
-        <pc:sldLayoutChg chg="modSp">
-          <pc:chgData name="Zhao Jin" userId="cd05a825-544c-438a-9ba1-08e63db50b47" providerId="ADAL" clId="{37A0D694-38DA-4421-B5D3-DEDBFC2EC57C}" dt="2021-02-03T06:56:12.527" v="36"/>
-          <pc:sldLayoutMkLst>
-            <pc:docMk/>
-            <pc:sldMasterMk cId="0" sldId="2147485087"/>
-            <pc:sldLayoutMk cId="0" sldId="2147485098"/>
-          </pc:sldLayoutMkLst>
-        </pc:sldLayoutChg>
-      </pc:sldMasterChg>
-    </pc:docChg>
-  </pc:docChgLst>
-  <pc:docChgLst>
-    <pc:chgData name="Zhao Jin" userId="cd05a825-544c-438a-9ba1-08e63db50b47" providerId="ADAL" clId="{9EE8A341-E075-4BCE-AF6C-E2386705436A}"/>
-    <pc:docChg chg="undo custSel modSld">
-      <pc:chgData name="Zhao Jin" userId="cd05a825-544c-438a-9ba1-08e63db50b47" providerId="ADAL" clId="{9EE8A341-E075-4BCE-AF6C-E2386705436A}" dt="2025-04-01T01:47:35.037" v="577"/>
-      <pc:docMkLst>
-        <pc:docMk/>
-      </pc:docMkLst>
-      <pc:sldChg chg="modSp mod">
-        <pc:chgData name="Zhao Jin" userId="cd05a825-544c-438a-9ba1-08e63db50b47" providerId="ADAL" clId="{9EE8A341-E075-4BCE-AF6C-E2386705436A}" dt="2025-04-01T01:36:21.441" v="197" actId="20577"/>
-        <pc:sldMkLst>
-          <pc:docMk/>
-          <pc:sldMk cId="52021965" sldId="590"/>
-        </pc:sldMkLst>
-        <pc:spChg chg="mod">
-          <ac:chgData name="Zhao Jin" userId="cd05a825-544c-438a-9ba1-08e63db50b47" providerId="ADAL" clId="{9EE8A341-E075-4BCE-AF6C-E2386705436A}" dt="2025-04-01T01:36:21.441" v="197" actId="20577"/>
-          <ac:spMkLst>
-            <pc:docMk/>
-            <pc:sldMk cId="52021965" sldId="590"/>
-            <ac:spMk id="8" creationId="{00000000-0000-0000-0000-000000000000}"/>
-          </ac:spMkLst>
-        </pc:spChg>
-      </pc:sldChg>
-      <pc:sldChg chg="modSp mod modAnim">
-        <pc:chgData name="Zhao Jin" userId="cd05a825-544c-438a-9ba1-08e63db50b47" providerId="ADAL" clId="{9EE8A341-E075-4BCE-AF6C-E2386705436A}" dt="2025-04-01T01:41:16.840" v="348" actId="20577"/>
-        <pc:sldMkLst>
-          <pc:docMk/>
-          <pc:sldMk cId="375744792" sldId="591"/>
-        </pc:sldMkLst>
-        <pc:spChg chg="mod">
-          <ac:chgData name="Zhao Jin" userId="cd05a825-544c-438a-9ba1-08e63db50b47" providerId="ADAL" clId="{9EE8A341-E075-4BCE-AF6C-E2386705436A}" dt="2025-04-01T01:41:16.840" v="348" actId="20577"/>
-          <ac:spMkLst>
-            <pc:docMk/>
-            <pc:sldMk cId="375744792" sldId="591"/>
-            <ac:spMk id="34" creationId="{00000000-0000-0000-0000-000000000000}"/>
-          </ac:spMkLst>
-        </pc:spChg>
-      </pc:sldChg>
-      <pc:sldChg chg="modAnim">
-        <pc:chgData name="Zhao Jin" userId="cd05a825-544c-438a-9ba1-08e63db50b47" providerId="ADAL" clId="{9EE8A341-E075-4BCE-AF6C-E2386705436A}" dt="2025-04-01T01:40:15.851" v="304"/>
-        <pc:sldMkLst>
-          <pc:docMk/>
-          <pc:sldMk cId="2497011922" sldId="592"/>
-        </pc:sldMkLst>
-      </pc:sldChg>
-      <pc:sldChg chg="modSp modAnim">
-        <pc:chgData name="Zhao Jin" userId="cd05a825-544c-438a-9ba1-08e63db50b47" providerId="ADAL" clId="{9EE8A341-E075-4BCE-AF6C-E2386705436A}" dt="2025-04-01T01:37:04.821" v="206" actId="20577"/>
-        <pc:sldMkLst>
-          <pc:docMk/>
-          <pc:sldMk cId="1854371286" sldId="597"/>
-        </pc:sldMkLst>
-        <pc:spChg chg="mod">
-          <ac:chgData name="Zhao Jin" userId="cd05a825-544c-438a-9ba1-08e63db50b47" providerId="ADAL" clId="{9EE8A341-E075-4BCE-AF6C-E2386705436A}" dt="2025-04-01T01:37:04.821" v="206" actId="20577"/>
-          <ac:spMkLst>
-            <pc:docMk/>
-            <pc:sldMk cId="1854371286" sldId="597"/>
-            <ac:spMk id="11" creationId="{00000000-0000-0000-0000-000000000000}"/>
-          </ac:spMkLst>
-        </pc:spChg>
-      </pc:sldChg>
-      <pc:sldChg chg="addSp modSp mod modAnim">
-        <pc:chgData name="Zhao Jin" userId="cd05a825-544c-438a-9ba1-08e63db50b47" providerId="ADAL" clId="{9EE8A341-E075-4BCE-AF6C-E2386705436A}" dt="2025-04-01T01:39:22.393" v="298"/>
-        <pc:sldMkLst>
-          <pc:docMk/>
-          <pc:sldMk cId="1365241982" sldId="598"/>
-        </pc:sldMkLst>
-        <pc:spChg chg="add mod">
-          <ac:chgData name="Zhao Jin" userId="cd05a825-544c-438a-9ba1-08e63db50b47" providerId="ADAL" clId="{9EE8A341-E075-4BCE-AF6C-E2386705436A}" dt="2025-04-01T01:39:00.886" v="292" actId="14100"/>
-          <ac:spMkLst>
-            <pc:docMk/>
-            <pc:sldMk cId="1365241982" sldId="598"/>
-            <ac:spMk id="3" creationId="{A427CF8D-9BB6-0C39-9BBA-08CDD54C5232}"/>
-          </ac:spMkLst>
-        </pc:spChg>
-        <pc:spChg chg="add mod">
-          <ac:chgData name="Zhao Jin" userId="cd05a825-544c-438a-9ba1-08e63db50b47" providerId="ADAL" clId="{9EE8A341-E075-4BCE-AF6C-E2386705436A}" dt="2025-04-01T01:39:03.894" v="293" actId="14100"/>
-          <ac:spMkLst>
-            <pc:docMk/>
-            <pc:sldMk cId="1365241982" sldId="598"/>
-            <ac:spMk id="4" creationId="{F48B6148-2E57-8BFF-6DE9-4E0A61A16845}"/>
-          </ac:spMkLst>
-        </pc:spChg>
-      </pc:sldChg>
-      <pc:sldChg chg="modAnim">
-        <pc:chgData name="Zhao Jin" userId="cd05a825-544c-438a-9ba1-08e63db50b47" providerId="ADAL" clId="{9EE8A341-E075-4BCE-AF6C-E2386705436A}" dt="2025-04-01T01:39:49.022" v="299"/>
-        <pc:sldMkLst>
-          <pc:docMk/>
-          <pc:sldMk cId="2302344841" sldId="599"/>
-        </pc:sldMkLst>
-      </pc:sldChg>
-      <pc:sldChg chg="modSp mod">
-        <pc:chgData name="Zhao Jin" userId="cd05a825-544c-438a-9ba1-08e63db50b47" providerId="ADAL" clId="{9EE8A341-E075-4BCE-AF6C-E2386705436A}" dt="2025-04-01T01:44:31.442" v="509" actId="20577"/>
-        <pc:sldMkLst>
-          <pc:docMk/>
-          <pc:sldMk cId="4018933415" sldId="609"/>
-        </pc:sldMkLst>
-        <pc:spChg chg="mod">
-          <ac:chgData name="Zhao Jin" userId="cd05a825-544c-438a-9ba1-08e63db50b47" providerId="ADAL" clId="{9EE8A341-E075-4BCE-AF6C-E2386705436A}" dt="2025-04-01T01:44:31.442" v="509" actId="20577"/>
-          <ac:spMkLst>
-            <pc:docMk/>
-            <pc:sldMk cId="4018933415" sldId="609"/>
-            <ac:spMk id="10" creationId="{00000000-0000-0000-0000-000000000000}"/>
-          </ac:spMkLst>
-        </pc:spChg>
-      </pc:sldChg>
-      <pc:sldChg chg="modSp mod">
-        <pc:chgData name="Zhao Jin" userId="cd05a825-544c-438a-9ba1-08e63db50b47" providerId="ADAL" clId="{9EE8A341-E075-4BCE-AF6C-E2386705436A}" dt="2025-04-01T01:45:44.645" v="563" actId="20577"/>
-        <pc:sldMkLst>
-          <pc:docMk/>
-          <pc:sldMk cId="2596011763" sldId="610"/>
-        </pc:sldMkLst>
-        <pc:spChg chg="mod">
-          <ac:chgData name="Zhao Jin" userId="cd05a825-544c-438a-9ba1-08e63db50b47" providerId="ADAL" clId="{9EE8A341-E075-4BCE-AF6C-E2386705436A}" dt="2025-04-01T01:45:44.645" v="563" actId="20577"/>
-          <ac:spMkLst>
-            <pc:docMk/>
-            <pc:sldMk cId="2596011763" sldId="610"/>
-            <ac:spMk id="11" creationId="{00000000-0000-0000-0000-000000000000}"/>
-          </ac:spMkLst>
-        </pc:spChg>
-      </pc:sldChg>
-      <pc:sldChg chg="modAnim">
-        <pc:chgData name="Zhao Jin" userId="cd05a825-544c-438a-9ba1-08e63db50b47" providerId="ADAL" clId="{9EE8A341-E075-4BCE-AF6C-E2386705436A}" dt="2025-04-01T01:46:01.207" v="564"/>
-        <pc:sldMkLst>
-          <pc:docMk/>
-          <pc:sldMk cId="1096816361" sldId="620"/>
-        </pc:sldMkLst>
-      </pc:sldChg>
-      <pc:sldChg chg="modAnim">
-        <pc:chgData name="Zhao Jin" userId="cd05a825-544c-438a-9ba1-08e63db50b47" providerId="ADAL" clId="{9EE8A341-E075-4BCE-AF6C-E2386705436A}" dt="2025-04-01T01:46:14.453" v="566"/>
-        <pc:sldMkLst>
-          <pc:docMk/>
-          <pc:sldMk cId="4110967709" sldId="621"/>
-        </pc:sldMkLst>
-      </pc:sldChg>
-      <pc:sldChg chg="modAnim">
-        <pc:chgData name="Zhao Jin" userId="cd05a825-544c-438a-9ba1-08e63db50b47" providerId="ADAL" clId="{9EE8A341-E075-4BCE-AF6C-E2386705436A}" dt="2025-04-01T01:47:19.019" v="574"/>
-        <pc:sldMkLst>
-          <pc:docMk/>
-          <pc:sldMk cId="858923647" sldId="654"/>
-        </pc:sldMkLst>
-      </pc:sldChg>
-      <pc:sldChg chg="modAnim">
-        <pc:chgData name="Zhao Jin" userId="cd05a825-544c-438a-9ba1-08e63db50b47" providerId="ADAL" clId="{9EE8A341-E075-4BCE-AF6C-E2386705436A}" dt="2025-04-01T01:47:04.698" v="572"/>
-        <pc:sldMkLst>
-          <pc:docMk/>
-          <pc:sldMk cId="4141080286" sldId="655"/>
-        </pc:sldMkLst>
-      </pc:sldChg>
-      <pc:sldChg chg="modAnim">
-        <pc:chgData name="Zhao Jin" userId="cd05a825-544c-438a-9ba1-08e63db50b47" providerId="ADAL" clId="{9EE8A341-E075-4BCE-AF6C-E2386705436A}" dt="2025-04-01T01:47:35.037" v="577"/>
-        <pc:sldMkLst>
-          <pc:docMk/>
-          <pc:sldMk cId="1245696994" sldId="657"/>
-        </pc:sldMkLst>
       </pc:sldChg>
     </pc:docChg>
   </pc:docChgLst>
@@ -4518,7 +1270,7 @@
               <a:pPr>
                 <a:defRPr/>
               </a:pPr>
-              <a:t>4/1/2025</a:t>
+              <a:t>3/31/2026</a:t>
             </a:fld>
             <a:endParaRPr lang="en-US"/>
           </a:p>
@@ -14396,7 +11148,7 @@
               <a:defRPr/>
             </a:pPr>
             <a:r>
-              <a:rPr lang="en-US" sz="2000" b="1">
+              <a:rPr lang="en-US" sz="2000" b="1" dirty="0">
                 <a:solidFill>
                   <a:srgbClr val="0000FF"/>
                 </a:solidFill>
@@ -14406,14 +11158,14 @@
               <a:t>long</a:t>
             </a:r>
             <a:r>
-              <a:rPr lang="en-US" sz="2000" b="1">
+              <a:rPr lang="en-US" sz="2000" b="1" dirty="0">
                 <a:latin typeface="Courier New" pitchFamily="49" charset="0"/>
                 <a:cs typeface="Courier New" pitchFamily="49" charset="0"/>
               </a:rPr>
-              <a:t> sumSq3(</a:t>
-            </a:r>
-            <a:r>
-              <a:rPr lang="en-US" sz="2000" b="1">
+              <a:t> sum_sq3(</a:t>
+            </a:r>
+            <a:r>
+              <a:rPr lang="en-US" sz="2000" b="1" dirty="0">
                 <a:solidFill>
                   <a:srgbClr val="0000FF"/>
                 </a:solidFill>
@@ -14423,14 +11175,14 @@
               <a:t>long</a:t>
             </a:r>
             <a:r>
-              <a:rPr lang="en-US" sz="2000" b="1">
+              <a:rPr lang="en-US" sz="2000" b="1" dirty="0">
                 <a:latin typeface="Courier New" pitchFamily="49" charset="0"/>
                 <a:cs typeface="Courier New" pitchFamily="49" charset="0"/>
               </a:rPr>
               <a:t> x, </a:t>
             </a:r>
             <a:r>
-              <a:rPr lang="en-US" sz="2000" b="1">
+              <a:rPr lang="en-US" sz="2000" b="1" dirty="0">
                 <a:solidFill>
                   <a:srgbClr val="0000FF"/>
                 </a:solidFill>
@@ -14440,7 +11192,7 @@
               <a:t>long</a:t>
             </a:r>
             <a:r>
-              <a:rPr lang="en-US" sz="2000" b="1">
+              <a:rPr lang="en-US" sz="2000" b="1" dirty="0">
                 <a:latin typeface="Courier New" pitchFamily="49" charset="0"/>
                 <a:cs typeface="Courier New" pitchFamily="49" charset="0"/>
               </a:rPr>
@@ -14457,14 +11209,14 @@
               <a:defRPr/>
             </a:pPr>
             <a:r>
-              <a:rPr lang="en-US" sz="2000" b="1">
+              <a:rPr lang="en-US" sz="2000" b="1" dirty="0">
                 <a:latin typeface="Courier New" pitchFamily="49" charset="0"/>
                 <a:cs typeface="Courier New" pitchFamily="49" charset="0"/>
               </a:rPr>
               <a:t>	</a:t>
             </a:r>
             <a:r>
-              <a:rPr lang="en-US" sz="2000" b="1">
+              <a:rPr lang="en-US" sz="2000" b="1" dirty="0">
                 <a:solidFill>
                   <a:srgbClr val="0000FF"/>
                 </a:solidFill>
@@ -14474,14 +11226,14 @@
               <a:t> long</a:t>
             </a:r>
             <a:r>
-              <a:rPr lang="en-US" sz="2000" b="1">
+              <a:rPr lang="en-US" sz="2000" b="1" dirty="0">
                 <a:latin typeface="Courier New" pitchFamily="49" charset="0"/>
                 <a:cs typeface="Courier New" pitchFamily="49" charset="0"/>
               </a:rPr>
               <a:t> mid; </a:t>
             </a:r>
             <a:r>
-              <a:rPr lang="en-US" sz="2000" b="1">
+              <a:rPr lang="en-US" sz="2000" b="1" dirty="0">
                 <a:solidFill>
                   <a:srgbClr val="006600"/>
                 </a:solidFill>
@@ -14500,7 +11252,7 @@
               </a:tabLst>
               <a:defRPr/>
             </a:pPr>
-            <a:endParaRPr lang="en-US" sz="2000" b="1">
+            <a:endParaRPr lang="en-US" sz="2000" b="1" dirty="0">
               <a:latin typeface="Courier New" pitchFamily="49" charset="0"/>
               <a:cs typeface="Courier New" pitchFamily="49" charset="0"/>
             </a:endParaRPr>
@@ -14515,14 +11267,14 @@
               <a:defRPr/>
             </a:pPr>
             <a:r>
-              <a:rPr lang="en-US" sz="2000" b="1">
+              <a:rPr lang="en-US" sz="2000" b="1" dirty="0">
                 <a:latin typeface="Courier New" pitchFamily="49" charset="0"/>
                 <a:cs typeface="Courier New" pitchFamily="49" charset="0"/>
               </a:rPr>
               <a:t>	</a:t>
             </a:r>
             <a:r>
-              <a:rPr lang="en-US" sz="2000" b="1">
+              <a:rPr lang="en-US" sz="2000" b="1" dirty="0">
                 <a:solidFill>
                   <a:srgbClr val="0000FF"/>
                 </a:solidFill>
@@ -14532,7 +11284,7 @@
               <a:t>if</a:t>
             </a:r>
             <a:r>
-              <a:rPr lang="en-US" sz="2000" b="1">
+              <a:rPr lang="en-US" sz="2000" b="1" dirty="0">
                 <a:latin typeface="Courier New" pitchFamily="49" charset="0"/>
                 <a:cs typeface="Courier New" pitchFamily="49" charset="0"/>
               </a:rPr>
@@ -14549,7 +11301,7 @@
               <a:defRPr/>
             </a:pPr>
             <a:r>
-              <a:rPr lang="en-US" sz="2000" b="1">
+              <a:rPr lang="en-US" sz="2000" b="1" dirty="0">
                 <a:solidFill>
                   <a:srgbClr val="0000FF"/>
                 </a:solidFill>
@@ -14559,7 +11311,7 @@
               <a:t>		return</a:t>
             </a:r>
             <a:r>
-              <a:rPr lang="en-US" sz="2000" b="1">
+              <a:rPr lang="en-US" sz="2000" b="1" dirty="0">
                 <a:latin typeface="Courier New" pitchFamily="49" charset="0"/>
                 <a:cs typeface="Courier New" pitchFamily="49" charset="0"/>
               </a:rPr>
@@ -14576,14 +11328,14 @@
               <a:defRPr/>
             </a:pPr>
             <a:r>
-              <a:rPr lang="en-US" sz="2000" b="1">
+              <a:rPr lang="en-US" sz="2000" b="1" dirty="0">
                 <a:latin typeface="Courier New" pitchFamily="49" charset="0"/>
                 <a:cs typeface="Courier New" pitchFamily="49" charset="0"/>
               </a:rPr>
               <a:t>	</a:t>
             </a:r>
             <a:r>
-              <a:rPr lang="en-US" sz="2000" b="1">
+              <a:rPr lang="en-US" sz="2000" b="1" dirty="0">
                 <a:solidFill>
                   <a:srgbClr val="0000FF"/>
                 </a:solidFill>
@@ -14593,7 +11345,7 @@
               <a:t>else </a:t>
             </a:r>
             <a:r>
-              <a:rPr lang="en-US" sz="2000" b="1">
+              <a:rPr lang="en-US" sz="2000" b="1" dirty="0">
                 <a:solidFill>
                   <a:schemeClr val="tx1"/>
                 </a:solidFill>
@@ -14613,7 +11365,7 @@
               <a:defRPr/>
             </a:pPr>
             <a:r>
-              <a:rPr lang="en-US" sz="2000" b="1">
+              <a:rPr lang="en-US" sz="2000" b="1" dirty="0">
                 <a:solidFill>
                   <a:schemeClr val="tx1"/>
                 </a:solidFill>
@@ -14623,7 +11375,7 @@
               <a:t>		mid = (x + y)/</a:t>
             </a:r>
             <a:r>
-              <a:rPr lang="en-US" sz="2000" b="1">
+              <a:rPr lang="en-US" sz="2000" b="1" dirty="0">
                 <a:solidFill>
                   <a:srgbClr val="006600"/>
                 </a:solidFill>
@@ -14633,7 +11385,7 @@
               <a:t>2</a:t>
             </a:r>
             <a:r>
-              <a:rPr lang="en-US" sz="2000" b="1">
+              <a:rPr lang="en-US" sz="2000" b="1" dirty="0">
                 <a:solidFill>
                   <a:schemeClr val="tx1"/>
                 </a:solidFill>
@@ -14653,7 +11405,7 @@
               <a:defRPr/>
             </a:pPr>
             <a:r>
-              <a:rPr lang="en-US" sz="2000" b="1">
+              <a:rPr lang="en-US" sz="2000" b="1" dirty="0">
                 <a:solidFill>
                   <a:srgbClr val="0000FF"/>
                 </a:solidFill>
@@ -14663,14 +11415,14 @@
               <a:t>		return</a:t>
             </a:r>
             <a:r>
-              <a:rPr lang="en-US" sz="2000" b="1">
+              <a:rPr lang="en-US" sz="2000" b="1" dirty="0">
                 <a:latin typeface="Courier New" pitchFamily="49" charset="0"/>
                 <a:cs typeface="Courier New" pitchFamily="49" charset="0"/>
               </a:rPr>
-              <a:t> sumSq3(x, mid) + sumSq3(mid+</a:t>
-            </a:r>
-            <a:r>
-              <a:rPr lang="en-US" sz="2000" b="1">
+              <a:t> sum_sq3(x, mid) + sum_sq3(mid+</a:t>
+            </a:r>
+            <a:r>
+              <a:rPr lang="en-US" sz="2000" b="1" dirty="0">
                 <a:solidFill>
                   <a:srgbClr val="006600"/>
                 </a:solidFill>
@@ -14680,7 +11432,7 @@
               <a:t>1</a:t>
             </a:r>
             <a:r>
-              <a:rPr lang="en-US" sz="2000" b="1">
+              <a:rPr lang="en-US" sz="2000" b="1" dirty="0">
                 <a:latin typeface="Courier New" pitchFamily="49" charset="0"/>
                 <a:cs typeface="Courier New" pitchFamily="49" charset="0"/>
               </a:rPr>
@@ -14697,7 +11449,7 @@
               <a:defRPr/>
             </a:pPr>
             <a:r>
-              <a:rPr lang="en-US" sz="2000" b="1">
+              <a:rPr lang="en-US" sz="2000" b="1" dirty="0">
                 <a:latin typeface="Courier New" pitchFamily="49" charset="0"/>
                 <a:cs typeface="Courier New" pitchFamily="49" charset="0"/>
               </a:rPr>
@@ -14714,7 +11466,7 @@
               <a:defRPr/>
             </a:pPr>
             <a:r>
-              <a:rPr lang="en-US" sz="2000" b="1">
+              <a:rPr lang="en-US" sz="2000" b="1" dirty="0">
                 <a:latin typeface="Courier New" pitchFamily="49" charset="0"/>
                 <a:cs typeface="Courier New" pitchFamily="49" charset="0"/>
               </a:rPr>
@@ -15128,9 +11880,9 @@
         <p:grpSpPr bwMode="auto">
           <a:xfrm>
             <a:off x="327025" y="1752600"/>
-            <a:ext cx="8347075" cy="4292600"/>
+            <a:ext cx="8451850" cy="4292600"/>
             <a:chOff x="110" y="1056"/>
-            <a:chExt cx="5258" cy="2704"/>
+            <a:chExt cx="5324" cy="2704"/>
           </a:xfrm>
         </p:grpSpPr>
         <p:sp>
@@ -15170,8 +11922,8 @@
                 </a:spcBef>
               </a:pPr>
               <a:r>
-                <a:rPr lang="en-US" b="1"/>
-                <a:t>sumSq3(5,10)</a:t>
+                <a:rPr lang="en-US" b="1" dirty="0"/>
+                <a:t>sum_sq3(5,10)</a:t>
               </a:r>
             </a:p>
           </p:txBody>
@@ -15213,8 +11965,8 @@
                 </a:spcBef>
               </a:pPr>
               <a:r>
-                <a:rPr lang="en-US" b="1"/>
-                <a:t>sumSq3(8,10)</a:t>
+                <a:rPr lang="en-US" b="1" dirty="0"/>
+                <a:t>sum_sq3(8,10)</a:t>
               </a:r>
             </a:p>
           </p:txBody>
@@ -15265,7 +12017,7 @@
           <p:spPr bwMode="auto">
             <a:xfrm>
               <a:off x="422" y="2400"/>
-              <a:ext cx="922" cy="220"/>
+              <a:ext cx="970" cy="220"/>
             </a:xfrm>
             <a:prstGeom prst="rect">
               <a:avLst/>
@@ -15291,8 +12043,8 @@
                 </a:spcBef>
               </a:pPr>
               <a:r>
-                <a:rPr lang="en-US" b="1"/>
-                <a:t>sumSq3(5,6)</a:t>
+                <a:rPr lang="en-US" b="1" dirty="0"/>
+                <a:t>sum_sq3(5,6)</a:t>
               </a:r>
             </a:p>
           </p:txBody>
@@ -15475,8 +12227,8 @@
                 </a:spcBef>
               </a:pPr>
               <a:r>
-                <a:rPr lang="en-US" b="1"/>
-                <a:t>sumSq3(5,7)</a:t>
+                <a:rPr lang="en-US" b="1" dirty="0"/>
+                <a:t>sum_sq3(5,7)</a:t>
               </a:r>
             </a:p>
           </p:txBody>
@@ -15527,7 +12279,7 @@
           <p:spPr bwMode="auto">
             <a:xfrm>
               <a:off x="1706" y="2400"/>
-              <a:ext cx="934" cy="219"/>
+              <a:ext cx="1030" cy="220"/>
             </a:xfrm>
             <a:prstGeom prst="rect">
               <a:avLst/>
@@ -15553,8 +12305,8 @@
                 </a:spcBef>
               </a:pPr>
               <a:r>
-                <a:rPr lang="en-US" b="1"/>
-                <a:t>sumSq3(7,7)</a:t>
+                <a:rPr lang="en-US" b="1" dirty="0"/>
+                <a:t>sum_sq3(7,7)</a:t>
               </a:r>
             </a:p>
           </p:txBody>
@@ -15570,7 +12322,7 @@
           <p:spPr bwMode="auto">
             <a:xfrm>
               <a:off x="2940" y="2400"/>
-              <a:ext cx="948" cy="220"/>
+              <a:ext cx="1030" cy="220"/>
             </a:xfrm>
             <a:prstGeom prst="rect">
               <a:avLst/>
@@ -15596,8 +12348,8 @@
                 </a:spcBef>
               </a:pPr>
               <a:r>
-                <a:rPr lang="en-US" b="1"/>
-                <a:t>sumSq3(8,9)</a:t>
+                <a:rPr lang="en-US" b="1" dirty="0"/>
+                <a:t>sum_sq3(8,9)</a:t>
               </a:r>
             </a:p>
           </p:txBody>
@@ -15613,7 +12365,7 @@
           <p:spPr bwMode="auto">
             <a:xfrm>
               <a:off x="4272" y="2400"/>
-              <a:ext cx="1096" cy="220"/>
+              <a:ext cx="1162" cy="220"/>
             </a:xfrm>
             <a:prstGeom prst="rect">
               <a:avLst/>
@@ -15639,8 +12391,8 @@
                 </a:spcBef>
               </a:pPr>
               <a:r>
-                <a:rPr lang="en-US" b="1"/>
-                <a:t>sumSq3(10,10)</a:t>
+                <a:rPr lang="en-US" b="1" dirty="0"/>
+                <a:t>sum_sq3(10,10)</a:t>
               </a:r>
             </a:p>
           </p:txBody>
@@ -15796,7 +12548,7 @@
           <p:spPr bwMode="auto">
             <a:xfrm>
               <a:off x="110" y="3072"/>
-              <a:ext cx="946" cy="220"/>
+              <a:ext cx="1042" cy="220"/>
             </a:xfrm>
             <a:prstGeom prst="rect">
               <a:avLst/>
@@ -15822,8 +12574,8 @@
                 </a:spcBef>
               </a:pPr>
               <a:r>
-                <a:rPr lang="en-US" b="1"/>
-                <a:t>sumSq3(5,5)</a:t>
+                <a:rPr lang="en-US" b="1" dirty="0"/>
+                <a:t>sum_sq3(5,5)</a:t>
               </a:r>
             </a:p>
           </p:txBody>
@@ -15839,7 +12591,7 @@
           <p:spPr bwMode="auto">
             <a:xfrm>
               <a:off x="1152" y="3072"/>
-              <a:ext cx="957" cy="219"/>
+              <a:ext cx="1056" cy="220"/>
             </a:xfrm>
             <a:prstGeom prst="rect">
               <a:avLst/>
@@ -15865,8 +12617,8 @@
                 </a:spcBef>
               </a:pPr>
               <a:r>
-                <a:rPr lang="en-US" b="1"/>
-                <a:t>sumSq3(6,6)</a:t>
+                <a:rPr lang="en-US" b="1" dirty="0"/>
+                <a:t>sum_sq3(6,6)</a:t>
               </a:r>
             </a:p>
           </p:txBody>
@@ -16433,7 +13185,7 @@
           <p:spPr bwMode="auto">
             <a:xfrm>
               <a:off x="2570" y="3072"/>
-              <a:ext cx="934" cy="220"/>
+              <a:ext cx="998" cy="220"/>
             </a:xfrm>
             <a:prstGeom prst="rect">
               <a:avLst/>
@@ -16459,8 +13211,8 @@
                 </a:spcBef>
               </a:pPr>
               <a:r>
-                <a:rPr lang="en-US" b="1"/>
-                <a:t>sumSq3(8,8)</a:t>
+                <a:rPr lang="en-US" b="1" dirty="0"/>
+                <a:t>sum_sq3(8,8)</a:t>
               </a:r>
             </a:p>
           </p:txBody>
@@ -16476,7 +13228,7 @@
           <p:spPr bwMode="auto">
             <a:xfrm>
               <a:off x="3600" y="3072"/>
-              <a:ext cx="953" cy="219"/>
+              <a:ext cx="998" cy="220"/>
             </a:xfrm>
             <a:prstGeom prst="rect">
               <a:avLst/>
@@ -16502,8 +13254,8 @@
                 </a:spcBef>
               </a:pPr>
               <a:r>
-                <a:rPr lang="en-US" b="1"/>
-                <a:t>sumSq3(9,9)</a:t>
+                <a:rPr lang="en-US" b="1" dirty="0"/>
+                <a:t>sum_sq3(9,9)</a:t>
               </a:r>
             </a:p>
           </p:txBody>
@@ -29877,7 +26629,7 @@
                 <a:defRPr/>
               </a:pPr>
               <a:r>
-                <a:rPr lang="en-US" sz="1400" b="1">
+                <a:rPr lang="en-US" sz="1400" b="1" dirty="0">
                   <a:latin typeface="Calibri" pitchFamily="34" charset="0"/>
                   <a:cs typeface="Arial" charset="0"/>
                 </a:rPr>
@@ -29889,19 +26641,19 @@
                 <a:defRPr/>
               </a:pPr>
               <a:r>
-                <a:rPr lang="en-US" sz="1400" b="1">
+                <a:rPr lang="en-US" sz="1400" b="1" dirty="0">
                   <a:latin typeface="Calibri" pitchFamily="34" charset="0"/>
                   <a:cs typeface="Arial" charset="0"/>
                 </a:rPr>
                 <a:t>source is </a:t>
               </a:r>
               <a:r>
-                <a:rPr lang="en-US" sz="1400" b="1">
+                <a:rPr lang="en-US" sz="1400" b="1" dirty="0">
                   <a:latin typeface="Calibri" pitchFamily="34" charset="0"/>
                 </a:rPr>
                 <a:t>2</a:t>
               </a:r>
-              <a:endParaRPr lang="en-US" sz="1400" b="1">
+              <a:endParaRPr lang="en-US" sz="1400" b="1" dirty="0">
                 <a:latin typeface="Calibri" pitchFamily="34" charset="0"/>
                 <a:cs typeface="Arial" charset="0"/>
               </a:endParaRPr>
@@ -29911,21 +26663,21 @@
                 <a:defRPr/>
               </a:pPr>
               <a:r>
-                <a:rPr lang="en-US" sz="1400" b="1" err="1">
+                <a:rPr lang="en-US" sz="1400" b="1" dirty="0" err="1">
                   <a:latin typeface="Calibri" pitchFamily="34" charset="0"/>
                   <a:cs typeface="Arial" charset="0"/>
                 </a:rPr>
                 <a:t>dest</a:t>
               </a:r>
               <a:r>
-                <a:rPr lang="en-US" sz="1400" b="1">
+                <a:rPr lang="en-US" sz="1400" b="1" dirty="0">
                   <a:latin typeface="Calibri" pitchFamily="34" charset="0"/>
                   <a:cs typeface="Arial" charset="0"/>
                 </a:rPr>
                 <a:t> is </a:t>
               </a:r>
               <a:r>
-                <a:rPr lang="en-US" sz="1400" b="1">
+                <a:rPr lang="en-US" sz="1400" b="1" dirty="0">
                   <a:latin typeface="Calibri" pitchFamily="34" charset="0"/>
                 </a:rPr>
                 <a:t>3</a:t>
@@ -29936,19 +26688,19 @@
                 <a:defRPr/>
               </a:pPr>
               <a:r>
-                <a:rPr lang="en-US" sz="1400" b="1">
+                <a:rPr lang="en-US" sz="1400" b="1" dirty="0">
                   <a:latin typeface="Calibri" pitchFamily="34" charset="0"/>
                   <a:cs typeface="Arial" charset="0"/>
                 </a:rPr>
                 <a:t>placeholder is </a:t>
               </a:r>
               <a:r>
-                <a:rPr lang="en-US" sz="1400" b="1">
+                <a:rPr lang="en-US" sz="1400" b="1" dirty="0">
                   <a:latin typeface="Calibri" pitchFamily="34" charset="0"/>
                 </a:rPr>
                 <a:t>1</a:t>
               </a:r>
-              <a:endParaRPr lang="en-US" sz="1400" b="1">
+              <a:endParaRPr lang="en-US" sz="1400" b="1" dirty="0">
                 <a:latin typeface="Calibri" pitchFamily="34" charset="0"/>
                 <a:cs typeface="Arial" charset="0"/>
               </a:endParaRPr>
@@ -29957,7 +26709,7 @@
               <a:pPr>
                 <a:defRPr/>
               </a:pPr>
-              <a:endParaRPr lang="en-US" sz="1400" b="1">
+              <a:endParaRPr lang="en-US" sz="1400" b="1" dirty="0">
                 <a:latin typeface="Calibri" pitchFamily="34" charset="0"/>
                 <a:cs typeface="Arial" charset="0"/>
               </a:endParaRPr>
@@ -30201,13 +26953,13 @@
                 <a:defRPr/>
               </a:pPr>
               <a:r>
-                <a:rPr lang="en-US" sz="1400" b="1">
+                <a:rPr lang="en-US" sz="1400" b="1" dirty="0">
                   <a:latin typeface="Calibri" pitchFamily="34" charset="0"/>
                 </a:rPr>
                 <a:t>k </a:t>
               </a:r>
               <a:r>
-                <a:rPr lang="en-US" sz="1400" b="1">
+                <a:rPr lang="en-US" sz="1400" b="1" dirty="0">
                   <a:latin typeface="Calibri" pitchFamily="34" charset="0"/>
                   <a:cs typeface="Arial" charset="0"/>
                 </a:rPr>
@@ -30219,7 +26971,7 @@
                 <a:defRPr/>
               </a:pPr>
               <a:r>
-                <a:rPr lang="en-US" sz="1400" b="1">
+                <a:rPr lang="en-US" sz="1400" b="1" dirty="0">
                   <a:latin typeface="Calibri" pitchFamily="34" charset="0"/>
                   <a:cs typeface="Arial" charset="0"/>
                 </a:rPr>
@@ -30231,21 +26983,21 @@
                 <a:defRPr/>
               </a:pPr>
               <a:r>
-                <a:rPr lang="en-US" sz="1400" b="1" err="1">
+                <a:rPr lang="en-US" sz="1400" b="1" dirty="0" err="1">
                   <a:latin typeface="Calibri" pitchFamily="34" charset="0"/>
                   <a:cs typeface="Arial" charset="0"/>
                 </a:rPr>
                 <a:t>dest</a:t>
               </a:r>
               <a:r>
-                <a:rPr lang="en-US" sz="1400" b="1">
+                <a:rPr lang="en-US" sz="1400" b="1" dirty="0">
                   <a:latin typeface="Calibri" pitchFamily="34" charset="0"/>
                   <a:cs typeface="Arial" charset="0"/>
                 </a:rPr>
                 <a:t> is </a:t>
               </a:r>
               <a:r>
-                <a:rPr lang="en-US" sz="1400" b="1">
+                <a:rPr lang="en-US" sz="1400" b="1" dirty="0">
                   <a:latin typeface="Calibri" pitchFamily="34" charset="0"/>
                 </a:rPr>
                 <a:t>3</a:t>
@@ -30256,26 +27008,33 @@
                 <a:defRPr/>
               </a:pPr>
               <a:r>
-                <a:rPr lang="en-US" sz="1400" b="1" err="1">
+                <a:rPr lang="en-US" sz="1400" b="1" dirty="0">
                   <a:latin typeface="Calibri" pitchFamily="34" charset="0"/>
                   <a:cs typeface="Arial" charset="0"/>
                 </a:rPr>
-                <a:t>palceholder</a:t>
+                <a:t>p</a:t>
               </a:r>
               <a:r>
-                <a:rPr lang="en-US" sz="1400" b="1">
+                <a:rPr lang="en-US" altLang="zh-CN" sz="1400" b="1" dirty="0">
                   <a:latin typeface="Calibri" pitchFamily="34" charset="0"/>
                   <a:cs typeface="Arial" charset="0"/>
                 </a:rPr>
-                <a:t> is </a:t>
+                <a:t>lace</a:t>
               </a:r>
               <a:r>
-                <a:rPr lang="en-US" sz="1400" b="1">
+                <a:rPr lang="en-US" sz="1400" b="1" dirty="0">
+                  <a:latin typeface="Calibri" pitchFamily="34" charset="0"/>
+                  <a:cs typeface="Arial" charset="0"/>
+                </a:rPr>
+                <a:t>holder is </a:t>
+              </a:r>
+              <a:r>
+                <a:rPr lang="en-US" sz="1400" b="1" dirty="0">
                   <a:latin typeface="Calibri" pitchFamily="34" charset="0"/>
                 </a:rPr>
                 <a:t>2</a:t>
               </a:r>
-              <a:endParaRPr lang="en-US" sz="1400" b="1">
+              <a:endParaRPr lang="en-US" sz="1400" b="1" dirty="0">
                 <a:latin typeface="Calibri" pitchFamily="34" charset="0"/>
                 <a:cs typeface="Arial" charset="0"/>
               </a:endParaRPr>
@@ -31388,6 +28147,126 @@
           </a:p>
         </p:txBody>
       </p:sp>
+      <p:pic>
+        <p:nvPicPr>
+          <p:cNvPr id="3" name="Picture 2">
+            <a:extLst>
+              <a:ext uri="{FF2B5EF4-FFF2-40B4-BE49-F238E27FC236}">
+                <a16:creationId xmlns:a16="http://schemas.microsoft.com/office/drawing/2014/main" id="{E04B5978-49B6-1B61-CF7F-EB927E86CABD}"/>
+              </a:ext>
+            </a:extLst>
+          </p:cNvPr>
+          <p:cNvPicPr>
+            <a:picLocks noChangeAspect="1"/>
+          </p:cNvPicPr>
+          <p:nvPr/>
+        </p:nvPicPr>
+        <p:blipFill>
+          <a:blip r:embed="rId3"/>
+          <a:stretch>
+            <a:fillRect/>
+          </a:stretch>
+        </p:blipFill>
+        <p:spPr>
+          <a:xfrm>
+            <a:off x="1834837" y="2105025"/>
+            <a:ext cx="1182404" cy="514537"/>
+          </a:xfrm>
+          <a:prstGeom prst="rect">
+            <a:avLst/>
+          </a:prstGeom>
+        </p:spPr>
+      </p:pic>
+      <p:pic>
+        <p:nvPicPr>
+          <p:cNvPr id="14350" name="Picture 14349">
+            <a:extLst>
+              <a:ext uri="{FF2B5EF4-FFF2-40B4-BE49-F238E27FC236}">
+                <a16:creationId xmlns:a16="http://schemas.microsoft.com/office/drawing/2014/main" id="{86996FD7-D01C-834A-251C-45ED6C8D81C6}"/>
+              </a:ext>
+            </a:extLst>
+          </p:cNvPr>
+          <p:cNvPicPr>
+            <a:picLocks noChangeAspect="1"/>
+          </p:cNvPicPr>
+          <p:nvPr/>
+        </p:nvPicPr>
+        <p:blipFill>
+          <a:blip r:embed="rId4"/>
+          <a:stretch>
+            <a:fillRect/>
+          </a:stretch>
+        </p:blipFill>
+        <p:spPr>
+          <a:xfrm>
+            <a:off x="1319575" y="4352442"/>
+            <a:ext cx="1494533" cy="650364"/>
+          </a:xfrm>
+          <a:prstGeom prst="rect">
+            <a:avLst/>
+          </a:prstGeom>
+        </p:spPr>
+      </p:pic>
+      <p:pic>
+        <p:nvPicPr>
+          <p:cNvPr id="14351" name="Picture 14350">
+            <a:extLst>
+              <a:ext uri="{FF2B5EF4-FFF2-40B4-BE49-F238E27FC236}">
+                <a16:creationId xmlns:a16="http://schemas.microsoft.com/office/drawing/2014/main" id="{C972E6C7-12ED-3B81-E339-D8D55C6EEFE2}"/>
+              </a:ext>
+            </a:extLst>
+          </p:cNvPr>
+          <p:cNvPicPr>
+            <a:picLocks noChangeAspect="1"/>
+          </p:cNvPicPr>
+          <p:nvPr/>
+        </p:nvPicPr>
+        <p:blipFill>
+          <a:blip r:embed="rId5"/>
+          <a:stretch>
+            <a:fillRect/>
+          </a:stretch>
+        </p:blipFill>
+        <p:spPr>
+          <a:xfrm>
+            <a:off x="1317826" y="4967799"/>
+            <a:ext cx="1494533" cy="650364"/>
+          </a:xfrm>
+          <a:prstGeom prst="rect">
+            <a:avLst/>
+          </a:prstGeom>
+        </p:spPr>
+      </p:pic>
+      <p:pic>
+        <p:nvPicPr>
+          <p:cNvPr id="14353" name="Picture 14352">
+            <a:extLst>
+              <a:ext uri="{FF2B5EF4-FFF2-40B4-BE49-F238E27FC236}">
+                <a16:creationId xmlns:a16="http://schemas.microsoft.com/office/drawing/2014/main" id="{7ADEAF2A-3175-300B-1BBF-F103802CC580}"/>
+              </a:ext>
+            </a:extLst>
+          </p:cNvPr>
+          <p:cNvPicPr>
+            <a:picLocks noChangeAspect="1"/>
+          </p:cNvPicPr>
+          <p:nvPr/>
+        </p:nvPicPr>
+        <p:blipFill>
+          <a:blip r:embed="rId6"/>
+          <a:stretch>
+            <a:fillRect/>
+          </a:stretch>
+        </p:blipFill>
+        <p:spPr>
+          <a:xfrm>
+            <a:off x="1292225" y="5618163"/>
+            <a:ext cx="1494534" cy="596304"/>
+          </a:xfrm>
+          <a:prstGeom prst="rect">
+            <a:avLst/>
+          </a:prstGeom>
+        </p:spPr>
+      </p:pic>
     </p:spTree>
     <p:extLst>
       <p:ext uri="{BB962C8B-B14F-4D97-AF65-F5344CB8AC3E}">
@@ -31509,24 +28388,15 @@
                                   </p:childTnLst>
                                 </p:cTn>
                               </p:par>
-                            </p:childTnLst>
-                          </p:cTn>
-                        </p:par>
-                        <p:par>
-                          <p:cTn id="13" fill="hold">
-                            <p:stCondLst>
-                              <p:cond delay="500"/>
-                            </p:stCondLst>
-                            <p:childTnLst>
                               <p:par>
-                                <p:cTn id="14" presetID="9" presetClass="entr" presetSubtype="0" fill="hold" nodeType="afterEffect">
+                                <p:cTn id="13" presetID="9" presetClass="entr" presetSubtype="0" fill="hold" nodeType="withEffect">
                                   <p:stCondLst>
                                     <p:cond delay="0"/>
                                   </p:stCondLst>
                                   <p:childTnLst>
                                     <p:set>
                                       <p:cBhvr>
-                                        <p:cTn id="15" dur="1" fill="hold">
+                                        <p:cTn id="14" dur="1" fill="hold">
                                           <p:stCondLst>
                                             <p:cond delay="0"/>
                                           </p:stCondLst>
@@ -31544,12 +28414,39 @@
                                     </p:set>
                                     <p:animEffect transition="in" filter="dissolve">
                                       <p:cBhvr>
-                                        <p:cTn id="16" dur="500"/>
+                                        <p:cTn id="15" dur="500"/>
                                         <p:tgtEl>
                                           <p:spTgt spid="9"/>
                                         </p:tgtEl>
                                       </p:cBhvr>
                                     </p:animEffect>
+                                  </p:childTnLst>
+                                </p:cTn>
+                              </p:par>
+                              <p:par>
+                                <p:cTn id="16" presetID="1" presetClass="entr" presetSubtype="0" fill="hold" nodeType="withEffect">
+                                  <p:stCondLst>
+                                    <p:cond delay="0"/>
+                                  </p:stCondLst>
+                                  <p:childTnLst>
+                                    <p:set>
+                                      <p:cBhvr>
+                                        <p:cTn id="17" dur="1" fill="hold">
+                                          <p:stCondLst>
+                                            <p:cond delay="0"/>
+                                          </p:stCondLst>
+                                        </p:cTn>
+                                        <p:tgtEl>
+                                          <p:spTgt spid="3"/>
+                                        </p:tgtEl>
+                                        <p:attrNameLst>
+                                          <p:attrName>style.visibility</p:attrName>
+                                        </p:attrNameLst>
+                                      </p:cBhvr>
+                                      <p:to>
+                                        <p:strVal val="visible"/>
+                                      </p:to>
+                                    </p:set>
                                   </p:childTnLst>
                                 </p:cTn>
                               </p:par>
@@ -31560,26 +28457,26 @@
                     </p:cTn>
                   </p:par>
                   <p:par>
-                    <p:cTn id="17" fill="hold">
+                    <p:cTn id="18" fill="hold">
                       <p:stCondLst>
                         <p:cond delay="indefinite"/>
                       </p:stCondLst>
                       <p:childTnLst>
                         <p:par>
-                          <p:cTn id="18" fill="hold">
+                          <p:cTn id="19" fill="hold">
                             <p:stCondLst>
                               <p:cond delay="0"/>
                             </p:stCondLst>
                             <p:childTnLst>
                               <p:par>
-                                <p:cTn id="19" presetID="9" presetClass="entr" presetSubtype="0" fill="hold" nodeType="clickEffect">
+                                <p:cTn id="20" presetID="9" presetClass="entr" presetSubtype="0" fill="hold" nodeType="clickEffect">
                                   <p:stCondLst>
                                     <p:cond delay="0"/>
                                   </p:stCondLst>
                                   <p:childTnLst>
                                     <p:set>
                                       <p:cBhvr>
-                                        <p:cTn id="20" dur="1" fill="hold">
+                                        <p:cTn id="21" dur="1" fill="hold">
                                           <p:stCondLst>
                                             <p:cond delay="0"/>
                                           </p:stCondLst>
@@ -31597,7 +28494,7 @@
                                     </p:set>
                                     <p:animEffect transition="in" filter="dissolve">
                                       <p:cBhvr>
-                                        <p:cTn id="21" dur="500"/>
+                                        <p:cTn id="22" dur="500"/>
                                         <p:tgtEl>
                                           <p:spTgt spid="24"/>
                                         </p:tgtEl>
@@ -31610,20 +28507,20 @@
                           </p:cTn>
                         </p:par>
                         <p:par>
-                          <p:cTn id="22" fill="hold">
+                          <p:cTn id="23" fill="hold">
                             <p:stCondLst>
                               <p:cond delay="500"/>
                             </p:stCondLst>
                             <p:childTnLst>
                               <p:par>
-                                <p:cTn id="23" presetID="9" presetClass="entr" presetSubtype="0" fill="hold" nodeType="afterEffect">
+                                <p:cTn id="24" presetID="9" presetClass="entr" presetSubtype="0" fill="hold" nodeType="afterEffect">
                                   <p:stCondLst>
                                     <p:cond delay="0"/>
                                   </p:stCondLst>
                                   <p:childTnLst>
                                     <p:set>
                                       <p:cBhvr>
-                                        <p:cTn id="24" dur="1" fill="hold">
+                                        <p:cTn id="25" dur="1" fill="hold">
                                           <p:stCondLst>
                                             <p:cond delay="0"/>
                                           </p:stCondLst>
@@ -31641,12 +28538,39 @@
                                     </p:set>
                                     <p:animEffect transition="in" filter="dissolve">
                                       <p:cBhvr>
-                                        <p:cTn id="25" dur="500"/>
+                                        <p:cTn id="26" dur="500"/>
                                         <p:tgtEl>
                                           <p:spTgt spid="18"/>
                                         </p:tgtEl>
                                       </p:cBhvr>
                                     </p:animEffect>
+                                  </p:childTnLst>
+                                </p:cTn>
+                              </p:par>
+                              <p:par>
+                                <p:cTn id="27" presetID="1" presetClass="entr" presetSubtype="0" fill="hold" nodeType="withEffect">
+                                  <p:stCondLst>
+                                    <p:cond delay="0"/>
+                                  </p:stCondLst>
+                                  <p:childTnLst>
+                                    <p:set>
+                                      <p:cBhvr>
+                                        <p:cTn id="28" dur="1" fill="hold">
+                                          <p:stCondLst>
+                                            <p:cond delay="0"/>
+                                          </p:stCondLst>
+                                        </p:cTn>
+                                        <p:tgtEl>
+                                          <p:spTgt spid="14350"/>
+                                        </p:tgtEl>
+                                        <p:attrNameLst>
+                                          <p:attrName>style.visibility</p:attrName>
+                                        </p:attrNameLst>
+                                      </p:cBhvr>
+                                      <p:to>
+                                        <p:strVal val="visible"/>
+                                      </p:to>
+                                    </p:set>
                                   </p:childTnLst>
                                 </p:cTn>
                               </p:par>
@@ -31657,26 +28581,26 @@
                     </p:cTn>
                   </p:par>
                   <p:par>
-                    <p:cTn id="26" fill="hold">
+                    <p:cTn id="29" fill="hold">
                       <p:stCondLst>
                         <p:cond delay="indefinite"/>
                       </p:stCondLst>
                       <p:childTnLst>
                         <p:par>
-                          <p:cTn id="27" fill="hold">
+                          <p:cTn id="30" fill="hold">
                             <p:stCondLst>
                               <p:cond delay="0"/>
                             </p:stCondLst>
                             <p:childTnLst>
                               <p:par>
-                                <p:cTn id="28" presetID="9" presetClass="entr" presetSubtype="0" fill="hold" nodeType="clickEffect">
+                                <p:cTn id="31" presetID="9" presetClass="entr" presetSubtype="0" fill="hold" nodeType="clickEffect">
                                   <p:stCondLst>
                                     <p:cond delay="0"/>
                                   </p:stCondLst>
                                   <p:childTnLst>
                                     <p:set>
                                       <p:cBhvr>
-                                        <p:cTn id="29" dur="1" fill="hold">
+                                        <p:cTn id="32" dur="1" fill="hold">
                                           <p:stCondLst>
                                             <p:cond delay="0"/>
                                           </p:stCondLst>
@@ -31694,7 +28618,7 @@
                                     </p:set>
                                     <p:animEffect transition="in" filter="dissolve">
                                       <p:cBhvr>
-                                        <p:cTn id="30" dur="500"/>
+                                        <p:cTn id="33" dur="500"/>
                                         <p:tgtEl>
                                           <p:spTgt spid="41"/>
                                         </p:tgtEl>
@@ -31707,20 +28631,20 @@
                           </p:cTn>
                         </p:par>
                         <p:par>
-                          <p:cTn id="31" fill="hold">
+                          <p:cTn id="34" fill="hold">
                             <p:stCondLst>
                               <p:cond delay="500"/>
                             </p:stCondLst>
                             <p:childTnLst>
                               <p:par>
-                                <p:cTn id="32" presetID="9" presetClass="entr" presetSubtype="0" fill="hold" nodeType="afterEffect">
+                                <p:cTn id="35" presetID="9" presetClass="entr" presetSubtype="0" fill="hold" nodeType="afterEffect">
                                   <p:stCondLst>
                                     <p:cond delay="0"/>
                                   </p:stCondLst>
                                   <p:childTnLst>
                                     <p:set>
                                       <p:cBhvr>
-                                        <p:cTn id="33" dur="1" fill="hold">
+                                        <p:cTn id="36" dur="1" fill="hold">
                                           <p:stCondLst>
                                             <p:cond delay="0"/>
                                           </p:stCondLst>
@@ -31738,7 +28662,7 @@
                                     </p:set>
                                     <p:animEffect transition="in" filter="dissolve">
                                       <p:cBhvr>
-                                        <p:cTn id="34" dur="500"/>
+                                        <p:cTn id="37" dur="500"/>
                                         <p:tgtEl>
                                           <p:spTgt spid="29"/>
                                         </p:tgtEl>
@@ -31754,26 +28678,26 @@
                     </p:cTn>
                   </p:par>
                   <p:par>
-                    <p:cTn id="35" fill="hold">
+                    <p:cTn id="38" fill="hold">
                       <p:stCondLst>
                         <p:cond delay="indefinite"/>
                       </p:stCondLst>
                       <p:childTnLst>
                         <p:par>
-                          <p:cTn id="36" fill="hold">
+                          <p:cTn id="39" fill="hold">
                             <p:stCondLst>
                               <p:cond delay="0"/>
                             </p:stCondLst>
                             <p:childTnLst>
                               <p:par>
-                                <p:cTn id="37" presetID="9" presetClass="entr" presetSubtype="0" fill="hold" nodeType="clickEffect">
+                                <p:cTn id="40" presetID="9" presetClass="entr" presetSubtype="0" fill="hold" nodeType="clickEffect">
                                   <p:stCondLst>
                                     <p:cond delay="0"/>
                                   </p:stCondLst>
                                   <p:childTnLst>
                                     <p:set>
                                       <p:cBhvr>
-                                        <p:cTn id="38" dur="1" fill="hold">
+                                        <p:cTn id="41" dur="1" fill="hold">
                                           <p:stCondLst>
                                             <p:cond delay="0"/>
                                           </p:stCondLst>
@@ -31791,7 +28715,7 @@
                                     </p:set>
                                     <p:animEffect transition="in" filter="dissolve">
                                       <p:cBhvr>
-                                        <p:cTn id="39" dur="500"/>
+                                        <p:cTn id="42" dur="500"/>
                                         <p:tgtEl>
                                           <p:spTgt spid="45"/>
                                         </p:tgtEl>
@@ -31807,26 +28731,26 @@
                     </p:cTn>
                   </p:par>
                   <p:par>
-                    <p:cTn id="40" fill="hold">
+                    <p:cTn id="43" fill="hold">
                       <p:stCondLst>
                         <p:cond delay="indefinite"/>
                       </p:stCondLst>
                       <p:childTnLst>
                         <p:par>
-                          <p:cTn id="41" fill="hold">
+                          <p:cTn id="44" fill="hold">
                             <p:stCondLst>
                               <p:cond delay="0"/>
                             </p:stCondLst>
                             <p:childTnLst>
                               <p:par>
-                                <p:cTn id="42" presetID="9" presetClass="entr" presetSubtype="0" fill="hold" nodeType="clickEffect">
+                                <p:cTn id="45" presetID="9" presetClass="entr" presetSubtype="0" fill="hold" nodeType="clickEffect">
                                   <p:stCondLst>
                                     <p:cond delay="0"/>
                                   </p:stCondLst>
                                   <p:childTnLst>
                                     <p:set>
                                       <p:cBhvr>
-                                        <p:cTn id="43" dur="1" fill="hold">
+                                        <p:cTn id="46" dur="1" fill="hold">
                                           <p:stCondLst>
                                             <p:cond delay="0"/>
                                           </p:stCondLst>
@@ -31844,7 +28768,7 @@
                                     </p:set>
                                     <p:animEffect transition="in" filter="dissolve">
                                       <p:cBhvr>
-                                        <p:cTn id="44" dur="500"/>
+                                        <p:cTn id="47" dur="500"/>
                                         <p:tgtEl>
                                           <p:spTgt spid="49"/>
                                         </p:tgtEl>
@@ -31857,20 +28781,20 @@
                           </p:cTn>
                         </p:par>
                         <p:par>
-                          <p:cTn id="45" fill="hold">
+                          <p:cTn id="48" fill="hold">
                             <p:stCondLst>
                               <p:cond delay="500"/>
                             </p:stCondLst>
                             <p:childTnLst>
                               <p:par>
-                                <p:cTn id="46" presetID="9" presetClass="entr" presetSubtype="0" fill="hold" nodeType="afterEffect">
+                                <p:cTn id="49" presetID="9" presetClass="entr" presetSubtype="0" fill="hold" nodeType="afterEffect">
                                   <p:stCondLst>
                                     <p:cond delay="0"/>
                                   </p:stCondLst>
                                   <p:childTnLst>
                                     <p:set>
                                       <p:cBhvr>
-                                        <p:cTn id="47" dur="1" fill="hold">
+                                        <p:cTn id="50" dur="1" fill="hold">
                                           <p:stCondLst>
                                             <p:cond delay="0"/>
                                           </p:stCondLst>
@@ -31888,7 +28812,7 @@
                                     </p:set>
                                     <p:animEffect transition="in" filter="dissolve">
                                       <p:cBhvr>
-                                        <p:cTn id="48" dur="500"/>
+                                        <p:cTn id="51" dur="500"/>
                                         <p:tgtEl>
                                           <p:spTgt spid="32"/>
                                         </p:tgtEl>
@@ -31904,26 +28828,26 @@
                     </p:cTn>
                   </p:par>
                   <p:par>
-                    <p:cTn id="49" fill="hold">
+                    <p:cTn id="52" fill="hold">
                       <p:stCondLst>
                         <p:cond delay="indefinite"/>
                       </p:stCondLst>
                       <p:childTnLst>
                         <p:par>
-                          <p:cTn id="50" fill="hold">
+                          <p:cTn id="53" fill="hold">
                             <p:stCondLst>
                               <p:cond delay="0"/>
                             </p:stCondLst>
                             <p:childTnLst>
                               <p:par>
-                                <p:cTn id="51" presetID="9" presetClass="entr" presetSubtype="0" fill="hold" nodeType="clickEffect">
+                                <p:cTn id="54" presetID="9" presetClass="entr" presetSubtype="0" fill="hold" nodeType="clickEffect">
                                   <p:stCondLst>
                                     <p:cond delay="0"/>
                                   </p:stCondLst>
                                   <p:childTnLst>
                                     <p:set>
                                       <p:cBhvr>
-                                        <p:cTn id="52" dur="1" fill="hold">
+                                        <p:cTn id="55" dur="1" fill="hold">
                                           <p:stCondLst>
                                             <p:cond delay="0"/>
                                           </p:stCondLst>
@@ -31941,7 +28865,7 @@
                                     </p:set>
                                     <p:animEffect transition="in" filter="dissolve">
                                       <p:cBhvr>
-                                        <p:cTn id="53" dur="500"/>
+                                        <p:cTn id="56" dur="500"/>
                                         <p:tgtEl>
                                           <p:spTgt spid="50"/>
                                         </p:tgtEl>
@@ -31957,26 +28881,26 @@
                     </p:cTn>
                   </p:par>
                   <p:par>
-                    <p:cTn id="54" fill="hold">
+                    <p:cTn id="57" fill="hold">
                       <p:stCondLst>
                         <p:cond delay="indefinite"/>
                       </p:stCondLst>
                       <p:childTnLst>
                         <p:par>
-                          <p:cTn id="55" fill="hold">
+                          <p:cTn id="58" fill="hold">
                             <p:stCondLst>
                               <p:cond delay="0"/>
                             </p:stCondLst>
                             <p:childTnLst>
                               <p:par>
-                                <p:cTn id="56" presetID="9" presetClass="entr" presetSubtype="0" fill="hold" nodeType="clickEffect">
+                                <p:cTn id="59" presetID="9" presetClass="entr" presetSubtype="0" fill="hold" nodeType="clickEffect">
                                   <p:stCondLst>
                                     <p:cond delay="0"/>
                                   </p:stCondLst>
                                   <p:childTnLst>
                                     <p:set>
                                       <p:cBhvr>
-                                        <p:cTn id="57" dur="1" fill="hold">
+                                        <p:cTn id="60" dur="1" fill="hold">
                                           <p:stCondLst>
                                             <p:cond delay="0"/>
                                           </p:stCondLst>
@@ -31994,7 +28918,7 @@
                                     </p:set>
                                     <p:animEffect transition="in" filter="dissolve">
                                       <p:cBhvr>
-                                        <p:cTn id="58" dur="500"/>
+                                        <p:cTn id="61" dur="500"/>
                                         <p:tgtEl>
                                           <p:spTgt spid="51"/>
                                         </p:tgtEl>
@@ -32010,26 +28934,71 @@
                     </p:cTn>
                   </p:par>
                   <p:par>
-                    <p:cTn id="59" fill="hold">
+                    <p:cTn id="62" fill="hold">
                       <p:stCondLst>
                         <p:cond delay="indefinite"/>
                       </p:stCondLst>
                       <p:childTnLst>
                         <p:par>
-                          <p:cTn id="60" fill="hold">
+                          <p:cTn id="63" fill="hold">
                             <p:stCondLst>
                               <p:cond delay="0"/>
                             </p:stCondLst>
                             <p:childTnLst>
                               <p:par>
-                                <p:cTn id="61" presetID="9" presetClass="entr" presetSubtype="0" fill="hold" nodeType="clickEffect">
+                                <p:cTn id="64" presetID="1" presetClass="entr" presetSubtype="0" fill="hold" nodeType="clickEffect">
                                   <p:stCondLst>
                                     <p:cond delay="0"/>
                                   </p:stCondLst>
                                   <p:childTnLst>
                                     <p:set>
                                       <p:cBhvr>
-                                        <p:cTn id="62" dur="1" fill="hold">
+                                        <p:cTn id="65" dur="1" fill="hold">
+                                          <p:stCondLst>
+                                            <p:cond delay="0"/>
+                                          </p:stCondLst>
+                                        </p:cTn>
+                                        <p:tgtEl>
+                                          <p:spTgt spid="14351"/>
+                                        </p:tgtEl>
+                                        <p:attrNameLst>
+                                          <p:attrName>style.visibility</p:attrName>
+                                        </p:attrNameLst>
+                                      </p:cBhvr>
+                                      <p:to>
+                                        <p:strVal val="visible"/>
+                                      </p:to>
+                                    </p:set>
+                                  </p:childTnLst>
+                                </p:cTn>
+                              </p:par>
+                            </p:childTnLst>
+                          </p:cTn>
+                        </p:par>
+                      </p:childTnLst>
+                    </p:cTn>
+                  </p:par>
+                  <p:par>
+                    <p:cTn id="66" fill="hold">
+                      <p:stCondLst>
+                        <p:cond delay="indefinite"/>
+                      </p:stCondLst>
+                      <p:childTnLst>
+                        <p:par>
+                          <p:cTn id="67" fill="hold">
+                            <p:stCondLst>
+                              <p:cond delay="0"/>
+                            </p:stCondLst>
+                            <p:childTnLst>
+                              <p:par>
+                                <p:cTn id="68" presetID="9" presetClass="entr" presetSubtype="0" fill="hold" nodeType="clickEffect">
+                                  <p:stCondLst>
+                                    <p:cond delay="0"/>
+                                  </p:stCondLst>
+                                  <p:childTnLst>
+                                    <p:set>
+                                      <p:cBhvr>
+                                        <p:cTn id="69" dur="1" fill="hold">
                                           <p:stCondLst>
                                             <p:cond delay="0"/>
                                           </p:stCondLst>
@@ -32047,7 +29016,7 @@
                                     </p:set>
                                     <p:animEffect transition="in" filter="dissolve">
                                       <p:cBhvr>
-                                        <p:cTn id="63" dur="500"/>
+                                        <p:cTn id="70" dur="500"/>
                                         <p:tgtEl>
                                           <p:spTgt spid="28"/>
                                         </p:tgtEl>
@@ -32060,20 +29029,20 @@
                           </p:cTn>
                         </p:par>
                         <p:par>
-                          <p:cTn id="64" fill="hold">
+                          <p:cTn id="71" fill="hold">
                             <p:stCondLst>
                               <p:cond delay="500"/>
                             </p:stCondLst>
                             <p:childTnLst>
                               <p:par>
-                                <p:cTn id="65" presetID="9" presetClass="entr" presetSubtype="0" fill="hold" nodeType="afterEffect">
+                                <p:cTn id="72" presetID="9" presetClass="entr" presetSubtype="0" fill="hold" nodeType="afterEffect">
                                   <p:stCondLst>
                                     <p:cond delay="0"/>
                                   </p:stCondLst>
                                   <p:childTnLst>
                                     <p:set>
                                       <p:cBhvr>
-                                        <p:cTn id="66" dur="1" fill="hold">
+                                        <p:cTn id="73" dur="1" fill="hold">
                                           <p:stCondLst>
                                             <p:cond delay="0"/>
                                           </p:stCondLst>
@@ -32091,7 +29060,7 @@
                                     </p:set>
                                     <p:animEffect transition="in" filter="dissolve">
                                       <p:cBhvr>
-                                        <p:cTn id="67" dur="500"/>
+                                        <p:cTn id="74" dur="500"/>
                                         <p:tgtEl>
                                           <p:spTgt spid="21"/>
                                         </p:tgtEl>
@@ -32100,39 +29069,21 @@
                                   </p:childTnLst>
                                 </p:cTn>
                               </p:par>
-                            </p:childTnLst>
-                          </p:cTn>
-                        </p:par>
-                      </p:childTnLst>
-                    </p:cTn>
-                  </p:par>
-                  <p:par>
-                    <p:cTn id="68" fill="hold">
-                      <p:stCondLst>
-                        <p:cond delay="indefinite"/>
-                      </p:stCondLst>
-                      <p:childTnLst>
-                        <p:par>
-                          <p:cTn id="69" fill="hold">
-                            <p:stCondLst>
-                              <p:cond delay="0"/>
-                            </p:stCondLst>
-                            <p:childTnLst>
                               <p:par>
-                                <p:cTn id="70" presetID="9" presetClass="entr" presetSubtype="0" fill="hold" nodeType="clickEffect">
+                                <p:cTn id="75" presetID="1" presetClass="entr" presetSubtype="0" fill="hold" nodeType="withEffect">
                                   <p:stCondLst>
                                     <p:cond delay="0"/>
                                   </p:stCondLst>
                                   <p:childTnLst>
                                     <p:set>
                                       <p:cBhvr>
-                                        <p:cTn id="71" dur="1" fill="hold">
+                                        <p:cTn id="76" dur="1" fill="hold">
                                           <p:stCondLst>
                                             <p:cond delay="0"/>
                                           </p:stCondLst>
                                         </p:cTn>
                                         <p:tgtEl>
-                                          <p:spTgt spid="52"/>
+                                          <p:spTgt spid="14353"/>
                                         </p:tgtEl>
                                         <p:attrNameLst>
                                           <p:attrName>style.visibility</p:attrName>
@@ -32142,58 +29093,6 @@
                                         <p:strVal val="visible"/>
                                       </p:to>
                                     </p:set>
-                                    <p:animEffect transition="in" filter="dissolve">
-                                      <p:cBhvr>
-                                        <p:cTn id="72" dur="500"/>
-                                        <p:tgtEl>
-                                          <p:spTgt spid="52"/>
-                                        </p:tgtEl>
-                                      </p:cBhvr>
-                                    </p:animEffect>
-                                  </p:childTnLst>
-                                </p:cTn>
-                              </p:par>
-                            </p:childTnLst>
-                          </p:cTn>
-                        </p:par>
-                        <p:par>
-                          <p:cTn id="73" fill="hold">
-                            <p:stCondLst>
-                              <p:cond delay="500"/>
-                            </p:stCondLst>
-                            <p:childTnLst>
-                              <p:par>
-                                <p:cTn id="74" presetID="9" presetClass="entr" presetSubtype="0" fill="hold" nodeType="afterEffect">
-                                  <p:stCondLst>
-                                    <p:cond delay="0"/>
-                                  </p:stCondLst>
-                                  <p:childTnLst>
-                                    <p:set>
-                                      <p:cBhvr>
-                                        <p:cTn id="75" dur="1" fill="hold">
-                                          <p:stCondLst>
-                                            <p:cond delay="0"/>
-                                          </p:stCondLst>
-                                        </p:cTn>
-                                        <p:tgtEl>
-                                          <p:spTgt spid="35"/>
-                                        </p:tgtEl>
-                                        <p:attrNameLst>
-                                          <p:attrName>style.visibility</p:attrName>
-                                        </p:attrNameLst>
-                                      </p:cBhvr>
-                                      <p:to>
-                                        <p:strVal val="visible"/>
-                                      </p:to>
-                                    </p:set>
-                                    <p:animEffect transition="in" filter="dissolve">
-                                      <p:cBhvr>
-                                        <p:cTn id="76" dur="500"/>
-                                        <p:tgtEl>
-                                          <p:spTgt spid="35"/>
-                                        </p:tgtEl>
-                                      </p:cBhvr>
-                                    </p:animEffect>
                                   </p:childTnLst>
                                 </p:cTn>
                               </p:par>
@@ -32229,7 +29128,7 @@
                                           </p:stCondLst>
                                         </p:cTn>
                                         <p:tgtEl>
-                                          <p:spTgt spid="53"/>
+                                          <p:spTgt spid="52"/>
                                         </p:tgtEl>
                                         <p:attrNameLst>
                                           <p:attrName>style.visibility</p:attrName>
@@ -32243,7 +29142,51 @@
                                       <p:cBhvr>
                                         <p:cTn id="81" dur="500"/>
                                         <p:tgtEl>
-                                          <p:spTgt spid="53"/>
+                                          <p:spTgt spid="52"/>
+                                        </p:tgtEl>
+                                      </p:cBhvr>
+                                    </p:animEffect>
+                                  </p:childTnLst>
+                                </p:cTn>
+                              </p:par>
+                            </p:childTnLst>
+                          </p:cTn>
+                        </p:par>
+                        <p:par>
+                          <p:cTn id="82" fill="hold">
+                            <p:stCondLst>
+                              <p:cond delay="500"/>
+                            </p:stCondLst>
+                            <p:childTnLst>
+                              <p:par>
+                                <p:cTn id="83" presetID="9" presetClass="entr" presetSubtype="0" fill="hold" nodeType="afterEffect">
+                                  <p:stCondLst>
+                                    <p:cond delay="0"/>
+                                  </p:stCondLst>
+                                  <p:childTnLst>
+                                    <p:set>
+                                      <p:cBhvr>
+                                        <p:cTn id="84" dur="1" fill="hold">
+                                          <p:stCondLst>
+                                            <p:cond delay="0"/>
+                                          </p:stCondLst>
+                                        </p:cTn>
+                                        <p:tgtEl>
+                                          <p:spTgt spid="35"/>
+                                        </p:tgtEl>
+                                        <p:attrNameLst>
+                                          <p:attrName>style.visibility</p:attrName>
+                                        </p:attrNameLst>
+                                      </p:cBhvr>
+                                      <p:to>
+                                        <p:strVal val="visible"/>
+                                      </p:to>
+                                    </p:set>
+                                    <p:animEffect transition="in" filter="dissolve">
+                                      <p:cBhvr>
+                                        <p:cTn id="85" dur="500"/>
+                                        <p:tgtEl>
+                                          <p:spTgt spid="35"/>
                                         </p:tgtEl>
                                       </p:cBhvr>
                                     </p:animEffect>
@@ -32257,63 +29200,19 @@
                     </p:cTn>
                   </p:par>
                   <p:par>
-                    <p:cTn id="82" fill="hold">
+                    <p:cTn id="86" fill="hold">
                       <p:stCondLst>
                         <p:cond delay="indefinite"/>
                       </p:stCondLst>
                       <p:childTnLst>
                         <p:par>
-                          <p:cTn id="83" fill="hold">
+                          <p:cTn id="87" fill="hold">
                             <p:stCondLst>
                               <p:cond delay="0"/>
                             </p:stCondLst>
                             <p:childTnLst>
                               <p:par>
-                                <p:cTn id="84" presetID="9" presetClass="entr" presetSubtype="0" fill="hold" nodeType="clickEffect">
-                                  <p:stCondLst>
-                                    <p:cond delay="0"/>
-                                  </p:stCondLst>
-                                  <p:childTnLst>
-                                    <p:set>
-                                      <p:cBhvr>
-                                        <p:cTn id="85" dur="1" fill="hold">
-                                          <p:stCondLst>
-                                            <p:cond delay="0"/>
-                                          </p:stCondLst>
-                                        </p:cTn>
-                                        <p:tgtEl>
-                                          <p:spTgt spid="54"/>
-                                        </p:tgtEl>
-                                        <p:attrNameLst>
-                                          <p:attrName>style.visibility</p:attrName>
-                                        </p:attrNameLst>
-                                      </p:cBhvr>
-                                      <p:to>
-                                        <p:strVal val="visible"/>
-                                      </p:to>
-                                    </p:set>
-                                    <p:animEffect transition="in" filter="dissolve">
-                                      <p:cBhvr>
-                                        <p:cTn id="86" dur="500"/>
-                                        <p:tgtEl>
-                                          <p:spTgt spid="54"/>
-                                        </p:tgtEl>
-                                      </p:cBhvr>
-                                    </p:animEffect>
-                                  </p:childTnLst>
-                                </p:cTn>
-                              </p:par>
-                            </p:childTnLst>
-                          </p:cTn>
-                        </p:par>
-                        <p:par>
-                          <p:cTn id="87" fill="hold">
-                            <p:stCondLst>
-                              <p:cond delay="500"/>
-                            </p:stCondLst>
-                            <p:childTnLst>
-                              <p:par>
-                                <p:cTn id="88" presetID="9" presetClass="entr" presetSubtype="0" fill="hold" nodeType="afterEffect">
+                                <p:cTn id="88" presetID="9" presetClass="entr" presetSubtype="0" fill="hold" nodeType="clickEffect">
                                   <p:stCondLst>
                                     <p:cond delay="0"/>
                                   </p:stCondLst>
@@ -32326,7 +29225,7 @@
                                           </p:stCondLst>
                                         </p:cTn>
                                         <p:tgtEl>
-                                          <p:spTgt spid="38"/>
+                                          <p:spTgt spid="53"/>
                                         </p:tgtEl>
                                         <p:attrNameLst>
                                           <p:attrName>style.visibility</p:attrName>
@@ -32340,7 +29239,7 @@
                                       <p:cBhvr>
                                         <p:cTn id="90" dur="500"/>
                                         <p:tgtEl>
-                                          <p:spTgt spid="38"/>
+                                          <p:spTgt spid="53"/>
                                         </p:tgtEl>
                                       </p:cBhvr>
                                     </p:animEffect>
@@ -32379,6 +29278,103 @@
                                           </p:stCondLst>
                                         </p:cTn>
                                         <p:tgtEl>
+                                          <p:spTgt spid="54"/>
+                                        </p:tgtEl>
+                                        <p:attrNameLst>
+                                          <p:attrName>style.visibility</p:attrName>
+                                        </p:attrNameLst>
+                                      </p:cBhvr>
+                                      <p:to>
+                                        <p:strVal val="visible"/>
+                                      </p:to>
+                                    </p:set>
+                                    <p:animEffect transition="in" filter="dissolve">
+                                      <p:cBhvr>
+                                        <p:cTn id="95" dur="500"/>
+                                        <p:tgtEl>
+                                          <p:spTgt spid="54"/>
+                                        </p:tgtEl>
+                                      </p:cBhvr>
+                                    </p:animEffect>
+                                  </p:childTnLst>
+                                </p:cTn>
+                              </p:par>
+                            </p:childTnLst>
+                          </p:cTn>
+                        </p:par>
+                        <p:par>
+                          <p:cTn id="96" fill="hold">
+                            <p:stCondLst>
+                              <p:cond delay="500"/>
+                            </p:stCondLst>
+                            <p:childTnLst>
+                              <p:par>
+                                <p:cTn id="97" presetID="9" presetClass="entr" presetSubtype="0" fill="hold" nodeType="afterEffect">
+                                  <p:stCondLst>
+                                    <p:cond delay="0"/>
+                                  </p:stCondLst>
+                                  <p:childTnLst>
+                                    <p:set>
+                                      <p:cBhvr>
+                                        <p:cTn id="98" dur="1" fill="hold">
+                                          <p:stCondLst>
+                                            <p:cond delay="0"/>
+                                          </p:stCondLst>
+                                        </p:cTn>
+                                        <p:tgtEl>
+                                          <p:spTgt spid="38"/>
+                                        </p:tgtEl>
+                                        <p:attrNameLst>
+                                          <p:attrName>style.visibility</p:attrName>
+                                        </p:attrNameLst>
+                                      </p:cBhvr>
+                                      <p:to>
+                                        <p:strVal val="visible"/>
+                                      </p:to>
+                                    </p:set>
+                                    <p:animEffect transition="in" filter="dissolve">
+                                      <p:cBhvr>
+                                        <p:cTn id="99" dur="500"/>
+                                        <p:tgtEl>
+                                          <p:spTgt spid="38"/>
+                                        </p:tgtEl>
+                                      </p:cBhvr>
+                                    </p:animEffect>
+                                  </p:childTnLst>
+                                </p:cTn>
+                              </p:par>
+                            </p:childTnLst>
+                          </p:cTn>
+                        </p:par>
+                      </p:childTnLst>
+                    </p:cTn>
+                  </p:par>
+                  <p:par>
+                    <p:cTn id="100" fill="hold">
+                      <p:stCondLst>
+                        <p:cond delay="indefinite"/>
+                      </p:stCondLst>
+                      <p:childTnLst>
+                        <p:par>
+                          <p:cTn id="101" fill="hold">
+                            <p:stCondLst>
+                              <p:cond delay="0"/>
+                            </p:stCondLst>
+                            <p:childTnLst>
+                              <p:par>
+                                <p:cTn id="102" presetID="9" presetClass="entr" presetSubtype="0" fill="hold" nodeType="clickEffect">
+                                  <p:stCondLst>
+                                    <p:cond delay="0"/>
+                                  </p:stCondLst>
+                                  <p:childTnLst>
+                                    <p:set>
+                                      <p:cBhvr>
+                                        <p:cTn id="103" dur="1" fill="hold">
+                                          <p:stCondLst>
+                                            <p:cond delay="0"/>
+                                          </p:stCondLst>
+                                        </p:cTn>
+                                        <p:tgtEl>
                                           <p:spTgt spid="55"/>
                                         </p:tgtEl>
                                         <p:attrNameLst>
@@ -32391,7 +29387,7 @@
                                     </p:set>
                                     <p:animEffect transition="in" filter="dissolve">
                                       <p:cBhvr>
-                                        <p:cTn id="95" dur="500"/>
+                                        <p:cTn id="104" dur="500"/>
                                         <p:tgtEl>
                                           <p:spTgt spid="55"/>
                                         </p:tgtEl>
@@ -32407,26 +29403,26 @@
                     </p:cTn>
                   </p:par>
                   <p:par>
-                    <p:cTn id="96" fill="hold">
+                    <p:cTn id="105" fill="hold">
                       <p:stCondLst>
                         <p:cond delay="indefinite"/>
                       </p:stCondLst>
                       <p:childTnLst>
                         <p:par>
-                          <p:cTn id="97" fill="hold">
+                          <p:cTn id="106" fill="hold">
                             <p:stCondLst>
                               <p:cond delay="0"/>
                             </p:stCondLst>
                             <p:childTnLst>
                               <p:par>
-                                <p:cTn id="98" presetID="9" presetClass="entr" presetSubtype="0" fill="hold" nodeType="clickEffect">
+                                <p:cTn id="107" presetID="9" presetClass="entr" presetSubtype="0" fill="hold" nodeType="clickEffect">
                                   <p:stCondLst>
                                     <p:cond delay="0"/>
                                   </p:stCondLst>
                                   <p:childTnLst>
                                     <p:set>
                                       <p:cBhvr>
-                                        <p:cTn id="99" dur="1" fill="hold">
+                                        <p:cTn id="108" dur="1" fill="hold">
                                           <p:stCondLst>
                                             <p:cond delay="0"/>
                                           </p:stCondLst>
@@ -32444,7 +29440,7 @@
                                     </p:set>
                                     <p:animEffect transition="in" filter="dissolve">
                                       <p:cBhvr>
-                                        <p:cTn id="100" dur="500"/>
+                                        <p:cTn id="109" dur="500"/>
                                         <p:tgtEl>
                                           <p:spTgt spid="56"/>
                                         </p:tgtEl>
@@ -32460,26 +29456,26 @@
                     </p:cTn>
                   </p:par>
                   <p:par>
-                    <p:cTn id="101" fill="hold">
+                    <p:cTn id="110" fill="hold">
                       <p:stCondLst>
                         <p:cond delay="indefinite"/>
                       </p:stCondLst>
                       <p:childTnLst>
                         <p:par>
-                          <p:cTn id="102" fill="hold">
+                          <p:cTn id="111" fill="hold">
                             <p:stCondLst>
                               <p:cond delay="0"/>
                             </p:stCondLst>
                             <p:childTnLst>
                               <p:par>
-                                <p:cTn id="103" presetID="9" presetClass="entr" presetSubtype="0" fill="hold" nodeType="clickEffect">
+                                <p:cTn id="112" presetID="9" presetClass="entr" presetSubtype="0" fill="hold" nodeType="clickEffect">
                                   <p:stCondLst>
                                     <p:cond delay="0"/>
                                   </p:stCondLst>
                                   <p:childTnLst>
                                     <p:set>
                                       <p:cBhvr>
-                                        <p:cTn id="104" dur="1" fill="hold">
+                                        <p:cTn id="113" dur="1" fill="hold">
                                           <p:stCondLst>
                                             <p:cond delay="0"/>
                                           </p:stCondLst>
@@ -32497,7 +29493,7 @@
                                     </p:set>
                                     <p:animEffect transition="in" filter="dissolve">
                                       <p:cBhvr>
-                                        <p:cTn id="105" dur="500"/>
+                                        <p:cTn id="114" dur="500"/>
                                         <p:tgtEl>
                                           <p:spTgt spid="60"/>
                                         </p:tgtEl>
@@ -35712,7 +32708,7 @@
         <p:spPr>
           <a:xfrm>
             <a:off x="471488" y="1182172"/>
-            <a:ext cx="7072312" cy="5372740"/>
+            <a:ext cx="8043862" cy="5372740"/>
           </a:xfrm>
           <a:prstGeom prst="rect">
             <a:avLst/>
@@ -36026,30 +33022,25 @@
             </a:pPr>
             <a:r>
               <a:rPr lang="en-GB" dirty="0"/>
-              <a:t>Arrange the remaining letters in all possible way</a:t>
-            </a:r>
-          </a:p>
-          <a:p>
-            <a:pPr marL="1005840" lvl="2" indent="-457200" fontAlgn="auto">
-              <a:spcBef>
-                <a:spcPts val="1200"/>
-              </a:spcBef>
-              <a:spcAft>
-                <a:spcPts val="0"/>
-              </a:spcAft>
-              <a:buClr>
-                <a:schemeClr val="tx1">
-                  <a:lumMod val="90000"/>
-                  <a:lumOff val="10000"/>
-                </a:schemeClr>
-              </a:buClr>
-              <a:buSzPct val="100000"/>
-              <a:buFont typeface="Wingdings" pitchFamily="2" charset="2"/>
-              <a:buChar char="§"/>
-            </a:pPr>
+              <a:t>Arrange the remaining letters in all possible way, </a:t>
+            </a:r>
+            <a:r>
+              <a:rPr lang="en-GB" dirty="0">
+                <a:sym typeface="Wingdings" panose="05000000000000000000" pitchFamily="2" charset="2"/>
+              </a:rPr>
+              <a:t>which is to p</a:t>
+            </a:r>
             <a:r>
               <a:rPr lang="en-GB" dirty="0"/>
-              <a:t>== permutate a string of n-1 letters!</a:t>
+              <a:t>ermutate a string of </a:t>
+            </a:r>
+            <a:r>
+              <a:rPr lang="en-GB" b="1" dirty="0"/>
+              <a:t>2</a:t>
+            </a:r>
+            <a:r>
+              <a:rPr lang="en-GB" dirty="0"/>
+              <a:t> letters!</a:t>
             </a:r>
           </a:p>
           <a:p>
@@ -36523,37 +33514,6 @@
                                   </p:childTnLst>
                                 </p:cTn>
                               </p:par>
-                              <p:par>
-                                <p:cTn id="17" presetID="1" presetClass="entr" presetSubtype="0" fill="hold" nodeType="withEffect">
-                                  <p:stCondLst>
-                                    <p:cond delay="0"/>
-                                  </p:stCondLst>
-                                  <p:childTnLst>
-                                    <p:set>
-                                      <p:cBhvr>
-                                        <p:cTn id="18" dur="1" fill="hold">
-                                          <p:stCondLst>
-                                            <p:cond delay="0"/>
-                                          </p:stCondLst>
-                                        </p:cTn>
-                                        <p:tgtEl>
-                                          <p:spTgt spid="13">
-                                            <p:txEl>
-                                              <p:pRg st="6" end="6"/>
-                                            </p:txEl>
-                                          </p:spTgt>
-                                        </p:tgtEl>
-                                        <p:attrNameLst>
-                                          <p:attrName>style.visibility</p:attrName>
-                                        </p:attrNameLst>
-                                      </p:cBhvr>
-                                      <p:to>
-                                        <p:strVal val="visible"/>
-                                      </p:to>
-                                    </p:set>
-                                  </p:childTnLst>
-                                </p:cTn>
-                              </p:par>
                             </p:childTnLst>
                           </p:cTn>
                         </p:par>
@@ -36561,26 +33521,26 @@
                     </p:cTn>
                   </p:par>
                   <p:par>
-                    <p:cTn id="19" fill="hold">
+                    <p:cTn id="17" fill="hold">
                       <p:stCondLst>
                         <p:cond delay="indefinite"/>
                       </p:stCondLst>
                       <p:childTnLst>
                         <p:par>
-                          <p:cTn id="20" fill="hold">
+                          <p:cTn id="18" fill="hold">
                             <p:stCondLst>
                               <p:cond delay="0"/>
                             </p:stCondLst>
                             <p:childTnLst>
                               <p:par>
-                                <p:cTn id="21" presetID="1" presetClass="entr" presetSubtype="0" fill="hold" grpId="0" nodeType="clickEffect">
+                                <p:cTn id="19" presetID="1" presetClass="entr" presetSubtype="0" fill="hold" grpId="0" nodeType="clickEffect">
                                   <p:stCondLst>
                                     <p:cond delay="0"/>
                                   </p:stCondLst>
                                   <p:childTnLst>
                                     <p:set>
                                       <p:cBhvr>
-                                        <p:cTn id="22" dur="1" fill="hold">
+                                        <p:cTn id="20" dur="1" fill="hold">
                                           <p:stCondLst>
                                             <p:cond delay="0"/>
                                           </p:stCondLst>
@@ -37036,7 +33996,7 @@
             </a:pPr>
             <a:r>
               <a:rPr lang="en-US" dirty="0"/>
-              <a:t>No need to permute when there is only 1 letter left.</a:t>
+              <a:t>No need to permute when there is only 1 letter left</a:t>
             </a:r>
           </a:p>
           <a:p>
@@ -37057,6 +34017,29 @@
               <a:buFont typeface="Wingdings" pitchFamily="2" charset="2"/>
               <a:buChar char="§"/>
             </a:pPr>
+            <a:r>
+              <a:rPr lang="en-US" dirty="0"/>
+              <a:t>Print the final string with the prefix (if any)</a:t>
+            </a:r>
+          </a:p>
+          <a:p>
+            <a:pPr marL="1005840" lvl="2" indent="-457200" fontAlgn="auto">
+              <a:spcBef>
+                <a:spcPts val="1200"/>
+              </a:spcBef>
+              <a:spcAft>
+                <a:spcPts val="0"/>
+              </a:spcAft>
+              <a:buClr>
+                <a:schemeClr val="tx1">
+                  <a:lumMod val="90000"/>
+                  <a:lumOff val="10000"/>
+                </a:schemeClr>
+              </a:buClr>
+              <a:buSzPct val="100000"/>
+              <a:buFont typeface="Wingdings" pitchFamily="2" charset="2"/>
+              <a:buChar char="§"/>
+            </a:pPr>
             <a:endParaRPr lang="en-US" dirty="0"/>
           </a:p>
           <a:p>
@@ -37241,7 +34224,7 @@
         </p:nvSpPr>
         <p:spPr>
           <a:xfrm>
-            <a:off x="6396487" y="3545376"/>
+            <a:off x="6396487" y="3993051"/>
             <a:ext cx="2294626" cy="646331"/>
           </a:xfrm>
           <a:prstGeom prst="rect">
@@ -37342,6 +34325,87 @@
         <p:spPr>
           <a:xfrm>
             <a:off x="7194430" y="2125240"/>
+            <a:ext cx="1492370" cy="369332"/>
+          </a:xfrm>
+          <a:prstGeom prst="rect">
+            <a:avLst/>
+          </a:prstGeom>
+          <a:solidFill>
+            <a:srgbClr val="FFFF99"/>
+          </a:solidFill>
+          <a:ln w="12700"/>
+        </p:spPr>
+        <p:style>
+          <a:lnRef idx="2">
+            <a:schemeClr val="accent4"/>
+          </a:lnRef>
+          <a:fillRef idx="1">
+            <a:schemeClr val="lt1"/>
+          </a:fillRef>
+          <a:effectRef idx="0">
+            <a:schemeClr val="accent4"/>
+          </a:effectRef>
+          <a:fontRef idx="minor">
+            <a:schemeClr val="dk1"/>
+          </a:fontRef>
+        </p:style>
+        <p:txBody>
+          <a:bodyPr wrap="square" rtlCol="0">
+            <a:spAutoFit/>
+          </a:bodyPr>
+          <a:lstStyle/>
+          <a:p>
+            <a:r>
+              <a:rPr lang="en-US" dirty="0"/>
+              <a:t>… c</a:t>
+            </a:r>
+            <a:r>
+              <a:rPr lang="en-US" b="1" dirty="0"/>
+              <a:t> </a:t>
+            </a:r>
+            <a:r>
+              <a:rPr lang="en-US" b="1" dirty="0">
+                <a:sym typeface="Wingdings" panose="05000000000000000000" pitchFamily="2" charset="2"/>
+              </a:rPr>
+              <a:t> </a:t>
+            </a:r>
+            <a:r>
+              <a:rPr lang="en-US" dirty="0">
+                <a:sym typeface="Wingdings" panose="05000000000000000000" pitchFamily="2" charset="2"/>
+              </a:rPr>
+              <a:t>…</a:t>
+            </a:r>
+            <a:r>
+              <a:rPr lang="en-US" b="1" dirty="0">
+                <a:sym typeface="Wingdings" panose="05000000000000000000" pitchFamily="2" charset="2"/>
+              </a:rPr>
+              <a:t> </a:t>
+            </a:r>
+            <a:r>
+              <a:rPr lang="en-US" dirty="0">
+                <a:sym typeface="Wingdings" panose="05000000000000000000" pitchFamily="2" charset="2"/>
+              </a:rPr>
+              <a:t>c</a:t>
+            </a:r>
+            <a:endParaRPr lang="en-US" dirty="0"/>
+          </a:p>
+        </p:txBody>
+      </p:sp>
+      <p:sp>
+        <p:nvSpPr>
+          <p:cNvPr id="4" name="TextBox 3">
+            <a:extLst>
+              <a:ext uri="{FF2B5EF4-FFF2-40B4-BE49-F238E27FC236}">
+                <a16:creationId xmlns:a16="http://schemas.microsoft.com/office/drawing/2014/main" id="{EE377046-CB6C-378C-A04E-F2CE06AD09C3}"/>
+              </a:ext>
+            </a:extLst>
+          </p:cNvPr>
+          <p:cNvSpPr txBox="1"/>
+          <p:nvPr/>
+        </p:nvSpPr>
+        <p:spPr>
+          <a:xfrm>
+            <a:off x="7194430" y="2636471"/>
             <a:ext cx="1492370" cy="369332"/>
           </a:xfrm>
           <a:prstGeom prst="rect">
@@ -37445,7 +34509,7 @@
                                         <p:tgtEl>
                                           <p:spTgt spid="13">
                                             <p:txEl>
-                                              <p:pRg st="4" end="4"/>
+                                              <p:pRg st="5" end="5"/>
                                             </p:txEl>
                                           </p:spTgt>
                                         </p:tgtEl>
@@ -37476,7 +34540,7 @@
                                         <p:tgtEl>
                                           <p:spTgt spid="13">
                                             <p:txEl>
-                                              <p:pRg st="5" end="5"/>
+                                              <p:pRg st="6" end="6"/>
                                             </p:txEl>
                                           </p:spTgt>
                                         </p:tgtEl>
@@ -37507,7 +34571,7 @@
                                         <p:tgtEl>
                                           <p:spTgt spid="13">
                                             <p:txEl>
-                                              <p:pRg st="6" end="6"/>
+                                              <p:pRg st="7" end="7"/>
                                             </p:txEl>
                                           </p:spTgt>
                                         </p:tgtEl>
@@ -37538,7 +34602,7 @@
                                         <p:tgtEl>
                                           <p:spTgt spid="13">
                                             <p:txEl>
-                                              <p:pRg st="7" end="7"/>
+                                              <p:pRg st="8" end="8"/>
                                             </p:txEl>
                                           </p:spTgt>
                                         </p:tgtEl>
@@ -40594,13 +37658,91 @@
               <a:buChar char="§"/>
             </a:pPr>
             <a:r>
-              <a:rPr lang="en-US"/>
-              <a:t>Is also </a:t>
-            </a:r>
-            <a:r>
               <a:rPr lang="en-US" dirty="0"/>
-              <a:t>a way to enumerate all possible solutions this way and testing them one by one to find valid ones…</a:t>
-            </a:r>
+              <a:t>Is also a way to enumerate all possible solutions this way and testing them one by one to find valid ones…</a:t>
+            </a:r>
+          </a:p>
+          <a:p>
+            <a:pPr marL="731520" lvl="1" indent="-457200" fontAlgn="auto">
+              <a:spcBef>
+                <a:spcPts val="1200"/>
+              </a:spcBef>
+              <a:spcAft>
+                <a:spcPts val="0"/>
+              </a:spcAft>
+              <a:buClr>
+                <a:schemeClr val="tx1">
+                  <a:lumMod val="90000"/>
+                  <a:lumOff val="10000"/>
+                </a:schemeClr>
+              </a:buClr>
+              <a:buSzPct val="100000"/>
+              <a:buFont typeface="Wingdings" pitchFamily="2" charset="2"/>
+              <a:buChar char="§"/>
+            </a:pPr>
+            <a:r>
+              <a:rPr lang="en-US" dirty="0"/>
+              <a:t>… by adding additional checks along the way.</a:t>
+            </a:r>
+          </a:p>
+          <a:p>
+            <a:pPr marL="457200" indent="-457200" fontAlgn="auto">
+              <a:spcBef>
+                <a:spcPts val="1200"/>
+              </a:spcBef>
+              <a:spcAft>
+                <a:spcPts val="0"/>
+              </a:spcAft>
+              <a:buClr>
+                <a:schemeClr val="tx1">
+                  <a:lumMod val="90000"/>
+                  <a:lumOff val="10000"/>
+                </a:schemeClr>
+              </a:buClr>
+              <a:buSzPct val="100000"/>
+              <a:buFont typeface="Wingdings" pitchFamily="2" charset="2"/>
+              <a:buChar char="§"/>
+            </a:pPr>
+            <a:endParaRPr lang="en-US" dirty="0"/>
+          </a:p>
+          <a:p>
+            <a:pPr marL="457200" indent="-457200" fontAlgn="auto">
+              <a:spcBef>
+                <a:spcPts val="1200"/>
+              </a:spcBef>
+              <a:spcAft>
+                <a:spcPts val="0"/>
+              </a:spcAft>
+              <a:buClr>
+                <a:schemeClr val="tx1">
+                  <a:lumMod val="90000"/>
+                  <a:lumOff val="10000"/>
+                </a:schemeClr>
+              </a:buClr>
+              <a:buSzPct val="100000"/>
+              <a:buFont typeface="Wingdings" pitchFamily="2" charset="2"/>
+              <a:buChar char="§"/>
+            </a:pPr>
+            <a:endParaRPr lang="en-US" dirty="0"/>
+          </a:p>
+          <a:p>
+            <a:pPr marL="457200" indent="-457200" fontAlgn="auto">
+              <a:spcBef>
+                <a:spcPts val="1200"/>
+              </a:spcBef>
+              <a:spcAft>
+                <a:spcPts val="0"/>
+              </a:spcAft>
+              <a:buClr>
+                <a:schemeClr val="tx1">
+                  <a:lumMod val="90000"/>
+                  <a:lumOff val="10000"/>
+                </a:schemeClr>
+              </a:buClr>
+              <a:buSzPct val="100000"/>
+              <a:buFont typeface="Wingdings" pitchFamily="2" charset="2"/>
+              <a:buChar char="§"/>
+            </a:pPr>
             <a:endParaRPr lang="en-GB" dirty="0"/>
           </a:p>
         </p:txBody>
@@ -42354,92 +39496,6 @@
   <p:transition>
     <p:fade/>
   </p:transition>
-  <p:timing>
-    <p:tnLst>
-      <p:par>
-        <p:cTn id="1" dur="indefinite" restart="never" nodeType="tmRoot">
-          <p:childTnLst>
-            <p:seq concurrent="1" nextAc="seek">
-              <p:cTn id="2" dur="indefinite" nodeType="mainSeq">
-                <p:childTnLst>
-                  <p:par>
-                    <p:cTn id="3" fill="hold">
-                      <p:stCondLst>
-                        <p:cond delay="indefinite"/>
-                        <p:cond evt="onBegin" delay="0">
-                          <p:tn val="2"/>
-                        </p:cond>
-                      </p:stCondLst>
-                      <p:childTnLst>
-                        <p:par>
-                          <p:cTn id="4" fill="hold">
-                            <p:stCondLst>
-                              <p:cond delay="0"/>
-                            </p:stCondLst>
-                            <p:childTnLst>
-                              <p:par>
-                                <p:cTn id="5" presetID="9" presetClass="entr" presetSubtype="0" fill="hold" nodeType="afterEffect">
-                                  <p:stCondLst>
-                                    <p:cond delay="0"/>
-                                  </p:stCondLst>
-                                  <p:childTnLst>
-                                    <p:set>
-                                      <p:cBhvr>
-                                        <p:cTn id="6" dur="1" fill="hold">
-                                          <p:stCondLst>
-                                            <p:cond delay="0"/>
-                                          </p:stCondLst>
-                                        </p:cTn>
-                                        <p:tgtEl>
-                                          <p:spTgt spid="6"/>
-                                        </p:tgtEl>
-                                        <p:attrNameLst>
-                                          <p:attrName>style.visibility</p:attrName>
-                                        </p:attrNameLst>
-                                      </p:cBhvr>
-                                      <p:to>
-                                        <p:strVal val="visible"/>
-                                      </p:to>
-                                    </p:set>
-                                    <p:animEffect transition="in" filter="dissolve">
-                                      <p:cBhvr>
-                                        <p:cTn id="7" dur="500"/>
-                                        <p:tgtEl>
-                                          <p:spTgt spid="6"/>
-                                        </p:tgtEl>
-                                      </p:cBhvr>
-                                    </p:animEffect>
-                                  </p:childTnLst>
-                                </p:cTn>
-                              </p:par>
-                            </p:childTnLst>
-                          </p:cTn>
-                        </p:par>
-                      </p:childTnLst>
-                    </p:cTn>
-                  </p:par>
-                </p:childTnLst>
-              </p:cTn>
-              <p:prevCondLst>
-                <p:cond evt="onPrev" delay="0">
-                  <p:tgtEl>
-                    <p:sldTgt/>
-                  </p:tgtEl>
-                </p:cond>
-              </p:prevCondLst>
-              <p:nextCondLst>
-                <p:cond evt="onNext" delay="0">
-                  <p:tgtEl>
-                    <p:sldTgt/>
-                  </p:tgtEl>
-                </p:cond>
-              </p:nextCondLst>
-            </p:seq>
-          </p:childTnLst>
-        </p:cTn>
-      </p:par>
-    </p:tnLst>
-  </p:timing>
 </p:sld>
 </file>
 
@@ -43095,92 +40151,6 @@
   <p:transition>
     <p:fade/>
   </p:transition>
-  <p:timing>
-    <p:tnLst>
-      <p:par>
-        <p:cTn id="1" dur="indefinite" restart="never" nodeType="tmRoot">
-          <p:childTnLst>
-            <p:seq concurrent="1" nextAc="seek">
-              <p:cTn id="2" dur="indefinite" nodeType="mainSeq">
-                <p:childTnLst>
-                  <p:par>
-                    <p:cTn id="3" fill="hold">
-                      <p:stCondLst>
-                        <p:cond delay="indefinite"/>
-                        <p:cond evt="onBegin" delay="0">
-                          <p:tn val="2"/>
-                        </p:cond>
-                      </p:stCondLst>
-                      <p:childTnLst>
-                        <p:par>
-                          <p:cTn id="4" fill="hold">
-                            <p:stCondLst>
-                              <p:cond delay="0"/>
-                            </p:stCondLst>
-                            <p:childTnLst>
-                              <p:par>
-                                <p:cTn id="5" presetID="9" presetClass="entr" presetSubtype="0" fill="hold" nodeType="afterEffect">
-                                  <p:stCondLst>
-                                    <p:cond delay="0"/>
-                                  </p:stCondLst>
-                                  <p:childTnLst>
-                                    <p:set>
-                                      <p:cBhvr>
-                                        <p:cTn id="6" dur="1" fill="hold">
-                                          <p:stCondLst>
-                                            <p:cond delay="0"/>
-                                          </p:stCondLst>
-                                        </p:cTn>
-                                        <p:tgtEl>
-                                          <p:spTgt spid="6"/>
-                                        </p:tgtEl>
-                                        <p:attrNameLst>
-                                          <p:attrName>style.visibility</p:attrName>
-                                        </p:attrNameLst>
-                                      </p:cBhvr>
-                                      <p:to>
-                                        <p:strVal val="visible"/>
-                                      </p:to>
-                                    </p:set>
-                                    <p:animEffect transition="in" filter="dissolve">
-                                      <p:cBhvr>
-                                        <p:cTn id="7" dur="500"/>
-                                        <p:tgtEl>
-                                          <p:spTgt spid="6"/>
-                                        </p:tgtEl>
-                                      </p:cBhvr>
-                                    </p:animEffect>
-                                  </p:childTnLst>
-                                </p:cTn>
-                              </p:par>
-                            </p:childTnLst>
-                          </p:cTn>
-                        </p:par>
-                      </p:childTnLst>
-                    </p:cTn>
-                  </p:par>
-                </p:childTnLst>
-              </p:cTn>
-              <p:prevCondLst>
-                <p:cond evt="onPrev" delay="0">
-                  <p:tgtEl>
-                    <p:sldTgt/>
-                  </p:tgtEl>
-                </p:cond>
-              </p:prevCondLst>
-              <p:nextCondLst>
-                <p:cond evt="onNext" delay="0">
-                  <p:tgtEl>
-                    <p:sldTgt/>
-                  </p:tgtEl>
-                </p:cond>
-              </p:nextCondLst>
-            </p:seq>
-          </p:childTnLst>
-        </p:cTn>
-      </p:par>
-    </p:tnLst>
-  </p:timing>
 </p:sld>
 </file>
 
@@ -43616,6 +40586,76 @@
             <a:r>
               <a:rPr lang="en-GB" dirty="0"/>
               <a:t>What if we generate all permutations of the placements (recursively) and check whether it works?</a:t>
+            </a:r>
+          </a:p>
+          <a:p>
+            <a:pPr marL="1005840" lvl="2" indent="-457200" fontAlgn="auto">
+              <a:spcBef>
+                <a:spcPts val="1200"/>
+              </a:spcBef>
+              <a:spcAft>
+                <a:spcPts val="0"/>
+              </a:spcAft>
+              <a:buClr>
+                <a:schemeClr val="tx1">
+                  <a:lumMod val="90000"/>
+                  <a:lumOff val="10000"/>
+                </a:schemeClr>
+              </a:buClr>
+              <a:buSzPct val="100000"/>
+              <a:buFont typeface="Wingdings" pitchFamily="2" charset="2"/>
+              <a:buChar char="§"/>
+            </a:pPr>
+            <a:r>
+              <a:rPr lang="en-GB" dirty="0"/>
+              <a:t>Starting with {‘a', ‘b', 'c', ‘d', ‘e', ‘f', ‘g', ‘h’}</a:t>
+            </a:r>
+          </a:p>
+          <a:p>
+            <a:pPr marL="1005840" lvl="2" indent="-457200" fontAlgn="auto">
+              <a:spcBef>
+                <a:spcPts val="1200"/>
+              </a:spcBef>
+              <a:spcAft>
+                <a:spcPts val="0"/>
+              </a:spcAft>
+              <a:buClr>
+                <a:schemeClr val="tx1">
+                  <a:lumMod val="90000"/>
+                  <a:lumOff val="10000"/>
+                </a:schemeClr>
+              </a:buClr>
+              <a:buSzPct val="100000"/>
+              <a:buFont typeface="Wingdings" pitchFamily="2" charset="2"/>
+              <a:buChar char="§"/>
+            </a:pPr>
+            <a:r>
+              <a:rPr lang="en-GB" dirty="0"/>
+              <a:t>Try </a:t>
+            </a:r>
+            <a:r>
+              <a:rPr lang="en-GB" dirty="0" err="1"/>
+              <a:t>abcdefgh</a:t>
+            </a:r>
+            <a:r>
+              <a:rPr lang="en-GB" dirty="0"/>
+              <a:t>, </a:t>
+            </a:r>
+            <a:r>
+              <a:rPr lang="en-GB" dirty="0" err="1"/>
+              <a:t>abcdefhg</a:t>
+            </a:r>
+            <a:r>
+              <a:rPr lang="en-GB" dirty="0"/>
+              <a:t>, ..., </a:t>
+            </a:r>
+            <a:r>
+              <a:rPr lang="en-GB" dirty="0" err="1"/>
+              <a:t>hgfedcba</a:t>
+            </a:r>
+            <a:r>
+              <a:rPr lang="en-GB" dirty="0"/>
+              <a:t> …</a:t>
             </a:r>
           </a:p>
         </p:txBody>
@@ -44827,95 +41867,6 @@
   <p:transition>
     <p:fade/>
   </p:transition>
-  <p:timing>
-    <p:tnLst>
-      <p:par>
-        <p:cTn id="1" dur="indefinite" restart="never" nodeType="tmRoot">
-          <p:childTnLst>
-            <p:seq concurrent="1" nextAc="seek">
-              <p:cTn id="2" dur="indefinite" nodeType="mainSeq">
-                <p:childTnLst>
-                  <p:par>
-                    <p:cTn id="3" fill="hold">
-                      <p:stCondLst>
-                        <p:cond delay="indefinite"/>
-                        <p:cond evt="onBegin" delay="0">
-                          <p:tn val="2"/>
-                        </p:cond>
-                      </p:stCondLst>
-                      <p:childTnLst>
-                        <p:par>
-                          <p:cTn id="4" fill="hold">
-                            <p:stCondLst>
-                              <p:cond delay="0"/>
-                            </p:stCondLst>
-                            <p:childTnLst>
-                              <p:par>
-                                <p:cTn id="5" presetID="9" presetClass="entr" presetSubtype="0" fill="hold" grpId="0" nodeType="afterEffect">
-                                  <p:stCondLst>
-                                    <p:cond delay="0"/>
-                                  </p:stCondLst>
-                                  <p:childTnLst>
-                                    <p:set>
-                                      <p:cBhvr>
-                                        <p:cTn id="6" dur="1" fill="hold">
-                                          <p:stCondLst>
-                                            <p:cond delay="0"/>
-                                          </p:stCondLst>
-                                        </p:cTn>
-                                        <p:tgtEl>
-                                          <p:spTgt spid="11"/>
-                                        </p:tgtEl>
-                                        <p:attrNameLst>
-                                          <p:attrName>style.visibility</p:attrName>
-                                        </p:attrNameLst>
-                                      </p:cBhvr>
-                                      <p:to>
-                                        <p:strVal val="visible"/>
-                                      </p:to>
-                                    </p:set>
-                                    <p:animEffect transition="in" filter="dissolve">
-                                      <p:cBhvr>
-                                        <p:cTn id="7" dur="500"/>
-                                        <p:tgtEl>
-                                          <p:spTgt spid="11"/>
-                                        </p:tgtEl>
-                                      </p:cBhvr>
-                                    </p:animEffect>
-                                  </p:childTnLst>
-                                </p:cTn>
-                              </p:par>
-                            </p:childTnLst>
-                          </p:cTn>
-                        </p:par>
-                      </p:childTnLst>
-                    </p:cTn>
-                  </p:par>
-                </p:childTnLst>
-              </p:cTn>
-              <p:prevCondLst>
-                <p:cond evt="onPrev" delay="0">
-                  <p:tgtEl>
-                    <p:sldTgt/>
-                  </p:tgtEl>
-                </p:cond>
-              </p:prevCondLst>
-              <p:nextCondLst>
-                <p:cond evt="onNext" delay="0">
-                  <p:tgtEl>
-                    <p:sldTgt/>
-                  </p:tgtEl>
-                </p:cond>
-              </p:nextCondLst>
-            </p:seq>
-          </p:childTnLst>
-        </p:cTn>
-      </p:par>
-    </p:tnLst>
-    <p:bldLst>
-      <p:bldP spid="11" grpId="0" animBg="1"/>
-    </p:bldLst>
-  </p:timing>
 </p:sld>
 </file>
 
@@ -46889,11 +43840,11 @@
             </a:pPr>
             <a:r>
               <a:rPr lang="en-US" sz="2800" dirty="0"/>
-              <a:t>Post-Lecture Diagnostic Quiz</a:t>
-            </a:r>
-          </a:p>
-          <a:p>
-            <a:pPr lvl="1">
+              <a:t>Diagnostic Quizzes</a:t>
+            </a:r>
+          </a:p>
+          <a:p>
+            <a:pPr marL="800100" lvl="1" indent="-342900">
               <a:spcBef>
                 <a:spcPts val="1200"/>
               </a:spcBef>
@@ -46904,8 +43855,25 @@
                 </a:schemeClr>
               </a:buClr>
               <a:buSzPct val="75000"/>
-            </a:pPr>
-            <a:endParaRPr lang="en-US" sz="2800" dirty="0"/>
+              <a:buFont typeface="Wingdings" pitchFamily="2" charset="2"/>
+              <a:buChar char="n"/>
+            </a:pPr>
+            <a:r>
+              <a:rPr lang="en-US" sz="2000" dirty="0"/>
+              <a:t>Lecture 11: due </a:t>
+            </a:r>
+            <a:r>
+              <a:rPr lang="en-US" sz="2000" dirty="0">
+                <a:solidFill>
+                  <a:srgbClr val="0000FF"/>
+                </a:solidFill>
+              </a:rPr>
+              <a:t>10 Apr, 2pm </a:t>
+            </a:r>
+            <a:r>
+              <a:rPr lang="en-US" sz="2000" dirty="0"/>
+              <a:t>(extended due to PE2)</a:t>
+            </a:r>
           </a:p>
           <a:p>
             <a:pPr marL="342900" indent="-342900">
@@ -46922,6 +43890,23 @@
               <a:buFont typeface="Wingdings" pitchFamily="2" charset="2"/>
               <a:buChar char="n"/>
             </a:pPr>
+            <a:endParaRPr lang="en-US" sz="2800" dirty="0"/>
+          </a:p>
+          <a:p>
+            <a:pPr marL="342900" indent="-342900">
+              <a:spcBef>
+                <a:spcPts val="1200"/>
+              </a:spcBef>
+              <a:buClr>
+                <a:schemeClr val="accent4">
+                  <a:lumMod val="60000"/>
+                  <a:lumOff val="40000"/>
+                </a:schemeClr>
+              </a:buClr>
+              <a:buSzPct val="75000"/>
+              <a:buFont typeface="Wingdings" pitchFamily="2" charset="2"/>
+              <a:buChar char="n"/>
+            </a:pPr>
             <a:r>
               <a:rPr lang="en-US" sz="2800" dirty="0"/>
               <a:t>Problem Set 23-25</a:t>
@@ -46961,7 +43946,39 @@
             </a:pPr>
             <a:r>
               <a:rPr lang="en-US" sz="2800" dirty="0"/>
-              <a:t>Exercise 7</a:t>
+              <a:t>Exercises</a:t>
+            </a:r>
+          </a:p>
+          <a:p>
+            <a:pPr marL="800100" lvl="1" indent="-342900">
+              <a:spcBef>
+                <a:spcPts val="1200"/>
+              </a:spcBef>
+              <a:buClr>
+                <a:schemeClr val="accent4">
+                  <a:lumMod val="60000"/>
+                  <a:lumOff val="40000"/>
+                </a:schemeClr>
+              </a:buClr>
+              <a:buSzPct val="75000"/>
+              <a:buFont typeface="Wingdings" pitchFamily="2" charset="2"/>
+              <a:buChar char="n"/>
+            </a:pPr>
+            <a:r>
+              <a:rPr lang="en-US" sz="2000" dirty="0"/>
+              <a:t>Exercise 7 due </a:t>
+            </a:r>
+            <a:r>
+              <a:rPr lang="en-US" sz="2000" dirty="0">
+                <a:solidFill>
+                  <a:srgbClr val="0000FF"/>
+                </a:solidFill>
+              </a:rPr>
+              <a:t>10 Apr, 2pm </a:t>
+            </a:r>
+            <a:r>
+              <a:rPr lang="en-US" sz="2000" dirty="0"/>
+              <a:t>(extended due to PE2)</a:t>
             </a:r>
           </a:p>
           <a:p>
@@ -48194,7 +45211,7 @@
           <a:p>
             <a:pPr eaLnBrk="1" hangingPunct="1"/>
             <a:r>
-              <a:rPr lang="en-GB" sz="3600">
+              <a:rPr lang="en-GB" sz="3600" dirty="0">
                 <a:solidFill>
                   <a:srgbClr val="0000FF"/>
                 </a:solidFill>
@@ -48479,7 +45496,7 @@
           <a:p>
             <a:pPr eaLnBrk="1" hangingPunct="1"/>
             <a:r>
-              <a:rPr lang="en-GB" sz="3600">
+              <a:rPr lang="en-GB" sz="3600" dirty="0">
                 <a:solidFill>
                   <a:srgbClr val="0000FF"/>
                 </a:solidFill>
@@ -48868,7 +45885,7 @@
                   <a:srgbClr val="0000FF"/>
                 </a:solidFill>
               </a:rPr>
-              <a:t>sumSq</a:t>
+              <a:t>sum_sq</a:t>
             </a:r>
             <a:r>
               <a:rPr lang="en-US" sz="2400" dirty="0">
@@ -49056,7 +46073,7 @@
             </a:r>
             <a:r>
               <a:rPr lang="en-US" sz="2400" dirty="0" err="1"/>
-              <a:t>sumSq</a:t>
+              <a:t>sum_sq</a:t>
             </a:r>
             <a:r>
               <a:rPr lang="en-US" sz="2400" dirty="0"/>
@@ -49737,7 +46754,7 @@
               <a:defRPr/>
             </a:pPr>
             <a:r>
-              <a:rPr lang="en-US" sz="2000" b="1">
+              <a:rPr lang="en-US" sz="2000" b="1" dirty="0">
                 <a:solidFill>
                   <a:srgbClr val="0000FF"/>
                 </a:solidFill>
@@ -49747,14 +46764,14 @@
               <a:t>long</a:t>
             </a:r>
             <a:r>
-              <a:rPr lang="en-US" sz="2000" b="1">
+              <a:rPr lang="en-US" sz="2000" b="1" dirty="0">
                 <a:latin typeface="Courier New" pitchFamily="49" charset="0"/>
                 <a:cs typeface="Courier New" pitchFamily="49" charset="0"/>
               </a:rPr>
-              <a:t> sumSq1(</a:t>
-            </a:r>
-            <a:r>
-              <a:rPr lang="en-US" sz="2000" b="1">
+              <a:t> sum_sq1(</a:t>
+            </a:r>
+            <a:r>
+              <a:rPr lang="en-US" sz="2000" b="1" dirty="0">
                 <a:solidFill>
                   <a:srgbClr val="0000FF"/>
                 </a:solidFill>
@@ -49764,14 +46781,14 @@
               <a:t>long</a:t>
             </a:r>
             <a:r>
-              <a:rPr lang="en-US" sz="2000" b="1">
+              <a:rPr lang="en-US" sz="2000" b="1" dirty="0">
                 <a:latin typeface="Courier New" pitchFamily="49" charset="0"/>
                 <a:cs typeface="Courier New" pitchFamily="49" charset="0"/>
               </a:rPr>
               <a:t> x, </a:t>
             </a:r>
             <a:r>
-              <a:rPr lang="en-US" sz="2000" b="1">
+              <a:rPr lang="en-US" sz="2000" b="1" dirty="0">
                 <a:solidFill>
                   <a:srgbClr val="0000FF"/>
                 </a:solidFill>
@@ -49781,7 +46798,7 @@
               <a:t>long</a:t>
             </a:r>
             <a:r>
-              <a:rPr lang="en-US" sz="2000" b="1">
+              <a:rPr lang="en-US" sz="2000" b="1" dirty="0">
                 <a:latin typeface="Courier New" pitchFamily="49" charset="0"/>
                 <a:cs typeface="Courier New" pitchFamily="49" charset="0"/>
               </a:rPr>
@@ -49798,14 +46815,14 @@
               <a:defRPr/>
             </a:pPr>
             <a:r>
-              <a:rPr lang="en-US" sz="2000" b="1">
+              <a:rPr lang="en-US" sz="2000" b="1" dirty="0">
                 <a:latin typeface="Courier New" pitchFamily="49" charset="0"/>
                 <a:cs typeface="Courier New" pitchFamily="49" charset="0"/>
               </a:rPr>
               <a:t>	</a:t>
             </a:r>
             <a:r>
-              <a:rPr lang="en-US" sz="2000" b="1">
+              <a:rPr lang="en-US" sz="2000" b="1" dirty="0">
                 <a:solidFill>
                   <a:srgbClr val="0000FF"/>
                 </a:solidFill>
@@ -49815,14 +46832,14 @@
               <a:t>if</a:t>
             </a:r>
             <a:r>
-              <a:rPr lang="en-US" sz="2000" b="1">
+              <a:rPr lang="en-US" sz="2000" b="1" dirty="0">
                 <a:latin typeface="Courier New" pitchFamily="49" charset="0"/>
                 <a:cs typeface="Courier New" pitchFamily="49" charset="0"/>
               </a:rPr>
               <a:t> (x == y) </a:t>
             </a:r>
             <a:r>
-              <a:rPr lang="en-US" sz="2000" b="1">
+              <a:rPr lang="en-US" sz="2000" b="1" dirty="0">
                 <a:solidFill>
                   <a:srgbClr val="0000FF"/>
                 </a:solidFill>
@@ -49832,7 +46849,7 @@
               <a:t>return</a:t>
             </a:r>
             <a:r>
-              <a:rPr lang="en-US" sz="2000" b="1">
+              <a:rPr lang="en-US" sz="2000" b="1" dirty="0">
                 <a:latin typeface="Courier New" pitchFamily="49" charset="0"/>
                 <a:cs typeface="Courier New" pitchFamily="49" charset="0"/>
               </a:rPr>
@@ -49849,14 +46866,14 @@
               <a:defRPr/>
             </a:pPr>
             <a:r>
-              <a:rPr lang="en-US" sz="2000" b="1">
+              <a:rPr lang="en-US" sz="2000" b="1" dirty="0">
                 <a:latin typeface="Courier New" pitchFamily="49" charset="0"/>
                 <a:cs typeface="Courier New" pitchFamily="49" charset="0"/>
               </a:rPr>
               <a:t>	</a:t>
             </a:r>
             <a:r>
-              <a:rPr lang="en-US" sz="2000" b="1">
+              <a:rPr lang="en-US" sz="2000" b="1" dirty="0">
                 <a:solidFill>
                   <a:srgbClr val="0000FF"/>
                 </a:solidFill>
@@ -49866,14 +46883,14 @@
               <a:t>else return</a:t>
             </a:r>
             <a:r>
-              <a:rPr lang="en-US" sz="2000" b="1">
+              <a:rPr lang="en-US" sz="2000" b="1" dirty="0">
                 <a:latin typeface="Courier New" pitchFamily="49" charset="0"/>
                 <a:cs typeface="Courier New" pitchFamily="49" charset="0"/>
               </a:rPr>
-              <a:t> x * x + sumSq1(x+</a:t>
-            </a:r>
-            <a:r>
-              <a:rPr lang="en-US" sz="2000" b="1">
+              <a:t> x * x + sum_sq1(x+</a:t>
+            </a:r>
+            <a:r>
+              <a:rPr lang="en-US" sz="2000" b="1" dirty="0">
                 <a:solidFill>
                   <a:srgbClr val="006600"/>
                 </a:solidFill>
@@ -49883,7 +46900,7 @@
               <a:t>1</a:t>
             </a:r>
             <a:r>
-              <a:rPr lang="en-US" sz="2000" b="1">
+              <a:rPr lang="en-US" sz="2000" b="1" dirty="0">
                 <a:latin typeface="Courier New" pitchFamily="49" charset="0"/>
                 <a:cs typeface="Courier New" pitchFamily="49" charset="0"/>
               </a:rPr>
@@ -49900,7 +46917,7 @@
               <a:defRPr/>
             </a:pPr>
             <a:r>
-              <a:rPr lang="en-US" sz="2000" b="1">
+              <a:rPr lang="en-US" sz="2000" b="1" dirty="0">
                 <a:latin typeface="Courier New" pitchFamily="49" charset="0"/>
                 <a:cs typeface="Courier New" pitchFamily="49" charset="0"/>
               </a:rPr>
@@ -50044,7 +47061,7 @@
               <a:defRPr/>
             </a:pPr>
             <a:r>
-              <a:rPr lang="en-US" sz="2000" b="1">
+              <a:rPr lang="en-US" sz="2000" b="1" dirty="0">
                 <a:solidFill>
                   <a:srgbClr val="0000FF"/>
                 </a:solidFill>
@@ -50054,14 +47071,14 @@
               <a:t>long</a:t>
             </a:r>
             <a:r>
-              <a:rPr lang="en-US" sz="2000" b="1">
+              <a:rPr lang="en-US" sz="2000" b="1" dirty="0">
                 <a:latin typeface="Courier New" pitchFamily="49" charset="0"/>
                 <a:cs typeface="Courier New" pitchFamily="49" charset="0"/>
               </a:rPr>
-              <a:t> sumSq2(</a:t>
-            </a:r>
-            <a:r>
-              <a:rPr lang="en-US" sz="2000" b="1">
+              <a:t> sum_sq2(</a:t>
+            </a:r>
+            <a:r>
+              <a:rPr lang="en-US" sz="2000" b="1" dirty="0">
                 <a:solidFill>
                   <a:srgbClr val="0000FF"/>
                 </a:solidFill>
@@ -50071,14 +47088,14 @@
               <a:t>long</a:t>
             </a:r>
             <a:r>
-              <a:rPr lang="en-US" sz="2000" b="1">
+              <a:rPr lang="en-US" sz="2000" b="1" dirty="0">
                 <a:latin typeface="Courier New" pitchFamily="49" charset="0"/>
                 <a:cs typeface="Courier New" pitchFamily="49" charset="0"/>
               </a:rPr>
               <a:t> x, </a:t>
             </a:r>
             <a:r>
-              <a:rPr lang="en-US" sz="2000" b="1">
+              <a:rPr lang="en-US" sz="2000" b="1" dirty="0">
                 <a:solidFill>
                   <a:srgbClr val="0000FF"/>
                 </a:solidFill>
@@ -50088,7 +47105,7 @@
               <a:t>long</a:t>
             </a:r>
             <a:r>
-              <a:rPr lang="en-US" sz="2000" b="1">
+              <a:rPr lang="en-US" sz="2000" b="1" dirty="0">
                 <a:latin typeface="Courier New" pitchFamily="49" charset="0"/>
                 <a:cs typeface="Courier New" pitchFamily="49" charset="0"/>
               </a:rPr>
@@ -50105,14 +47122,14 @@
               <a:defRPr/>
             </a:pPr>
             <a:r>
-              <a:rPr lang="en-US" sz="2000" b="1">
+              <a:rPr lang="en-US" sz="2000" b="1" dirty="0">
                 <a:latin typeface="Courier New" pitchFamily="49" charset="0"/>
                 <a:cs typeface="Courier New" pitchFamily="49" charset="0"/>
               </a:rPr>
               <a:t>	</a:t>
             </a:r>
             <a:r>
-              <a:rPr lang="en-US" sz="2000" b="1">
+              <a:rPr lang="en-US" sz="2000" b="1" dirty="0">
                 <a:solidFill>
                   <a:srgbClr val="0000FF"/>
                 </a:solidFill>
@@ -50122,14 +47139,14 @@
               <a:t>if</a:t>
             </a:r>
             <a:r>
-              <a:rPr lang="en-US" sz="2000" b="1">
+              <a:rPr lang="en-US" sz="2000" b="1" dirty="0">
                 <a:latin typeface="Courier New" pitchFamily="49" charset="0"/>
                 <a:cs typeface="Courier New" pitchFamily="49" charset="0"/>
               </a:rPr>
               <a:t> (x == y) </a:t>
             </a:r>
             <a:r>
-              <a:rPr lang="en-US" sz="2000" b="1">
+              <a:rPr lang="en-US" sz="2000" b="1" dirty="0">
                 <a:solidFill>
                   <a:srgbClr val="0000FF"/>
                 </a:solidFill>
@@ -50139,7 +47156,7 @@
               <a:t>return</a:t>
             </a:r>
             <a:r>
-              <a:rPr lang="en-US" sz="2000" b="1">
+              <a:rPr lang="en-US" sz="2000" b="1" dirty="0">
                 <a:latin typeface="Courier New" pitchFamily="49" charset="0"/>
                 <a:cs typeface="Courier New" pitchFamily="49" charset="0"/>
               </a:rPr>
@@ -50156,14 +47173,14 @@
               <a:defRPr/>
             </a:pPr>
             <a:r>
-              <a:rPr lang="en-US" sz="2000" b="1">
+              <a:rPr lang="en-US" sz="2000" b="1" dirty="0">
                 <a:latin typeface="Courier New" pitchFamily="49" charset="0"/>
                 <a:cs typeface="Courier New" pitchFamily="49" charset="0"/>
               </a:rPr>
               <a:t>	</a:t>
             </a:r>
             <a:r>
-              <a:rPr lang="en-US" sz="2000" b="1">
+              <a:rPr lang="en-US" sz="2000" b="1" dirty="0">
                 <a:solidFill>
                   <a:srgbClr val="0000FF"/>
                 </a:solidFill>
@@ -50173,14 +47190,14 @@
               <a:t>else return</a:t>
             </a:r>
             <a:r>
-              <a:rPr lang="en-US" sz="2000" b="1">
+              <a:rPr lang="en-US" sz="2000" b="1" dirty="0">
                 <a:latin typeface="Courier New" pitchFamily="49" charset="0"/>
                 <a:cs typeface="Courier New" pitchFamily="49" charset="0"/>
               </a:rPr>
-              <a:t> y * y + sumSq2(x, y-</a:t>
-            </a:r>
-            <a:r>
-              <a:rPr lang="en-US" sz="2000" b="1">
+              <a:t> y * y + sum_sq2(x, y-</a:t>
+            </a:r>
+            <a:r>
+              <a:rPr lang="en-US" sz="2000" b="1" dirty="0">
                 <a:solidFill>
                   <a:srgbClr val="006600"/>
                 </a:solidFill>
@@ -50190,7 +47207,7 @@
               <a:t>1</a:t>
             </a:r>
             <a:r>
-              <a:rPr lang="en-US" sz="2000" b="1">
+              <a:rPr lang="en-US" sz="2000" b="1" dirty="0">
                 <a:latin typeface="Courier New" pitchFamily="49" charset="0"/>
                 <a:cs typeface="Courier New" pitchFamily="49" charset="0"/>
               </a:rPr>
@@ -50207,7 +47224,7 @@
               <a:defRPr/>
             </a:pPr>
             <a:r>
-              <a:rPr lang="en-US" sz="2000" b="1">
+              <a:rPr lang="en-US" sz="2000" b="1" dirty="0">
                 <a:latin typeface="Courier New" pitchFamily="49" charset="0"/>
                 <a:cs typeface="Courier New" pitchFamily="49" charset="0"/>
               </a:rPr>
@@ -50264,7 +47281,7 @@
         <p:spPr bwMode="auto">
           <a:xfrm>
             <a:off x="3428999" y="3070388"/>
-            <a:ext cx="4275945" cy="400110"/>
+            <a:ext cx="4553094" cy="400110"/>
           </a:xfrm>
           <a:prstGeom prst="rect">
             <a:avLst/>
@@ -50409,7 +47426,7 @@
             <a:pPr eaLnBrk="1" hangingPunct="1"/>
             <a:r>
               <a:rPr lang="en-US" sz="2000" dirty="0" err="1"/>
-              <a:t>sumSq</a:t>
+              <a:t>sum_sq</a:t>
             </a:r>
             <a:r>
               <a:rPr lang="en-US" sz="2000" dirty="0"/>
@@ -50417,7 +47434,7 @@
             </a:r>
             <a:r>
               <a:rPr lang="en-US" sz="2000" dirty="0" err="1"/>
-              <a:t>sumSq</a:t>
+              <a:t>sum_sq</a:t>
             </a:r>
             <a:r>
               <a:rPr lang="en-US" sz="2000" dirty="0"/>
@@ -50443,8 +47460,8 @@
         </p:nvSpPr>
         <p:spPr bwMode="auto">
           <a:xfrm>
-            <a:off x="3218688" y="5246460"/>
-            <a:ext cx="4401312" cy="400110"/>
+            <a:off x="3218687" y="5246460"/>
+            <a:ext cx="4680903" cy="400110"/>
           </a:xfrm>
           <a:prstGeom prst="rect">
             <a:avLst/>
@@ -50589,7 +47606,7 @@
             <a:pPr eaLnBrk="1" hangingPunct="1"/>
             <a:r>
               <a:rPr lang="en-US" sz="2000" dirty="0" err="1"/>
-              <a:t>sumSq</a:t>
+              <a:t>sum_sq</a:t>
             </a:r>
             <a:r>
               <a:rPr lang="en-US" sz="2000" dirty="0"/>
@@ -50597,7 +47614,7 @@
             </a:r>
             <a:r>
               <a:rPr lang="en-US" sz="2000" dirty="0" err="1"/>
-              <a:t>sumSq</a:t>
+              <a:t>sum_sq</a:t>
             </a:r>
             <a:r>
               <a:rPr lang="en-US" sz="2000" dirty="0"/>
@@ -51247,8 +48264,8 @@
               </a:spcBef>
             </a:pPr>
             <a:r>
-              <a:rPr lang="en-US" b="1"/>
-              <a:t>sumSq1(5,10)</a:t>
+              <a:rPr lang="en-US" b="1" dirty="0"/>
+              <a:t>sum_sq1(5,10)</a:t>
             </a:r>
           </a:p>
         </p:txBody>
@@ -51290,8 +48307,8 @@
               </a:spcBef>
             </a:pPr>
             <a:r>
-              <a:rPr lang="en-US" b="1"/>
-              <a:t>sumSq1(6,10)</a:t>
+              <a:rPr lang="en-US" b="1" dirty="0"/>
+              <a:t>sum_sq1(6,10)</a:t>
             </a:r>
           </a:p>
         </p:txBody>
@@ -51368,8 +48385,8 @@
               </a:spcBef>
             </a:pPr>
             <a:r>
-              <a:rPr lang="en-US" b="1"/>
-              <a:t>sumSq1(7,10)</a:t>
+              <a:rPr lang="en-US" b="1" dirty="0"/>
+              <a:t>sum_sq1(7,10)</a:t>
             </a:r>
           </a:p>
         </p:txBody>
@@ -51446,8 +48463,8 @@
               </a:spcBef>
             </a:pPr>
             <a:r>
-              <a:rPr lang="en-US" b="1"/>
-              <a:t>sumSq1(8,10)</a:t>
+              <a:rPr lang="en-US" b="1" dirty="0"/>
+              <a:t>sum_sq1(8,10)</a:t>
             </a:r>
           </a:p>
         </p:txBody>
@@ -51524,8 +48541,8 @@
               </a:spcBef>
             </a:pPr>
             <a:r>
-              <a:rPr lang="en-US" b="1"/>
-              <a:t>sumSq1(9,10)</a:t>
+              <a:rPr lang="en-US" b="1" dirty="0"/>
+              <a:t>sum_sq1(9,10)</a:t>
             </a:r>
           </a:p>
         </p:txBody>
@@ -51602,8 +48619,8 @@
               </a:spcBef>
             </a:pPr>
             <a:r>
-              <a:rPr lang="en-US" b="1"/>
-              <a:t>sumSq1(10,10)</a:t>
+              <a:rPr lang="en-US" b="1" dirty="0"/>
+              <a:t>sum_sq1(10,10)</a:t>
             </a:r>
           </a:p>
         </p:txBody>
@@ -52510,8 +49527,8 @@
                 </a:spcBef>
               </a:pPr>
               <a:r>
-                <a:rPr lang="en-US" b="1"/>
-                <a:t>sumSq2(5,10)</a:t>
+                <a:rPr lang="en-US" b="1" dirty="0"/>
+                <a:t>sum_sq2(5,10)</a:t>
               </a:r>
             </a:p>
           </p:txBody>
@@ -52553,8 +49570,8 @@
                 </a:spcBef>
               </a:pPr>
               <a:r>
-                <a:rPr lang="en-US" b="1"/>
-                <a:t>sumSq2(5,9)</a:t>
+                <a:rPr lang="en-US" b="1" dirty="0"/>
+                <a:t>sum_sq2(5,9)</a:t>
               </a:r>
             </a:p>
           </p:txBody>
@@ -52631,8 +49648,8 @@
                 </a:spcBef>
               </a:pPr>
               <a:r>
-                <a:rPr lang="en-US" b="1"/>
-                <a:t>sumSq2(5,8)</a:t>
+                <a:rPr lang="en-US" b="1" dirty="0"/>
+                <a:t>sum_sq2(5,8)</a:t>
               </a:r>
             </a:p>
           </p:txBody>
@@ -52709,8 +49726,8 @@
                 </a:spcBef>
               </a:pPr>
               <a:r>
-                <a:rPr lang="en-US" b="1"/>
-                <a:t>sumSq2(5,7)</a:t>
+                <a:rPr lang="en-US" b="1" dirty="0"/>
+                <a:t>sum_sq2(5,7)</a:t>
               </a:r>
             </a:p>
           </p:txBody>
@@ -52787,8 +49804,8 @@
                 </a:spcBef>
               </a:pPr>
               <a:r>
-                <a:rPr lang="en-US" b="1"/>
-                <a:t>sumSq2(5,6)</a:t>
+                <a:rPr lang="en-US" b="1" dirty="0"/>
+                <a:t>sum_sq2(5,6)</a:t>
               </a:r>
             </a:p>
           </p:txBody>
@@ -52865,8 +49882,8 @@
                 </a:spcBef>
               </a:pPr>
               <a:r>
-                <a:rPr lang="en-US" b="1"/>
-                <a:t>sumSq2(5,5)</a:t>
+                <a:rPr lang="en-US" b="1" dirty="0"/>
+                <a:t>sum_sq2(5,5)</a:t>
               </a:r>
             </a:p>
           </p:txBody>
